--- a/docs/poster/MTSU_WeedAgent_Poster.pptx
+++ b/docs/poster/MTSU_WeedAgent_Poster.pptx
@@ -4528,7 +4528,7 @@
                 </a:solidFill>
                 <a:latin typeface="Calibri"/>
               </a:rPr>
-              <a:t>Two agents run as separate SLURM jobs against one locked registry: a collector that searches, downloads and pseudo-labels, and a trainer that merges, deduplicates, guards the holdout and trains. Field data arrives from three robots driving crop rows — a dual-laser weeding cart, a tracked platform (241) and a quadruped — carrying camera, GPS and IMU.</a:t>
+              <a:t>Two agents run as separate SLURM jobs against one locked registry: a collector that searches, downloads and pseudo-labels, and a trainer that merges, deduplicates, guards the holdout and trains. Field data arrives over a live uplink from two robots driving crop rows.</a:t>
             </a:r>
           </a:p>
         </p:txBody>
@@ -4541,7 +4541,7 @@
         </p:nvSpPr>
         <p:spPr>
           <a:xfrm>
-            <a:off x="822960" y="13246608"/>
+            <a:off x="822960" y="12986766"/>
             <a:ext cx="10184130" cy="365760"/>
           </a:xfrm>
           <a:prstGeom prst="rect">
@@ -4566,24 +4566,90 @@
             <a:r>
               <a:rPr sz="1550" b="0">
                 <a:solidFill>
-                  <a:srgbClr val="B4511F"/>
+                  <a:srgbClr val="12243A"/>
                 </a:solidFill>
                 <a:latin typeface="Calibri"/>
               </a:rPr>
-              <a:t>PLATFORM INVENTORY PENDING — frame counts, dates and GPS/IMU coverage are being read off the live platform and will replace this paragraph.</a:t>
-            </a:r>
-          </a:p>
-        </p:txBody>
-      </p:sp>
-      <p:sp>
-        <p:nvSpPr>
-          <p:cNvPr id="36" name="TextBox 35"/>
+              <a:t>Counted on disk rather than claimed: 2,686 frames across 26 sessions from 2 robots, and none of them labelled. Robot 241 contributes 2,259 frames at 640 x 360, 2026-08-15 to 2026-09-05, camera at 1 Hz, of which 1,704 are genuinely on vegetation or soil. The laser cart contributes 427 frames, of which 75 — one session on 2026-08-29 — are in a field; the rest are indoor bench tests. The laser cart carries no GPS and no IMU: its uplink declares detections, laser, vehicle, system, camera.</a:t>
+            </a:r>
+          </a:p>
+        </p:txBody>
+      </p:sp>
+      <p:pic>
+        <p:nvPicPr>
+          <p:cNvPr id="36" name="Picture 35" descr="f7_fielddrive.png"/>
+          <p:cNvPicPr>
+            <a:picLocks noChangeAspect="1"/>
+          </p:cNvPicPr>
+          <p:nvPr/>
+        </p:nvPicPr>
+        <p:blipFill>
+          <a:blip r:embed="rId2"/>
+          <a:stretch>
+            <a:fillRect/>
+          </a:stretch>
+        </p:blipFill>
+        <p:spPr>
+          <a:xfrm>
+            <a:off x="822960" y="14510004"/>
+            <a:ext cx="10184130" cy="3798365"/>
+          </a:xfrm>
+          <a:prstGeom prst="rect">
+            <a:avLst/>
+          </a:prstGeom>
+        </p:spPr>
+      </p:pic>
+      <p:sp>
+        <p:nvSpPr>
+          <p:cNvPr id="37" name="TextBox 36"/>
           <p:cNvSpPr txBox="1"/>
           <p:nvPr/>
         </p:nvSpPr>
         <p:spPr>
           <a:xfrm>
-            <a:off x="822960" y="14109192"/>
+            <a:off x="822960" y="18399809"/>
+            <a:ext cx="10184130" cy="365760"/>
+          </a:xfrm>
+          <a:prstGeom prst="rect">
+            <a:avLst/>
+          </a:prstGeom>
+          <a:noFill/>
+        </p:spPr>
+        <p:txBody>
+          <a:bodyPr wrap="square" anchor="t" lIns="0" rIns="0" tIns="0" bIns="0">
+            <a:spAutoFit/>
+          </a:bodyPr>
+          <a:lstStyle/>
+          <a:p>
+            <a:pPr algn="l">
+              <a:lnSpc>
+                <a:spcPct val="106000"/>
+              </a:lnSpc>
+              <a:spcAft>
+                <a:spcPts val="1200"/>
+              </a:spcAft>
+            </a:pPr>
+            <a:r>
+              <a:rPr sz="1250" b="0">
+                <a:solidFill>
+                  <a:srgbClr val="5D6B7A"/>
+                </a:solidFill>
+                <a:latin typeface="Calibri"/>
+              </a:rPr>
+              <a:t>Figure 1.  The platform's one unambiguous field drive: robot 241 on 2026-08-29, one pass through a crop plot: rows under black plastic mulch, weeds between rows, bare soil, tree line. 1,013 camera frames at 640 x 360 over 213 s, 211 GPS fixes and 3,154 IMU samples, 140.7 m of track. The trajectory is drawn from the board fix — the platform's own derived GPS preferred a receiver frozen to a single coordinate, so every track it exposed was a motionless point (17 sessions, 1,281 rows, 0.0 m) until that was fixed. Source: uploads/ul_4_09test_49ea7a2a/files/.</a:t>
+            </a:r>
+          </a:p>
+        </p:txBody>
+      </p:sp>
+      <p:sp>
+        <p:nvSpPr>
+          <p:cNvPr id="38" name="TextBox 37"/>
+          <p:cNvSpPr txBox="1"/>
+          <p:nvPr/>
+        </p:nvSpPr>
+        <p:spPr>
+          <a:xfrm>
+            <a:off x="822960" y="19828559"/>
             <a:ext cx="10184130" cy="502920"/>
           </a:xfrm>
           <a:prstGeom prst="rect">
@@ -4619,13 +4685,13 @@
       </p:sp>
       <p:sp>
         <p:nvSpPr>
-          <p:cNvPr id="37" name="Rectangle 36"/>
+          <p:cNvPr id="39" name="Rectangle 38"/>
           <p:cNvSpPr/>
           <p:nvPr/>
         </p:nvSpPr>
         <p:spPr>
           <a:xfrm>
-            <a:off x="822960" y="14657832"/>
+            <a:off x="822960" y="20377199"/>
             <a:ext cx="10184130" cy="32004"/>
           </a:xfrm>
           <a:prstGeom prst="rect">
@@ -4663,21 +4729,21 @@
       </p:sp>
       <p:pic>
         <p:nvPicPr>
-          <p:cNvPr id="38" name="Picture 37" descr="f4_funnel.png"/>
+          <p:cNvPr id="40" name="Picture 39" descr="f4_funnel.png"/>
           <p:cNvPicPr>
             <a:picLocks noChangeAspect="1"/>
           </p:cNvPicPr>
           <p:nvPr/>
         </p:nvPicPr>
         <p:blipFill>
-          <a:blip r:embed="rId2"/>
+          <a:blip r:embed="rId3"/>
           <a:stretch>
             <a:fillRect/>
           </a:stretch>
         </p:blipFill>
         <p:spPr>
           <a:xfrm>
-            <a:off x="822960" y="14859000"/>
+            <a:off x="822960" y="20578367"/>
             <a:ext cx="10184130" cy="6769985"/>
           </a:xfrm>
           <a:prstGeom prst="rect">
@@ -4687,13 +4753,13 @@
       </p:pic>
       <p:sp>
         <p:nvSpPr>
-          <p:cNvPr id="39" name="TextBox 38"/>
+          <p:cNvPr id="41" name="TextBox 40"/>
           <p:cNvSpPr txBox="1"/>
           <p:nvPr/>
         </p:nvSpPr>
         <p:spPr>
           <a:xfrm>
-            <a:off x="822960" y="21720425"/>
+            <a:off x="822960" y="27439792"/>
             <a:ext cx="10184130" cy="365760"/>
           </a:xfrm>
           <a:prstGeom prst="rect">
@@ -4722,14 +4788,14 @@
                 </a:solidFill>
                 <a:latin typeface="Calibri"/>
               </a:rPr>
-              <a:t>Figure 1.  156,521 registry-labelled images collapse to 59,134 unique: 44,750 cross-dataset duplicates and 1,977 holdout stems removed. Of six audited harvested sources (13,527 images) exactly one (3,208 images) clears the 0.90 label-precision bar; the rest score 0.18-0.74. The audit probe reads 1.000 on human-labelled cwd12, so the low scores are the data, not the instrument.</a:t>
-            </a:r>
-          </a:p>
-        </p:txBody>
-      </p:sp>
-      <p:sp>
-        <p:nvSpPr>
-          <p:cNvPr id="40" name="TextBox 39"/>
+              <a:t>Figure 2.  156,521 registry-labelled images collapse to 59,134 unique: 44,750 cross-dataset duplicates and 1,977 holdout stems removed. Of six audited harvested sources (13,527 images) exactly one (3,208 images) clears the 0.90 label-precision bar; the rest score 0.18-0.74. The audit probe reads 1.000 on human-labelled cwd12, so the low scores are the data, not the instrument.</a:t>
+            </a:r>
+          </a:p>
+        </p:txBody>
+      </p:sp>
+      <p:sp>
+        <p:nvSpPr>
+          <p:cNvPr id="42" name="TextBox 41"/>
           <p:cNvSpPr txBox="1"/>
           <p:nvPr/>
         </p:nvSpPr>
@@ -4771,7 +4837,7 @@
       </p:sp>
       <p:sp>
         <p:nvSpPr>
-          <p:cNvPr id="41" name="Rectangle 40"/>
+          <p:cNvPr id="43" name="Rectangle 42"/>
           <p:cNvSpPr/>
           <p:nvPr/>
         </p:nvSpPr>
@@ -4815,14 +4881,14 @@
       </p:sp>
       <p:pic>
         <p:nvPicPr>
-          <p:cNvPr id="42" name="Picture 41" descr="f1_levers.png"/>
+          <p:cNvPr id="44" name="Picture 43" descr="f1_levers.png"/>
           <p:cNvPicPr>
             <a:picLocks noChangeAspect="1"/>
           </p:cNvPicPr>
           <p:nvPr/>
         </p:nvPicPr>
         <p:blipFill>
-          <a:blip r:embed="rId3"/>
+          <a:blip r:embed="rId4"/>
           <a:stretch>
             <a:fillRect/>
           </a:stretch>
@@ -4839,7 +4905,7 @@
       </p:pic>
       <p:sp>
         <p:nvSpPr>
-          <p:cNvPr id="43" name="TextBox 42"/>
+          <p:cNvPr id="45" name="TextBox 44"/>
           <p:cNvSpPr txBox="1"/>
           <p:nvPr/>
         </p:nvSpPr>
@@ -4874,21 +4940,21 @@
                 </a:solidFill>
                 <a:latin typeface="Calibri"/>
               </a:rPr>
-              <a:t>Figure 2.  Three levers on one holdout and one evaluator. Initialisation is worth three times what architecture is worth, and both dwarf the data-collection lever the whole system was built around. Top two rows n = 3 seeds; bottom row n = 1 with seeds in flight. Source: results/framework/s3_yolo11n/*/results.csv.</a:t>
+              <a:t>Figure 3.  Three levers on one holdout and one evaluator. Initialisation is worth three times what architecture is worth, and both dwarf the data-collection lever the whole system was built around. Top two rows n = 3 seeds; bottom row n = 1 with seeds in flight. Source: results/framework/s3_yolo11n/*/results.csv.</a:t>
             </a:r>
           </a:p>
         </p:txBody>
       </p:sp>
       <p:pic>
         <p:nvPicPr>
-          <p:cNvPr id="44" name="Picture 43" descr="f2_ladder.png"/>
+          <p:cNvPr id="46" name="Picture 45" descr="f2_ladder.png"/>
           <p:cNvPicPr>
             <a:picLocks noChangeAspect="1"/>
           </p:cNvPicPr>
           <p:nvPr/>
         </p:nvPicPr>
         <p:blipFill>
-          <a:blip r:embed="rId4"/>
+          <a:blip r:embed="rId5"/>
           <a:stretch>
             <a:fillRect/>
           </a:stretch>
@@ -4905,7 +4971,7 @@
       </p:pic>
       <p:sp>
         <p:nvSpPr>
-          <p:cNvPr id="45" name="TextBox 44"/>
+          <p:cNvPr id="47" name="TextBox 46"/>
           <p:cNvSpPr txBox="1"/>
           <p:nvPr/>
         </p:nvSpPr>
@@ -4940,14 +5006,14 @@
                 </a:solidFill>
                 <a:latin typeface="Calibri"/>
               </a:rPr>
-              <a:t>Figure 3.  Harvested images added to a clean in-domain core. Flat within the seed band to +15,000, then −0.020 at +40,000 — twelve times the training data for nothing, then a cost. The shaded band is the measured seed std (0.0029), not an assumption. Source: results/framework/s3_tier_v2_*.json.</a:t>
-            </a:r>
-          </a:p>
-        </p:txBody>
-      </p:sp>
-      <p:sp>
-        <p:nvSpPr>
-          <p:cNvPr id="46" name="TextBox 45"/>
+              <a:t>Figure 4.  Harvested images added to a clean in-domain core. Flat within the seed band to +15,000, then −0.020 at +40,000 — twelve times the training data for nothing, then a cost. The shaded band is the measured seed std (0.0029), not an assumption. Source: results/framework/s3_tier_v2_*.json.</a:t>
+            </a:r>
+          </a:p>
+        </p:txBody>
+      </p:sp>
+      <p:sp>
+        <p:nvSpPr>
+          <p:cNvPr id="48" name="TextBox 47"/>
           <p:cNvSpPr txBox="1"/>
           <p:nvPr/>
         </p:nvSpPr>
@@ -4989,7 +5055,7 @@
       </p:sp>
       <p:sp>
         <p:nvSpPr>
-          <p:cNvPr id="47" name="Rectangle 46"/>
+          <p:cNvPr id="49" name="Rectangle 48"/>
           <p:cNvSpPr/>
           <p:nvPr/>
         </p:nvSpPr>
@@ -5033,7 +5099,7 @@
       </p:sp>
       <p:sp>
         <p:nvSpPr>
-          <p:cNvPr id="48" name="TextBox 47"/>
+          <p:cNvPr id="50" name="TextBox 49"/>
           <p:cNvSpPr txBox="1"/>
           <p:nvPr/>
         </p:nvSpPr>
@@ -5075,7 +5141,7 @@
       </p:sp>
       <p:sp>
         <p:nvSpPr>
-          <p:cNvPr id="49" name="TextBox 48"/>
+          <p:cNvPr id="51" name="TextBox 50"/>
           <p:cNvSpPr txBox="1"/>
           <p:nvPr/>
         </p:nvSpPr>
@@ -5117,7 +5183,7 @@
       </p:sp>
       <p:sp>
         <p:nvSpPr>
-          <p:cNvPr id="50" name="Rectangle 49"/>
+          <p:cNvPr id="52" name="Rectangle 51"/>
           <p:cNvSpPr/>
           <p:nvPr/>
         </p:nvSpPr>
@@ -5161,14 +5227,14 @@
       </p:sp>
       <p:pic>
         <p:nvPicPr>
-          <p:cNvPr id="51" name="Picture 50" descr="f3_wall.png"/>
+          <p:cNvPr id="53" name="Picture 52" descr="f3_wall.png"/>
           <p:cNvPicPr>
             <a:picLocks noChangeAspect="1"/>
           </p:cNvPicPr>
           <p:nvPr/>
         </p:nvPicPr>
         <p:blipFill>
-          <a:blip r:embed="rId5"/>
+          <a:blip r:embed="rId6"/>
           <a:stretch>
             <a:fillRect/>
           </a:stretch>
@@ -5185,7 +5251,7 @@
       </p:pic>
       <p:sp>
         <p:nvSpPr>
-          <p:cNvPr id="52" name="TextBox 51"/>
+          <p:cNvPr id="54" name="TextBox 53"/>
           <p:cNvSpPr txBox="1"/>
           <p:nvPr/>
         </p:nvSpPr>
@@ -5220,14 +5286,14 @@
                 </a:solidFill>
                 <a:latin typeface="Calibri"/>
               </a:rPr>
-              <a:t>Figure 4.  The same three checkpoints, the same matcher on both sides so the evaluator offset cancels: 0.8730 ± 0.0011 in-domain against 0.1003 ± 0.0053 on ImageWeeds. Best species Ragweed 0.9604 → Ragweed 0.0006. An in-domain weed detector does not transfer across imaging domains, and no amount of in-domain data fixes that. Source: results/framework/s6_crossdataset_imageweeds.json.</a:t>
-            </a:r>
-          </a:p>
-        </p:txBody>
-      </p:sp>
-      <p:sp>
-        <p:nvSpPr>
-          <p:cNvPr id="53" name="TextBox 52"/>
+              <a:t>Figure 5.  The same three checkpoints, the same matcher on both sides so the evaluator offset cancels: 0.8730 ± 0.0011 in-domain against 0.1003 ± 0.0053 on ImageWeeds. Best species Ragweed 0.9604 → Ragweed 0.0006. An in-domain weed detector does not transfer across imaging domains, and no amount of in-domain data fixes that. Source: results/framework/s6_crossdataset_imageweeds.json.</a:t>
+            </a:r>
+          </a:p>
+        </p:txBody>
+      </p:sp>
+      <p:sp>
+        <p:nvSpPr>
+          <p:cNvPr id="55" name="TextBox 54"/>
           <p:cNvSpPr txBox="1"/>
           <p:nvPr/>
         </p:nvSpPr>
@@ -5269,7 +5335,7 @@
       </p:sp>
       <p:sp>
         <p:nvSpPr>
-          <p:cNvPr id="54" name="Rectangle 53"/>
+          <p:cNvPr id="56" name="Rectangle 55"/>
           <p:cNvSpPr/>
           <p:nvPr/>
         </p:nvSpPr>
@@ -5313,14 +5379,14 @@
       </p:sp>
       <p:pic>
         <p:nvPicPr>
-          <p:cNvPr id="55" name="Picture 54" descr="f6_rounds.png"/>
+          <p:cNvPr id="57" name="Picture 56" descr="f6_rounds.png"/>
           <p:cNvPicPr>
             <a:picLocks noChangeAspect="1"/>
           </p:cNvPicPr>
           <p:nvPr/>
         </p:nvPicPr>
         <p:blipFill>
-          <a:blip r:embed="rId6"/>
+          <a:blip r:embed="rId7"/>
           <a:stretch>
             <a:fillRect/>
           </a:stretch>
@@ -5337,7 +5403,7 @@
       </p:pic>
       <p:sp>
         <p:nvSpPr>
-          <p:cNvPr id="56" name="TextBox 55"/>
+          <p:cNvPr id="58" name="TextBox 57"/>
           <p:cNvSpPr txBox="1"/>
           <p:nvPr/>
         </p:nvSpPr>
@@ -5372,14 +5438,14 @@
                 </a:solidFill>
                 <a:latin typeface="Calibri"/>
               </a:rPr>
-              <a:t>Figure 5.  Left: fifteen unattended rounds, reported metric and last-epoch metric. The shaded region is where the training corpus stopped changing — 24 datasets, 48,752 unique images, identical from round 3 to round 15. Right: on round 15's exact dataset, starting fresh scores 0.5805 against the chained recipe's 0.5577 ± 0.0040 (n = 3), a gap of +0.0287 at 5.0 standard deviations with the schedule held constant. The decline is the chain, not the data.</a:t>
-            </a:r>
-          </a:p>
-        </p:txBody>
-      </p:sp>
-      <p:sp>
-        <p:nvSpPr>
-          <p:cNvPr id="57" name="TextBox 56"/>
+              <a:t>Figure 6.  Left: fifteen unattended rounds, reported metric and last-epoch metric. The shaded region is where the training corpus stopped changing — 24 datasets, 48,752 unique images, identical from round 3 to round 15. Right: on round 15's exact dataset, starting fresh scores 0.5805 against the chained recipe's 0.5577 ± 0.0040 (n = 3), a gap of +0.0287 at 5.0 standard deviations with the schedule held constant. The decline is the chain, not the data.</a:t>
+            </a:r>
+          </a:p>
+        </p:txBody>
+      </p:sp>
+      <p:sp>
+        <p:nvSpPr>
+          <p:cNvPr id="59" name="TextBox 58"/>
           <p:cNvSpPr txBox="1"/>
           <p:nvPr/>
         </p:nvSpPr>
@@ -5421,7 +5487,7 @@
       </p:sp>
       <p:sp>
         <p:nvSpPr>
-          <p:cNvPr id="58" name="Rectangle 57"/>
+          <p:cNvPr id="60" name="Rectangle 59"/>
           <p:cNvSpPr/>
           <p:nvPr/>
         </p:nvSpPr>
@@ -5465,14 +5531,14 @@
       </p:sp>
       <p:pic>
         <p:nvPicPr>
-          <p:cNvPr id="59" name="Picture 58" descr="f5_supervision.png"/>
+          <p:cNvPr id="61" name="Picture 60" descr="f5_supervision.png"/>
           <p:cNvPicPr>
             <a:picLocks noChangeAspect="1"/>
           </p:cNvPicPr>
           <p:nvPr/>
         </p:nvPicPr>
         <p:blipFill>
-          <a:blip r:embed="rId7"/>
+          <a:blip r:embed="rId8"/>
           <a:stretch>
             <a:fillRect/>
           </a:stretch>
@@ -5489,7 +5555,7 @@
       </p:pic>
       <p:sp>
         <p:nvSpPr>
-          <p:cNvPr id="60" name="TextBox 59"/>
+          <p:cNvPr id="62" name="TextBox 61"/>
           <p:cNvSpPr txBox="1"/>
           <p:nvPr/>
         </p:nvSpPr>
@@ -5524,14 +5590,14 @@
                 </a:solidFill>
                 <a:latin typeface="Calibri"/>
               </a:rPr>
-              <a:t>Figure 6.  A frozen corpus of 162 real incidents from this project's own history, scored on the dev split: 116 incidents, 33 controls. Bars right of zero are recall, left of zero are false alarms. The scripted watchdog reads status fields and flags nothing, 149 times out of 149. The twelve deterministic checks catch 11. A model reading raw artifact excerpts catches four to eight times more. The dotted line is the ceiling any rules-only arm has on this corpus: 56 of the 127 incidents declare no deterministic signal that could reach them.</a:t>
-            </a:r>
-          </a:p>
-        </p:txBody>
-      </p:sp>
-      <p:sp>
-        <p:nvSpPr>
-          <p:cNvPr id="61" name="TextBox 60"/>
+              <a:t>Figure 7.  A frozen corpus of 162 real incidents from this project's own history, scored on the dev split: 116 incidents, 33 controls. Bars right of zero are recall, left of zero are false alarms. The scripted watchdog reads status fields and flags nothing, 149 times out of 149. The twelve deterministic checks catch 11. A model reading raw artifact excerpts catches four to eight times more. The dotted line is the ceiling any rules-only arm has on this corpus: 56 of the 127 incidents declare no deterministic signal that could reach them.</a:t>
+            </a:r>
+          </a:p>
+        </p:txBody>
+      </p:sp>
+      <p:sp>
+        <p:nvSpPr>
+          <p:cNvPr id="63" name="TextBox 62"/>
           <p:cNvSpPr txBox="1"/>
           <p:nvPr/>
         </p:nvSpPr>
@@ -5573,7 +5639,7 @@
       </p:sp>
       <p:sp>
         <p:nvSpPr>
-          <p:cNvPr id="62" name="Rectangle 61"/>
+          <p:cNvPr id="64" name="Rectangle 63"/>
           <p:cNvSpPr/>
           <p:nvPr/>
         </p:nvSpPr>
@@ -5617,7 +5683,7 @@
       </p:sp>
       <p:sp>
         <p:nvSpPr>
-          <p:cNvPr id="63" name="TextBox 62"/>
+          <p:cNvPr id="65" name="TextBox 64"/>
           <p:cNvSpPr txBox="1"/>
           <p:nvPr/>
         </p:nvSpPr>
@@ -5659,7 +5725,7 @@
       </p:sp>
       <p:sp>
         <p:nvSpPr>
-          <p:cNvPr id="64" name="TextBox 63"/>
+          <p:cNvPr id="66" name="TextBox 65"/>
           <p:cNvSpPr txBox="1"/>
           <p:nvPr/>
         </p:nvSpPr>
@@ -5701,7 +5767,7 @@
       </p:sp>
       <p:sp>
         <p:nvSpPr>
-          <p:cNvPr id="65" name="TextBox 64"/>
+          <p:cNvPr id="67" name="TextBox 66"/>
           <p:cNvSpPr txBox="1"/>
           <p:nvPr/>
         </p:nvSpPr>
@@ -5743,7 +5809,7 @@
       </p:sp>
       <p:sp>
         <p:nvSpPr>
-          <p:cNvPr id="66" name="TextBox 65"/>
+          <p:cNvPr id="68" name="TextBox 67"/>
           <p:cNvSpPr txBox="1"/>
           <p:nvPr/>
         </p:nvSpPr>
@@ -5785,7 +5851,7 @@
       </p:sp>
       <p:sp>
         <p:nvSpPr>
-          <p:cNvPr id="67" name="TextBox 66"/>
+          <p:cNvPr id="69" name="TextBox 68"/>
           <p:cNvSpPr txBox="1"/>
           <p:nvPr/>
         </p:nvSpPr>
@@ -5827,7 +5893,7 @@
       </p:sp>
       <p:sp>
         <p:nvSpPr>
-          <p:cNvPr id="68" name="TextBox 67"/>
+          <p:cNvPr id="70" name="TextBox 69"/>
           <p:cNvSpPr txBox="1"/>
           <p:nvPr/>
         </p:nvSpPr>
@@ -5869,7 +5935,7 @@
       </p:sp>
       <p:sp>
         <p:nvSpPr>
-          <p:cNvPr id="69" name="Rectangle 68"/>
+          <p:cNvPr id="71" name="Rectangle 70"/>
           <p:cNvSpPr/>
           <p:nvPr/>
         </p:nvSpPr>
@@ -5913,7 +5979,7 @@
       </p:sp>
       <p:sp>
         <p:nvSpPr>
-          <p:cNvPr id="70" name="TextBox 69"/>
+          <p:cNvPr id="72" name="TextBox 71"/>
           <p:cNvSpPr txBox="1"/>
           <p:nvPr/>
         </p:nvSpPr>
@@ -5948,7 +6014,7 @@
                 </a:solidFill>
                 <a:latin typeface="Calibri"/>
               </a:rPr>
-              <a:t>The holdout is used as the validation set, so every number is a maximum over many evaluations on the reported set; the optimism is measured (+0.002 to +0.017) but not removed. The tier ladder and the chain control are n = 1 per point with seed repeats in flight. The 27B supervision row is 107 of 149 cases and still running. The supervision corpus was labelled from this project's own engineering record by the same system that wrote the reviewer prompt, and its test split is 13 cases — too small to separate methods. Robot field frames are collected but not yet scored: the 358 stored frames contain no weeds, so they measure false positives only.</a:t>
+              <a:t>The holdout is used as the validation set, so every number is a maximum over many evaluations on the reported set; the optimism is measured (+0.002 to +0.017) but not removed. The tier ladder and the chain control are n = 1 per point with seed repeats in flight. The 27B supervision row is 107 of 149 cases and still running. The supervision corpus was labelled from this project's own engineering record by the same system that wrote the reviewer prompt, and its test split is 13 cases — too small to separate methods. Robot field frames are collected but not yet scored, and none of the 2,686 robot frames is labelled. The laser cart carries no GPS or IMU, so the platform's sensor-fusion story is robot 241 only.</a:t>
             </a:r>
           </a:p>
         </p:txBody>

--- a/docs/poster/MTSU_WeedAgent_Poster.pptx
+++ b/docs/poster/MTSU_WeedAgent_Poster.pptx
@@ -4962,7 +4962,7 @@
         <p:spPr>
           <a:xfrm>
             <a:off x="11510010" y="13591750"/>
-            <a:ext cx="10184130" cy="6201029"/>
+            <a:ext cx="10184130" cy="6372961"/>
           </a:xfrm>
           <a:prstGeom prst="rect">
             <a:avLst/>
@@ -4977,7 +4977,7 @@
         </p:nvSpPr>
         <p:spPr>
           <a:xfrm>
-            <a:off x="11510010" y="19884220"/>
+            <a:off x="11510010" y="20056152"/>
             <a:ext cx="10184130" cy="365760"/>
           </a:xfrm>
           <a:prstGeom prst="rect">
@@ -5019,7 +5019,7 @@
         </p:nvSpPr>
         <p:spPr>
           <a:xfrm>
-            <a:off x="11510010" y="20829862"/>
+            <a:off x="11510010" y="21001794"/>
             <a:ext cx="10184130" cy="502920"/>
           </a:xfrm>
           <a:prstGeom prst="rect">
@@ -5061,7 +5061,7 @@
         </p:nvSpPr>
         <p:spPr>
           <a:xfrm>
-            <a:off x="11510010" y="21378502"/>
+            <a:off x="11510010" y="21550434"/>
             <a:ext cx="10184130" cy="32004"/>
           </a:xfrm>
           <a:prstGeom prst="rect">
@@ -5105,7 +5105,7 @@
         </p:nvSpPr>
         <p:spPr>
           <a:xfrm>
-            <a:off x="11510010" y="21579670"/>
+            <a:off x="11510010" y="21751602"/>
             <a:ext cx="10184130" cy="365760"/>
           </a:xfrm>
           <a:prstGeom prst="rect">
@@ -5546,7 +5546,7 @@
         <p:spPr>
           <a:xfrm>
             <a:off x="32884110" y="7653527"/>
-            <a:ext cx="10184130" cy="3382226"/>
+            <a:ext cx="10184130" cy="3371734"/>
           </a:xfrm>
           <a:prstGeom prst="rect">
             <a:avLst/>
@@ -5561,7 +5561,7 @@
         </p:nvSpPr>
         <p:spPr>
           <a:xfrm>
-            <a:off x="32884110" y="11127194"/>
+            <a:off x="32884110" y="11116701"/>
             <a:ext cx="10184130" cy="365760"/>
           </a:xfrm>
           <a:prstGeom prst="rect">
@@ -5603,7 +5603,7 @@
         </p:nvSpPr>
         <p:spPr>
           <a:xfrm>
-            <a:off x="32884110" y="12318961"/>
+            <a:off x="32884110" y="12308469"/>
             <a:ext cx="10184130" cy="502920"/>
           </a:xfrm>
           <a:prstGeom prst="rect">
@@ -5645,7 +5645,7 @@
         </p:nvSpPr>
         <p:spPr>
           <a:xfrm>
-            <a:off x="32884110" y="12867601"/>
+            <a:off x="32884110" y="12857109"/>
             <a:ext cx="10184130" cy="32004"/>
           </a:xfrm>
           <a:prstGeom prst="rect">
@@ -5689,7 +5689,7 @@
         </p:nvSpPr>
         <p:spPr>
           <a:xfrm>
-            <a:off x="32884110" y="13068769"/>
+            <a:off x="32884110" y="13058277"/>
             <a:ext cx="10184130" cy="365760"/>
           </a:xfrm>
           <a:prstGeom prst="rect">
@@ -5731,7 +5731,7 @@
         </p:nvSpPr>
         <p:spPr>
           <a:xfrm>
-            <a:off x="32884110" y="13677353"/>
+            <a:off x="32884110" y="13666861"/>
             <a:ext cx="10184130" cy="365760"/>
           </a:xfrm>
           <a:prstGeom prst="rect">
@@ -5773,7 +5773,7 @@
         </p:nvSpPr>
         <p:spPr>
           <a:xfrm>
-            <a:off x="32884110" y="14285937"/>
+            <a:off x="32884110" y="14275445"/>
             <a:ext cx="10184130" cy="365760"/>
           </a:xfrm>
           <a:prstGeom prst="rect">
@@ -5815,7 +5815,7 @@
         </p:nvSpPr>
         <p:spPr>
           <a:xfrm>
-            <a:off x="32884110" y="14894521"/>
+            <a:off x="32884110" y="14884029"/>
             <a:ext cx="10184130" cy="365760"/>
           </a:xfrm>
           <a:prstGeom prst="rect">
@@ -5857,7 +5857,7 @@
         </p:nvSpPr>
         <p:spPr>
           <a:xfrm>
-            <a:off x="32884110" y="15503105"/>
+            <a:off x="32884110" y="15492613"/>
             <a:ext cx="10184130" cy="365760"/>
           </a:xfrm>
           <a:prstGeom prst="rect">
@@ -5899,7 +5899,7 @@
         </p:nvSpPr>
         <p:spPr>
           <a:xfrm>
-            <a:off x="32884110" y="16294569"/>
+            <a:off x="32884110" y="16284077"/>
             <a:ext cx="10184130" cy="502920"/>
           </a:xfrm>
           <a:prstGeom prst="rect">
@@ -5941,7 +5941,7 @@
         </p:nvSpPr>
         <p:spPr>
           <a:xfrm>
-            <a:off x="32884110" y="16843209"/>
+            <a:off x="32884110" y="16832717"/>
             <a:ext cx="10184130" cy="32004"/>
           </a:xfrm>
           <a:prstGeom prst="rect">
@@ -5985,7 +5985,7 @@
         </p:nvSpPr>
         <p:spPr>
           <a:xfrm>
-            <a:off x="32884110" y="17044377"/>
+            <a:off x="32884110" y="17033885"/>
             <a:ext cx="10184130" cy="365760"/>
           </a:xfrm>
           <a:prstGeom prst="rect">
@@ -6014,7 +6014,7 @@
                 </a:solidFill>
                 <a:latin typeface="Calibri"/>
               </a:rPr>
-              <a:t>The holdout is used as the validation set, so every number is a maximum over many evaluations on the reported set; the optimism is measured (+0.002 to +0.017) but not removed. The tier ladder and the chain control are n = 1 per point with seed repeats in flight. The 27B supervision row is 107 of 149 cases and still running. The supervision corpus was labelled from this project's own engineering record by the same system that wrote the reviewer prompt, and its test split is 13 cases — too small to separate methods. Robot field frames are collected but not yet scored, and none of the 2,686 robot frames is labelled. The laser cart carries no GPS or IMU, so the platform's sensor-fusion story is robot 241 only.</a:t>
+              <a:t>The holdout is used as the validation set, so every number is a maximum over many evaluations on the reported set; the optimism is measured (+0.002 to +0.017) but not removed. The tier ladder and the chain control are n = 1 per point with seed repeats in flight. The 27B supervision row is 149 of 149 cases and still running. The supervision corpus was labelled from this project's own engineering record by the same system that wrote the reviewer prompt, and its test split is 13 cases — too small to separate methods. Robot field frames are collected but not yet scored, and none of the 2,686 robot frames is labelled. The laser cart carries no GPS or IMU, so the platform's sensor-fusion story is robot 241 only.</a:t>
             </a:r>
           </a:p>
         </p:txBody>

--- a/docs/poster/MTSU_WeedAgent_Poster.pptx
+++ b/docs/poster/MTSU_WeedAgent_Poster.pptx
@@ -7,7 +7,7 @@
   <p:sldIdLst>
     <p:sldId id="256" r:id="rId7"/>
   </p:sldIdLst>
-  <p:sldSz cx="43891200" cy="21945600" type="screen4x3"/>
+  <p:sldSz cx="43891200" cy="32918400" type="screen4x3"/>
   <p:notesSz cx="6858000" cy="9144000"/>
   <p:defaultTextStyle>
     <a:defPPr>
@@ -3097,13 +3097,13 @@
         <p:spPr>
           <a:xfrm>
             <a:off x="0" y="0"/>
-            <a:ext cx="43891200" cy="3703320"/>
+            <a:ext cx="43891200" cy="3931920"/>
           </a:xfrm>
           <a:prstGeom prst="rect">
             <a:avLst/>
           </a:prstGeom>
           <a:solidFill>
-            <a:srgbClr val="0A4D8C"/>
+            <a:srgbClr val="14314E"/>
           </a:solidFill>
           <a:ln>
             <a:noFill/>
@@ -3134,225 +3134,20 @@
       </p:sp>
       <p:sp>
         <p:nvSpPr>
-          <p:cNvPr id="3" name="TextBox 2"/>
-          <p:cNvSpPr txBox="1"/>
-          <p:nvPr/>
-        </p:nvSpPr>
-        <p:spPr>
-          <a:xfrm>
-            <a:off x="822960" y="384048"/>
-            <a:ext cx="42245280" cy="1371600"/>
-          </a:xfrm>
-          <a:prstGeom prst="rect">
-            <a:avLst/>
-          </a:prstGeom>
-          <a:noFill/>
-        </p:spPr>
-        <p:txBody>
-          <a:bodyPr wrap="square" anchor="t" lIns="0" rIns="0" tIns="0" bIns="0">
-            <a:spAutoFit/>
-          </a:bodyPr>
-          <a:lstStyle/>
-          <a:p>
-            <a:pPr algn="l">
-              <a:lnSpc>
-                <a:spcPct val="92000"/>
-              </a:lnSpc>
-              <a:spcAft>
-                <a:spcPts val="600"/>
-              </a:spcAft>
-            </a:pPr>
-            <a:r>
-              <a:rPr sz="7400" b="1">
-                <a:solidFill>
-                  <a:srgbClr val="FFFFFF"/>
-                </a:solidFill>
-                <a:latin typeface="Calibri"/>
-              </a:rPr>
-              <a:t>What Actually Moves a Weed Detector</a:t>
-            </a:r>
-          </a:p>
-        </p:txBody>
-      </p:sp>
-      <p:sp>
-        <p:nvSpPr>
-          <p:cNvPr id="4" name="TextBox 3"/>
-          <p:cNvSpPr txBox="1"/>
-          <p:nvPr/>
-        </p:nvSpPr>
-        <p:spPr>
-          <a:xfrm>
-            <a:off x="822960" y="1572768"/>
-            <a:ext cx="42245280" cy="640080"/>
-          </a:xfrm>
-          <a:prstGeom prst="rect">
-            <a:avLst/>
-          </a:prstGeom>
-          <a:noFill/>
-        </p:spPr>
-        <p:txBody>
-          <a:bodyPr wrap="square" anchor="t" lIns="0" rIns="0" tIns="0" bIns="0">
-            <a:spAutoFit/>
-          </a:bodyPr>
-          <a:lstStyle/>
-          <a:p>
-            <a:pPr algn="l">
-              <a:lnSpc>
-                <a:spcPct val="100000"/>
-              </a:lnSpc>
-              <a:spcAft>
-                <a:spcPts val="600"/>
-              </a:spcAft>
-            </a:pPr>
-            <a:r>
-              <a:rPr sz="2600" b="0">
-                <a:solidFill>
-                  <a:srgbClr val="CBDDEE"/>
-                </a:solidFill>
-                <a:latin typeface="Calibri"/>
-              </a:rPr>
-              <a:t>Six months of an autonomous data-harvesting pipeline, instrumented and audited: which levers move accuracy, and which supervision catches failure</a:t>
-            </a:r>
-          </a:p>
-        </p:txBody>
-      </p:sp>
-      <p:sp>
-        <p:nvSpPr>
-          <p:cNvPr id="5" name="TextBox 4"/>
-          <p:cNvSpPr txBox="1"/>
-          <p:nvPr/>
-        </p:nvSpPr>
-        <p:spPr>
-          <a:xfrm>
-            <a:off x="822960" y="2359152"/>
-            <a:ext cx="42245280" cy="566928"/>
-          </a:xfrm>
-          <a:prstGeom prst="rect">
-            <a:avLst/>
-          </a:prstGeom>
-          <a:noFill/>
-        </p:spPr>
-        <p:txBody>
-          <a:bodyPr wrap="square" lIns="0" rIns="0" tIns="0" bIns="0">
-            <a:spAutoFit/>
-          </a:bodyPr>
-          <a:lstStyle/>
-          <a:p>
-            <a:r>
-              <a:rPr sz="3000" b="1">
-                <a:solidFill>
-                  <a:srgbClr val="FFFFFF"/>
-                </a:solidFill>
-                <a:latin typeface="Calibri"/>
-              </a:rPr>
-              <a:t>Hongbo Zhang</a:t>
-            </a:r>
-            <a:r>
-              <a:rPr sz="1900" b="1" baseline="30000">
-                <a:solidFill>
-                  <a:srgbClr val="FFFFFF"/>
-                </a:solidFill>
-                <a:latin typeface="Calibri"/>
-              </a:rPr>
-              <a:t>1</a:t>
-            </a:r>
-            <a:r>
-              <a:rPr sz="3000" b="1">
-                <a:solidFill>
-                  <a:srgbClr val="FFFFFF"/>
-                </a:solidFill>
-                <a:latin typeface="Calibri"/>
-              </a:rPr>
-              <a:t>     Harry He</a:t>
-            </a:r>
-            <a:r>
-              <a:rPr sz="1900" b="1" baseline="30000">
-                <a:solidFill>
-                  <a:srgbClr val="FFFFFF"/>
-                </a:solidFill>
-                <a:latin typeface="Calibri"/>
-              </a:rPr>
-              <a:t>1</a:t>
-            </a:r>
-            <a:r>
-              <a:rPr sz="3000" b="1">
-                <a:solidFill>
-                  <a:srgbClr val="FFFFFF"/>
-                </a:solidFill>
-                <a:latin typeface="Calibri"/>
-              </a:rPr>
-              <a:t>     Song Cui</a:t>
-            </a:r>
-            <a:r>
-              <a:rPr sz="1900" b="1" baseline="30000">
-                <a:solidFill>
-                  <a:srgbClr val="FFFFFF"/>
-                </a:solidFill>
-                <a:latin typeface="Calibri"/>
-              </a:rPr>
-              <a:t>2</a:t>
-            </a:r>
-          </a:p>
-        </p:txBody>
-      </p:sp>
-      <p:sp>
-        <p:nvSpPr>
-          <p:cNvPr id="6" name="TextBox 5"/>
-          <p:cNvSpPr txBox="1"/>
-          <p:nvPr/>
-        </p:nvSpPr>
-        <p:spPr>
-          <a:xfrm>
-            <a:off x="822960" y="2926080"/>
-            <a:ext cx="42245280" cy="457200"/>
-          </a:xfrm>
-          <a:prstGeom prst="rect">
-            <a:avLst/>
-          </a:prstGeom>
-          <a:noFill/>
-        </p:spPr>
-        <p:txBody>
-          <a:bodyPr wrap="square" anchor="t" lIns="0" rIns="0" tIns="0" bIns="0">
-            <a:spAutoFit/>
-          </a:bodyPr>
-          <a:lstStyle/>
-          <a:p>
-            <a:pPr algn="l">
-              <a:lnSpc>
-                <a:spcPct val="100000"/>
-              </a:lnSpc>
-              <a:spcAft>
-                <a:spcPts val="600"/>
-              </a:spcAft>
-            </a:pPr>
-            <a:r>
-              <a:rPr sz="2100" b="0">
-                <a:solidFill>
-                  <a:srgbClr val="CBDDEE"/>
-                </a:solidFill>
-                <a:latin typeface="Calibri"/>
-              </a:rPr>
-              <a:t>1 Department of Engineering Technology    ·    2 School of Agriculture    ·    Middle Tennessee State University, Murfreesboro, TN, USA</a:t>
-            </a:r>
-          </a:p>
-        </p:txBody>
-      </p:sp>
-      <p:sp>
-        <p:nvSpPr>
-          <p:cNvPr id="7" name="Rectangle 6"/>
+          <p:cNvPr id="3" name="Rectangle 2"/>
           <p:cNvSpPr/>
           <p:nvPr/>
         </p:nvSpPr>
         <p:spPr>
           <a:xfrm>
-            <a:off x="822960" y="3977639"/>
-            <a:ext cx="10184130" cy="2240280"/>
+            <a:off x="0" y="3931920"/>
+            <a:ext cx="43891200" cy="45720"/>
           </a:xfrm>
           <a:prstGeom prst="rect">
             <a:avLst/>
           </a:prstGeom>
           <a:solidFill>
-            <a:srgbClr val="EEF3F8"/>
+            <a:srgbClr val="1C6FB5"/>
           </a:solidFill>
           <a:ln>
             <a:noFill/>
@@ -3383,20 +3178,225 @@
       </p:sp>
       <p:sp>
         <p:nvSpPr>
+          <p:cNvPr id="4" name="TextBox 3"/>
+          <p:cNvSpPr txBox="1"/>
+          <p:nvPr/>
+        </p:nvSpPr>
+        <p:spPr>
+          <a:xfrm>
+            <a:off x="731520" y="502920"/>
+            <a:ext cx="42428160" cy="365760"/>
+          </a:xfrm>
+          <a:prstGeom prst="rect">
+            <a:avLst/>
+          </a:prstGeom>
+          <a:noFill/>
+        </p:spPr>
+        <p:txBody>
+          <a:bodyPr wrap="square" lIns="0" rIns="0" tIns="0" bIns="0">
+            <a:spAutoFit/>
+          </a:bodyPr>
+          <a:lstStyle/>
+          <a:p>
+            <a:pPr algn="l">
+              <a:lnSpc>
+                <a:spcPct val="95000"/>
+              </a:lnSpc>
+              <a:spcAft>
+                <a:spcPts val="0"/>
+              </a:spcAft>
+            </a:pPr>
+            <a:r>
+              <a:rPr sz="6600" b="1">
+                <a:solidFill>
+                  <a:srgbClr val="FFFFFF"/>
+                </a:solidFill>
+                <a:latin typeface="Arial"/>
+              </a:rPr>
+              <a:t>What Actually Moves a Weed Detector — and What Catches It Failing</a:t>
+            </a:r>
+          </a:p>
+        </p:txBody>
+      </p:sp>
+      <p:sp>
+        <p:nvSpPr>
+          <p:cNvPr id="5" name="TextBox 4"/>
+          <p:cNvSpPr txBox="1"/>
+          <p:nvPr/>
+        </p:nvSpPr>
+        <p:spPr>
+          <a:xfrm>
+            <a:off x="731520" y="2103120"/>
+            <a:ext cx="42428160" cy="548640"/>
+          </a:xfrm>
+          <a:prstGeom prst="rect">
+            <a:avLst/>
+          </a:prstGeom>
+          <a:noFill/>
+        </p:spPr>
+        <p:txBody>
+          <a:bodyPr wrap="square" lIns="0" rIns="0" tIns="0" bIns="0">
+            <a:spAutoFit/>
+          </a:bodyPr>
+          <a:lstStyle/>
+          <a:p>
+            <a:r>
+              <a:rPr sz="3200" b="1">
+                <a:solidFill>
+                  <a:srgbClr val="FFFFFF"/>
+                </a:solidFill>
+                <a:latin typeface="Arial"/>
+              </a:rPr>
+              <a:t>Hongbo Zhang</a:t>
+            </a:r>
+            <a:r>
+              <a:rPr sz="2000" b="1" baseline="30000">
+                <a:solidFill>
+                  <a:srgbClr val="FFFFFF"/>
+                </a:solidFill>
+                <a:latin typeface="Arial"/>
+              </a:rPr>
+              <a:t>1</a:t>
+            </a:r>
+            <a:r>
+              <a:rPr sz="3200" b="1">
+                <a:solidFill>
+                  <a:srgbClr val="FFFFFF"/>
+                </a:solidFill>
+                <a:latin typeface="Arial"/>
+              </a:rPr>
+              <a:t>,     Harry He</a:t>
+            </a:r>
+            <a:r>
+              <a:rPr sz="2000" b="1" baseline="30000">
+                <a:solidFill>
+                  <a:srgbClr val="FFFFFF"/>
+                </a:solidFill>
+                <a:latin typeface="Arial"/>
+              </a:rPr>
+              <a:t>1</a:t>
+            </a:r>
+            <a:r>
+              <a:rPr sz="3200" b="1">
+                <a:solidFill>
+                  <a:srgbClr val="FFFFFF"/>
+                </a:solidFill>
+                <a:latin typeface="Arial"/>
+              </a:rPr>
+              <a:t>,     Song Cui</a:t>
+            </a:r>
+            <a:r>
+              <a:rPr sz="2000" b="1" baseline="30000">
+                <a:solidFill>
+                  <a:srgbClr val="FFFFFF"/>
+                </a:solidFill>
+                <a:latin typeface="Arial"/>
+              </a:rPr>
+              <a:t>2</a:t>
+            </a:r>
+          </a:p>
+        </p:txBody>
+      </p:sp>
+      <p:sp>
+        <p:nvSpPr>
+          <p:cNvPr id="6" name="TextBox 5"/>
+          <p:cNvSpPr txBox="1"/>
+          <p:nvPr/>
+        </p:nvSpPr>
+        <p:spPr>
+          <a:xfrm>
+            <a:off x="731520" y="2788920"/>
+            <a:ext cx="42428160" cy="365760"/>
+          </a:xfrm>
+          <a:prstGeom prst="rect">
+            <a:avLst/>
+          </a:prstGeom>
+          <a:noFill/>
+        </p:spPr>
+        <p:txBody>
+          <a:bodyPr wrap="square" lIns="0" rIns="0" tIns="0" bIns="0">
+            <a:spAutoFit/>
+          </a:bodyPr>
+          <a:lstStyle/>
+          <a:p>
+            <a:pPr algn="l">
+              <a:lnSpc>
+                <a:spcPct val="100000"/>
+              </a:lnSpc>
+              <a:spcAft>
+                <a:spcPts val="0"/>
+              </a:spcAft>
+            </a:pPr>
+            <a:r>
+              <a:rPr sz="2000" b="0">
+                <a:solidFill>
+                  <a:srgbClr val="C2CEDA"/>
+                </a:solidFill>
+                <a:latin typeface="Arial"/>
+              </a:rPr>
+              <a:t>¹Department of Engineering Technology   ·   ²School of Agriculture   ·   Middle Tennessee State University, Murfreesboro, TN, USA</a:t>
+            </a:r>
+          </a:p>
+        </p:txBody>
+      </p:sp>
+      <p:sp>
+        <p:nvSpPr>
+          <p:cNvPr id="7" name="TextBox 6"/>
+          <p:cNvSpPr txBox="1"/>
+          <p:nvPr/>
+        </p:nvSpPr>
+        <p:spPr>
+          <a:xfrm>
+            <a:off x="731520" y="4846320"/>
+            <a:ext cx="10607040" cy="365760"/>
+          </a:xfrm>
+          <a:prstGeom prst="rect">
+            <a:avLst/>
+          </a:prstGeom>
+          <a:noFill/>
+        </p:spPr>
+        <p:txBody>
+          <a:bodyPr wrap="square" lIns="0" rIns="0" tIns="0" bIns="0">
+            <a:spAutoFit/>
+          </a:bodyPr>
+          <a:lstStyle/>
+          <a:p>
+            <a:pPr algn="l">
+              <a:lnSpc>
+                <a:spcPct val="95000"/>
+              </a:lnSpc>
+              <a:spcAft>
+                <a:spcPts val="0"/>
+              </a:spcAft>
+            </a:pPr>
+            <a:r>
+              <a:rPr sz="2800" b="1">
+                <a:solidFill>
+                  <a:srgbClr val="14314E"/>
+                </a:solidFill>
+                <a:latin typeface="Arial"/>
+              </a:rPr>
+              <a:t>INTRODUCTION</a:t>
+            </a:r>
+          </a:p>
+        </p:txBody>
+      </p:sp>
+      <p:sp>
+        <p:nvSpPr>
           <p:cNvPr id="8" name="Rectangle 7"/>
           <p:cNvSpPr/>
           <p:nvPr/>
         </p:nvSpPr>
         <p:spPr>
           <a:xfrm>
-            <a:off x="822960" y="3977639"/>
-            <a:ext cx="82296" cy="2240280"/>
+            <a:off x="731520" y="5321808"/>
+            <a:ext cx="10607040" cy="25603"/>
           </a:xfrm>
           <a:prstGeom prst="rect">
             <a:avLst/>
           </a:prstGeom>
           <a:solidFill>
-            <a:srgbClr val="1F6F4A"/>
+            <a:srgbClr val="1C6FB5"/>
           </a:solidFill>
           <a:ln>
             <a:noFill/>
@@ -3433,36 +3433,36 @@
         </p:nvSpPr>
         <p:spPr>
           <a:xfrm>
-            <a:off x="1170432" y="4178807"/>
-            <a:ext cx="9635490" cy="914400"/>
-          </a:xfrm>
-          <a:prstGeom prst="rect">
-            <a:avLst/>
-          </a:prstGeom>
-          <a:noFill/>
-        </p:spPr>
-        <p:txBody>
-          <a:bodyPr wrap="square" anchor="t" lIns="0" rIns="0" tIns="0" bIns="0">
+            <a:off x="731520" y="5577840"/>
+            <a:ext cx="10607040" cy="365760"/>
+          </a:xfrm>
+          <a:prstGeom prst="rect">
+            <a:avLst/>
+          </a:prstGeom>
+          <a:noFill/>
+        </p:spPr>
+        <p:txBody>
+          <a:bodyPr wrap="square" lIns="0" rIns="0" tIns="0" bIns="0">
             <a:spAutoFit/>
           </a:bodyPr>
           <a:lstStyle/>
           <a:p>
             <a:pPr algn="l">
               <a:lnSpc>
-                <a:spcPct val="90000"/>
-              </a:lnSpc>
-              <a:spcAft>
-                <a:spcPts val="600"/>
-              </a:spcAft>
-            </a:pPr>
-            <a:r>
-              <a:rPr sz="6200" b="1">
-                <a:solidFill>
-                  <a:srgbClr val="1F6F4A"/>
-                </a:solidFill>
-                <a:latin typeface="Calibri"/>
-              </a:rPr>
-              <a:t>+0.0714</a:t>
+                <a:spcPct val="122000"/>
+              </a:lnSpc>
+              <a:spcAft>
+                <a:spcPts val="1000"/>
+              </a:spcAft>
+            </a:pPr>
+            <a:r>
+              <a:rPr sz="1350" b="0">
+                <a:solidFill>
+                  <a:srgbClr val="1E293B"/>
+                </a:solidFill>
+                <a:latin typeface="Arial"/>
+              </a:rPr>
+              <a:t>Autonomous data-harvesting pipelines promise compounding gains: collect field images, label them, retrain, repeat. We built one for cotton-field weed detection — a collector agent and a trainer agent running unattended on an HPC allocation, fed by robots driving crop rows — and ran it for fifteen rounds.</a:t>
             </a:r>
           </a:p>
         </p:txBody>
@@ -3475,36 +3475,36 @@
         </p:nvSpPr>
         <p:spPr>
           <a:xfrm>
-            <a:off x="1170432" y="5276088"/>
-            <a:ext cx="9635490" cy="457200"/>
-          </a:xfrm>
-          <a:prstGeom prst="rect">
-            <a:avLst/>
-          </a:prstGeom>
-          <a:noFill/>
-        </p:spPr>
-        <p:txBody>
-          <a:bodyPr wrap="square" anchor="t" lIns="0" rIns="0" tIns="0" bIns="0">
+            <a:off x="731520" y="6332346"/>
+            <a:ext cx="10607040" cy="365760"/>
+          </a:xfrm>
+          <a:prstGeom prst="rect">
+            <a:avLst/>
+          </a:prstGeom>
+          <a:noFill/>
+        </p:spPr>
+        <p:txBody>
+          <a:bodyPr wrap="square" lIns="0" rIns="0" tIns="0" bIns="0">
             <a:spAutoFit/>
           </a:bodyPr>
           <a:lstStyle/>
           <a:p>
             <a:pPr algn="l">
               <a:lnSpc>
-                <a:spcPct val="100000"/>
-              </a:lnSpc>
-              <a:spcAft>
-                <a:spcPts val="600"/>
-              </a:spcAft>
-            </a:pPr>
-            <a:r>
-              <a:rPr sz="1700" b="1">
-                <a:solidFill>
-                  <a:srgbClr val="12243A"/>
-                </a:solidFill>
-                <a:latin typeface="Calibri"/>
-              </a:rPr>
-              <a:t>what COCO pretraining is worth</a:t>
+                <a:spcPct val="122000"/>
+              </a:lnSpc>
+              <a:spcAft>
+                <a:spcPts val="1000"/>
+              </a:spcAft>
+            </a:pPr>
+            <a:r>
+              <a:rPr sz="1350" b="0">
+                <a:solidFill>
+                  <a:srgbClr val="1E293B"/>
+                </a:solidFill>
+                <a:latin typeface="Arial"/>
+              </a:rPr>
+              <a:t>Its dangerous failure mode was not a crash. Every round reported success, every dashboard read green, and the holdout accuracy fell the entire time. This poster reports what we measured when we stopped trusting the pipeline and audited it: which levers actually move a weed detector, and which kind of supervision actually catches it failing.</a:t>
             </a:r>
           </a:p>
         </p:txBody>
@@ -3517,36 +3517,36 @@
         </p:nvSpPr>
         <p:spPr>
           <a:xfrm>
-            <a:off x="1170432" y="5733288"/>
-            <a:ext cx="9635490" cy="365760"/>
-          </a:xfrm>
-          <a:prstGeom prst="rect">
-            <a:avLst/>
-          </a:prstGeom>
-          <a:noFill/>
-        </p:spPr>
-        <p:txBody>
-          <a:bodyPr wrap="square" anchor="t" lIns="0" rIns="0" tIns="0" bIns="0">
+            <a:off x="731520" y="7178293"/>
+            <a:ext cx="10607040" cy="365760"/>
+          </a:xfrm>
+          <a:prstGeom prst="rect">
+            <a:avLst/>
+          </a:prstGeom>
+          <a:noFill/>
+        </p:spPr>
+        <p:txBody>
+          <a:bodyPr wrap="square" lIns="0" rIns="0" tIns="0" bIns="0">
             <a:spAutoFit/>
           </a:bodyPr>
           <a:lstStyle/>
           <a:p>
             <a:pPr algn="l">
               <a:lnSpc>
-                <a:spcPct val="100000"/>
-              </a:lnSpc>
-              <a:spcAft>
-                <a:spcPts val="600"/>
-              </a:spcAft>
-            </a:pPr>
-            <a:r>
-              <a:rPr sz="1350" b="0">
-                <a:solidFill>
-                  <a:srgbClr val="5D6B7A"/>
-                </a:solidFill>
-                <a:latin typeface="Calibri"/>
-              </a:rPr>
-              <a:t>n = 3 seeds each side</a:t>
+                <a:spcPct val="95000"/>
+              </a:lnSpc>
+              <a:spcAft>
+                <a:spcPts val="0"/>
+              </a:spcAft>
+            </a:pPr>
+            <a:r>
+              <a:rPr sz="2800" b="1">
+                <a:solidFill>
+                  <a:srgbClr val="14314E"/>
+                </a:solidFill>
+                <a:latin typeface="Arial"/>
+              </a:rPr>
+              <a:t>PLATFORM</a:t>
             </a:r>
           </a:p>
         </p:txBody>
@@ -3559,14 +3559,14 @@
         </p:nvSpPr>
         <p:spPr>
           <a:xfrm>
-            <a:off x="11510010" y="3977639"/>
-            <a:ext cx="10184130" cy="2240280"/>
+            <a:off x="731520" y="7653781"/>
+            <a:ext cx="10607040" cy="25603"/>
           </a:xfrm>
           <a:prstGeom prst="rect">
             <a:avLst/>
           </a:prstGeom>
           <a:solidFill>
-            <a:srgbClr val="EEF3F8"/>
+            <a:srgbClr val="1C6FB5"/>
           </a:solidFill>
           <a:ln>
             <a:noFill/>
@@ -3597,20 +3597,278 @@
       </p:sp>
       <p:sp>
         <p:nvSpPr>
-          <p:cNvPr id="13" name="Rectangle 12"/>
+          <p:cNvPr id="13" name="TextBox 12"/>
+          <p:cNvSpPr txBox="1"/>
+          <p:nvPr/>
+        </p:nvSpPr>
+        <p:spPr>
+          <a:xfrm>
+            <a:off x="731520" y="7909814"/>
+            <a:ext cx="10607040" cy="365760"/>
+          </a:xfrm>
+          <a:prstGeom prst="rect">
+            <a:avLst/>
+          </a:prstGeom>
+          <a:noFill/>
+        </p:spPr>
+        <p:txBody>
+          <a:bodyPr wrap="square" lIns="0" rIns="0" tIns="0" bIns="0">
+            <a:spAutoFit/>
+          </a:bodyPr>
+          <a:lstStyle/>
+          <a:p>
+            <a:pPr algn="l">
+              <a:lnSpc>
+                <a:spcPct val="122000"/>
+              </a:lnSpc>
+              <a:spcAft>
+                <a:spcPts val="1000"/>
+              </a:spcAft>
+            </a:pPr>
+            <a:r>
+              <a:rPr sz="1350" b="0">
+                <a:solidFill>
+                  <a:srgbClr val="1E293B"/>
+                </a:solidFill>
+                <a:latin typeface="Arial"/>
+              </a:rPr>
+              <a:t>Two agents run as separate scheduler jobs against one locked dataset registry. A collector searches public sources, downloads and pseudo-labels; a trainer merges, removes duplicates, guards the evaluation set and trains. Field data arrives over a live uplink from two ground robots.</a:t>
+            </a:r>
+          </a:p>
+        </p:txBody>
+      </p:sp>
+      <p:sp>
+        <p:nvSpPr>
+          <p:cNvPr id="14" name="TextBox 13"/>
+          <p:cNvSpPr txBox="1"/>
+          <p:nvPr/>
+        </p:nvSpPr>
+        <p:spPr>
+          <a:xfrm>
+            <a:off x="731520" y="8664321"/>
+            <a:ext cx="10607040" cy="365760"/>
+          </a:xfrm>
+          <a:prstGeom prst="rect">
+            <a:avLst/>
+          </a:prstGeom>
+          <a:noFill/>
+        </p:spPr>
+        <p:txBody>
+          <a:bodyPr wrap="square" lIns="0" rIns="0" tIns="0" bIns="0">
+            <a:spAutoFit/>
+          </a:bodyPr>
+          <a:lstStyle/>
+          <a:p>
+            <a:pPr algn="l">
+              <a:lnSpc>
+                <a:spcPct val="122000"/>
+              </a:lnSpc>
+              <a:spcAft>
+                <a:spcPts val="1000"/>
+              </a:spcAft>
+            </a:pPr>
+            <a:r>
+              <a:rPr sz="1350" b="0">
+                <a:solidFill>
+                  <a:srgbClr val="1E293B"/>
+                </a:solidFill>
+                <a:latin typeface="Arial"/>
+              </a:rPr>
+              <a:t>Counted on disk rather than claimed: 2,686 camera frames across 26 sessions from 2 robots, none of them labelled. Robot 241 contributes 2,259 frames at 640 x 360, 2026-08-15 to 2026-09-05, of which 1,704 are genuinely on vegetation or soil, with GPS at 1 Hz and IMU at 15 Hz. The laser cart contributes 427 frames, of which 75 are in a field; it carries laser and vehicle telemetry but no GPS and no IMU.</a:t>
+            </a:r>
+          </a:p>
+        </p:txBody>
+      </p:sp>
+      <p:pic>
+        <p:nvPicPr>
+          <p:cNvPr id="15" name="Picture 14" descr="h_drive.png"/>
+          <p:cNvPicPr>
+            <a:picLocks noChangeAspect="1"/>
+          </p:cNvPicPr>
+          <p:nvPr/>
+        </p:nvPicPr>
+        <p:blipFill>
+          <a:blip r:embed="rId2"/>
+          <a:stretch>
+            <a:fillRect/>
+          </a:stretch>
+        </p:blipFill>
+        <p:spPr>
+          <a:xfrm>
+            <a:off x="731520" y="9719436"/>
+            <a:ext cx="10607040" cy="4294410"/>
+          </a:xfrm>
+          <a:prstGeom prst="rect">
+            <a:avLst/>
+          </a:prstGeom>
+        </p:spPr>
+      </p:pic>
+      <p:sp>
+        <p:nvSpPr>
+          <p:cNvPr id="16" name="TextBox 15"/>
+          <p:cNvSpPr txBox="1"/>
+          <p:nvPr/>
+        </p:nvSpPr>
+        <p:spPr>
+          <a:xfrm>
+            <a:off x="731520" y="14105286"/>
+            <a:ext cx="10607040" cy="365760"/>
+          </a:xfrm>
+          <a:prstGeom prst="rect">
+            <a:avLst/>
+          </a:prstGeom>
+          <a:noFill/>
+        </p:spPr>
+        <p:txBody>
+          <a:bodyPr wrap="square" lIns="0" rIns="0" tIns="0" bIns="0">
+            <a:spAutoFit/>
+          </a:bodyPr>
+          <a:lstStyle/>
+          <a:p>
+            <a:pPr algn="l">
+              <a:lnSpc>
+                <a:spcPct val="120000"/>
+              </a:lnSpc>
+              <a:spcAft>
+                <a:spcPts val="0"/>
+              </a:spcAft>
+            </a:pPr>
+            <a:r>
+              <a:rPr sz="1200" b="0">
+                <a:solidFill>
+                  <a:srgbClr val="556575"/>
+                </a:solidFill>
+                <a:latin typeface="Arial"/>
+              </a:rPr>
+              <a:t>Figure 1.  Robot 241, 2026-08-29: one 213 s pass through a crop plot. (h) GPS track from the board fix. (i) IMU heading over the same pass.</a:t>
+            </a:r>
+          </a:p>
+        </p:txBody>
+      </p:sp>
+      <p:pic>
+        <p:nvPicPr>
+          <p:cNvPr id="17" name="Picture 16" descr="k_funnel.png"/>
+          <p:cNvPicPr>
+            <a:picLocks noChangeAspect="1"/>
+          </p:cNvPicPr>
+          <p:nvPr/>
+        </p:nvPicPr>
+        <p:blipFill>
+          <a:blip r:embed="rId3"/>
+          <a:stretch>
+            <a:fillRect/>
+          </a:stretch>
+        </p:blipFill>
+        <p:spPr>
+          <a:xfrm>
+            <a:off x="731520" y="14562486"/>
+            <a:ext cx="10607040" cy="4525878"/>
+          </a:xfrm>
+          <a:prstGeom prst="rect">
+            <a:avLst/>
+          </a:prstGeom>
+        </p:spPr>
+      </p:pic>
+      <p:sp>
+        <p:nvSpPr>
+          <p:cNvPr id="18" name="TextBox 17"/>
+          <p:cNvSpPr txBox="1"/>
+          <p:nvPr/>
+        </p:nvSpPr>
+        <p:spPr>
+          <a:xfrm>
+            <a:off x="731520" y="19179804"/>
+            <a:ext cx="10607040" cy="365760"/>
+          </a:xfrm>
+          <a:prstGeom prst="rect">
+            <a:avLst/>
+          </a:prstGeom>
+          <a:noFill/>
+        </p:spPr>
+        <p:txBody>
+          <a:bodyPr wrap="square" lIns="0" rIns="0" tIns="0" bIns="0">
+            <a:spAutoFit/>
+          </a:bodyPr>
+          <a:lstStyle/>
+          <a:p>
+            <a:pPr algn="l">
+              <a:lnSpc>
+                <a:spcPct val="120000"/>
+              </a:lnSpc>
+              <a:spcAft>
+                <a:spcPts val="0"/>
+              </a:spcAft>
+            </a:pPr>
+            <a:r>
+              <a:rPr sz="1200" b="0">
+                <a:solidFill>
+                  <a:srgbClr val="556575"/>
+                </a:solidFill>
+                <a:latin typeface="Arial"/>
+              </a:rPr>
+              <a:t>Figure 2.  One of six audited harvested sources clears the label-precision bar. The audit probe reads 1.000 on human-labelled cwd12, so the low scores are the data.</a:t>
+            </a:r>
+          </a:p>
+        </p:txBody>
+      </p:sp>
+      <p:sp>
+        <p:nvSpPr>
+          <p:cNvPr id="19" name="TextBox 18"/>
+          <p:cNvSpPr txBox="1"/>
+          <p:nvPr/>
+        </p:nvSpPr>
+        <p:spPr>
+          <a:xfrm>
+            <a:off x="731520" y="19865604"/>
+            <a:ext cx="10607040" cy="365760"/>
+          </a:xfrm>
+          <a:prstGeom prst="rect">
+            <a:avLst/>
+          </a:prstGeom>
+          <a:noFill/>
+        </p:spPr>
+        <p:txBody>
+          <a:bodyPr wrap="square" lIns="0" rIns="0" tIns="0" bIns="0">
+            <a:spAutoFit/>
+          </a:bodyPr>
+          <a:lstStyle/>
+          <a:p>
+            <a:pPr algn="l">
+              <a:lnSpc>
+                <a:spcPct val="95000"/>
+              </a:lnSpc>
+              <a:spcAft>
+                <a:spcPts val="0"/>
+              </a:spcAft>
+            </a:pPr>
+            <a:r>
+              <a:rPr sz="2800" b="1">
+                <a:solidFill>
+                  <a:srgbClr val="14314E"/>
+                </a:solidFill>
+                <a:latin typeface="Arial"/>
+              </a:rPr>
+              <a:t>PROTOCOL</a:t>
+            </a:r>
+          </a:p>
+        </p:txBody>
+      </p:sp>
+      <p:sp>
+        <p:nvSpPr>
+          <p:cNvPr id="20" name="Rectangle 19"/>
           <p:cNvSpPr/>
           <p:nvPr/>
         </p:nvSpPr>
         <p:spPr>
           <a:xfrm>
-            <a:off x="11510010" y="3977639"/>
-            <a:ext cx="82296" cy="2240280"/>
+            <a:off x="731520" y="20341092"/>
+            <a:ext cx="10607040" cy="25603"/>
           </a:xfrm>
           <a:prstGeom prst="rect">
             <a:avLst/>
           </a:prstGeom>
           <a:solidFill>
-            <a:srgbClr val="B4511F"/>
+            <a:srgbClr val="1C6FB5"/>
           </a:solidFill>
           <a:ln>
             <a:noFill/>
@@ -3641,146 +3899,146 @@
       </p:sp>
       <p:sp>
         <p:nvSpPr>
-          <p:cNvPr id="14" name="TextBox 13"/>
-          <p:cNvSpPr txBox="1"/>
-          <p:nvPr/>
-        </p:nvSpPr>
-        <p:spPr>
-          <a:xfrm>
-            <a:off x="11857482" y="4178807"/>
-            <a:ext cx="9635490" cy="914400"/>
-          </a:xfrm>
-          <a:prstGeom prst="rect">
-            <a:avLst/>
-          </a:prstGeom>
-          <a:noFill/>
-        </p:spPr>
-        <p:txBody>
-          <a:bodyPr wrap="square" anchor="t" lIns="0" rIns="0" tIns="0" bIns="0">
+          <p:cNvPr id="21" name="TextBox 20"/>
+          <p:cNvSpPr txBox="1"/>
+          <p:nvPr/>
+        </p:nvSpPr>
+        <p:spPr>
+          <a:xfrm>
+            <a:off x="731520" y="20597124"/>
+            <a:ext cx="10607040" cy="365760"/>
+          </a:xfrm>
+          <a:prstGeom prst="rect">
+            <a:avLst/>
+          </a:prstGeom>
+          <a:noFill/>
+        </p:spPr>
+        <p:txBody>
+          <a:bodyPr wrap="square" lIns="0" rIns="0" tIns="0" bIns="0">
             <a:spAutoFit/>
           </a:bodyPr>
           <a:lstStyle/>
           <a:p>
             <a:pPr algn="l">
               <a:lnSpc>
-                <a:spcPct val="90000"/>
-              </a:lnSpc>
-              <a:spcAft>
-                <a:spcPts val="600"/>
-              </a:spcAft>
-            </a:pPr>
-            <a:r>
-              <a:rPr sz="6200" b="1">
-                <a:solidFill>
-                  <a:srgbClr val="B4511F"/>
-                </a:solidFill>
-                <a:latin typeface="Calibri"/>
-              </a:rPr>
-              <a:t>0.100</a:t>
-            </a:r>
-          </a:p>
-        </p:txBody>
-      </p:sp>
-      <p:sp>
-        <p:nvSpPr>
-          <p:cNvPr id="15" name="TextBox 14"/>
-          <p:cNvSpPr txBox="1"/>
-          <p:nvPr/>
-        </p:nvSpPr>
-        <p:spPr>
-          <a:xfrm>
-            <a:off x="11857482" y="5276088"/>
-            <a:ext cx="9635490" cy="457200"/>
-          </a:xfrm>
-          <a:prstGeom prst="rect">
-            <a:avLst/>
-          </a:prstGeom>
-          <a:noFill/>
-        </p:spPr>
-        <p:txBody>
-          <a:bodyPr wrap="square" anchor="t" lIns="0" rIns="0" tIns="0" bIns="0">
+                <a:spcPct val="122000"/>
+              </a:lnSpc>
+              <a:spcAft>
+                <a:spcPts val="1000"/>
+              </a:spcAft>
+            </a:pPr>
+            <a:r>
+              <a:rPr sz="1350" b="0">
+                <a:solidFill>
+                  <a:srgbClr val="1E293B"/>
+                </a:solidFill>
+                <a:latin typeface="Arial"/>
+              </a:rPr>
+              <a:t>Every in-domain number is mAP₅₀₋₉₅ on the same 1,977 images and 3,257 instances of CottonWeedDet12, under one evaluator. That set is also the validation set during training, so each figure is a maximum over 21–100 evaluations on the set it is reported on. We measured the size of that optimism rather than hiding it — +0.002 to +0.017 depending on recipe — and every conclusion below survives re-reading at last-epoch and at mean-of-last-five.</a:t>
+            </a:r>
+          </a:p>
+        </p:txBody>
+      </p:sp>
+      <p:sp>
+        <p:nvSpPr>
+          <p:cNvPr id="22" name="TextBox 21"/>
+          <p:cNvSpPr txBox="1"/>
+          <p:nvPr/>
+        </p:nvSpPr>
+        <p:spPr>
+          <a:xfrm>
+            <a:off x="731520" y="21560800"/>
+            <a:ext cx="10607040" cy="365760"/>
+          </a:xfrm>
+          <a:prstGeom prst="rect">
+            <a:avLst/>
+          </a:prstGeom>
+          <a:noFill/>
+        </p:spPr>
+        <p:txBody>
+          <a:bodyPr wrap="square" lIns="0" rIns="0" tIns="0" bIns="0">
             <a:spAutoFit/>
           </a:bodyPr>
           <a:lstStyle/>
           <a:p>
             <a:pPr algn="l">
               <a:lnSpc>
-                <a:spcPct val="100000"/>
-              </a:lnSpc>
-              <a:spcAft>
-                <a:spcPts val="600"/>
-              </a:spcAft>
-            </a:pPr>
-            <a:r>
-              <a:rPr sz="1700" b="1">
-                <a:solidFill>
-                  <a:srgbClr val="12243A"/>
-                </a:solidFill>
-                <a:latin typeface="Calibri"/>
-              </a:rPr>
-              <a:t>same detector on another weed dataset</a:t>
-            </a:r>
-          </a:p>
-        </p:txBody>
-      </p:sp>
-      <p:sp>
-        <p:nvSpPr>
-          <p:cNvPr id="16" name="TextBox 15"/>
-          <p:cNvSpPr txBox="1"/>
-          <p:nvPr/>
-        </p:nvSpPr>
-        <p:spPr>
-          <a:xfrm>
-            <a:off x="11857482" y="5733288"/>
-            <a:ext cx="9635490" cy="365760"/>
-          </a:xfrm>
-          <a:prstGeom prst="rect">
-            <a:avLst/>
-          </a:prstGeom>
-          <a:noFill/>
-        </p:spPr>
-        <p:txBody>
-          <a:bodyPr wrap="square" anchor="t" lIns="0" rIns="0" tIns="0" bIns="0">
+                <a:spcPct val="122000"/>
+              </a:lnSpc>
+              <a:spcAft>
+                <a:spcPts val="1000"/>
+              </a:spcAft>
+            </a:pPr>
+            <a:r>
+              <a:rPr sz="1250" b="0">
+                <a:solidFill>
+                  <a:srgbClr val="556575"/>
+                </a:solidFill>
+                <a:latin typeface="Arial"/>
+              </a:rPr>
+              <a:t>Three evaluators exist in this project and they do not share a scale: the same checkpoint reads 0.8794 under one and 0.8554 under another. Every number here is stated with the evaluator that produced it, and numbers from different evaluators are never compared.</a:t>
+            </a:r>
+          </a:p>
+        </p:txBody>
+      </p:sp>
+      <p:sp>
+        <p:nvSpPr>
+          <p:cNvPr id="23" name="TextBox 22"/>
+          <p:cNvSpPr txBox="1"/>
+          <p:nvPr/>
+        </p:nvSpPr>
+        <p:spPr>
+          <a:xfrm>
+            <a:off x="731520" y="22166591"/>
+            <a:ext cx="10607040" cy="365760"/>
+          </a:xfrm>
+          <a:prstGeom prst="rect">
+            <a:avLst/>
+          </a:prstGeom>
+          <a:noFill/>
+        </p:spPr>
+        <p:txBody>
+          <a:bodyPr wrap="square" lIns="0" rIns="0" tIns="0" bIns="0">
             <a:spAutoFit/>
           </a:bodyPr>
           <a:lstStyle/>
           <a:p>
             <a:pPr algn="l">
               <a:lnSpc>
-                <a:spcPct val="100000"/>
-              </a:lnSpc>
-              <a:spcAft>
-                <a:spcPts val="600"/>
-              </a:spcAft>
-            </a:pPr>
-            <a:r>
-              <a:rPr sz="1350" b="0">
-                <a:solidFill>
-                  <a:srgbClr val="5D6B7A"/>
-                </a:solidFill>
-                <a:latin typeface="Calibri"/>
-              </a:rPr>
-              <a:t>from 0.873 in-domain, n = 3</a:t>
-            </a:r>
-          </a:p>
-        </p:txBody>
-      </p:sp>
-      <p:sp>
-        <p:nvSpPr>
-          <p:cNvPr id="17" name="Rectangle 16"/>
+                <a:spcPct val="95000"/>
+              </a:lnSpc>
+              <a:spcAft>
+                <a:spcPts val="0"/>
+              </a:spcAft>
+            </a:pPr>
+            <a:r>
+              <a:rPr sz="2800" b="1">
+                <a:solidFill>
+                  <a:srgbClr val="14314E"/>
+                </a:solidFill>
+                <a:latin typeface="Arial"/>
+              </a:rPr>
+              <a:t>WHAT THE AUDIT RECOVERED</a:t>
+            </a:r>
+          </a:p>
+        </p:txBody>
+      </p:sp>
+      <p:sp>
+        <p:nvSpPr>
+          <p:cNvPr id="24" name="Rectangle 23"/>
           <p:cNvSpPr/>
           <p:nvPr/>
         </p:nvSpPr>
         <p:spPr>
           <a:xfrm>
-            <a:off x="22197060" y="3977639"/>
-            <a:ext cx="10184130" cy="2240280"/>
+            <a:off x="731520" y="22642079"/>
+            <a:ext cx="10607040" cy="25603"/>
           </a:xfrm>
           <a:prstGeom prst="rect">
             <a:avLst/>
           </a:prstGeom>
           <a:solidFill>
-            <a:srgbClr val="EEF3F8"/>
+            <a:srgbClr val="1C6FB5"/>
           </a:solidFill>
           <a:ln>
             <a:noFill/>
@@ -3811,20 +4069,62 @@
       </p:sp>
       <p:sp>
         <p:nvSpPr>
-          <p:cNvPr id="18" name="Rectangle 17"/>
+          <p:cNvPr id="25" name="TextBox 24"/>
+          <p:cNvSpPr txBox="1"/>
+          <p:nvPr/>
+        </p:nvSpPr>
+        <p:spPr>
+          <a:xfrm>
+            <a:off x="731520" y="22898111"/>
+            <a:ext cx="10607040" cy="365760"/>
+          </a:xfrm>
+          <a:prstGeom prst="rect">
+            <a:avLst/>
+          </a:prstGeom>
+          <a:noFill/>
+        </p:spPr>
+        <p:txBody>
+          <a:bodyPr wrap="square" lIns="0" rIns="0" tIns="0" bIns="0">
+            <a:spAutoFit/>
+          </a:bodyPr>
+          <a:lstStyle/>
+          <a:p>
+            <a:pPr algn="l">
+              <a:lnSpc>
+                <a:spcPct val="122000"/>
+              </a:lnSpc>
+              <a:spcAft>
+                <a:spcPts val="1000"/>
+              </a:spcAft>
+            </a:pPr>
+            <a:r>
+              <a:rPr sz="1350" b="0">
+                <a:solidFill>
+                  <a:srgbClr val="1E293B"/>
+                </a:solidFill>
+                <a:latin typeface="Arial"/>
+              </a:rPr>
+              <a:t>Four defects found by reading the pipeline's own artifacts rather than its dashboards. Each was silent: the run reported success while the defect held.</a:t>
+            </a:r>
+          </a:p>
+        </p:txBody>
+      </p:sp>
+      <p:sp>
+        <p:nvSpPr>
+          <p:cNvPr id="26" name="Rectangle 25"/>
           <p:cNvSpPr/>
           <p:nvPr/>
         </p:nvSpPr>
         <p:spPr>
           <a:xfrm>
-            <a:off x="22197060" y="3977639"/>
-            <a:ext cx="82296" cy="2240280"/>
+            <a:off x="731520" y="23443449"/>
+            <a:ext cx="10607040" cy="20116"/>
           </a:xfrm>
           <a:prstGeom prst="rect">
             <a:avLst/>
           </a:prstGeom>
           <a:solidFill>
-            <a:srgbClr val="B4511F"/>
+            <a:srgbClr val="1E293B"/>
           </a:solidFill>
           <a:ln>
             <a:noFill/>
@@ -3855,146 +4155,104 @@
       </p:sp>
       <p:sp>
         <p:nvSpPr>
-          <p:cNvPr id="19" name="TextBox 18"/>
-          <p:cNvSpPr txBox="1"/>
-          <p:nvPr/>
-        </p:nvSpPr>
-        <p:spPr>
-          <a:xfrm>
-            <a:off x="22544532" y="4178807"/>
-            <a:ext cx="9635490" cy="914400"/>
-          </a:xfrm>
-          <a:prstGeom prst="rect">
-            <a:avLst/>
-          </a:prstGeom>
-          <a:noFill/>
-        </p:spPr>
-        <p:txBody>
-          <a:bodyPr wrap="square" anchor="t" lIns="0" rIns="0" tIns="0" bIns="0">
+          <p:cNvPr id="27" name="TextBox 26"/>
+          <p:cNvSpPr txBox="1"/>
+          <p:nvPr/>
+        </p:nvSpPr>
+        <p:spPr>
+          <a:xfrm>
+            <a:off x="731520" y="23534889"/>
+            <a:ext cx="6576364" cy="365760"/>
+          </a:xfrm>
+          <a:prstGeom prst="rect">
+            <a:avLst/>
+          </a:prstGeom>
+          <a:noFill/>
+        </p:spPr>
+        <p:txBody>
+          <a:bodyPr wrap="square" lIns="0" rIns="0" tIns="0" bIns="0">
             <a:spAutoFit/>
           </a:bodyPr>
           <a:lstStyle/>
           <a:p>
             <a:pPr algn="l">
               <a:lnSpc>
-                <a:spcPct val="90000"/>
-              </a:lnSpc>
-              <a:spcAft>
-                <a:spcPts val="600"/>
-              </a:spcAft>
-            </a:pPr>
-            <a:r>
-              <a:rPr sz="6200" b="1">
-                <a:solidFill>
-                  <a:srgbClr val="B4511F"/>
-                </a:solidFill>
-                <a:latin typeface="Calibri"/>
-              </a:rPr>
-              <a:t>0 of 116</a:t>
-            </a:r>
-          </a:p>
-        </p:txBody>
-      </p:sp>
-      <p:sp>
-        <p:nvSpPr>
-          <p:cNvPr id="20" name="TextBox 19"/>
-          <p:cNvSpPr txBox="1"/>
-          <p:nvPr/>
-        </p:nvSpPr>
-        <p:spPr>
-          <a:xfrm>
-            <a:off x="22544532" y="5276088"/>
-            <a:ext cx="9635490" cy="457200"/>
-          </a:xfrm>
-          <a:prstGeom prst="rect">
-            <a:avLst/>
-          </a:prstGeom>
-          <a:noFill/>
-        </p:spPr>
-        <p:txBody>
-          <a:bodyPr wrap="square" anchor="t" lIns="0" rIns="0" tIns="0" bIns="0">
-            <a:spAutoFit/>
-          </a:bodyPr>
-          <a:lstStyle/>
-          <a:p>
-            <a:pPr algn="l">
-              <a:lnSpc>
                 <a:spcPct val="100000"/>
               </a:lnSpc>
               <a:spcAft>
-                <a:spcPts val="600"/>
-              </a:spcAft>
-            </a:pPr>
-            <a:r>
-              <a:rPr sz="1700" b="1">
-                <a:solidFill>
-                  <a:srgbClr val="12243A"/>
-                </a:solidFill>
-                <a:latin typeface="Calibri"/>
-              </a:rPr>
-              <a:t>real incidents the scripted watchdog caught</a:t>
-            </a:r>
-          </a:p>
-        </p:txBody>
-      </p:sp>
-      <p:sp>
-        <p:nvSpPr>
-          <p:cNvPr id="21" name="TextBox 20"/>
-          <p:cNvSpPr txBox="1"/>
-          <p:nvPr/>
-        </p:nvSpPr>
-        <p:spPr>
-          <a:xfrm>
-            <a:off x="22544532" y="5733288"/>
-            <a:ext cx="9635490" cy="365760"/>
-          </a:xfrm>
-          <a:prstGeom prst="rect">
-            <a:avLst/>
-          </a:prstGeom>
-          <a:noFill/>
-        </p:spPr>
-        <p:txBody>
-          <a:bodyPr wrap="square" anchor="t" lIns="0" rIns="0" tIns="0" bIns="0">
-            <a:spAutoFit/>
-          </a:bodyPr>
-          <a:lstStyle/>
-          <a:p>
-            <a:pPr algn="l">
+                <a:spcPts val="0"/>
+              </a:spcAft>
+            </a:pPr>
+            <a:r>
+              <a:rPr sz="1250" b="1">
+                <a:solidFill>
+                  <a:srgbClr val="1E293B"/>
+                </a:solidFill>
+                <a:latin typeface="Arial"/>
+              </a:rPr>
+              <a:t>defect</a:t>
+            </a:r>
+          </a:p>
+        </p:txBody>
+      </p:sp>
+      <p:sp>
+        <p:nvSpPr>
+          <p:cNvPr id="28" name="TextBox 27"/>
+          <p:cNvSpPr txBox="1"/>
+          <p:nvPr/>
+        </p:nvSpPr>
+        <p:spPr>
+          <a:xfrm>
+            <a:off x="7307884" y="23534889"/>
+            <a:ext cx="4030675" cy="365760"/>
+          </a:xfrm>
+          <a:prstGeom prst="rect">
+            <a:avLst/>
+          </a:prstGeom>
+          <a:noFill/>
+        </p:spPr>
+        <p:txBody>
+          <a:bodyPr wrap="square" lIns="0" rIns="0" tIns="0" bIns="0">
+            <a:spAutoFit/>
+          </a:bodyPr>
+          <a:lstStyle/>
+          <a:p>
+            <a:pPr algn="r">
               <a:lnSpc>
                 <a:spcPct val="100000"/>
               </a:lnSpc>
               <a:spcAft>
-                <a:spcPts val="600"/>
-              </a:spcAft>
-            </a:pPr>
-            <a:r>
-              <a:rPr sz="1350" b="0">
-                <a:solidFill>
-                  <a:srgbClr val="5D6B7A"/>
-                </a:solidFill>
-                <a:latin typeface="Calibri"/>
-              </a:rPr>
-              <a:t>149 cases, it flagged none</a:t>
-            </a:r>
-          </a:p>
-        </p:txBody>
-      </p:sp>
-      <p:sp>
-        <p:nvSpPr>
-          <p:cNvPr id="22" name="Rectangle 21"/>
+                <a:spcPts val="0"/>
+              </a:spcAft>
+            </a:pPr>
+            <a:r>
+              <a:rPr sz="1250" b="1">
+                <a:solidFill>
+                  <a:srgbClr val="1E293B"/>
+                </a:solidFill>
+                <a:latin typeface="Arial"/>
+              </a:rPr>
+              <a:t>recovered</a:t>
+            </a:r>
+          </a:p>
+        </p:txBody>
+      </p:sp>
+      <p:sp>
+        <p:nvSpPr>
+          <p:cNvPr id="29" name="Rectangle 28"/>
           <p:cNvSpPr/>
           <p:nvPr/>
         </p:nvSpPr>
         <p:spPr>
           <a:xfrm>
-            <a:off x="32884110" y="3977639"/>
-            <a:ext cx="10184130" cy="2240280"/>
+            <a:off x="731520" y="23809209"/>
+            <a:ext cx="10607040" cy="12801"/>
           </a:xfrm>
           <a:prstGeom prst="rect">
             <a:avLst/>
           </a:prstGeom>
           <a:solidFill>
-            <a:srgbClr val="EEF3F8"/>
+            <a:srgbClr val="C2CEDA"/>
           </a:solidFill>
           <a:ln>
             <a:noFill/>
@@ -4025,20 +4283,356 @@
       </p:sp>
       <p:sp>
         <p:nvSpPr>
-          <p:cNvPr id="23" name="Rectangle 22"/>
+          <p:cNvPr id="30" name="TextBox 29"/>
+          <p:cNvSpPr txBox="1"/>
+          <p:nvPr/>
+        </p:nvSpPr>
+        <p:spPr>
+          <a:xfrm>
+            <a:off x="731520" y="23891505"/>
+            <a:ext cx="6576364" cy="365760"/>
+          </a:xfrm>
+          <a:prstGeom prst="rect">
+            <a:avLst/>
+          </a:prstGeom>
+          <a:noFill/>
+        </p:spPr>
+        <p:txBody>
+          <a:bodyPr wrap="square" lIns="0" rIns="0" tIns="0" bIns="0">
+            <a:spAutoFit/>
+          </a:bodyPr>
+          <a:lstStyle/>
+          <a:p>
+            <a:pPr algn="l">
+              <a:lnSpc>
+                <a:spcPct val="100000"/>
+              </a:lnSpc>
+              <a:spcAft>
+                <a:spcPts val="0"/>
+              </a:spcAft>
+            </a:pPr>
+            <a:r>
+              <a:rPr sz="1300" b="0">
+                <a:solidFill>
+                  <a:srgbClr val="1E293B"/>
+                </a:solidFill>
+                <a:latin typeface="Arial"/>
+              </a:rPr>
+              <a:t>Warm-start chain across rounds</a:t>
+            </a:r>
+          </a:p>
+        </p:txBody>
+      </p:sp>
+      <p:sp>
+        <p:nvSpPr>
+          <p:cNvPr id="31" name="TextBox 30"/>
+          <p:cNvSpPr txBox="1"/>
+          <p:nvPr/>
+        </p:nvSpPr>
+        <p:spPr>
+          <a:xfrm>
+            <a:off x="7307884" y="23891505"/>
+            <a:ext cx="4030675" cy="365760"/>
+          </a:xfrm>
+          <a:prstGeom prst="rect">
+            <a:avLst/>
+          </a:prstGeom>
+          <a:noFill/>
+        </p:spPr>
+        <p:txBody>
+          <a:bodyPr wrap="square" lIns="0" rIns="0" tIns="0" bIns="0">
+            <a:spAutoFit/>
+          </a:bodyPr>
+          <a:lstStyle/>
+          <a:p>
+            <a:pPr algn="r">
+              <a:lnSpc>
+                <a:spcPct val="100000"/>
+              </a:lnSpc>
+              <a:spcAft>
+                <a:spcPts val="0"/>
+              </a:spcAft>
+            </a:pPr>
+            <a:r>
+              <a:rPr sz="1300" b="0">
+                <a:solidFill>
+                  <a:srgbClr val="1E293B"/>
+                </a:solidFill>
+                <a:latin typeface="Arial"/>
+              </a:rPr>
+              <a:t>+0.0287 mAP</a:t>
+            </a:r>
+          </a:p>
+        </p:txBody>
+      </p:sp>
+      <p:sp>
+        <p:nvSpPr>
+          <p:cNvPr id="32" name="TextBox 31"/>
+          <p:cNvSpPr txBox="1"/>
+          <p:nvPr/>
+        </p:nvSpPr>
+        <p:spPr>
+          <a:xfrm>
+            <a:off x="731520" y="24202401"/>
+            <a:ext cx="6576364" cy="365760"/>
+          </a:xfrm>
+          <a:prstGeom prst="rect">
+            <a:avLst/>
+          </a:prstGeom>
+          <a:noFill/>
+        </p:spPr>
+        <p:txBody>
+          <a:bodyPr wrap="square" lIns="0" rIns="0" tIns="0" bIns="0">
+            <a:spAutoFit/>
+          </a:bodyPr>
+          <a:lstStyle/>
+          <a:p>
+            <a:pPr algn="l">
+              <a:lnSpc>
+                <a:spcPct val="100000"/>
+              </a:lnSpc>
+              <a:spcAft>
+                <a:spcPts val="0"/>
+              </a:spcAft>
+            </a:pPr>
+            <a:r>
+              <a:rPr sz="1300" b="0">
+                <a:solidFill>
+                  <a:srgbClr val="1E293B"/>
+                </a:solidFill>
+                <a:latin typeface="Arial"/>
+              </a:rPr>
+              <a:t>GPS logged from a frozen receiver</a:t>
+            </a:r>
+          </a:p>
+        </p:txBody>
+      </p:sp>
+      <p:sp>
+        <p:nvSpPr>
+          <p:cNvPr id="33" name="TextBox 32"/>
+          <p:cNvSpPr txBox="1"/>
+          <p:nvPr/>
+        </p:nvSpPr>
+        <p:spPr>
+          <a:xfrm>
+            <a:off x="7307884" y="24202401"/>
+            <a:ext cx="4030675" cy="365760"/>
+          </a:xfrm>
+          <a:prstGeom prst="rect">
+            <a:avLst/>
+          </a:prstGeom>
+          <a:noFill/>
+        </p:spPr>
+        <p:txBody>
+          <a:bodyPr wrap="square" lIns="0" rIns="0" tIns="0" bIns="0">
+            <a:spAutoFit/>
+          </a:bodyPr>
+          <a:lstStyle/>
+          <a:p>
+            <a:pPr algn="r">
+              <a:lnSpc>
+                <a:spcPct val="100000"/>
+              </a:lnSpc>
+              <a:spcAft>
+                <a:spcPts val="0"/>
+              </a:spcAft>
+            </a:pPr>
+            <a:r>
+              <a:rPr sz="1300" b="0">
+                <a:solidFill>
+                  <a:srgbClr val="1E293B"/>
+                </a:solidFill>
+                <a:latin typeface="Arial"/>
+              </a:rPr>
+              <a:t>200.9 m of track</a:t>
+            </a:r>
+          </a:p>
+        </p:txBody>
+      </p:sp>
+      <p:sp>
+        <p:nvSpPr>
+          <p:cNvPr id="34" name="TextBox 33"/>
+          <p:cNvSpPr txBox="1"/>
+          <p:nvPr/>
+        </p:nvSpPr>
+        <p:spPr>
+          <a:xfrm>
+            <a:off x="731520" y="24513297"/>
+            <a:ext cx="6576364" cy="365760"/>
+          </a:xfrm>
+          <a:prstGeom prst="rect">
+            <a:avLst/>
+          </a:prstGeom>
+          <a:noFill/>
+        </p:spPr>
+        <p:txBody>
+          <a:bodyPr wrap="square" lIns="0" rIns="0" tIns="0" bIns="0">
+            <a:spAutoFit/>
+          </a:bodyPr>
+          <a:lstStyle/>
+          <a:p>
+            <a:pPr algn="l">
+              <a:lnSpc>
+                <a:spcPct val="100000"/>
+              </a:lnSpc>
+              <a:spcAft>
+                <a:spcPts val="0"/>
+              </a:spcAft>
+            </a:pPr>
+            <a:r>
+              <a:rPr sz="1300" b="0">
+                <a:solidFill>
+                  <a:srgbClr val="1E293B"/>
+                </a:solidFill>
+                <a:latin typeface="Arial"/>
+              </a:rPr>
+              <a:t>Harvest decisions never logged</a:t>
+            </a:r>
+          </a:p>
+        </p:txBody>
+      </p:sp>
+      <p:sp>
+        <p:nvSpPr>
+          <p:cNvPr id="35" name="TextBox 34"/>
+          <p:cNvSpPr txBox="1"/>
+          <p:nvPr/>
+        </p:nvSpPr>
+        <p:spPr>
+          <a:xfrm>
+            <a:off x="7307884" y="24513297"/>
+            <a:ext cx="4030675" cy="365760"/>
+          </a:xfrm>
+          <a:prstGeom prst="rect">
+            <a:avLst/>
+          </a:prstGeom>
+          <a:noFill/>
+        </p:spPr>
+        <p:txBody>
+          <a:bodyPr wrap="square" lIns="0" rIns="0" tIns="0" bIns="0">
+            <a:spAutoFit/>
+          </a:bodyPr>
+          <a:lstStyle/>
+          <a:p>
+            <a:pPr algn="r">
+              <a:lnSpc>
+                <a:spcPct val="100000"/>
+              </a:lnSpc>
+              <a:spcAft>
+                <a:spcPts val="0"/>
+              </a:spcAft>
+            </a:pPr>
+            <a:r>
+              <a:rPr sz="1300" b="0">
+                <a:solidFill>
+                  <a:srgbClr val="1E293B"/>
+                </a:solidFill>
+                <a:latin typeface="Arial"/>
+              </a:rPr>
+              <a:t>8 empty rounds seen</a:t>
+            </a:r>
+          </a:p>
+        </p:txBody>
+      </p:sp>
+      <p:sp>
+        <p:nvSpPr>
+          <p:cNvPr id="36" name="TextBox 35"/>
+          <p:cNvSpPr txBox="1"/>
+          <p:nvPr/>
+        </p:nvSpPr>
+        <p:spPr>
+          <a:xfrm>
+            <a:off x="731520" y="24824193"/>
+            <a:ext cx="6576364" cy="365760"/>
+          </a:xfrm>
+          <a:prstGeom prst="rect">
+            <a:avLst/>
+          </a:prstGeom>
+          <a:noFill/>
+        </p:spPr>
+        <p:txBody>
+          <a:bodyPr wrap="square" lIns="0" rIns="0" tIns="0" bIns="0">
+            <a:spAutoFit/>
+          </a:bodyPr>
+          <a:lstStyle/>
+          <a:p>
+            <a:pPr algn="l">
+              <a:lnSpc>
+                <a:spcPct val="100000"/>
+              </a:lnSpc>
+              <a:spcAft>
+                <a:spcPts val="0"/>
+              </a:spcAft>
+            </a:pPr>
+            <a:r>
+              <a:rPr sz="1300" b="0">
+                <a:solidFill>
+                  <a:srgbClr val="1E293B"/>
+                </a:solidFill>
+                <a:latin typeface="Arial"/>
+              </a:rPr>
+              <a:t>Staging directory never cleared</a:t>
+            </a:r>
+          </a:p>
+        </p:txBody>
+      </p:sp>
+      <p:sp>
+        <p:nvSpPr>
+          <p:cNvPr id="37" name="TextBox 36"/>
+          <p:cNvSpPr txBox="1"/>
+          <p:nvPr/>
+        </p:nvSpPr>
+        <p:spPr>
+          <a:xfrm>
+            <a:off x="7307884" y="24824193"/>
+            <a:ext cx="4030675" cy="365760"/>
+          </a:xfrm>
+          <a:prstGeom prst="rect">
+            <a:avLst/>
+          </a:prstGeom>
+          <a:noFill/>
+        </p:spPr>
+        <p:txBody>
+          <a:bodyPr wrap="square" lIns="0" rIns="0" tIns="0" bIns="0">
+            <a:spAutoFit/>
+          </a:bodyPr>
+          <a:lstStyle/>
+          <a:p>
+            <a:pPr algn="r">
+              <a:lnSpc>
+                <a:spcPct val="100000"/>
+              </a:lnSpc>
+              <a:spcAft>
+                <a:spcPts val="0"/>
+              </a:spcAft>
+            </a:pPr>
+            <a:r>
+              <a:rPr sz="1300" b="0">
+                <a:solidFill>
+                  <a:srgbClr val="1E293B"/>
+                </a:solidFill>
+                <a:latin typeface="Arial"/>
+              </a:rPr>
+              <a:t>20,258 stale files</a:t>
+            </a:r>
+          </a:p>
+        </p:txBody>
+      </p:sp>
+      <p:sp>
+        <p:nvSpPr>
+          <p:cNvPr id="38" name="Rectangle 37"/>
           <p:cNvSpPr/>
           <p:nvPr/>
         </p:nvSpPr>
         <p:spPr>
           <a:xfrm>
-            <a:off x="32884110" y="3977639"/>
-            <a:ext cx="82296" cy="2240280"/>
+            <a:off x="731520" y="25153377"/>
+            <a:ext cx="10607040" cy="20116"/>
           </a:xfrm>
           <a:prstGeom prst="rect">
             <a:avLst/>
           </a:prstGeom>
           <a:solidFill>
-            <a:srgbClr val="12243A"/>
+            <a:srgbClr val="1E293B"/>
           </a:solidFill>
           <a:ln>
             <a:noFill/>
@@ -4069,188 +4663,62 @@
       </p:sp>
       <p:sp>
         <p:nvSpPr>
-          <p:cNvPr id="24" name="TextBox 23"/>
-          <p:cNvSpPr txBox="1"/>
-          <p:nvPr/>
-        </p:nvSpPr>
-        <p:spPr>
-          <a:xfrm>
-            <a:off x="33231582" y="4178807"/>
-            <a:ext cx="9635490" cy="914400"/>
-          </a:xfrm>
-          <a:prstGeom prst="rect">
-            <a:avLst/>
-          </a:prstGeom>
-          <a:noFill/>
-        </p:spPr>
-        <p:txBody>
-          <a:bodyPr wrap="square" anchor="t" lIns="0" rIns="0" tIns="0" bIns="0">
+          <p:cNvPr id="39" name="TextBox 38"/>
+          <p:cNvSpPr txBox="1"/>
+          <p:nvPr/>
+        </p:nvSpPr>
+        <p:spPr>
+          <a:xfrm>
+            <a:off x="11704320" y="4846320"/>
+            <a:ext cx="20482560" cy="365760"/>
+          </a:xfrm>
+          <a:prstGeom prst="rect">
+            <a:avLst/>
+          </a:prstGeom>
+          <a:noFill/>
+        </p:spPr>
+        <p:txBody>
+          <a:bodyPr wrap="square" lIns="0" rIns="0" tIns="0" bIns="0">
             <a:spAutoFit/>
           </a:bodyPr>
           <a:lstStyle/>
           <a:p>
             <a:pPr algn="l">
               <a:lnSpc>
-                <a:spcPct val="90000"/>
-              </a:lnSpc>
-              <a:spcAft>
-                <a:spcPts val="600"/>
-              </a:spcAft>
-            </a:pPr>
-            <a:r>
-              <a:rPr sz="6200" b="1">
-                <a:solidFill>
-                  <a:srgbClr val="12243A"/>
-                </a:solidFill>
-                <a:latin typeface="Calibri"/>
-              </a:rPr>
-              <a:t>48,752</a:t>
-            </a:r>
-          </a:p>
-        </p:txBody>
-      </p:sp>
-      <p:sp>
-        <p:nvSpPr>
-          <p:cNvPr id="25" name="TextBox 24"/>
-          <p:cNvSpPr txBox="1"/>
-          <p:nvPr/>
-        </p:nvSpPr>
-        <p:spPr>
-          <a:xfrm>
-            <a:off x="33231582" y="5276088"/>
-            <a:ext cx="9635490" cy="457200"/>
-          </a:xfrm>
-          <a:prstGeom prst="rect">
-            <a:avLst/>
-          </a:prstGeom>
-          <a:noFill/>
-        </p:spPr>
-        <p:txBody>
-          <a:bodyPr wrap="square" anchor="t" lIns="0" rIns="0" tIns="0" bIns="0">
-            <a:spAutoFit/>
-          </a:bodyPr>
-          <a:lstStyle/>
-          <a:p>
-            <a:pPr algn="l">
-              <a:lnSpc>
-                <a:spcPct val="100000"/>
-              </a:lnSpc>
-              <a:spcAft>
-                <a:spcPts val="600"/>
-              </a:spcAft>
-            </a:pPr>
-            <a:r>
-              <a:rPr sz="1700" b="1">
-                <a:solidFill>
-                  <a:srgbClr val="12243A"/>
-                </a:solidFill>
-                <a:latin typeface="Calibri"/>
-              </a:rPr>
-              <a:t>images, unchanged for 13 of 15 rounds</a:t>
-            </a:r>
-          </a:p>
-        </p:txBody>
-      </p:sp>
-      <p:sp>
-        <p:nvSpPr>
-          <p:cNvPr id="26" name="TextBox 25"/>
-          <p:cNvSpPr txBox="1"/>
-          <p:nvPr/>
-        </p:nvSpPr>
-        <p:spPr>
-          <a:xfrm>
-            <a:off x="33231582" y="5733288"/>
-            <a:ext cx="9635490" cy="365760"/>
-          </a:xfrm>
-          <a:prstGeom prst="rect">
-            <a:avLst/>
-          </a:prstGeom>
-          <a:noFill/>
-        </p:spPr>
-        <p:txBody>
-          <a:bodyPr wrap="square" anchor="t" lIns="0" rIns="0" tIns="0" bIns="0">
-            <a:spAutoFit/>
-          </a:bodyPr>
-          <a:lstStyle/>
-          <a:p>
-            <a:pPr algn="l">
-              <a:lnSpc>
-                <a:spcPct val="100000"/>
-              </a:lnSpc>
-              <a:spcAft>
-                <a:spcPts val="600"/>
-              </a:spcAft>
-            </a:pPr>
-            <a:r>
-              <a:rPr sz="1350" b="0">
-                <a:solidFill>
-                  <a:srgbClr val="5D6B7A"/>
-                </a:solidFill>
-                <a:latin typeface="Calibri"/>
-              </a:rPr>
-              <a:t>while the loop reported progress</a:t>
-            </a:r>
-          </a:p>
-        </p:txBody>
-      </p:sp>
-      <p:sp>
-        <p:nvSpPr>
-          <p:cNvPr id="27" name="TextBox 26"/>
-          <p:cNvSpPr txBox="1"/>
-          <p:nvPr/>
-        </p:nvSpPr>
-        <p:spPr>
-          <a:xfrm>
-            <a:off x="822960" y="6903720"/>
-            <a:ext cx="10184130" cy="502920"/>
-          </a:xfrm>
-          <a:prstGeom prst="rect">
-            <a:avLst/>
-          </a:prstGeom>
-          <a:noFill/>
-        </p:spPr>
-        <p:txBody>
-          <a:bodyPr wrap="square" anchor="t" lIns="0" rIns="0" tIns="0" bIns="0">
-            <a:spAutoFit/>
-          </a:bodyPr>
-          <a:lstStyle/>
-          <a:p>
-            <a:pPr algn="l">
-              <a:lnSpc>
-                <a:spcPct val="90000"/>
-              </a:lnSpc>
-              <a:spcAft>
-                <a:spcPts val="600"/>
-              </a:spcAft>
-            </a:pPr>
-            <a:r>
-              <a:rPr sz="2600" b="1">
-                <a:solidFill>
-                  <a:srgbClr val="0A4D8C"/>
-                </a:solidFill>
-                <a:latin typeface="Calibri"/>
-              </a:rPr>
-              <a:t>ABSTRACT</a:t>
-            </a:r>
-          </a:p>
-        </p:txBody>
-      </p:sp>
-      <p:sp>
-        <p:nvSpPr>
-          <p:cNvPr id="28" name="Rectangle 27"/>
+                <a:spcPct val="95000"/>
+              </a:lnSpc>
+              <a:spcAft>
+                <a:spcPts val="0"/>
+              </a:spcAft>
+            </a:pPr>
+            <a:r>
+              <a:rPr sz="2800" b="1">
+                <a:solidFill>
+                  <a:srgbClr val="14314E"/>
+                </a:solidFill>
+                <a:latin typeface="Arial"/>
+              </a:rPr>
+              <a:t>RESULTS</a:t>
+            </a:r>
+          </a:p>
+        </p:txBody>
+      </p:sp>
+      <p:sp>
+        <p:nvSpPr>
+          <p:cNvPr id="40" name="Rectangle 39"/>
           <p:cNvSpPr/>
           <p:nvPr/>
         </p:nvSpPr>
         <p:spPr>
           <a:xfrm>
-            <a:off x="822960" y="7452360"/>
-            <a:ext cx="10184130" cy="32004"/>
+            <a:off x="11704320" y="5321808"/>
+            <a:ext cx="20482560" cy="25603"/>
           </a:xfrm>
           <a:prstGeom prst="rect">
             <a:avLst/>
           </a:prstGeom>
           <a:solidFill>
-            <a:srgbClr val="0A4D8C"/>
+            <a:srgbClr val="1C6FB5"/>
           </a:solidFill>
           <a:ln>
             <a:noFill/>
@@ -4281,188 +4749,20 @@
       </p:sp>
       <p:sp>
         <p:nvSpPr>
-          <p:cNvPr id="29" name="TextBox 28"/>
-          <p:cNvSpPr txBox="1"/>
-          <p:nvPr/>
-        </p:nvSpPr>
-        <p:spPr>
-          <a:xfrm>
-            <a:off x="822960" y="7653527"/>
-            <a:ext cx="10184130" cy="365760"/>
-          </a:xfrm>
-          <a:prstGeom prst="rect">
-            <a:avLst/>
-          </a:prstGeom>
-          <a:noFill/>
-        </p:spPr>
-        <p:txBody>
-          <a:bodyPr wrap="square" anchor="t" lIns="0" rIns="0" tIns="0" bIns="0">
-            <a:spAutoFit/>
-          </a:bodyPr>
-          <a:lstStyle/>
-          <a:p>
-            <a:pPr algn="l">
-              <a:lnSpc>
-                <a:spcPct val="106000"/>
-              </a:lnSpc>
-              <a:spcAft>
-                <a:spcPts val="900"/>
-              </a:spcAft>
-            </a:pPr>
-            <a:r>
-              <a:rPr sz="1550" b="0">
-                <a:solidFill>
-                  <a:srgbClr val="12243A"/>
-                </a:solidFill>
-                <a:latin typeface="Calibri"/>
-              </a:rPr>
-              <a:t>Autonomous data-harvesting pipelines promise compounding gains: collect, label, retrain, repeat. We built one for cotton-field weed detection — a collector agent and a trainer agent running unattended on an HPC allocation, fed by field robots — and ran it for fifteen rounds. Its dangerous failure mode was not a crash. It was a plausible number.</a:t>
-            </a:r>
-          </a:p>
-        </p:txBody>
-      </p:sp>
-      <p:sp>
-        <p:nvSpPr>
-          <p:cNvPr id="30" name="TextBox 29"/>
-          <p:cNvSpPr txBox="1"/>
-          <p:nvPr/>
-        </p:nvSpPr>
-        <p:spPr>
-          <a:xfrm>
-            <a:off x="822960" y="8807196"/>
-            <a:ext cx="10184130" cy="365760"/>
-          </a:xfrm>
-          <a:prstGeom prst="rect">
-            <a:avLst/>
-          </a:prstGeom>
-          <a:noFill/>
-        </p:spPr>
-        <p:txBody>
-          <a:bodyPr wrap="square" anchor="t" lIns="0" rIns="0" tIns="0" bIns="0">
-            <a:spAutoFit/>
-          </a:bodyPr>
-          <a:lstStyle/>
-          <a:p>
-            <a:pPr algn="l">
-              <a:lnSpc>
-                <a:spcPct val="106000"/>
-              </a:lnSpc>
-              <a:spcAft>
-                <a:spcPts val="900"/>
-              </a:spcAft>
-            </a:pPr>
-            <a:r>
-              <a:rPr sz="1550" b="0">
-                <a:solidFill>
-                  <a:srgbClr val="12243A"/>
-                </a:solidFill>
-                <a:latin typeface="Calibri"/>
-              </a:rPr>
-              <a:t>Audited against a fixed 1,977-image CottonWeedDet12 holdout: the training corpus was identical from round 3 onward, because the collector admitted nothing for eight consecutive rounds while reporting success; the metric nonetheless fell 0.6019 → 0.5607; and a controlled experiment on identical data attributes that decline to warm-start chaining rather than to the data.</a:t>
-            </a:r>
-          </a:p>
-        </p:txBody>
-      </p:sp>
-      <p:sp>
-        <p:nvSpPr>
-          <p:cNvPr id="31" name="TextBox 30"/>
-          <p:cNvSpPr txBox="1"/>
-          <p:nvPr/>
-        </p:nvSpPr>
-        <p:spPr>
-          <a:xfrm>
-            <a:off x="822960" y="9960864"/>
-            <a:ext cx="10184130" cy="365760"/>
-          </a:xfrm>
-          <a:prstGeom prst="rect">
-            <a:avLst/>
-          </a:prstGeom>
-          <a:noFill/>
-        </p:spPr>
-        <p:txBody>
-          <a:bodyPr wrap="square" anchor="t" lIns="0" rIns="0" tIns="0" bIns="0">
-            <a:spAutoFit/>
-          </a:bodyPr>
-          <a:lstStyle/>
-          <a:p>
-            <a:pPr algn="l">
-              <a:lnSpc>
-                <a:spcPct val="106000"/>
-              </a:lnSpc>
-              <a:spcAft>
-                <a:spcPts val="900"/>
-              </a:spcAft>
-            </a:pPr>
-            <a:r>
-              <a:rPr sz="1550" b="0">
-                <a:solidFill>
-                  <a:srgbClr val="12243A"/>
-                </a:solidFill>
-                <a:latin typeface="Calibri"/>
-              </a:rPr>
-              <a:t>Three measurements survive scrutiny at n = 3 seeds: COCO pretraining is worth +0.0714 mAP50-95, architecture at equal initialisation +0.0225, and web-harvested data 0.00 to −0.02. Detection collapses from 0.873 to 0.100 across imaging domains. A model reading raw artifacts catches failures that twelve deterministic checks structurally cannot.</a:t>
-            </a:r>
-          </a:p>
-        </p:txBody>
-      </p:sp>
-      <p:sp>
-        <p:nvSpPr>
-          <p:cNvPr id="32" name="TextBox 31"/>
-          <p:cNvSpPr txBox="1"/>
-          <p:nvPr/>
-        </p:nvSpPr>
-        <p:spPr>
-          <a:xfrm>
-            <a:off x="822960" y="11343132"/>
-            <a:ext cx="10184130" cy="502920"/>
-          </a:xfrm>
-          <a:prstGeom prst="rect">
-            <a:avLst/>
-          </a:prstGeom>
-          <a:noFill/>
-        </p:spPr>
-        <p:txBody>
-          <a:bodyPr wrap="square" anchor="t" lIns="0" rIns="0" tIns="0" bIns="0">
-            <a:spAutoFit/>
-          </a:bodyPr>
-          <a:lstStyle/>
-          <a:p>
-            <a:pPr algn="l">
-              <a:lnSpc>
-                <a:spcPct val="90000"/>
-              </a:lnSpc>
-              <a:spcAft>
-                <a:spcPts val="600"/>
-              </a:spcAft>
-            </a:pPr>
-            <a:r>
-              <a:rPr sz="2600" b="1">
-                <a:solidFill>
-                  <a:srgbClr val="0A4D8C"/>
-                </a:solidFill>
-                <a:latin typeface="Calibri"/>
-              </a:rPr>
-              <a:t>THE PLATFORM</a:t>
-            </a:r>
-          </a:p>
-        </p:txBody>
-      </p:sp>
-      <p:sp>
-        <p:nvSpPr>
-          <p:cNvPr id="33" name="Rectangle 32"/>
+          <p:cNvPr id="41" name="Rectangle 40"/>
           <p:cNvSpPr/>
           <p:nvPr/>
         </p:nvSpPr>
         <p:spPr>
           <a:xfrm>
-            <a:off x="822960" y="11891772"/>
-            <a:ext cx="10184130" cy="32004"/>
+            <a:off x="11704320" y="5577840"/>
+            <a:ext cx="4914900" cy="1554480"/>
           </a:xfrm>
           <a:prstGeom prst="rect">
             <a:avLst/>
           </a:prstGeom>
           <a:solidFill>
-            <a:srgbClr val="0A4D8C"/>
+            <a:srgbClr val="EAF2F9"/>
           </a:solidFill>
           <a:ln>
             <a:noFill/>
@@ -4493,212 +4793,146 @@
       </p:sp>
       <p:sp>
         <p:nvSpPr>
-          <p:cNvPr id="34" name="TextBox 33"/>
-          <p:cNvSpPr txBox="1"/>
-          <p:nvPr/>
-        </p:nvSpPr>
-        <p:spPr>
-          <a:xfrm>
-            <a:off x="822960" y="12092940"/>
-            <a:ext cx="10184130" cy="365760"/>
-          </a:xfrm>
-          <a:prstGeom prst="rect">
-            <a:avLst/>
-          </a:prstGeom>
-          <a:noFill/>
-        </p:spPr>
-        <p:txBody>
-          <a:bodyPr wrap="square" anchor="t" lIns="0" rIns="0" tIns="0" bIns="0">
+          <p:cNvPr id="42" name="TextBox 41"/>
+          <p:cNvSpPr txBox="1"/>
+          <p:nvPr/>
+        </p:nvSpPr>
+        <p:spPr>
+          <a:xfrm>
+            <a:off x="11932920" y="5705855"/>
+            <a:ext cx="4549140" cy="365760"/>
+          </a:xfrm>
+          <a:prstGeom prst="rect">
+            <a:avLst/>
+          </a:prstGeom>
+          <a:noFill/>
+        </p:spPr>
+        <p:txBody>
+          <a:bodyPr wrap="square" lIns="0" rIns="0" tIns="0" bIns="0">
             <a:spAutoFit/>
           </a:bodyPr>
           <a:lstStyle/>
           <a:p>
             <a:pPr algn="l">
               <a:lnSpc>
-                <a:spcPct val="106000"/>
-              </a:lnSpc>
-              <a:spcAft>
-                <a:spcPts val="900"/>
-              </a:spcAft>
-            </a:pPr>
-            <a:r>
-              <a:rPr sz="1550" b="0">
-                <a:solidFill>
-                  <a:srgbClr val="12243A"/>
-                </a:solidFill>
-                <a:latin typeface="Calibri"/>
-              </a:rPr>
-              <a:t>Two agents run as separate SLURM jobs against one locked registry: a collector that searches, downloads and pseudo-labels, and a trainer that merges, deduplicates, guards the holdout and trains. Field data arrives over a live uplink from two robots driving crop rows.</a:t>
-            </a:r>
-          </a:p>
-        </p:txBody>
-      </p:sp>
-      <p:sp>
-        <p:nvSpPr>
-          <p:cNvPr id="35" name="TextBox 34"/>
-          <p:cNvSpPr txBox="1"/>
-          <p:nvPr/>
-        </p:nvSpPr>
-        <p:spPr>
-          <a:xfrm>
-            <a:off x="822960" y="12986766"/>
-            <a:ext cx="10184130" cy="365760"/>
-          </a:xfrm>
-          <a:prstGeom prst="rect">
-            <a:avLst/>
-          </a:prstGeom>
-          <a:noFill/>
-        </p:spPr>
-        <p:txBody>
-          <a:bodyPr wrap="square" anchor="t" lIns="0" rIns="0" tIns="0" bIns="0">
+                <a:spcPct val="95000"/>
+              </a:lnSpc>
+              <a:spcAft>
+                <a:spcPts val="0"/>
+              </a:spcAft>
+            </a:pPr>
+            <a:r>
+              <a:rPr sz="4000" b="1">
+                <a:solidFill>
+                  <a:srgbClr val="1C6FB5"/>
+                </a:solidFill>
+                <a:latin typeface="Arial"/>
+              </a:rPr>
+              <a:t>+0.0714</a:t>
+            </a:r>
+          </a:p>
+        </p:txBody>
+      </p:sp>
+      <p:sp>
+        <p:nvSpPr>
+          <p:cNvPr id="43" name="TextBox 42"/>
+          <p:cNvSpPr txBox="1"/>
+          <p:nvPr/>
+        </p:nvSpPr>
+        <p:spPr>
+          <a:xfrm>
+            <a:off x="11932920" y="6364224"/>
+            <a:ext cx="4549140" cy="365760"/>
+          </a:xfrm>
+          <a:prstGeom prst="rect">
+            <a:avLst/>
+          </a:prstGeom>
+          <a:noFill/>
+        </p:spPr>
+        <p:txBody>
+          <a:bodyPr wrap="square" lIns="0" rIns="0" tIns="0" bIns="0">
             <a:spAutoFit/>
           </a:bodyPr>
           <a:lstStyle/>
           <a:p>
             <a:pPr algn="l">
               <a:lnSpc>
-                <a:spcPct val="106000"/>
-              </a:lnSpc>
-              <a:spcAft>
-                <a:spcPts val="900"/>
-              </a:spcAft>
-            </a:pPr>
-            <a:r>
-              <a:rPr sz="1550" b="0">
-                <a:solidFill>
-                  <a:srgbClr val="12243A"/>
-                </a:solidFill>
-                <a:latin typeface="Calibri"/>
-              </a:rPr>
-              <a:t>Counted on disk rather than claimed: 2,686 frames across 26 sessions from 2 robots, and none of them labelled. Robot 241 contributes 2,259 frames at 640 x 360, 2026-08-15 to 2026-09-05, camera at 1 Hz, of which 1,704 are genuinely on vegetation or soil. The laser cart contributes 427 frames, of which 75 — one session on 2026-08-29 — are in a field; the rest are indoor bench tests. The laser cart carries no GPS and no IMU: its uplink declares detections, laser, vehicle, system, camera.</a:t>
-            </a:r>
-          </a:p>
-        </p:txBody>
-      </p:sp>
-      <p:pic>
-        <p:nvPicPr>
-          <p:cNvPr id="36" name="Picture 35" descr="f7_fielddrive.png"/>
-          <p:cNvPicPr>
-            <a:picLocks noChangeAspect="1"/>
-          </p:cNvPicPr>
-          <p:nvPr/>
-        </p:nvPicPr>
-        <p:blipFill>
-          <a:blip r:embed="rId2"/>
-          <a:stretch>
-            <a:fillRect/>
-          </a:stretch>
-        </p:blipFill>
-        <p:spPr>
-          <a:xfrm>
-            <a:off x="822960" y="14510004"/>
-            <a:ext cx="10184130" cy="3798365"/>
-          </a:xfrm>
-          <a:prstGeom prst="rect">
-            <a:avLst/>
-          </a:prstGeom>
-        </p:spPr>
-      </p:pic>
-      <p:sp>
-        <p:nvSpPr>
-          <p:cNvPr id="37" name="TextBox 36"/>
-          <p:cNvSpPr txBox="1"/>
-          <p:nvPr/>
-        </p:nvSpPr>
-        <p:spPr>
-          <a:xfrm>
-            <a:off x="822960" y="18399809"/>
-            <a:ext cx="10184130" cy="365760"/>
-          </a:xfrm>
-          <a:prstGeom prst="rect">
-            <a:avLst/>
-          </a:prstGeom>
-          <a:noFill/>
-        </p:spPr>
-        <p:txBody>
-          <a:bodyPr wrap="square" anchor="t" lIns="0" rIns="0" tIns="0" bIns="0">
+                <a:spcPct val="110000"/>
+              </a:lnSpc>
+              <a:spcAft>
+                <a:spcPts val="0"/>
+              </a:spcAft>
+            </a:pPr>
+            <a:r>
+              <a:rPr sz="1300" b="1">
+                <a:solidFill>
+                  <a:srgbClr val="1E293B"/>
+                </a:solidFill>
+                <a:latin typeface="Arial"/>
+              </a:rPr>
+              <a:t>pretraining over random init</a:t>
+            </a:r>
+          </a:p>
+        </p:txBody>
+      </p:sp>
+      <p:sp>
+        <p:nvSpPr>
+          <p:cNvPr id="44" name="TextBox 43"/>
+          <p:cNvSpPr txBox="1"/>
+          <p:nvPr/>
+        </p:nvSpPr>
+        <p:spPr>
+          <a:xfrm>
+            <a:off x="11932920" y="6766559"/>
+            <a:ext cx="4549140" cy="365760"/>
+          </a:xfrm>
+          <a:prstGeom prst="rect">
+            <a:avLst/>
+          </a:prstGeom>
+          <a:noFill/>
+        </p:spPr>
+        <p:txBody>
+          <a:bodyPr wrap="square" lIns="0" rIns="0" tIns="0" bIns="0">
             <a:spAutoFit/>
           </a:bodyPr>
           <a:lstStyle/>
           <a:p>
             <a:pPr algn="l">
               <a:lnSpc>
-                <a:spcPct val="106000"/>
-              </a:lnSpc>
-              <a:spcAft>
-                <a:spcPts val="1200"/>
-              </a:spcAft>
-            </a:pPr>
-            <a:r>
-              <a:rPr sz="1250" b="0">
-                <a:solidFill>
-                  <a:srgbClr val="5D6B7A"/>
-                </a:solidFill>
-                <a:latin typeface="Calibri"/>
-              </a:rPr>
-              <a:t>Figure 1.  The platform's one unambiguous field drive: robot 241 on 2026-08-29, one pass through a crop plot: rows under black plastic mulch, weeds between rows, bare soil, tree line. 1,013 camera frames at 640 x 360 over 213 s, 211 GPS fixes and 3,154 IMU samples, 140.7 m of track. The trajectory is drawn from the board fix — the platform's own derived GPS preferred a receiver frozen to a single coordinate, so every track it exposed was a motionless point (17 sessions, 1,281 rows, 0.0 m) until that was fixed. Source: uploads/ul_4_09test_49ea7a2a/files/.</a:t>
-            </a:r>
-          </a:p>
-        </p:txBody>
-      </p:sp>
-      <p:sp>
-        <p:nvSpPr>
-          <p:cNvPr id="38" name="TextBox 37"/>
-          <p:cNvSpPr txBox="1"/>
-          <p:nvPr/>
-        </p:nvSpPr>
-        <p:spPr>
-          <a:xfrm>
-            <a:off x="822960" y="19828559"/>
-            <a:ext cx="10184130" cy="502920"/>
-          </a:xfrm>
-          <a:prstGeom prst="rect">
-            <a:avLst/>
-          </a:prstGeom>
-          <a:noFill/>
-        </p:spPr>
-        <p:txBody>
-          <a:bodyPr wrap="square" anchor="t" lIns="0" rIns="0" tIns="0" bIns="0">
-            <a:spAutoFit/>
-          </a:bodyPr>
-          <a:lstStyle/>
-          <a:p>
-            <a:pPr algn="l">
-              <a:lnSpc>
-                <a:spcPct val="90000"/>
-              </a:lnSpc>
-              <a:spcAft>
-                <a:spcPts val="600"/>
-              </a:spcAft>
-            </a:pPr>
-            <a:r>
-              <a:rPr sz="2600" b="1">
-                <a:solidFill>
-                  <a:srgbClr val="0A4D8C"/>
-                </a:solidFill>
-                <a:latin typeface="Calibri"/>
-              </a:rPr>
-              <a:t>WHERE THE HARVESTED DATA GOES</a:t>
-            </a:r>
-          </a:p>
-        </p:txBody>
-      </p:sp>
-      <p:sp>
-        <p:nvSpPr>
-          <p:cNvPr id="39" name="Rectangle 38"/>
+                <a:spcPct val="100000"/>
+              </a:lnSpc>
+              <a:spcAft>
+                <a:spcPts val="0"/>
+              </a:spcAft>
+            </a:pPr>
+            <a:r>
+              <a:rPr sz="1150" b="0">
+                <a:solidFill>
+                  <a:srgbClr val="556575"/>
+                </a:solidFill>
+                <a:latin typeface="Arial"/>
+              </a:rPr>
+              <a:t>n = 3 each side</a:t>
+            </a:r>
+          </a:p>
+        </p:txBody>
+      </p:sp>
+      <p:sp>
+        <p:nvSpPr>
+          <p:cNvPr id="45" name="Rectangle 44"/>
           <p:cNvSpPr/>
           <p:nvPr/>
         </p:nvSpPr>
         <p:spPr>
           <a:xfrm>
-            <a:off x="822960" y="20377199"/>
-            <a:ext cx="10184130" cy="32004"/>
+            <a:off x="16893540" y="5577840"/>
+            <a:ext cx="4914900" cy="1554480"/>
           </a:xfrm>
           <a:prstGeom prst="rect">
             <a:avLst/>
           </a:prstGeom>
           <a:solidFill>
-            <a:srgbClr val="0A4D8C"/>
+            <a:srgbClr val="EAF2F9"/>
           </a:solidFill>
           <a:ln>
             <a:noFill/>
@@ -4727,130 +4961,148 @@
           </a:p>
         </p:txBody>
       </p:sp>
-      <p:pic>
-        <p:nvPicPr>
-          <p:cNvPr id="40" name="Picture 39" descr="f4_funnel.png"/>
-          <p:cNvPicPr>
-            <a:picLocks noChangeAspect="1"/>
-          </p:cNvPicPr>
-          <p:nvPr/>
-        </p:nvPicPr>
-        <p:blipFill>
-          <a:blip r:embed="rId3"/>
-          <a:stretch>
-            <a:fillRect/>
-          </a:stretch>
-        </p:blipFill>
-        <p:spPr>
-          <a:xfrm>
-            <a:off x="822960" y="20578367"/>
-            <a:ext cx="10184130" cy="6769985"/>
-          </a:xfrm>
-          <a:prstGeom prst="rect">
-            <a:avLst/>
-          </a:prstGeom>
-        </p:spPr>
-      </p:pic>
-      <p:sp>
-        <p:nvSpPr>
-          <p:cNvPr id="41" name="TextBox 40"/>
-          <p:cNvSpPr txBox="1"/>
-          <p:nvPr/>
-        </p:nvSpPr>
-        <p:spPr>
-          <a:xfrm>
-            <a:off x="822960" y="27439792"/>
-            <a:ext cx="10184130" cy="365760"/>
-          </a:xfrm>
-          <a:prstGeom prst="rect">
-            <a:avLst/>
-          </a:prstGeom>
-          <a:noFill/>
-        </p:spPr>
-        <p:txBody>
-          <a:bodyPr wrap="square" anchor="t" lIns="0" rIns="0" tIns="0" bIns="0">
+      <p:sp>
+        <p:nvSpPr>
+          <p:cNvPr id="46" name="TextBox 45"/>
+          <p:cNvSpPr txBox="1"/>
+          <p:nvPr/>
+        </p:nvSpPr>
+        <p:spPr>
+          <a:xfrm>
+            <a:off x="17122140" y="5705855"/>
+            <a:ext cx="4549140" cy="365760"/>
+          </a:xfrm>
+          <a:prstGeom prst="rect">
+            <a:avLst/>
+          </a:prstGeom>
+          <a:noFill/>
+        </p:spPr>
+        <p:txBody>
+          <a:bodyPr wrap="square" lIns="0" rIns="0" tIns="0" bIns="0">
             <a:spAutoFit/>
           </a:bodyPr>
           <a:lstStyle/>
           <a:p>
             <a:pPr algn="l">
               <a:lnSpc>
-                <a:spcPct val="106000"/>
-              </a:lnSpc>
-              <a:spcAft>
-                <a:spcPts val="1200"/>
-              </a:spcAft>
-            </a:pPr>
-            <a:r>
-              <a:rPr sz="1250" b="0">
-                <a:solidFill>
-                  <a:srgbClr val="5D6B7A"/>
-                </a:solidFill>
-                <a:latin typeface="Calibri"/>
-              </a:rPr>
-              <a:t>Figure 2.  156,521 registry-labelled images collapse to 59,134 unique: 44,750 cross-dataset duplicates and 1,977 holdout stems removed. Of six audited harvested sources (13,527 images) exactly one (3,208 images) clears the 0.90 label-precision bar; the rest score 0.18-0.74. The audit probe reads 1.000 on human-labelled cwd12, so the low scores are the data, not the instrument.</a:t>
-            </a:r>
-          </a:p>
-        </p:txBody>
-      </p:sp>
-      <p:sp>
-        <p:nvSpPr>
-          <p:cNvPr id="42" name="TextBox 41"/>
-          <p:cNvSpPr txBox="1"/>
-          <p:nvPr/>
-        </p:nvSpPr>
-        <p:spPr>
-          <a:xfrm>
-            <a:off x="11510010" y="6903720"/>
-            <a:ext cx="10184130" cy="502920"/>
-          </a:xfrm>
-          <a:prstGeom prst="rect">
-            <a:avLst/>
-          </a:prstGeom>
-          <a:noFill/>
-        </p:spPr>
-        <p:txBody>
-          <a:bodyPr wrap="square" anchor="t" lIns="0" rIns="0" tIns="0" bIns="0">
+                <a:spcPct val="95000"/>
+              </a:lnSpc>
+              <a:spcAft>
+                <a:spcPts val="0"/>
+              </a:spcAft>
+            </a:pPr>
+            <a:r>
+              <a:rPr sz="4000" b="1">
+                <a:solidFill>
+                  <a:srgbClr val="1C6FB5"/>
+                </a:solidFill>
+                <a:latin typeface="Arial"/>
+              </a:rPr>
+              <a:t>0.100</a:t>
+            </a:r>
+          </a:p>
+        </p:txBody>
+      </p:sp>
+      <p:sp>
+        <p:nvSpPr>
+          <p:cNvPr id="47" name="TextBox 46"/>
+          <p:cNvSpPr txBox="1"/>
+          <p:nvPr/>
+        </p:nvSpPr>
+        <p:spPr>
+          <a:xfrm>
+            <a:off x="17122140" y="6364224"/>
+            <a:ext cx="4549140" cy="365760"/>
+          </a:xfrm>
+          <a:prstGeom prst="rect">
+            <a:avLst/>
+          </a:prstGeom>
+          <a:noFill/>
+        </p:spPr>
+        <p:txBody>
+          <a:bodyPr wrap="square" lIns="0" rIns="0" tIns="0" bIns="0">
             <a:spAutoFit/>
           </a:bodyPr>
           <a:lstStyle/>
           <a:p>
             <a:pPr algn="l">
               <a:lnSpc>
-                <a:spcPct val="90000"/>
-              </a:lnSpc>
-              <a:spcAft>
-                <a:spcPts val="600"/>
-              </a:spcAft>
-            </a:pPr>
-            <a:r>
-              <a:rPr sz="2600" b="1">
-                <a:solidFill>
-                  <a:srgbClr val="0A4D8C"/>
-                </a:solidFill>
-                <a:latin typeface="Calibri"/>
-              </a:rPr>
-              <a:t>WHAT MOVES THE DETECTOR</a:t>
-            </a:r>
-          </a:p>
-        </p:txBody>
-      </p:sp>
-      <p:sp>
-        <p:nvSpPr>
-          <p:cNvPr id="43" name="Rectangle 42"/>
+                <a:spcPct val="110000"/>
+              </a:lnSpc>
+              <a:spcAft>
+                <a:spcPts val="0"/>
+              </a:spcAft>
+            </a:pPr>
+            <a:r>
+              <a:rPr sz="1300" b="1">
+                <a:solidFill>
+                  <a:srgbClr val="1E293B"/>
+                </a:solidFill>
+                <a:latin typeface="Arial"/>
+              </a:rPr>
+              <a:t>same detector, another field</a:t>
+            </a:r>
+          </a:p>
+        </p:txBody>
+      </p:sp>
+      <p:sp>
+        <p:nvSpPr>
+          <p:cNvPr id="48" name="TextBox 47"/>
+          <p:cNvSpPr txBox="1"/>
+          <p:nvPr/>
+        </p:nvSpPr>
+        <p:spPr>
+          <a:xfrm>
+            <a:off x="17122140" y="6766559"/>
+            <a:ext cx="4549140" cy="365760"/>
+          </a:xfrm>
+          <a:prstGeom prst="rect">
+            <a:avLst/>
+          </a:prstGeom>
+          <a:noFill/>
+        </p:spPr>
+        <p:txBody>
+          <a:bodyPr wrap="square" lIns="0" rIns="0" tIns="0" bIns="0">
+            <a:spAutoFit/>
+          </a:bodyPr>
+          <a:lstStyle/>
+          <a:p>
+            <a:pPr algn="l">
+              <a:lnSpc>
+                <a:spcPct val="100000"/>
+              </a:lnSpc>
+              <a:spcAft>
+                <a:spcPts val="0"/>
+              </a:spcAft>
+            </a:pPr>
+            <a:r>
+              <a:rPr sz="1150" b="0">
+                <a:solidFill>
+                  <a:srgbClr val="556575"/>
+                </a:solidFill>
+                <a:latin typeface="Arial"/>
+              </a:rPr>
+              <a:t>from 0.873, n = 3</a:t>
+            </a:r>
+          </a:p>
+        </p:txBody>
+      </p:sp>
+      <p:sp>
+        <p:nvSpPr>
+          <p:cNvPr id="49" name="Rectangle 48"/>
           <p:cNvSpPr/>
           <p:nvPr/>
         </p:nvSpPr>
         <p:spPr>
           <a:xfrm>
-            <a:off x="11510010" y="7452360"/>
-            <a:ext cx="10184130" cy="32004"/>
+            <a:off x="22082760" y="5577840"/>
+            <a:ext cx="4914900" cy="1554480"/>
           </a:xfrm>
           <a:prstGeom prst="rect">
             <a:avLst/>
           </a:prstGeom>
           <a:solidFill>
-            <a:srgbClr val="0A4D8C"/>
+            <a:srgbClr val="EAF2F9"/>
           </a:solidFill>
           <a:ln>
             <a:noFill/>
@@ -4879,196 +5131,148 @@
           </a:p>
         </p:txBody>
       </p:sp>
-      <p:pic>
-        <p:nvPicPr>
-          <p:cNvPr id="44" name="Picture 43" descr="f1_levers.png"/>
-          <p:cNvPicPr>
-            <a:picLocks noChangeAspect="1"/>
-          </p:cNvPicPr>
-          <p:nvPr/>
-        </p:nvPicPr>
-        <p:blipFill>
-          <a:blip r:embed="rId4"/>
-          <a:stretch>
-            <a:fillRect/>
-          </a:stretch>
-        </p:blipFill>
-        <p:spPr>
-          <a:xfrm>
-            <a:off x="11510010" y="7653527"/>
-            <a:ext cx="10184130" cy="4901141"/>
-          </a:xfrm>
-          <a:prstGeom prst="rect">
-            <a:avLst/>
-          </a:prstGeom>
-        </p:spPr>
-      </p:pic>
-      <p:sp>
-        <p:nvSpPr>
-          <p:cNvPr id="45" name="TextBox 44"/>
-          <p:cNvSpPr txBox="1"/>
-          <p:nvPr/>
-        </p:nvSpPr>
-        <p:spPr>
-          <a:xfrm>
-            <a:off x="11510010" y="12646109"/>
-            <a:ext cx="10184130" cy="365760"/>
-          </a:xfrm>
-          <a:prstGeom prst="rect">
-            <a:avLst/>
-          </a:prstGeom>
-          <a:noFill/>
-        </p:spPr>
-        <p:txBody>
-          <a:bodyPr wrap="square" anchor="t" lIns="0" rIns="0" tIns="0" bIns="0">
+      <p:sp>
+        <p:nvSpPr>
+          <p:cNvPr id="50" name="TextBox 49"/>
+          <p:cNvSpPr txBox="1"/>
+          <p:nvPr/>
+        </p:nvSpPr>
+        <p:spPr>
+          <a:xfrm>
+            <a:off x="22311360" y="5705855"/>
+            <a:ext cx="4549140" cy="365760"/>
+          </a:xfrm>
+          <a:prstGeom prst="rect">
+            <a:avLst/>
+          </a:prstGeom>
+          <a:noFill/>
+        </p:spPr>
+        <p:txBody>
+          <a:bodyPr wrap="square" lIns="0" rIns="0" tIns="0" bIns="0">
             <a:spAutoFit/>
           </a:bodyPr>
           <a:lstStyle/>
           <a:p>
             <a:pPr algn="l">
               <a:lnSpc>
-                <a:spcPct val="106000"/>
-              </a:lnSpc>
-              <a:spcAft>
-                <a:spcPts val="1200"/>
-              </a:spcAft>
-            </a:pPr>
-            <a:r>
-              <a:rPr sz="1250" b="0">
-                <a:solidFill>
-                  <a:srgbClr val="5D6B7A"/>
-                </a:solidFill>
-                <a:latin typeface="Calibri"/>
-              </a:rPr>
-              <a:t>Figure 3.  Three levers on one holdout and one evaluator. Initialisation is worth three times what architecture is worth, and both dwarf the data-collection lever the whole system was built around. Top two rows n = 3 seeds; bottom row n = 1 with seeds in flight. Source: results/framework/s3_yolo11n/*/results.csv.</a:t>
-            </a:r>
-          </a:p>
-        </p:txBody>
-      </p:sp>
-      <p:pic>
-        <p:nvPicPr>
-          <p:cNvPr id="46" name="Picture 45" descr="f2_ladder.png"/>
-          <p:cNvPicPr>
-            <a:picLocks noChangeAspect="1"/>
-          </p:cNvPicPr>
-          <p:nvPr/>
-        </p:nvPicPr>
-        <p:blipFill>
-          <a:blip r:embed="rId5"/>
-          <a:stretch>
-            <a:fillRect/>
-          </a:stretch>
-        </p:blipFill>
-        <p:spPr>
-          <a:xfrm>
-            <a:off x="11510010" y="13591750"/>
-            <a:ext cx="10184130" cy="6372961"/>
-          </a:xfrm>
-          <a:prstGeom prst="rect">
-            <a:avLst/>
-          </a:prstGeom>
-        </p:spPr>
-      </p:pic>
-      <p:sp>
-        <p:nvSpPr>
-          <p:cNvPr id="47" name="TextBox 46"/>
-          <p:cNvSpPr txBox="1"/>
-          <p:nvPr/>
-        </p:nvSpPr>
-        <p:spPr>
-          <a:xfrm>
-            <a:off x="11510010" y="20056152"/>
-            <a:ext cx="10184130" cy="365760"/>
-          </a:xfrm>
-          <a:prstGeom prst="rect">
-            <a:avLst/>
-          </a:prstGeom>
-          <a:noFill/>
-        </p:spPr>
-        <p:txBody>
-          <a:bodyPr wrap="square" anchor="t" lIns="0" rIns="0" tIns="0" bIns="0">
+                <a:spcPct val="95000"/>
+              </a:lnSpc>
+              <a:spcAft>
+                <a:spcPts val="0"/>
+              </a:spcAft>
+            </a:pPr>
+            <a:r>
+              <a:rPr sz="4000" b="1">
+                <a:solidFill>
+                  <a:srgbClr val="1C6FB5"/>
+                </a:solidFill>
+                <a:latin typeface="Arial"/>
+              </a:rPr>
+              <a:t>0 of 116</a:t>
+            </a:r>
+          </a:p>
+        </p:txBody>
+      </p:sp>
+      <p:sp>
+        <p:nvSpPr>
+          <p:cNvPr id="51" name="TextBox 50"/>
+          <p:cNvSpPr txBox="1"/>
+          <p:nvPr/>
+        </p:nvSpPr>
+        <p:spPr>
+          <a:xfrm>
+            <a:off x="22311360" y="6364224"/>
+            <a:ext cx="4549140" cy="365760"/>
+          </a:xfrm>
+          <a:prstGeom prst="rect">
+            <a:avLst/>
+          </a:prstGeom>
+          <a:noFill/>
+        </p:spPr>
+        <p:txBody>
+          <a:bodyPr wrap="square" lIns="0" rIns="0" tIns="0" bIns="0">
             <a:spAutoFit/>
           </a:bodyPr>
           <a:lstStyle/>
           <a:p>
             <a:pPr algn="l">
               <a:lnSpc>
-                <a:spcPct val="106000"/>
-              </a:lnSpc>
-              <a:spcAft>
-                <a:spcPts val="1200"/>
-              </a:spcAft>
-            </a:pPr>
-            <a:r>
-              <a:rPr sz="1250" b="0">
-                <a:solidFill>
-                  <a:srgbClr val="5D6B7A"/>
-                </a:solidFill>
-                <a:latin typeface="Calibri"/>
-              </a:rPr>
-              <a:t>Figure 4.  Harvested images added to a clean in-domain core. Flat within the seed band to +15,000, then −0.020 at +40,000 — twelve times the training data for nothing, then a cost. The shaded band is the measured seed std (0.0029), not an assumption. Source: results/framework/s3_tier_v2_*.json.</a:t>
-            </a:r>
-          </a:p>
-        </p:txBody>
-      </p:sp>
-      <p:sp>
-        <p:nvSpPr>
-          <p:cNvPr id="48" name="TextBox 47"/>
-          <p:cNvSpPr txBox="1"/>
-          <p:nvPr/>
-        </p:nvSpPr>
-        <p:spPr>
-          <a:xfrm>
-            <a:off x="11510010" y="21001794"/>
-            <a:ext cx="10184130" cy="502920"/>
-          </a:xfrm>
-          <a:prstGeom prst="rect">
-            <a:avLst/>
-          </a:prstGeom>
-          <a:noFill/>
-        </p:spPr>
-        <p:txBody>
-          <a:bodyPr wrap="square" anchor="t" lIns="0" rIns="0" tIns="0" bIns="0">
+                <a:spcPct val="110000"/>
+              </a:lnSpc>
+              <a:spcAft>
+                <a:spcPts val="0"/>
+              </a:spcAft>
+            </a:pPr>
+            <a:r>
+              <a:rPr sz="1300" b="1">
+                <a:solidFill>
+                  <a:srgbClr val="1E293B"/>
+                </a:solidFill>
+                <a:latin typeface="Arial"/>
+              </a:rPr>
+              <a:t>incidents a scripted watchdog caught</a:t>
+            </a:r>
+          </a:p>
+        </p:txBody>
+      </p:sp>
+      <p:sp>
+        <p:nvSpPr>
+          <p:cNvPr id="52" name="TextBox 51"/>
+          <p:cNvSpPr txBox="1"/>
+          <p:nvPr/>
+        </p:nvSpPr>
+        <p:spPr>
+          <a:xfrm>
+            <a:off x="22311360" y="6766559"/>
+            <a:ext cx="4549140" cy="365760"/>
+          </a:xfrm>
+          <a:prstGeom prst="rect">
+            <a:avLst/>
+          </a:prstGeom>
+          <a:noFill/>
+        </p:spPr>
+        <p:txBody>
+          <a:bodyPr wrap="square" lIns="0" rIns="0" tIns="0" bIns="0">
             <a:spAutoFit/>
           </a:bodyPr>
           <a:lstStyle/>
           <a:p>
             <a:pPr algn="l">
               <a:lnSpc>
-                <a:spcPct val="90000"/>
-              </a:lnSpc>
-              <a:spcAft>
-                <a:spcPts val="600"/>
-              </a:spcAft>
-            </a:pPr>
-            <a:r>
-              <a:rPr sz="2600" b="1">
-                <a:solidFill>
-                  <a:srgbClr val="0A4D8C"/>
-                </a:solidFill>
-                <a:latin typeface="Calibri"/>
-              </a:rPr>
-              <a:t>PROTOCOL</a:t>
-            </a:r>
-          </a:p>
-        </p:txBody>
-      </p:sp>
-      <p:sp>
-        <p:nvSpPr>
-          <p:cNvPr id="49" name="Rectangle 48"/>
+                <a:spcPct val="100000"/>
+              </a:lnSpc>
+              <a:spcAft>
+                <a:spcPts val="0"/>
+              </a:spcAft>
+            </a:pPr>
+            <a:r>
+              <a:rPr sz="1150" b="0">
+                <a:solidFill>
+                  <a:srgbClr val="556575"/>
+                </a:solidFill>
+                <a:latin typeface="Arial"/>
+              </a:rPr>
+              <a:t>149 cases, none flagged</a:t>
+            </a:r>
+          </a:p>
+        </p:txBody>
+      </p:sp>
+      <p:sp>
+        <p:nvSpPr>
+          <p:cNvPr id="53" name="Rectangle 52"/>
           <p:cNvSpPr/>
           <p:nvPr/>
         </p:nvSpPr>
         <p:spPr>
           <a:xfrm>
-            <a:off x="11510010" y="21550434"/>
-            <a:ext cx="10184130" cy="32004"/>
+            <a:off x="27271980" y="5577840"/>
+            <a:ext cx="4914900" cy="1554480"/>
           </a:xfrm>
           <a:prstGeom prst="rect">
             <a:avLst/>
           </a:prstGeom>
           <a:solidFill>
-            <a:srgbClr val="0A4D8C"/>
+            <a:srgbClr val="EAF2F9"/>
           </a:solidFill>
           <a:ln>
             <a:noFill/>
@@ -5099,104 +5303,470 @@
       </p:sp>
       <p:sp>
         <p:nvSpPr>
-          <p:cNvPr id="50" name="TextBox 49"/>
-          <p:cNvSpPr txBox="1"/>
-          <p:nvPr/>
-        </p:nvSpPr>
-        <p:spPr>
-          <a:xfrm>
-            <a:off x="11510010" y="21751602"/>
-            <a:ext cx="10184130" cy="365760"/>
-          </a:xfrm>
-          <a:prstGeom prst="rect">
-            <a:avLst/>
-          </a:prstGeom>
-          <a:noFill/>
-        </p:spPr>
-        <p:txBody>
-          <a:bodyPr wrap="square" anchor="t" lIns="0" rIns="0" tIns="0" bIns="0">
+          <p:cNvPr id="54" name="TextBox 53"/>
+          <p:cNvSpPr txBox="1"/>
+          <p:nvPr/>
+        </p:nvSpPr>
+        <p:spPr>
+          <a:xfrm>
+            <a:off x="27500580" y="5705855"/>
+            <a:ext cx="4549140" cy="365760"/>
+          </a:xfrm>
+          <a:prstGeom prst="rect">
+            <a:avLst/>
+          </a:prstGeom>
+          <a:noFill/>
+        </p:spPr>
+        <p:txBody>
+          <a:bodyPr wrap="square" lIns="0" rIns="0" tIns="0" bIns="0">
             <a:spAutoFit/>
           </a:bodyPr>
           <a:lstStyle/>
           <a:p>
             <a:pPr algn="l">
               <a:lnSpc>
-                <a:spcPct val="106000"/>
-              </a:lnSpc>
-              <a:spcAft>
-                <a:spcPts val="900"/>
-              </a:spcAft>
-            </a:pPr>
-            <a:r>
-              <a:rPr sz="1550" b="0">
-                <a:solidFill>
-                  <a:srgbClr val="12243A"/>
-                </a:solidFill>
-                <a:latin typeface="Calibri"/>
-              </a:rPr>
-              <a:t>Every in-domain number is mAP50-95 on the same 1,977 images / 3,257 instances of CottonWeedDet12 test+valid, under the Ultralytics validator. That set is also the validation set during training, so each figure is a maximum over 21–100 evaluations on the set it is reported on. We measured the size of that optimism rather than hiding it: +0.002 to +0.017 depending on recipe, and every conclusion above survives re-reading at last-epoch and mean-of-last-five.</a:t>
-            </a:r>
-          </a:p>
-        </p:txBody>
-      </p:sp>
-      <p:sp>
-        <p:nvSpPr>
-          <p:cNvPr id="51" name="TextBox 50"/>
-          <p:cNvSpPr txBox="1"/>
-          <p:nvPr/>
-        </p:nvSpPr>
-        <p:spPr>
-          <a:xfrm>
-            <a:off x="22197060" y="6903720"/>
-            <a:ext cx="10184130" cy="502920"/>
-          </a:xfrm>
-          <a:prstGeom prst="rect">
-            <a:avLst/>
-          </a:prstGeom>
-          <a:noFill/>
-        </p:spPr>
-        <p:txBody>
-          <a:bodyPr wrap="square" anchor="t" lIns="0" rIns="0" tIns="0" bIns="0">
+                <a:spcPct val="95000"/>
+              </a:lnSpc>
+              <a:spcAft>
+                <a:spcPts val="0"/>
+              </a:spcAft>
+            </a:pPr>
+            <a:r>
+              <a:rPr sz="4000" b="1">
+                <a:solidFill>
+                  <a:srgbClr val="1C6FB5"/>
+                </a:solidFill>
+                <a:latin typeface="Arial"/>
+              </a:rPr>
+              <a:t>48,752</a:t>
+            </a:r>
+          </a:p>
+        </p:txBody>
+      </p:sp>
+      <p:sp>
+        <p:nvSpPr>
+          <p:cNvPr id="55" name="TextBox 54"/>
+          <p:cNvSpPr txBox="1"/>
+          <p:nvPr/>
+        </p:nvSpPr>
+        <p:spPr>
+          <a:xfrm>
+            <a:off x="27500580" y="6364224"/>
+            <a:ext cx="4549140" cy="365760"/>
+          </a:xfrm>
+          <a:prstGeom prst="rect">
+            <a:avLst/>
+          </a:prstGeom>
+          <a:noFill/>
+        </p:spPr>
+        <p:txBody>
+          <a:bodyPr wrap="square" lIns="0" rIns="0" tIns="0" bIns="0">
             <a:spAutoFit/>
           </a:bodyPr>
           <a:lstStyle/>
           <a:p>
             <a:pPr algn="l">
               <a:lnSpc>
-                <a:spcPct val="90000"/>
-              </a:lnSpc>
-              <a:spcAft>
-                <a:spcPts val="600"/>
-              </a:spcAft>
-            </a:pPr>
-            <a:r>
-              <a:rPr sz="2600" b="1">
-                <a:solidFill>
-                  <a:srgbClr val="0A4D8C"/>
-                </a:solidFill>
-                <a:latin typeface="Calibri"/>
-              </a:rPr>
-              <a:t>THE GENERALISATION WALL</a:t>
-            </a:r>
-          </a:p>
-        </p:txBody>
-      </p:sp>
-      <p:sp>
-        <p:nvSpPr>
-          <p:cNvPr id="52" name="Rectangle 51"/>
+                <a:spcPct val="110000"/>
+              </a:lnSpc>
+              <a:spcAft>
+                <a:spcPts val="0"/>
+              </a:spcAft>
+            </a:pPr>
+            <a:r>
+              <a:rPr sz="1300" b="1">
+                <a:solidFill>
+                  <a:srgbClr val="1E293B"/>
+                </a:solidFill>
+                <a:latin typeface="Arial"/>
+              </a:rPr>
+              <a:t>images, unchanged for 13 rounds</a:t>
+            </a:r>
+          </a:p>
+        </p:txBody>
+      </p:sp>
+      <p:sp>
+        <p:nvSpPr>
+          <p:cNvPr id="56" name="TextBox 55"/>
+          <p:cNvSpPr txBox="1"/>
+          <p:nvPr/>
+        </p:nvSpPr>
+        <p:spPr>
+          <a:xfrm>
+            <a:off x="27500580" y="6766559"/>
+            <a:ext cx="4549140" cy="365760"/>
+          </a:xfrm>
+          <a:prstGeom prst="rect">
+            <a:avLst/>
+          </a:prstGeom>
+          <a:noFill/>
+        </p:spPr>
+        <p:txBody>
+          <a:bodyPr wrap="square" lIns="0" rIns="0" tIns="0" bIns="0">
+            <a:spAutoFit/>
+          </a:bodyPr>
+          <a:lstStyle/>
+          <a:p>
+            <a:pPr algn="l">
+              <a:lnSpc>
+                <a:spcPct val="100000"/>
+              </a:lnSpc>
+              <a:spcAft>
+                <a:spcPts val="0"/>
+              </a:spcAft>
+            </a:pPr>
+            <a:r>
+              <a:rPr sz="1150" b="0">
+                <a:solidFill>
+                  <a:srgbClr val="556575"/>
+                </a:solidFill>
+                <a:latin typeface="Arial"/>
+              </a:rPr>
+              <a:t>while the loop reported progress</a:t>
+            </a:r>
+          </a:p>
+        </p:txBody>
+      </p:sp>
+      <p:sp>
+        <p:nvSpPr>
+          <p:cNvPr id="57" name="TextBox 56"/>
+          <p:cNvSpPr txBox="1"/>
+          <p:nvPr/>
+        </p:nvSpPr>
+        <p:spPr>
+          <a:xfrm>
+            <a:off x="11704320" y="7452359"/>
+            <a:ext cx="20482560" cy="365760"/>
+          </a:xfrm>
+          <a:prstGeom prst="rect">
+            <a:avLst/>
+          </a:prstGeom>
+          <a:noFill/>
+        </p:spPr>
+        <p:txBody>
+          <a:bodyPr wrap="square" lIns="0" rIns="0" tIns="0" bIns="0">
+            <a:spAutoFit/>
+          </a:bodyPr>
+          <a:lstStyle/>
+          <a:p>
+            <a:pPr algn="l">
+              <a:lnSpc>
+                <a:spcPct val="100000"/>
+              </a:lnSpc>
+              <a:spcAft>
+                <a:spcPts val="0"/>
+              </a:spcAft>
+            </a:pPr>
+            <a:r>
+              <a:rPr sz="1800" b="1">
+                <a:solidFill>
+                  <a:srgbClr val="1E293B"/>
+                </a:solidFill>
+                <a:latin typeface="Arial"/>
+              </a:rPr>
+              <a:t>What moves the detector</a:t>
+            </a:r>
+          </a:p>
+        </p:txBody>
+      </p:sp>
+      <p:pic>
+        <p:nvPicPr>
+          <p:cNvPr id="58" name="Picture 57" descr="a_families.png"/>
+          <p:cNvPicPr>
+            <a:picLocks noChangeAspect="1"/>
+          </p:cNvPicPr>
+          <p:nvPr/>
+        </p:nvPicPr>
+        <p:blipFill>
+          <a:blip r:embed="rId4"/>
+          <a:stretch>
+            <a:fillRect/>
+          </a:stretch>
+        </p:blipFill>
+        <p:spPr>
+          <a:xfrm>
+            <a:off x="11704320" y="7763255"/>
+            <a:ext cx="9989819" cy="5361065"/>
+          </a:xfrm>
+          <a:prstGeom prst="rect">
+            <a:avLst/>
+          </a:prstGeom>
+        </p:spPr>
+      </p:pic>
+      <p:sp>
+        <p:nvSpPr>
+          <p:cNvPr id="59" name="TextBox 58"/>
+          <p:cNvSpPr txBox="1"/>
+          <p:nvPr/>
+        </p:nvSpPr>
+        <p:spPr>
+          <a:xfrm>
+            <a:off x="11704320" y="13215760"/>
+            <a:ext cx="9989819" cy="365760"/>
+          </a:xfrm>
+          <a:prstGeom prst="rect">
+            <a:avLst/>
+          </a:prstGeom>
+          <a:noFill/>
+        </p:spPr>
+        <p:txBody>
+          <a:bodyPr wrap="square" lIns="0" rIns="0" tIns="0" bIns="0">
+            <a:spAutoFit/>
+          </a:bodyPr>
+          <a:lstStyle/>
+          <a:p>
+            <a:pPr algn="l">
+              <a:lnSpc>
+                <a:spcPct val="120000"/>
+              </a:lnSpc>
+              <a:spcAft>
+                <a:spcPts val="0"/>
+              </a:spcAft>
+            </a:pPr>
+            <a:r>
+              <a:rPr sz="1200" b="0">
+                <a:solidFill>
+                  <a:srgbClr val="556575"/>
+                </a:solidFill>
+                <a:latin typeface="Arial"/>
+              </a:rPr>
+              <a:t>Figure 3.  Three detector families on the CottonWeedDet12 holdout, three seeds each. How the network is initialised is worth three times what the architecture is worth.</a:t>
+            </a:r>
+          </a:p>
+        </p:txBody>
+      </p:sp>
+      <p:pic>
+        <p:nvPicPr>
+          <p:cNvPr id="60" name="Picture 59" descr="b_zeroshot.png"/>
+          <p:cNvPicPr>
+            <a:picLocks noChangeAspect="1"/>
+          </p:cNvPicPr>
+          <p:nvPr/>
+        </p:nvPicPr>
+        <p:blipFill>
+          <a:blip r:embed="rId5"/>
+          <a:stretch>
+            <a:fillRect/>
+          </a:stretch>
+        </p:blipFill>
+        <p:spPr>
+          <a:xfrm>
+            <a:off x="22197060" y="7763255"/>
+            <a:ext cx="9989819" cy="4817913"/>
+          </a:xfrm>
+          <a:prstGeom prst="rect">
+            <a:avLst/>
+          </a:prstGeom>
+        </p:spPr>
+      </p:pic>
+      <p:sp>
+        <p:nvSpPr>
+          <p:cNvPr id="61" name="TextBox 60"/>
+          <p:cNvSpPr txBox="1"/>
+          <p:nvPr/>
+        </p:nvSpPr>
+        <p:spPr>
+          <a:xfrm>
+            <a:off x="22197060" y="12672608"/>
+            <a:ext cx="9989819" cy="365760"/>
+          </a:xfrm>
+          <a:prstGeom prst="rect">
+            <a:avLst/>
+          </a:prstGeom>
+          <a:noFill/>
+        </p:spPr>
+        <p:txBody>
+          <a:bodyPr wrap="square" lIns="0" rIns="0" tIns="0" bIns="0">
+            <a:spAutoFit/>
+          </a:bodyPr>
+          <a:lstStyle/>
+          <a:p>
+            <a:pPr algn="l">
+              <a:lnSpc>
+                <a:spcPct val="120000"/>
+              </a:lnSpc>
+              <a:spcAft>
+                <a:spcPts val="0"/>
+              </a:spcAft>
+            </a:pPr>
+            <a:r>
+              <a:rPr sz="1200" b="0">
+                <a:solidFill>
+                  <a:srgbClr val="556575"/>
+                </a:solidFill>
+                <a:latin typeface="Arial"/>
+              </a:rPr>
+              <a:t>Figure 4.  One deterministic pass per model, no repeats. Fifteen zero-shot vision-language models against the fine-tuned detector: the best of them reaches 0.434 against 0.929, and five produce no usable grounding at all.</a:t>
+            </a:r>
+          </a:p>
+        </p:txBody>
+      </p:sp>
+      <p:sp>
+        <p:nvSpPr>
+          <p:cNvPr id="62" name="TextBox 61"/>
+          <p:cNvSpPr txBox="1"/>
+          <p:nvPr/>
+        </p:nvSpPr>
+        <p:spPr>
+          <a:xfrm>
+            <a:off x="11704320" y="13947281"/>
+            <a:ext cx="20482560" cy="365760"/>
+          </a:xfrm>
+          <a:prstGeom prst="rect">
+            <a:avLst/>
+          </a:prstGeom>
+          <a:noFill/>
+        </p:spPr>
+        <p:txBody>
+          <a:bodyPr wrap="square" lIns="0" rIns="0" tIns="0" bIns="0">
+            <a:spAutoFit/>
+          </a:bodyPr>
+          <a:lstStyle/>
+          <a:p>
+            <a:pPr algn="l">
+              <a:lnSpc>
+                <a:spcPct val="100000"/>
+              </a:lnSpc>
+              <a:spcAft>
+                <a:spcPts val="0"/>
+              </a:spcAft>
+            </a:pPr>
+            <a:r>
+              <a:rPr sz="1800" b="1">
+                <a:solidFill>
+                  <a:srgbClr val="1E293B"/>
+                </a:solidFill>
+                <a:latin typeface="Arial"/>
+              </a:rPr>
+              <a:t>Does more harvested data help?</a:t>
+            </a:r>
+          </a:p>
+        </p:txBody>
+      </p:sp>
+      <p:pic>
+        <p:nvPicPr>
+          <p:cNvPr id="63" name="Picture 62" descr="c_ladder.png"/>
+          <p:cNvPicPr>
+            <a:picLocks noChangeAspect="1"/>
+          </p:cNvPicPr>
+          <p:nvPr/>
+        </p:nvPicPr>
+        <p:blipFill>
+          <a:blip r:embed="rId6"/>
+          <a:stretch>
+            <a:fillRect/>
+          </a:stretch>
+        </p:blipFill>
+        <p:spPr>
+          <a:xfrm>
+            <a:off x="11704320" y="14258176"/>
+            <a:ext cx="9989819" cy="6090839"/>
+          </a:xfrm>
+          <a:prstGeom prst="rect">
+            <a:avLst/>
+          </a:prstGeom>
+        </p:spPr>
+      </p:pic>
+      <p:sp>
+        <p:nvSpPr>
+          <p:cNvPr id="64" name="TextBox 63"/>
+          <p:cNvSpPr txBox="1"/>
+          <p:nvPr/>
+        </p:nvSpPr>
+        <p:spPr>
+          <a:xfrm>
+            <a:off x="11704320" y="20440456"/>
+            <a:ext cx="9989819" cy="365760"/>
+          </a:xfrm>
+          <a:prstGeom prst="rect">
+            <a:avLst/>
+          </a:prstGeom>
+          <a:noFill/>
+        </p:spPr>
+        <p:txBody>
+          <a:bodyPr wrap="square" lIns="0" rIns="0" tIns="0" bIns="0">
+            <a:spAutoFit/>
+          </a:bodyPr>
+          <a:lstStyle/>
+          <a:p>
+            <a:pPr algn="l">
+              <a:lnSpc>
+                <a:spcPct val="120000"/>
+              </a:lnSpc>
+              <a:spcAft>
+                <a:spcPts val="0"/>
+              </a:spcAft>
+            </a:pPr>
+            <a:r>
+              <a:rPr sz="1200" b="0">
+                <a:solidFill>
+                  <a:srgbClr val="556575"/>
+                </a:solidFill>
+                <a:latin typeface="Arial"/>
+              </a:rPr>
+              <a:t>Figure 5.  Twelve times the training data. Error bars are the seed spread where three seeds exist; rungs still at one run are marked. The two class spaces differ only in the label a harvested box carries.</a:t>
+            </a:r>
+          </a:p>
+        </p:txBody>
+      </p:sp>
+      <p:sp>
+        <p:nvSpPr>
+          <p:cNvPr id="65" name="TextBox 64"/>
+          <p:cNvSpPr txBox="1"/>
+          <p:nvPr/>
+        </p:nvSpPr>
+        <p:spPr>
+          <a:xfrm>
+            <a:off x="22197060" y="14258176"/>
+            <a:ext cx="9989819" cy="365760"/>
+          </a:xfrm>
+          <a:prstGeom prst="rect">
+            <a:avLst/>
+          </a:prstGeom>
+          <a:noFill/>
+        </p:spPr>
+        <p:txBody>
+          <a:bodyPr wrap="square" lIns="0" rIns="0" tIns="0" bIns="0">
+            <a:spAutoFit/>
+          </a:bodyPr>
+          <a:lstStyle/>
+          <a:p>
+            <a:pPr algn="l">
+              <a:lnSpc>
+                <a:spcPct val="122000"/>
+              </a:lnSpc>
+              <a:spcAft>
+                <a:spcPts val="1000"/>
+              </a:spcAft>
+            </a:pPr>
+            <a:r>
+              <a:rPr sz="1350" b="0">
+                <a:solidFill>
+                  <a:srgbClr val="1E293B"/>
+                </a:solidFill>
+                <a:latin typeface="Arial"/>
+              </a:rPr>
+              <a:t>Harvested images added to a clean in-domain core, the same images at every seed. Only the training seed varies, so the spread is training noise and not a different sample of the corpus.</a:t>
+            </a:r>
+          </a:p>
+        </p:txBody>
+      </p:sp>
+      <p:sp>
+        <p:nvSpPr>
+          <p:cNvPr id="66" name="Rectangle 65"/>
           <p:cNvSpPr/>
           <p:nvPr/>
         </p:nvSpPr>
         <p:spPr>
           <a:xfrm>
-            <a:off x="22197060" y="7452360"/>
-            <a:ext cx="10184130" cy="32004"/>
+            <a:off x="22197060" y="14803514"/>
+            <a:ext cx="9989819" cy="20116"/>
           </a:xfrm>
           <a:prstGeom prst="rect">
             <a:avLst/>
           </a:prstGeom>
           <a:solidFill>
-            <a:srgbClr val="0A4D8C"/>
+            <a:srgbClr val="1E293B"/>
           </a:solidFill>
           <a:ln>
             <a:noFill/>
@@ -5225,130 +5795,148 @@
           </a:p>
         </p:txBody>
       </p:sp>
-      <p:pic>
-        <p:nvPicPr>
-          <p:cNvPr id="53" name="Picture 52" descr="f3_wall.png"/>
-          <p:cNvPicPr>
-            <a:picLocks noChangeAspect="1"/>
-          </p:cNvPicPr>
-          <p:nvPr/>
-        </p:nvPicPr>
-        <p:blipFill>
-          <a:blip r:embed="rId6"/>
-          <a:stretch>
-            <a:fillRect/>
-          </a:stretch>
-        </p:blipFill>
-        <p:spPr>
-          <a:xfrm>
-            <a:off x="22197060" y="7653527"/>
-            <a:ext cx="10184130" cy="7739073"/>
-          </a:xfrm>
-          <a:prstGeom prst="rect">
-            <a:avLst/>
-          </a:prstGeom>
-        </p:spPr>
-      </p:pic>
-      <p:sp>
-        <p:nvSpPr>
-          <p:cNvPr id="54" name="TextBox 53"/>
-          <p:cNvSpPr txBox="1"/>
-          <p:nvPr/>
-        </p:nvSpPr>
-        <p:spPr>
-          <a:xfrm>
-            <a:off x="22197060" y="15484041"/>
-            <a:ext cx="10184130" cy="365760"/>
-          </a:xfrm>
-          <a:prstGeom prst="rect">
-            <a:avLst/>
-          </a:prstGeom>
-          <a:noFill/>
-        </p:spPr>
-        <p:txBody>
-          <a:bodyPr wrap="square" anchor="t" lIns="0" rIns="0" tIns="0" bIns="0">
+      <p:sp>
+        <p:nvSpPr>
+          <p:cNvPr id="67" name="TextBox 66"/>
+          <p:cNvSpPr txBox="1"/>
+          <p:nvPr/>
+        </p:nvSpPr>
+        <p:spPr>
+          <a:xfrm>
+            <a:off x="22197060" y="14894955"/>
+            <a:ext cx="4595317" cy="365760"/>
+          </a:xfrm>
+          <a:prstGeom prst="rect">
+            <a:avLst/>
+          </a:prstGeom>
+          <a:noFill/>
+        </p:spPr>
+        <p:txBody>
+          <a:bodyPr wrap="square" lIns="0" rIns="0" tIns="0" bIns="0">
             <a:spAutoFit/>
           </a:bodyPr>
           <a:lstStyle/>
           <a:p>
             <a:pPr algn="l">
               <a:lnSpc>
-                <a:spcPct val="106000"/>
-              </a:lnSpc>
-              <a:spcAft>
-                <a:spcPts val="1200"/>
-              </a:spcAft>
-            </a:pPr>
-            <a:r>
-              <a:rPr sz="1250" b="0">
-                <a:solidFill>
-                  <a:srgbClr val="5D6B7A"/>
-                </a:solidFill>
-                <a:latin typeface="Calibri"/>
-              </a:rPr>
-              <a:t>Figure 5.  The same three checkpoints, the same matcher on both sides so the evaluator offset cancels: 0.8730 ± 0.0011 in-domain against 0.1003 ± 0.0053 on ImageWeeds. Best species Ragweed 0.9604 → Ragweed 0.0006. An in-domain weed detector does not transfer across imaging domains, and no amount of in-domain data fixes that. Source: results/framework/s6_crossdataset_imageweeds.json.</a:t>
-            </a:r>
-          </a:p>
-        </p:txBody>
-      </p:sp>
-      <p:sp>
-        <p:nvSpPr>
-          <p:cNvPr id="55" name="TextBox 54"/>
-          <p:cNvSpPr txBox="1"/>
-          <p:nvPr/>
-        </p:nvSpPr>
-        <p:spPr>
-          <a:xfrm>
-            <a:off x="22197060" y="16447971"/>
-            <a:ext cx="10184130" cy="502920"/>
-          </a:xfrm>
-          <a:prstGeom prst="rect">
-            <a:avLst/>
-          </a:prstGeom>
-          <a:noFill/>
-        </p:spPr>
-        <p:txBody>
-          <a:bodyPr wrap="square" anchor="t" lIns="0" rIns="0" tIns="0" bIns="0">
-            <a:spAutoFit/>
-          </a:bodyPr>
-          <a:lstStyle/>
-          <a:p>
-            <a:pPr algn="l">
-              <a:lnSpc>
-                <a:spcPct val="90000"/>
-              </a:lnSpc>
-              <a:spcAft>
-                <a:spcPts val="600"/>
-              </a:spcAft>
-            </a:pPr>
-            <a:r>
-              <a:rPr sz="2600" b="1">
-                <a:solidFill>
-                  <a:srgbClr val="0A4D8C"/>
-                </a:solidFill>
-                <a:latin typeface="Calibri"/>
-              </a:rPr>
-              <a:t>WHY THE LOOP LOOKED LIKE IT WAS LEARNING</a:t>
-            </a:r>
-          </a:p>
-        </p:txBody>
-      </p:sp>
-      <p:sp>
-        <p:nvSpPr>
-          <p:cNvPr id="56" name="Rectangle 55"/>
+                <a:spcPct val="100000"/>
+              </a:lnSpc>
+              <a:spcAft>
+                <a:spcPts val="0"/>
+              </a:spcAft>
+            </a:pPr>
+            <a:r>
+              <a:rPr sz="1250" b="1">
+                <a:solidFill>
+                  <a:srgbClr val="1E293B"/>
+                </a:solidFill>
+                <a:latin typeface="Arial"/>
+              </a:rPr>
+              <a:t>harvested added</a:t>
+            </a:r>
+          </a:p>
+        </p:txBody>
+      </p:sp>
+      <p:sp>
+        <p:nvSpPr>
+          <p:cNvPr id="68" name="TextBox 67"/>
+          <p:cNvSpPr txBox="1"/>
+          <p:nvPr/>
+        </p:nvSpPr>
+        <p:spPr>
+          <a:xfrm>
+            <a:off x="26792377" y="14894955"/>
+            <a:ext cx="3796131" cy="365760"/>
+          </a:xfrm>
+          <a:prstGeom prst="rect">
+            <a:avLst/>
+          </a:prstGeom>
+          <a:noFill/>
+        </p:spPr>
+        <p:txBody>
+          <a:bodyPr wrap="square" lIns="0" rIns="0" tIns="0" bIns="0">
+            <a:spAutoFit/>
+          </a:bodyPr>
+          <a:lstStyle/>
+          <a:p>
+            <a:pPr algn="r">
+              <a:lnSpc>
+                <a:spcPct val="100000"/>
+              </a:lnSpc>
+              <a:spcAft>
+                <a:spcPts val="0"/>
+              </a:spcAft>
+            </a:pPr>
+            <a:r>
+              <a:rPr sz="1250" b="1">
+                <a:solidFill>
+                  <a:srgbClr val="1E293B"/>
+                </a:solidFill>
+                <a:latin typeface="Arial"/>
+              </a:rPr>
+              <a:t>mAP₅₀₋₉₅</a:t>
+            </a:r>
+          </a:p>
+        </p:txBody>
+      </p:sp>
+      <p:sp>
+        <p:nvSpPr>
+          <p:cNvPr id="69" name="TextBox 68"/>
+          <p:cNvSpPr txBox="1"/>
+          <p:nvPr/>
+        </p:nvSpPr>
+        <p:spPr>
+          <a:xfrm>
+            <a:off x="30588508" y="14894955"/>
+            <a:ext cx="1598371" cy="365760"/>
+          </a:xfrm>
+          <a:prstGeom prst="rect">
+            <a:avLst/>
+          </a:prstGeom>
+          <a:noFill/>
+        </p:spPr>
+        <p:txBody>
+          <a:bodyPr wrap="square" lIns="0" rIns="0" tIns="0" bIns="0">
+            <a:spAutoFit/>
+          </a:bodyPr>
+          <a:lstStyle/>
+          <a:p>
+            <a:pPr algn="r">
+              <a:lnSpc>
+                <a:spcPct val="100000"/>
+              </a:lnSpc>
+              <a:spcAft>
+                <a:spcPts val="0"/>
+              </a:spcAft>
+            </a:pPr>
+            <a:r>
+              <a:rPr sz="1250" b="1">
+                <a:solidFill>
+                  <a:srgbClr val="1E293B"/>
+                </a:solidFill>
+                <a:latin typeface="Arial"/>
+              </a:rPr>
+              <a:t>n</a:t>
+            </a:r>
+          </a:p>
+        </p:txBody>
+      </p:sp>
+      <p:sp>
+        <p:nvSpPr>
+          <p:cNvPr id="70" name="Rectangle 69"/>
           <p:cNvSpPr/>
           <p:nvPr/>
         </p:nvSpPr>
         <p:spPr>
           <a:xfrm>
-            <a:off x="22197060" y="16996611"/>
-            <a:ext cx="10184130" cy="32004"/>
+            <a:off x="22197060" y="15169275"/>
+            <a:ext cx="9989819" cy="12801"/>
           </a:xfrm>
           <a:prstGeom prst="rect">
             <a:avLst/>
           </a:prstGeom>
           <a:solidFill>
-            <a:srgbClr val="0A4D8C"/>
+            <a:srgbClr val="C2CEDA"/>
           </a:solidFill>
           <a:ln>
             <a:noFill/>
@@ -5377,130 +5965,526 @@
           </a:p>
         </p:txBody>
       </p:sp>
-      <p:pic>
-        <p:nvPicPr>
-          <p:cNvPr id="57" name="Picture 56" descr="f6_rounds.png"/>
-          <p:cNvPicPr>
-            <a:picLocks noChangeAspect="1"/>
-          </p:cNvPicPr>
-          <p:nvPr/>
-        </p:nvPicPr>
-        <p:blipFill>
-          <a:blip r:embed="rId7"/>
-          <a:stretch>
-            <a:fillRect/>
-          </a:stretch>
-        </p:blipFill>
-        <p:spPr>
-          <a:xfrm>
-            <a:off x="22197060" y="17197779"/>
-            <a:ext cx="10184130" cy="3602792"/>
-          </a:xfrm>
-          <a:prstGeom prst="rect">
-            <a:avLst/>
-          </a:prstGeom>
-        </p:spPr>
-      </p:pic>
-      <p:sp>
-        <p:nvSpPr>
-          <p:cNvPr id="58" name="TextBox 57"/>
-          <p:cNvSpPr txBox="1"/>
-          <p:nvPr/>
-        </p:nvSpPr>
-        <p:spPr>
-          <a:xfrm>
-            <a:off x="22197060" y="20892011"/>
-            <a:ext cx="10184130" cy="365760"/>
-          </a:xfrm>
-          <a:prstGeom prst="rect">
-            <a:avLst/>
-          </a:prstGeom>
-          <a:noFill/>
-        </p:spPr>
-        <p:txBody>
-          <a:bodyPr wrap="square" anchor="t" lIns="0" rIns="0" tIns="0" bIns="0">
+      <p:sp>
+        <p:nvSpPr>
+          <p:cNvPr id="71" name="TextBox 70"/>
+          <p:cNvSpPr txBox="1"/>
+          <p:nvPr/>
+        </p:nvSpPr>
+        <p:spPr>
+          <a:xfrm>
+            <a:off x="22197060" y="15251571"/>
+            <a:ext cx="4595317" cy="365760"/>
+          </a:xfrm>
+          <a:prstGeom prst="rect">
+            <a:avLst/>
+          </a:prstGeom>
+          <a:noFill/>
+        </p:spPr>
+        <p:txBody>
+          <a:bodyPr wrap="square" lIns="0" rIns="0" tIns="0" bIns="0">
             <a:spAutoFit/>
           </a:bodyPr>
           <a:lstStyle/>
           <a:p>
             <a:pPr algn="l">
               <a:lnSpc>
-                <a:spcPct val="106000"/>
-              </a:lnSpc>
-              <a:spcAft>
-                <a:spcPts val="1200"/>
-              </a:spcAft>
-            </a:pPr>
-            <a:r>
-              <a:rPr sz="1250" b="0">
-                <a:solidFill>
-                  <a:srgbClr val="5D6B7A"/>
-                </a:solidFill>
-                <a:latin typeface="Calibri"/>
-              </a:rPr>
-              <a:t>Figure 6.  Left: fifteen unattended rounds, reported metric and last-epoch metric. The shaded region is where the training corpus stopped changing — 24 datasets, 48,752 unique images, identical from round 3 to round 15. Right: on round 15's exact dataset, starting fresh scores 0.5805 against the chained recipe's 0.5577 ± 0.0040 (n = 3), a gap of +0.0287 at 5.0 standard deviations with the schedule held constant. The decline is the chain, not the data.</a:t>
-            </a:r>
-          </a:p>
-        </p:txBody>
-      </p:sp>
-      <p:sp>
-        <p:nvSpPr>
-          <p:cNvPr id="59" name="TextBox 58"/>
-          <p:cNvSpPr txBox="1"/>
-          <p:nvPr/>
-        </p:nvSpPr>
-        <p:spPr>
-          <a:xfrm>
-            <a:off x="32884110" y="6903720"/>
-            <a:ext cx="10184130" cy="502920"/>
-          </a:xfrm>
-          <a:prstGeom prst="rect">
-            <a:avLst/>
-          </a:prstGeom>
-          <a:noFill/>
-        </p:spPr>
-        <p:txBody>
-          <a:bodyPr wrap="square" anchor="t" lIns="0" rIns="0" tIns="0" bIns="0">
+                <a:spcPct val="100000"/>
+              </a:lnSpc>
+              <a:spcAft>
+                <a:spcPts val="0"/>
+              </a:spcAft>
+            </a:pPr>
+            <a:r>
+              <a:rPr sz="1300" b="0">
+                <a:solidFill>
+                  <a:srgbClr val="1E293B"/>
+                </a:solidFill>
+                <a:latin typeface="Arial"/>
+              </a:rPr>
+              <a:t>none — the core</a:t>
+            </a:r>
+          </a:p>
+        </p:txBody>
+      </p:sp>
+      <p:sp>
+        <p:nvSpPr>
+          <p:cNvPr id="72" name="TextBox 71"/>
+          <p:cNvSpPr txBox="1"/>
+          <p:nvPr/>
+        </p:nvSpPr>
+        <p:spPr>
+          <a:xfrm>
+            <a:off x="26792377" y="15251571"/>
+            <a:ext cx="3796131" cy="365760"/>
+          </a:xfrm>
+          <a:prstGeom prst="rect">
+            <a:avLst/>
+          </a:prstGeom>
+          <a:noFill/>
+        </p:spPr>
+        <p:txBody>
+          <a:bodyPr wrap="square" lIns="0" rIns="0" tIns="0" bIns="0">
+            <a:spAutoFit/>
+          </a:bodyPr>
+          <a:lstStyle/>
+          <a:p>
+            <a:pPr algn="r">
+              <a:lnSpc>
+                <a:spcPct val="100000"/>
+              </a:lnSpc>
+              <a:spcAft>
+                <a:spcPts val="0"/>
+              </a:spcAft>
+            </a:pPr>
+            <a:r>
+              <a:rPr sz="1300" b="0">
+                <a:solidFill>
+                  <a:srgbClr val="1E293B"/>
+                </a:solidFill>
+                <a:latin typeface="Arial"/>
+              </a:rPr>
+              <a:t>0.8637 ± 0.0027</a:t>
+            </a:r>
+          </a:p>
+        </p:txBody>
+      </p:sp>
+      <p:sp>
+        <p:nvSpPr>
+          <p:cNvPr id="73" name="TextBox 72"/>
+          <p:cNvSpPr txBox="1"/>
+          <p:nvPr/>
+        </p:nvSpPr>
+        <p:spPr>
+          <a:xfrm>
+            <a:off x="30588508" y="15251571"/>
+            <a:ext cx="1598371" cy="365760"/>
+          </a:xfrm>
+          <a:prstGeom prst="rect">
+            <a:avLst/>
+          </a:prstGeom>
+          <a:noFill/>
+        </p:spPr>
+        <p:txBody>
+          <a:bodyPr wrap="square" lIns="0" rIns="0" tIns="0" bIns="0">
+            <a:spAutoFit/>
+          </a:bodyPr>
+          <a:lstStyle/>
+          <a:p>
+            <a:pPr algn="r">
+              <a:lnSpc>
+                <a:spcPct val="100000"/>
+              </a:lnSpc>
+              <a:spcAft>
+                <a:spcPts val="0"/>
+              </a:spcAft>
+            </a:pPr>
+            <a:r>
+              <a:rPr sz="1300" b="0">
+                <a:solidFill>
+                  <a:srgbClr val="1E293B"/>
+                </a:solidFill>
+                <a:latin typeface="Arial"/>
+              </a:rPr>
+              <a:t>3</a:t>
+            </a:r>
+          </a:p>
+        </p:txBody>
+      </p:sp>
+      <p:sp>
+        <p:nvSpPr>
+          <p:cNvPr id="74" name="TextBox 73"/>
+          <p:cNvSpPr txBox="1"/>
+          <p:nvPr/>
+        </p:nvSpPr>
+        <p:spPr>
+          <a:xfrm>
+            <a:off x="22197060" y="15562467"/>
+            <a:ext cx="4595317" cy="365760"/>
+          </a:xfrm>
+          <a:prstGeom prst="rect">
+            <a:avLst/>
+          </a:prstGeom>
+          <a:noFill/>
+        </p:spPr>
+        <p:txBody>
+          <a:bodyPr wrap="square" lIns="0" rIns="0" tIns="0" bIns="0">
             <a:spAutoFit/>
           </a:bodyPr>
           <a:lstStyle/>
           <a:p>
             <a:pPr algn="l">
               <a:lnSpc>
-                <a:spcPct val="90000"/>
-              </a:lnSpc>
-              <a:spcAft>
-                <a:spcPts val="600"/>
-              </a:spcAft>
-            </a:pPr>
-            <a:r>
-              <a:rPr sz="2600" b="1">
-                <a:solidFill>
-                  <a:srgbClr val="0A4D8C"/>
-                </a:solidFill>
-                <a:latin typeface="Calibri"/>
-              </a:rPr>
-              <a:t>WHAT SUPERVISION ACTUALLY CATCHES</a:t>
-            </a:r>
-          </a:p>
-        </p:txBody>
-      </p:sp>
-      <p:sp>
-        <p:nvSpPr>
-          <p:cNvPr id="60" name="Rectangle 59"/>
+                <a:spcPct val="100000"/>
+              </a:lnSpc>
+              <a:spcAft>
+                <a:spcPts val="0"/>
+              </a:spcAft>
+            </a:pPr>
+            <a:r>
+              <a:rPr sz="1300" b="0">
+                <a:solidFill>
+                  <a:srgbClr val="1E293B"/>
+                </a:solidFill>
+                <a:latin typeface="Arial"/>
+              </a:rPr>
+              <a:t>+5,000</a:t>
+            </a:r>
+          </a:p>
+        </p:txBody>
+      </p:sp>
+      <p:sp>
+        <p:nvSpPr>
+          <p:cNvPr id="75" name="TextBox 74"/>
+          <p:cNvSpPr txBox="1"/>
+          <p:nvPr/>
+        </p:nvSpPr>
+        <p:spPr>
+          <a:xfrm>
+            <a:off x="26792377" y="15562467"/>
+            <a:ext cx="3796131" cy="365760"/>
+          </a:xfrm>
+          <a:prstGeom prst="rect">
+            <a:avLst/>
+          </a:prstGeom>
+          <a:noFill/>
+        </p:spPr>
+        <p:txBody>
+          <a:bodyPr wrap="square" lIns="0" rIns="0" tIns="0" bIns="0">
+            <a:spAutoFit/>
+          </a:bodyPr>
+          <a:lstStyle/>
+          <a:p>
+            <a:pPr algn="r">
+              <a:lnSpc>
+                <a:spcPct val="100000"/>
+              </a:lnSpc>
+              <a:spcAft>
+                <a:spcPts val="0"/>
+              </a:spcAft>
+            </a:pPr>
+            <a:r>
+              <a:rPr sz="1300" b="0">
+                <a:solidFill>
+                  <a:srgbClr val="1E293B"/>
+                </a:solidFill>
+                <a:latin typeface="Arial"/>
+              </a:rPr>
+              <a:t>0.8609 ± 0.0036</a:t>
+            </a:r>
+          </a:p>
+        </p:txBody>
+      </p:sp>
+      <p:sp>
+        <p:nvSpPr>
+          <p:cNvPr id="76" name="TextBox 75"/>
+          <p:cNvSpPr txBox="1"/>
+          <p:nvPr/>
+        </p:nvSpPr>
+        <p:spPr>
+          <a:xfrm>
+            <a:off x="30588508" y="15562467"/>
+            <a:ext cx="1598371" cy="365760"/>
+          </a:xfrm>
+          <a:prstGeom prst="rect">
+            <a:avLst/>
+          </a:prstGeom>
+          <a:noFill/>
+        </p:spPr>
+        <p:txBody>
+          <a:bodyPr wrap="square" lIns="0" rIns="0" tIns="0" bIns="0">
+            <a:spAutoFit/>
+          </a:bodyPr>
+          <a:lstStyle/>
+          <a:p>
+            <a:pPr algn="r">
+              <a:lnSpc>
+                <a:spcPct val="100000"/>
+              </a:lnSpc>
+              <a:spcAft>
+                <a:spcPts val="0"/>
+              </a:spcAft>
+            </a:pPr>
+            <a:r>
+              <a:rPr sz="1300" b="0">
+                <a:solidFill>
+                  <a:srgbClr val="1E293B"/>
+                </a:solidFill>
+                <a:latin typeface="Arial"/>
+              </a:rPr>
+              <a:t>3</a:t>
+            </a:r>
+          </a:p>
+        </p:txBody>
+      </p:sp>
+      <p:sp>
+        <p:nvSpPr>
+          <p:cNvPr id="77" name="TextBox 76"/>
+          <p:cNvSpPr txBox="1"/>
+          <p:nvPr/>
+        </p:nvSpPr>
+        <p:spPr>
+          <a:xfrm>
+            <a:off x="22197060" y="15873363"/>
+            <a:ext cx="4595317" cy="365760"/>
+          </a:xfrm>
+          <a:prstGeom prst="rect">
+            <a:avLst/>
+          </a:prstGeom>
+          <a:noFill/>
+        </p:spPr>
+        <p:txBody>
+          <a:bodyPr wrap="square" lIns="0" rIns="0" tIns="0" bIns="0">
+            <a:spAutoFit/>
+          </a:bodyPr>
+          <a:lstStyle/>
+          <a:p>
+            <a:pPr algn="l">
+              <a:lnSpc>
+                <a:spcPct val="100000"/>
+              </a:lnSpc>
+              <a:spcAft>
+                <a:spcPts val="0"/>
+              </a:spcAft>
+            </a:pPr>
+            <a:r>
+              <a:rPr sz="1300" b="0">
+                <a:solidFill>
+                  <a:srgbClr val="1E293B"/>
+                </a:solidFill>
+                <a:latin typeface="Arial"/>
+              </a:rPr>
+              <a:t>+15,000</a:t>
+            </a:r>
+          </a:p>
+        </p:txBody>
+      </p:sp>
+      <p:sp>
+        <p:nvSpPr>
+          <p:cNvPr id="78" name="TextBox 77"/>
+          <p:cNvSpPr txBox="1"/>
+          <p:nvPr/>
+        </p:nvSpPr>
+        <p:spPr>
+          <a:xfrm>
+            <a:off x="26792377" y="15873363"/>
+            <a:ext cx="3796131" cy="365760"/>
+          </a:xfrm>
+          <a:prstGeom prst="rect">
+            <a:avLst/>
+          </a:prstGeom>
+          <a:noFill/>
+        </p:spPr>
+        <p:txBody>
+          <a:bodyPr wrap="square" lIns="0" rIns="0" tIns="0" bIns="0">
+            <a:spAutoFit/>
+          </a:bodyPr>
+          <a:lstStyle/>
+          <a:p>
+            <a:pPr algn="r">
+              <a:lnSpc>
+                <a:spcPct val="100000"/>
+              </a:lnSpc>
+              <a:spcAft>
+                <a:spcPts val="0"/>
+              </a:spcAft>
+            </a:pPr>
+            <a:r>
+              <a:rPr sz="1300" b="0">
+                <a:solidFill>
+                  <a:srgbClr val="1E293B"/>
+                </a:solidFill>
+                <a:latin typeface="Arial"/>
+              </a:rPr>
+              <a:t>0.8580 ± 0.0047</a:t>
+            </a:r>
+          </a:p>
+        </p:txBody>
+      </p:sp>
+      <p:sp>
+        <p:nvSpPr>
+          <p:cNvPr id="79" name="TextBox 78"/>
+          <p:cNvSpPr txBox="1"/>
+          <p:nvPr/>
+        </p:nvSpPr>
+        <p:spPr>
+          <a:xfrm>
+            <a:off x="30588508" y="15873363"/>
+            <a:ext cx="1598371" cy="365760"/>
+          </a:xfrm>
+          <a:prstGeom prst="rect">
+            <a:avLst/>
+          </a:prstGeom>
+          <a:noFill/>
+        </p:spPr>
+        <p:txBody>
+          <a:bodyPr wrap="square" lIns="0" rIns="0" tIns="0" bIns="0">
+            <a:spAutoFit/>
+          </a:bodyPr>
+          <a:lstStyle/>
+          <a:p>
+            <a:pPr algn="r">
+              <a:lnSpc>
+                <a:spcPct val="100000"/>
+              </a:lnSpc>
+              <a:spcAft>
+                <a:spcPts val="0"/>
+              </a:spcAft>
+            </a:pPr>
+            <a:r>
+              <a:rPr sz="1300" b="0">
+                <a:solidFill>
+                  <a:srgbClr val="1E293B"/>
+                </a:solidFill>
+                <a:latin typeface="Arial"/>
+              </a:rPr>
+              <a:t>3</a:t>
+            </a:r>
+          </a:p>
+        </p:txBody>
+      </p:sp>
+      <p:sp>
+        <p:nvSpPr>
+          <p:cNvPr id="80" name="TextBox 79"/>
+          <p:cNvSpPr txBox="1"/>
+          <p:nvPr/>
+        </p:nvSpPr>
+        <p:spPr>
+          <a:xfrm>
+            <a:off x="22197060" y="16184259"/>
+            <a:ext cx="4595317" cy="365760"/>
+          </a:xfrm>
+          <a:prstGeom prst="rect">
+            <a:avLst/>
+          </a:prstGeom>
+          <a:noFill/>
+        </p:spPr>
+        <p:txBody>
+          <a:bodyPr wrap="square" lIns="0" rIns="0" tIns="0" bIns="0">
+            <a:spAutoFit/>
+          </a:bodyPr>
+          <a:lstStyle/>
+          <a:p>
+            <a:pPr algn="l">
+              <a:lnSpc>
+                <a:spcPct val="100000"/>
+              </a:lnSpc>
+              <a:spcAft>
+                <a:spcPts val="0"/>
+              </a:spcAft>
+            </a:pPr>
+            <a:r>
+              <a:rPr sz="1300" b="0">
+                <a:solidFill>
+                  <a:srgbClr val="1E293B"/>
+                </a:solidFill>
+                <a:latin typeface="Arial"/>
+              </a:rPr>
+              <a:t>+40,000</a:t>
+            </a:r>
+          </a:p>
+        </p:txBody>
+      </p:sp>
+      <p:sp>
+        <p:nvSpPr>
+          <p:cNvPr id="81" name="TextBox 80"/>
+          <p:cNvSpPr txBox="1"/>
+          <p:nvPr/>
+        </p:nvSpPr>
+        <p:spPr>
+          <a:xfrm>
+            <a:off x="26792377" y="16184259"/>
+            <a:ext cx="3796131" cy="365760"/>
+          </a:xfrm>
+          <a:prstGeom prst="rect">
+            <a:avLst/>
+          </a:prstGeom>
+          <a:noFill/>
+        </p:spPr>
+        <p:txBody>
+          <a:bodyPr wrap="square" lIns="0" rIns="0" tIns="0" bIns="0">
+            <a:spAutoFit/>
+          </a:bodyPr>
+          <a:lstStyle/>
+          <a:p>
+            <a:pPr algn="r">
+              <a:lnSpc>
+                <a:spcPct val="100000"/>
+              </a:lnSpc>
+              <a:spcAft>
+                <a:spcPts val="0"/>
+              </a:spcAft>
+            </a:pPr>
+            <a:r>
+              <a:rPr sz="1300" b="0">
+                <a:solidFill>
+                  <a:srgbClr val="1E293B"/>
+                </a:solidFill>
+                <a:latin typeface="Arial"/>
+              </a:rPr>
+              <a:t>0.8436</a:t>
+            </a:r>
+          </a:p>
+        </p:txBody>
+      </p:sp>
+      <p:sp>
+        <p:nvSpPr>
+          <p:cNvPr id="82" name="TextBox 81"/>
+          <p:cNvSpPr txBox="1"/>
+          <p:nvPr/>
+        </p:nvSpPr>
+        <p:spPr>
+          <a:xfrm>
+            <a:off x="30588508" y="16184259"/>
+            <a:ext cx="1598371" cy="365760"/>
+          </a:xfrm>
+          <a:prstGeom prst="rect">
+            <a:avLst/>
+          </a:prstGeom>
+          <a:noFill/>
+        </p:spPr>
+        <p:txBody>
+          <a:bodyPr wrap="square" lIns="0" rIns="0" tIns="0" bIns="0">
+            <a:spAutoFit/>
+          </a:bodyPr>
+          <a:lstStyle/>
+          <a:p>
+            <a:pPr algn="r">
+              <a:lnSpc>
+                <a:spcPct val="100000"/>
+              </a:lnSpc>
+              <a:spcAft>
+                <a:spcPts val="0"/>
+              </a:spcAft>
+            </a:pPr>
+            <a:r>
+              <a:rPr sz="1300" b="0">
+                <a:solidFill>
+                  <a:srgbClr val="1E293B"/>
+                </a:solidFill>
+                <a:latin typeface="Arial"/>
+              </a:rPr>
+              <a:t>1</a:t>
+            </a:r>
+          </a:p>
+        </p:txBody>
+      </p:sp>
+      <p:sp>
+        <p:nvSpPr>
+          <p:cNvPr id="83" name="Rectangle 82"/>
           <p:cNvSpPr/>
           <p:nvPr/>
         </p:nvSpPr>
         <p:spPr>
           <a:xfrm>
-            <a:off x="32884110" y="7452360"/>
-            <a:ext cx="10184130" cy="32004"/>
+            <a:off x="22197060" y="16513443"/>
+            <a:ext cx="9989819" cy="20116"/>
           </a:xfrm>
           <a:prstGeom prst="rect">
             <a:avLst/>
           </a:prstGeom>
           <a:solidFill>
-            <a:srgbClr val="0A4D8C"/>
+            <a:srgbClr val="1E293B"/>
           </a:solidFill>
           <a:ln>
             <a:noFill/>
@@ -5529,24 +6513,108 @@
           </a:p>
         </p:txBody>
       </p:sp>
+      <p:sp>
+        <p:nvSpPr>
+          <p:cNvPr id="84" name="TextBox 83"/>
+          <p:cNvSpPr txBox="1"/>
+          <p:nvPr/>
+        </p:nvSpPr>
+        <p:spPr>
+          <a:xfrm>
+            <a:off x="22197060" y="16714610"/>
+            <a:ext cx="9989819" cy="365760"/>
+          </a:xfrm>
+          <a:prstGeom prst="rect">
+            <a:avLst/>
+          </a:prstGeom>
+          <a:noFill/>
+        </p:spPr>
+        <p:txBody>
+          <a:bodyPr wrap="square" lIns="0" rIns="0" tIns="0" bIns="0">
+            <a:spAutoFit/>
+          </a:bodyPr>
+          <a:lstStyle/>
+          <a:p>
+            <a:pPr algn="l">
+              <a:lnSpc>
+                <a:spcPct val="122000"/>
+              </a:lnSpc>
+              <a:spcAft>
+                <a:spcPts val="1000"/>
+              </a:spcAft>
+            </a:pPr>
+            <a:r>
+              <a:rPr sz="1250" b="0">
+                <a:solidFill>
+                  <a:srgbClr val="556575"/>
+                </a:solidFill>
+                <a:latin typeface="Arial"/>
+              </a:rPr>
+              <a:t>−0.0028 and −0.0057 sit inside pooled seed spreads of 0.0032 and 0.0039, so neither is separable. Only +40,000 is, and it is still a single run.</a:t>
+            </a:r>
+          </a:p>
+        </p:txBody>
+      </p:sp>
+      <p:sp>
+        <p:nvSpPr>
+          <p:cNvPr id="85" name="TextBox 84"/>
+          <p:cNvSpPr txBox="1"/>
+          <p:nvPr/>
+        </p:nvSpPr>
+        <p:spPr>
+          <a:xfrm>
+            <a:off x="11704320" y="21171976"/>
+            <a:ext cx="20482560" cy="365760"/>
+          </a:xfrm>
+          <a:prstGeom prst="rect">
+            <a:avLst/>
+          </a:prstGeom>
+          <a:noFill/>
+        </p:spPr>
+        <p:txBody>
+          <a:bodyPr wrap="square" lIns="0" rIns="0" tIns="0" bIns="0">
+            <a:spAutoFit/>
+          </a:bodyPr>
+          <a:lstStyle/>
+          <a:p>
+            <a:pPr algn="l">
+              <a:lnSpc>
+                <a:spcPct val="100000"/>
+              </a:lnSpc>
+              <a:spcAft>
+                <a:spcPts val="0"/>
+              </a:spcAft>
+            </a:pPr>
+            <a:r>
+              <a:rPr sz="1800" b="1">
+                <a:solidFill>
+                  <a:srgbClr val="1E293B"/>
+                </a:solidFill>
+                <a:latin typeface="Arial"/>
+              </a:rPr>
+              <a:t>What catches the pipeline failing</a:t>
+            </a:r>
+          </a:p>
+        </p:txBody>
+      </p:sp>
       <p:pic>
         <p:nvPicPr>
-          <p:cNvPr id="61" name="Picture 60" descr="f5_supervision.png"/>
+          <p:cNvPr id="86" name="Picture 85" descr="e_supervision.png"/>
           <p:cNvPicPr>
             <a:picLocks noChangeAspect="1"/>
           </p:cNvPicPr>
           <p:nvPr/>
         </p:nvPicPr>
         <p:blipFill>
-          <a:blip r:embed="rId8"/>
+          <a:blip r:embed="rId7"/>
           <a:stretch>
             <a:fillRect/>
           </a:stretch>
         </p:blipFill>
         <p:spPr>
           <a:xfrm>
-            <a:off x="32884110" y="7653527"/>
-            <a:ext cx="10184130" cy="3371734"/>
+            <a:off x="11704320" y="21482872"/>
+            <a:ext cx="9989819" cy="5399525"/>
           </a:xfrm>
           <a:prstGeom prst="rect">
             <a:avLst/>
@@ -5555,104 +6623,104 @@
       </p:pic>
       <p:sp>
         <p:nvSpPr>
-          <p:cNvPr id="62" name="TextBox 61"/>
-          <p:cNvSpPr txBox="1"/>
-          <p:nvPr/>
-        </p:nvSpPr>
-        <p:spPr>
-          <a:xfrm>
-            <a:off x="32884110" y="11116701"/>
-            <a:ext cx="10184130" cy="365760"/>
-          </a:xfrm>
-          <a:prstGeom prst="rect">
-            <a:avLst/>
-          </a:prstGeom>
-          <a:noFill/>
-        </p:spPr>
-        <p:txBody>
-          <a:bodyPr wrap="square" anchor="t" lIns="0" rIns="0" tIns="0" bIns="0">
+          <p:cNvPr id="87" name="TextBox 86"/>
+          <p:cNvSpPr txBox="1"/>
+          <p:nvPr/>
+        </p:nvSpPr>
+        <p:spPr>
+          <a:xfrm>
+            <a:off x="11704320" y="26973837"/>
+            <a:ext cx="9989819" cy="365760"/>
+          </a:xfrm>
+          <a:prstGeom prst="rect">
+            <a:avLst/>
+          </a:prstGeom>
+          <a:noFill/>
+        </p:spPr>
+        <p:txBody>
+          <a:bodyPr wrap="square" lIns="0" rIns="0" tIns="0" bIns="0">
             <a:spAutoFit/>
           </a:bodyPr>
           <a:lstStyle/>
           <a:p>
             <a:pPr algn="l">
               <a:lnSpc>
-                <a:spcPct val="106000"/>
-              </a:lnSpc>
-              <a:spcAft>
-                <a:spcPts val="1200"/>
-              </a:spcAft>
-            </a:pPr>
-            <a:r>
-              <a:rPr sz="1250" b="0">
-                <a:solidFill>
-                  <a:srgbClr val="5D6B7A"/>
-                </a:solidFill>
-                <a:latin typeface="Calibri"/>
-              </a:rPr>
-              <a:t>Figure 7.  A frozen corpus of 162 real incidents from this project's own history, scored on the dev split: 116 incidents, 33 controls. Bars right of zero are recall, left of zero are false alarms. The scripted watchdog reads status fields and flags nothing, 149 times out of 149. The twelve deterministic checks catch 11. A model reading raw artifact excerpts catches four to eight times more. The dotted line is the ceiling any rules-only arm has on this corpus: 56 of the 127 incidents declare no deterministic signal that could reach them.</a:t>
-            </a:r>
-          </a:p>
-        </p:txBody>
-      </p:sp>
-      <p:sp>
-        <p:nvSpPr>
-          <p:cNvPr id="63" name="TextBox 62"/>
-          <p:cNvSpPr txBox="1"/>
-          <p:nvPr/>
-        </p:nvSpPr>
-        <p:spPr>
-          <a:xfrm>
-            <a:off x="32884110" y="12308469"/>
-            <a:ext cx="10184130" cy="502920"/>
-          </a:xfrm>
-          <a:prstGeom prst="rect">
-            <a:avLst/>
-          </a:prstGeom>
-          <a:noFill/>
-        </p:spPr>
-        <p:txBody>
-          <a:bodyPr wrap="square" anchor="t" lIns="0" rIns="0" tIns="0" bIns="0">
+                <a:spcPct val="120000"/>
+              </a:lnSpc>
+              <a:spcAft>
+                <a:spcPts val="0"/>
+              </a:spcAft>
+            </a:pPr>
+            <a:r>
+              <a:rPr sz="1200" b="0">
+                <a:solidFill>
+                  <a:srgbClr val="556575"/>
+                </a:solidFill>
+                <a:latin typeface="Arial"/>
+              </a:rPr>
+              <a:t>Figure 6.  Every arm on one frozen corpus of 162 real incidents from this project's own history. Up and to the left is better. The scripted watchdog sits at the origin: it flagged nothing, 149 times out of 149.</a:t>
+            </a:r>
+          </a:p>
+        </p:txBody>
+      </p:sp>
+      <p:sp>
+        <p:nvSpPr>
+          <p:cNvPr id="88" name="TextBox 87"/>
+          <p:cNvSpPr txBox="1"/>
+          <p:nvPr/>
+        </p:nvSpPr>
+        <p:spPr>
+          <a:xfrm>
+            <a:off x="22197060" y="21482872"/>
+            <a:ext cx="9989819" cy="365760"/>
+          </a:xfrm>
+          <a:prstGeom prst="rect">
+            <a:avLst/>
+          </a:prstGeom>
+          <a:noFill/>
+        </p:spPr>
+        <p:txBody>
+          <a:bodyPr wrap="square" lIns="0" rIns="0" tIns="0" bIns="0">
             <a:spAutoFit/>
           </a:bodyPr>
           <a:lstStyle/>
           <a:p>
             <a:pPr algn="l">
               <a:lnSpc>
-                <a:spcPct val="90000"/>
-              </a:lnSpc>
-              <a:spcAft>
-                <a:spcPts val="600"/>
-              </a:spcAft>
-            </a:pPr>
-            <a:r>
-              <a:rPr sz="2600" b="1">
-                <a:solidFill>
-                  <a:srgbClr val="0A4D8C"/>
-                </a:solidFill>
-                <a:latin typeface="Calibri"/>
-              </a:rPr>
-              <a:t>CONCLUSIONS</a:t>
-            </a:r>
-          </a:p>
-        </p:txBody>
-      </p:sp>
-      <p:sp>
-        <p:nvSpPr>
-          <p:cNvPr id="64" name="Rectangle 63"/>
+                <a:spcPct val="122000"/>
+              </a:lnSpc>
+              <a:spcAft>
+                <a:spcPts val="1000"/>
+              </a:spcAft>
+            </a:pPr>
+            <a:r>
+              <a:rPr sz="1350" b="0">
+                <a:solidFill>
+                  <a:srgbClr val="1E293B"/>
+                </a:solidFill>
+                <a:latin typeface="Arial"/>
+              </a:rPr>
+              <a:t>A frozen corpus of 162 real incidents from this project's own engineering record, scored on the dev split: 116 incidents and 33 controls. Recall is over incidents, the false-alarm rate over controls, and an arm that cannot decide a case is counted as a miss.</a:t>
+            </a:r>
+          </a:p>
+        </p:txBody>
+      </p:sp>
+      <p:sp>
+        <p:nvSpPr>
+          <p:cNvPr id="89" name="Rectangle 88"/>
           <p:cNvSpPr/>
           <p:nvPr/>
         </p:nvSpPr>
         <p:spPr>
           <a:xfrm>
-            <a:off x="32884110" y="12857109"/>
-            <a:ext cx="10184130" cy="32004"/>
+            <a:off x="22197060" y="22237379"/>
+            <a:ext cx="9989819" cy="20116"/>
           </a:xfrm>
           <a:prstGeom prst="rect">
             <a:avLst/>
           </a:prstGeom>
           <a:solidFill>
-            <a:srgbClr val="0A4D8C"/>
+            <a:srgbClr val="1E293B"/>
           </a:solidFill>
           <a:ln>
             <a:noFill/>
@@ -5683,272 +6751,146 @@
       </p:sp>
       <p:sp>
         <p:nvSpPr>
-          <p:cNvPr id="65" name="TextBox 64"/>
-          <p:cNvSpPr txBox="1"/>
-          <p:nvPr/>
-        </p:nvSpPr>
-        <p:spPr>
-          <a:xfrm>
-            <a:off x="32884110" y="13058277"/>
-            <a:ext cx="10184130" cy="365760"/>
-          </a:xfrm>
-          <a:prstGeom prst="rect">
-            <a:avLst/>
-          </a:prstGeom>
-          <a:noFill/>
-        </p:spPr>
-        <p:txBody>
-          <a:bodyPr wrap="square" anchor="t" lIns="0" rIns="0" tIns="0" bIns="0">
+          <p:cNvPr id="90" name="TextBox 89"/>
+          <p:cNvSpPr txBox="1"/>
+          <p:nvPr/>
+        </p:nvSpPr>
+        <p:spPr>
+          <a:xfrm>
+            <a:off x="22197060" y="22328819"/>
+            <a:ext cx="4795113" cy="365760"/>
+          </a:xfrm>
+          <a:prstGeom prst="rect">
+            <a:avLst/>
+          </a:prstGeom>
+          <a:noFill/>
+        </p:spPr>
+        <p:txBody>
+          <a:bodyPr wrap="square" lIns="0" rIns="0" tIns="0" bIns="0">
             <a:spAutoFit/>
           </a:bodyPr>
           <a:lstStyle/>
           <a:p>
             <a:pPr algn="l">
               <a:lnSpc>
-                <a:spcPct val="106000"/>
-              </a:lnSpc>
-              <a:spcAft>
-                <a:spcPts val="700"/>
-              </a:spcAft>
-            </a:pPr>
-            <a:r>
-              <a:rPr sz="1550" b="0">
-                <a:solidFill>
-                  <a:srgbClr val="12243A"/>
-                </a:solidFill>
-                <a:latin typeface="Calibri"/>
-              </a:rPr>
-              <a:t>1.  Initialisation beats architecture beats data. The data-collection lever the system was built around is the weakest of the three, and at +40,000 images it is negative.</a:t>
-            </a:r>
-          </a:p>
-        </p:txBody>
-      </p:sp>
-      <p:sp>
-        <p:nvSpPr>
-          <p:cNvPr id="66" name="TextBox 65"/>
-          <p:cNvSpPr txBox="1"/>
-          <p:nvPr/>
-        </p:nvSpPr>
-        <p:spPr>
-          <a:xfrm>
-            <a:off x="32884110" y="13666861"/>
-            <a:ext cx="10184130" cy="365760"/>
-          </a:xfrm>
-          <a:prstGeom prst="rect">
-            <a:avLst/>
-          </a:prstGeom>
-          <a:noFill/>
-        </p:spPr>
-        <p:txBody>
-          <a:bodyPr wrap="square" anchor="t" lIns="0" rIns="0" tIns="0" bIns="0">
-            <a:spAutoFit/>
-          </a:bodyPr>
-          <a:lstStyle/>
-          <a:p>
-            <a:pPr algn="l">
-              <a:lnSpc>
-                <a:spcPct val="106000"/>
-              </a:lnSpc>
-              <a:spcAft>
-                <a:spcPts val="700"/>
-              </a:spcAft>
-            </a:pPr>
-            <a:r>
-              <a:rPr sz="1550" b="0">
-                <a:solidFill>
-                  <a:srgbClr val="12243A"/>
-                </a:solidFill>
-                <a:latin typeface="Calibri"/>
-              </a:rPr>
-              <a:t>2.  The detector does not travel. 0.873 in-domain becomes 0.100 on another weed dataset, class-agnostic, same matcher both sides.</a:t>
-            </a:r>
-          </a:p>
-        </p:txBody>
-      </p:sp>
-      <p:sp>
-        <p:nvSpPr>
-          <p:cNvPr id="67" name="TextBox 66"/>
-          <p:cNvSpPr txBox="1"/>
-          <p:nvPr/>
-        </p:nvSpPr>
-        <p:spPr>
-          <a:xfrm>
-            <a:off x="32884110" y="14275445"/>
-            <a:ext cx="10184130" cy="365760"/>
-          </a:xfrm>
-          <a:prstGeom prst="rect">
-            <a:avLst/>
-          </a:prstGeom>
-          <a:noFill/>
-        </p:spPr>
-        <p:txBody>
-          <a:bodyPr wrap="square" anchor="t" lIns="0" rIns="0" tIns="0" bIns="0">
-            <a:spAutoFit/>
-          </a:bodyPr>
-          <a:lstStyle/>
-          <a:p>
-            <a:pPr algn="l">
-              <a:lnSpc>
-                <a:spcPct val="106000"/>
-              </a:lnSpc>
-              <a:spcAft>
-                <a:spcPts val="700"/>
-              </a:spcAft>
-            </a:pPr>
-            <a:r>
-              <a:rPr sz="1550" b="0">
-                <a:solidFill>
-                  <a:srgbClr val="12243A"/>
-                </a:solidFill>
-                <a:latin typeface="Calibri"/>
-              </a:rPr>
-              <a:t>3.  Web harvest supplies volume, not supervision. One of six audited sources clears a 0.90 label-precision bar.</a:t>
-            </a:r>
-          </a:p>
-        </p:txBody>
-      </p:sp>
-      <p:sp>
-        <p:nvSpPr>
-          <p:cNvPr id="68" name="TextBox 67"/>
-          <p:cNvSpPr txBox="1"/>
-          <p:nvPr/>
-        </p:nvSpPr>
-        <p:spPr>
-          <a:xfrm>
-            <a:off x="32884110" y="14884029"/>
-            <a:ext cx="10184130" cy="365760"/>
-          </a:xfrm>
-          <a:prstGeom prst="rect">
-            <a:avLst/>
-          </a:prstGeom>
-          <a:noFill/>
-        </p:spPr>
-        <p:txBody>
-          <a:bodyPr wrap="square" anchor="t" lIns="0" rIns="0" tIns="0" bIns="0">
-            <a:spAutoFit/>
-          </a:bodyPr>
-          <a:lstStyle/>
-          <a:p>
-            <a:pPr algn="l">
-              <a:lnSpc>
-                <a:spcPct val="106000"/>
-              </a:lnSpc>
-              <a:spcAft>
-                <a:spcPts val="700"/>
-              </a:spcAft>
-            </a:pPr>
-            <a:r>
-              <a:rPr sz="1550" b="0">
-                <a:solidFill>
-                  <a:srgbClr val="12243A"/>
-                </a:solidFill>
-                <a:latin typeface="Calibri"/>
-              </a:rPr>
-              <a:t>4.  Retrospective supervision needs the artifacts, not the status fields. A scripted watchdog over status fields caught none of 116 real incidents; a model reading the artifacts caught most.</a:t>
-            </a:r>
-          </a:p>
-        </p:txBody>
-      </p:sp>
-      <p:sp>
-        <p:nvSpPr>
-          <p:cNvPr id="69" name="TextBox 68"/>
-          <p:cNvSpPr txBox="1"/>
-          <p:nvPr/>
-        </p:nvSpPr>
-        <p:spPr>
-          <a:xfrm>
-            <a:off x="32884110" y="15492613"/>
-            <a:ext cx="10184130" cy="365760"/>
-          </a:xfrm>
-          <a:prstGeom prst="rect">
-            <a:avLst/>
-          </a:prstGeom>
-          <a:noFill/>
-        </p:spPr>
-        <p:txBody>
-          <a:bodyPr wrap="square" anchor="t" lIns="0" rIns="0" tIns="0" bIns="0">
-            <a:spAutoFit/>
-          </a:bodyPr>
-          <a:lstStyle/>
-          <a:p>
-            <a:pPr algn="l">
-              <a:lnSpc>
-                <a:spcPct val="106000"/>
-              </a:lnSpc>
-              <a:spcAft>
-                <a:spcPts val="700"/>
-              </a:spcAft>
-            </a:pPr>
-            <a:r>
-              <a:rPr sz="1550" b="0">
-                <a:solidFill>
-                  <a:srgbClr val="12243A"/>
-                </a:solidFill>
-                <a:latin typeface="Calibri"/>
-              </a:rPr>
-              <a:t>5.  An unattended loop can report success for eight consecutive rounds while collecting nothing. Absence of a failure signal is not evidence of success.</a:t>
-            </a:r>
-          </a:p>
-        </p:txBody>
-      </p:sp>
-      <p:sp>
-        <p:nvSpPr>
-          <p:cNvPr id="70" name="TextBox 69"/>
-          <p:cNvSpPr txBox="1"/>
-          <p:nvPr/>
-        </p:nvSpPr>
-        <p:spPr>
-          <a:xfrm>
-            <a:off x="32884110" y="16284077"/>
-            <a:ext cx="10184130" cy="502920"/>
-          </a:xfrm>
-          <a:prstGeom prst="rect">
-            <a:avLst/>
-          </a:prstGeom>
-          <a:noFill/>
-        </p:spPr>
-        <p:txBody>
-          <a:bodyPr wrap="square" anchor="t" lIns="0" rIns="0" tIns="0" bIns="0">
-            <a:spAutoFit/>
-          </a:bodyPr>
-          <a:lstStyle/>
-          <a:p>
-            <a:pPr algn="l">
-              <a:lnSpc>
-                <a:spcPct val="90000"/>
-              </a:lnSpc>
-              <a:spcAft>
-                <a:spcPts val="600"/>
-              </a:spcAft>
-            </a:pPr>
-            <a:r>
-              <a:rPr sz="2600" b="1">
-                <a:solidFill>
-                  <a:srgbClr val="0A4D8C"/>
-                </a:solidFill>
-                <a:latin typeface="Calibri"/>
-              </a:rPr>
-              <a:t>LIMITATIONS</a:t>
-            </a:r>
-          </a:p>
-        </p:txBody>
-      </p:sp>
-      <p:sp>
-        <p:nvSpPr>
-          <p:cNvPr id="71" name="Rectangle 70"/>
+                <a:spcPct val="100000"/>
+              </a:lnSpc>
+              <a:spcAft>
+                <a:spcPts val="0"/>
+              </a:spcAft>
+            </a:pPr>
+            <a:r>
+              <a:rPr sz="1250" b="1">
+                <a:solidFill>
+                  <a:srgbClr val="1E293B"/>
+                </a:solidFill>
+                <a:latin typeface="Arial"/>
+              </a:rPr>
+              <a:t>arm</a:t>
+            </a:r>
+          </a:p>
+        </p:txBody>
+      </p:sp>
+      <p:sp>
+        <p:nvSpPr>
+          <p:cNvPr id="91" name="TextBox 90"/>
+          <p:cNvSpPr txBox="1"/>
+          <p:nvPr/>
+        </p:nvSpPr>
+        <p:spPr>
+          <a:xfrm>
+            <a:off x="26992173" y="22328819"/>
+            <a:ext cx="2597353" cy="365760"/>
+          </a:xfrm>
+          <a:prstGeom prst="rect">
+            <a:avLst/>
+          </a:prstGeom>
+          <a:noFill/>
+        </p:spPr>
+        <p:txBody>
+          <a:bodyPr wrap="square" lIns="0" rIns="0" tIns="0" bIns="0">
+            <a:spAutoFit/>
+          </a:bodyPr>
+          <a:lstStyle/>
+          <a:p>
+            <a:pPr algn="r">
+              <a:lnSpc>
+                <a:spcPct val="100000"/>
+              </a:lnSpc>
+              <a:spcAft>
+                <a:spcPts val="0"/>
+              </a:spcAft>
+            </a:pPr>
+            <a:r>
+              <a:rPr sz="1250" b="1">
+                <a:solidFill>
+                  <a:srgbClr val="1E293B"/>
+                </a:solidFill>
+                <a:latin typeface="Arial"/>
+              </a:rPr>
+              <a:t>recall</a:t>
+            </a:r>
+          </a:p>
+        </p:txBody>
+      </p:sp>
+      <p:sp>
+        <p:nvSpPr>
+          <p:cNvPr id="92" name="TextBox 91"/>
+          <p:cNvSpPr txBox="1"/>
+          <p:nvPr/>
+        </p:nvSpPr>
+        <p:spPr>
+          <a:xfrm>
+            <a:off x="29589526" y="22328819"/>
+            <a:ext cx="2597353" cy="365760"/>
+          </a:xfrm>
+          <a:prstGeom prst="rect">
+            <a:avLst/>
+          </a:prstGeom>
+          <a:noFill/>
+        </p:spPr>
+        <p:txBody>
+          <a:bodyPr wrap="square" lIns="0" rIns="0" tIns="0" bIns="0">
+            <a:spAutoFit/>
+          </a:bodyPr>
+          <a:lstStyle/>
+          <a:p>
+            <a:pPr algn="r">
+              <a:lnSpc>
+                <a:spcPct val="100000"/>
+              </a:lnSpc>
+              <a:spcAft>
+                <a:spcPts val="0"/>
+              </a:spcAft>
+            </a:pPr>
+            <a:r>
+              <a:rPr sz="1250" b="1">
+                <a:solidFill>
+                  <a:srgbClr val="1E293B"/>
+                </a:solidFill>
+                <a:latin typeface="Arial"/>
+              </a:rPr>
+              <a:t>false alarms</a:t>
+            </a:r>
+          </a:p>
+        </p:txBody>
+      </p:sp>
+      <p:sp>
+        <p:nvSpPr>
+          <p:cNvPr id="93" name="Rectangle 92"/>
           <p:cNvSpPr/>
           <p:nvPr/>
         </p:nvSpPr>
         <p:spPr>
           <a:xfrm>
-            <a:off x="32884110" y="16832717"/>
-            <a:ext cx="10184130" cy="32004"/>
+            <a:off x="22197060" y="22603139"/>
+            <a:ext cx="9989819" cy="12801"/>
           </a:xfrm>
           <a:prstGeom prst="rect">
             <a:avLst/>
           </a:prstGeom>
           <a:solidFill>
-            <a:srgbClr val="0A4D8C"/>
+            <a:srgbClr val="C2CEDA"/>
           </a:solidFill>
           <a:ln>
             <a:noFill/>
@@ -5979,42 +6921,1468 @@
       </p:sp>
       <p:sp>
         <p:nvSpPr>
-          <p:cNvPr id="72" name="TextBox 71"/>
-          <p:cNvSpPr txBox="1"/>
-          <p:nvPr/>
-        </p:nvSpPr>
-        <p:spPr>
-          <a:xfrm>
-            <a:off x="32884110" y="17033885"/>
-            <a:ext cx="10184130" cy="365760"/>
-          </a:xfrm>
-          <a:prstGeom prst="rect">
-            <a:avLst/>
-          </a:prstGeom>
-          <a:noFill/>
-        </p:spPr>
-        <p:txBody>
-          <a:bodyPr wrap="square" anchor="t" lIns="0" rIns="0" tIns="0" bIns="0">
+          <p:cNvPr id="94" name="TextBox 93"/>
+          <p:cNvSpPr txBox="1"/>
+          <p:nvPr/>
+        </p:nvSpPr>
+        <p:spPr>
+          <a:xfrm>
+            <a:off x="22197060" y="22685435"/>
+            <a:ext cx="4795113" cy="365760"/>
+          </a:xfrm>
+          <a:prstGeom prst="rect">
+            <a:avLst/>
+          </a:prstGeom>
+          <a:noFill/>
+        </p:spPr>
+        <p:txBody>
+          <a:bodyPr wrap="square" lIns="0" rIns="0" tIns="0" bIns="0">
             <a:spAutoFit/>
           </a:bodyPr>
           <a:lstStyle/>
           <a:p>
             <a:pPr algn="l">
               <a:lnSpc>
-                <a:spcPct val="106000"/>
-              </a:lnSpc>
-              <a:spcAft>
-                <a:spcPts val="900"/>
-              </a:spcAft>
-            </a:pPr>
-            <a:r>
-              <a:rPr sz="1350" b="0">
-                <a:solidFill>
-                  <a:srgbClr val="5D6B7A"/>
-                </a:solidFill>
-                <a:latin typeface="Calibri"/>
-              </a:rPr>
-              <a:t>The holdout is used as the validation set, so every number is a maximum over many evaluations on the reported set; the optimism is measured (+0.002 to +0.017) but not removed. The tier ladder and the chain control are n = 1 per point with seed repeats in flight. The 27B supervision row is 149 of 149 cases and still running. The supervision corpus was labelled from this project's own engineering record by the same system that wrote the reviewer prompt, and its test split is 13 cases — too small to separate methods. Robot field frames are collected but not yet scored, and none of the 2,686 robot frames is labelled. The laser cart carries no GPS or IMU, so the platform's sensor-fusion story is robot 241 only.</a:t>
+                <a:spcPct val="100000"/>
+              </a:lnSpc>
+              <a:spcAft>
+                <a:spcPts val="0"/>
+              </a:spcAft>
+            </a:pPr>
+            <a:r>
+              <a:rPr sz="1300" b="0">
+                <a:solidFill>
+                  <a:srgbClr val="1E293B"/>
+                </a:solidFill>
+                <a:latin typeface="Arial"/>
+              </a:rPr>
+              <a:t>Scripted watchdog</a:t>
+            </a:r>
+          </a:p>
+        </p:txBody>
+      </p:sp>
+      <p:sp>
+        <p:nvSpPr>
+          <p:cNvPr id="95" name="TextBox 94"/>
+          <p:cNvSpPr txBox="1"/>
+          <p:nvPr/>
+        </p:nvSpPr>
+        <p:spPr>
+          <a:xfrm>
+            <a:off x="26992173" y="22685435"/>
+            <a:ext cx="2597353" cy="365760"/>
+          </a:xfrm>
+          <a:prstGeom prst="rect">
+            <a:avLst/>
+          </a:prstGeom>
+          <a:noFill/>
+        </p:spPr>
+        <p:txBody>
+          <a:bodyPr wrap="square" lIns="0" rIns="0" tIns="0" bIns="0">
+            <a:spAutoFit/>
+          </a:bodyPr>
+          <a:lstStyle/>
+          <a:p>
+            <a:pPr algn="r">
+              <a:lnSpc>
+                <a:spcPct val="100000"/>
+              </a:lnSpc>
+              <a:spcAft>
+                <a:spcPts val="0"/>
+              </a:spcAft>
+            </a:pPr>
+            <a:r>
+              <a:rPr sz="1300" b="0">
+                <a:solidFill>
+                  <a:srgbClr val="1E293B"/>
+                </a:solidFill>
+                <a:latin typeface="Arial"/>
+              </a:rPr>
+              <a:t>0.000</a:t>
+            </a:r>
+          </a:p>
+        </p:txBody>
+      </p:sp>
+      <p:sp>
+        <p:nvSpPr>
+          <p:cNvPr id="96" name="TextBox 95"/>
+          <p:cNvSpPr txBox="1"/>
+          <p:nvPr/>
+        </p:nvSpPr>
+        <p:spPr>
+          <a:xfrm>
+            <a:off x="29589526" y="22685435"/>
+            <a:ext cx="2597353" cy="365760"/>
+          </a:xfrm>
+          <a:prstGeom prst="rect">
+            <a:avLst/>
+          </a:prstGeom>
+          <a:noFill/>
+        </p:spPr>
+        <p:txBody>
+          <a:bodyPr wrap="square" lIns="0" rIns="0" tIns="0" bIns="0">
+            <a:spAutoFit/>
+          </a:bodyPr>
+          <a:lstStyle/>
+          <a:p>
+            <a:pPr algn="r">
+              <a:lnSpc>
+                <a:spcPct val="100000"/>
+              </a:lnSpc>
+              <a:spcAft>
+                <a:spcPts val="0"/>
+              </a:spcAft>
+            </a:pPr>
+            <a:r>
+              <a:rPr sz="1300" b="0">
+                <a:solidFill>
+                  <a:srgbClr val="1E293B"/>
+                </a:solidFill>
+                <a:latin typeface="Arial"/>
+              </a:rPr>
+              <a:t>0.000</a:t>
+            </a:r>
+          </a:p>
+        </p:txBody>
+      </p:sp>
+      <p:sp>
+        <p:nvSpPr>
+          <p:cNvPr id="97" name="TextBox 96"/>
+          <p:cNvSpPr txBox="1"/>
+          <p:nvPr/>
+        </p:nvSpPr>
+        <p:spPr>
+          <a:xfrm>
+            <a:off x="22197060" y="22996331"/>
+            <a:ext cx="4795113" cy="365760"/>
+          </a:xfrm>
+          <a:prstGeom prst="rect">
+            <a:avLst/>
+          </a:prstGeom>
+          <a:noFill/>
+        </p:spPr>
+        <p:txBody>
+          <a:bodyPr wrap="square" lIns="0" rIns="0" tIns="0" bIns="0">
+            <a:spAutoFit/>
+          </a:bodyPr>
+          <a:lstStyle/>
+          <a:p>
+            <a:pPr algn="l">
+              <a:lnSpc>
+                <a:spcPct val="100000"/>
+              </a:lnSpc>
+              <a:spcAft>
+                <a:spcPts val="0"/>
+              </a:spcAft>
+            </a:pPr>
+            <a:r>
+              <a:rPr sz="1300" b="0">
+                <a:solidFill>
+                  <a:srgbClr val="1E293B"/>
+                </a:solidFill>
+                <a:latin typeface="Arial"/>
+              </a:rPr>
+              <a:t>Deterministic signals</a:t>
+            </a:r>
+          </a:p>
+        </p:txBody>
+      </p:sp>
+      <p:sp>
+        <p:nvSpPr>
+          <p:cNvPr id="98" name="TextBox 97"/>
+          <p:cNvSpPr txBox="1"/>
+          <p:nvPr/>
+        </p:nvSpPr>
+        <p:spPr>
+          <a:xfrm>
+            <a:off x="26992173" y="22996331"/>
+            <a:ext cx="2597353" cy="365760"/>
+          </a:xfrm>
+          <a:prstGeom prst="rect">
+            <a:avLst/>
+          </a:prstGeom>
+          <a:noFill/>
+        </p:spPr>
+        <p:txBody>
+          <a:bodyPr wrap="square" lIns="0" rIns="0" tIns="0" bIns="0">
+            <a:spAutoFit/>
+          </a:bodyPr>
+          <a:lstStyle/>
+          <a:p>
+            <a:pPr algn="r">
+              <a:lnSpc>
+                <a:spcPct val="100000"/>
+              </a:lnSpc>
+              <a:spcAft>
+                <a:spcPts val="0"/>
+              </a:spcAft>
+            </a:pPr>
+            <a:r>
+              <a:rPr sz="1300" b="0">
+                <a:solidFill>
+                  <a:srgbClr val="1E293B"/>
+                </a:solidFill>
+                <a:latin typeface="Arial"/>
+              </a:rPr>
+              <a:t>0.095</a:t>
+            </a:r>
+          </a:p>
+        </p:txBody>
+      </p:sp>
+      <p:sp>
+        <p:nvSpPr>
+          <p:cNvPr id="99" name="TextBox 98"/>
+          <p:cNvSpPr txBox="1"/>
+          <p:nvPr/>
+        </p:nvSpPr>
+        <p:spPr>
+          <a:xfrm>
+            <a:off x="29589526" y="22996331"/>
+            <a:ext cx="2597353" cy="365760"/>
+          </a:xfrm>
+          <a:prstGeom prst="rect">
+            <a:avLst/>
+          </a:prstGeom>
+          <a:noFill/>
+        </p:spPr>
+        <p:txBody>
+          <a:bodyPr wrap="square" lIns="0" rIns="0" tIns="0" bIns="0">
+            <a:spAutoFit/>
+          </a:bodyPr>
+          <a:lstStyle/>
+          <a:p>
+            <a:pPr algn="r">
+              <a:lnSpc>
+                <a:spcPct val="100000"/>
+              </a:lnSpc>
+              <a:spcAft>
+                <a:spcPts val="0"/>
+              </a:spcAft>
+            </a:pPr>
+            <a:r>
+              <a:rPr sz="1300" b="0">
+                <a:solidFill>
+                  <a:srgbClr val="1E293B"/>
+                </a:solidFill>
+                <a:latin typeface="Arial"/>
+              </a:rPr>
+              <a:t>0.061</a:t>
+            </a:r>
+          </a:p>
+        </p:txBody>
+      </p:sp>
+      <p:sp>
+        <p:nvSpPr>
+          <p:cNvPr id="100" name="TextBox 99"/>
+          <p:cNvSpPr txBox="1"/>
+          <p:nvPr/>
+        </p:nvSpPr>
+        <p:spPr>
+          <a:xfrm>
+            <a:off x="22197060" y="23307227"/>
+            <a:ext cx="4795113" cy="365760"/>
+          </a:xfrm>
+          <a:prstGeom prst="rect">
+            <a:avLst/>
+          </a:prstGeom>
+          <a:noFill/>
+        </p:spPr>
+        <p:txBody>
+          <a:bodyPr wrap="square" lIns="0" rIns="0" tIns="0" bIns="0">
+            <a:spAutoFit/>
+          </a:bodyPr>
+          <a:lstStyle/>
+          <a:p>
+            <a:pPr algn="l">
+              <a:lnSpc>
+                <a:spcPct val="100000"/>
+              </a:lnSpc>
+              <a:spcAft>
+                <a:spcPts val="0"/>
+              </a:spcAft>
+            </a:pPr>
+            <a:r>
+              <a:rPr sz="1300" b="0">
+                <a:solidFill>
+                  <a:srgbClr val="1E293B"/>
+                </a:solidFill>
+                <a:latin typeface="Arial"/>
+              </a:rPr>
+              <a:t>Qwen3-14B</a:t>
+            </a:r>
+          </a:p>
+        </p:txBody>
+      </p:sp>
+      <p:sp>
+        <p:nvSpPr>
+          <p:cNvPr id="101" name="TextBox 100"/>
+          <p:cNvSpPr txBox="1"/>
+          <p:nvPr/>
+        </p:nvSpPr>
+        <p:spPr>
+          <a:xfrm>
+            <a:off x="26992173" y="23307227"/>
+            <a:ext cx="2597353" cy="365760"/>
+          </a:xfrm>
+          <a:prstGeom prst="rect">
+            <a:avLst/>
+          </a:prstGeom>
+          <a:noFill/>
+        </p:spPr>
+        <p:txBody>
+          <a:bodyPr wrap="square" lIns="0" rIns="0" tIns="0" bIns="0">
+            <a:spAutoFit/>
+          </a:bodyPr>
+          <a:lstStyle/>
+          <a:p>
+            <a:pPr algn="r">
+              <a:lnSpc>
+                <a:spcPct val="100000"/>
+              </a:lnSpc>
+              <a:spcAft>
+                <a:spcPts val="0"/>
+              </a:spcAft>
+            </a:pPr>
+            <a:r>
+              <a:rPr sz="1300" b="0">
+                <a:solidFill>
+                  <a:srgbClr val="1E293B"/>
+                </a:solidFill>
+                <a:latin typeface="Arial"/>
+              </a:rPr>
+              <a:t>0.707</a:t>
+            </a:r>
+          </a:p>
+        </p:txBody>
+      </p:sp>
+      <p:sp>
+        <p:nvSpPr>
+          <p:cNvPr id="102" name="TextBox 101"/>
+          <p:cNvSpPr txBox="1"/>
+          <p:nvPr/>
+        </p:nvSpPr>
+        <p:spPr>
+          <a:xfrm>
+            <a:off x="29589526" y="23307227"/>
+            <a:ext cx="2597353" cy="365760"/>
+          </a:xfrm>
+          <a:prstGeom prst="rect">
+            <a:avLst/>
+          </a:prstGeom>
+          <a:noFill/>
+        </p:spPr>
+        <p:txBody>
+          <a:bodyPr wrap="square" lIns="0" rIns="0" tIns="0" bIns="0">
+            <a:spAutoFit/>
+          </a:bodyPr>
+          <a:lstStyle/>
+          <a:p>
+            <a:pPr algn="r">
+              <a:lnSpc>
+                <a:spcPct val="100000"/>
+              </a:lnSpc>
+              <a:spcAft>
+                <a:spcPts val="0"/>
+              </a:spcAft>
+            </a:pPr>
+            <a:r>
+              <a:rPr sz="1300" b="0">
+                <a:solidFill>
+                  <a:srgbClr val="1E293B"/>
+                </a:solidFill>
+                <a:latin typeface="Arial"/>
+              </a:rPr>
+              <a:t>0.636</a:t>
+            </a:r>
+          </a:p>
+        </p:txBody>
+      </p:sp>
+      <p:sp>
+        <p:nvSpPr>
+          <p:cNvPr id="103" name="TextBox 102"/>
+          <p:cNvSpPr txBox="1"/>
+          <p:nvPr/>
+        </p:nvSpPr>
+        <p:spPr>
+          <a:xfrm>
+            <a:off x="22197060" y="23618123"/>
+            <a:ext cx="4795113" cy="365760"/>
+          </a:xfrm>
+          <a:prstGeom prst="rect">
+            <a:avLst/>
+          </a:prstGeom>
+          <a:noFill/>
+        </p:spPr>
+        <p:txBody>
+          <a:bodyPr wrap="square" lIns="0" rIns="0" tIns="0" bIns="0">
+            <a:spAutoFit/>
+          </a:bodyPr>
+          <a:lstStyle/>
+          <a:p>
+            <a:pPr algn="l">
+              <a:lnSpc>
+                <a:spcPct val="100000"/>
+              </a:lnSpc>
+              <a:spcAft>
+                <a:spcPts val="0"/>
+              </a:spcAft>
+            </a:pPr>
+            <a:r>
+              <a:rPr sz="1300" b="1">
+                <a:solidFill>
+                  <a:srgbClr val="1C6FB5"/>
+                </a:solidFill>
+                <a:latin typeface="Arial"/>
+              </a:rPr>
+              <a:t>Qwen3.8-27B</a:t>
+            </a:r>
+          </a:p>
+        </p:txBody>
+      </p:sp>
+      <p:sp>
+        <p:nvSpPr>
+          <p:cNvPr id="104" name="TextBox 103"/>
+          <p:cNvSpPr txBox="1"/>
+          <p:nvPr/>
+        </p:nvSpPr>
+        <p:spPr>
+          <a:xfrm>
+            <a:off x="26992173" y="23618123"/>
+            <a:ext cx="2597353" cy="365760"/>
+          </a:xfrm>
+          <a:prstGeom prst="rect">
+            <a:avLst/>
+          </a:prstGeom>
+          <a:noFill/>
+        </p:spPr>
+        <p:txBody>
+          <a:bodyPr wrap="square" lIns="0" rIns="0" tIns="0" bIns="0">
+            <a:spAutoFit/>
+          </a:bodyPr>
+          <a:lstStyle/>
+          <a:p>
+            <a:pPr algn="r">
+              <a:lnSpc>
+                <a:spcPct val="100000"/>
+              </a:lnSpc>
+              <a:spcAft>
+                <a:spcPts val="0"/>
+              </a:spcAft>
+            </a:pPr>
+            <a:r>
+              <a:rPr sz="1300" b="1">
+                <a:solidFill>
+                  <a:srgbClr val="1C6FB5"/>
+                </a:solidFill>
+                <a:latin typeface="Arial"/>
+              </a:rPr>
+              <a:t>0.802</a:t>
+            </a:r>
+          </a:p>
+        </p:txBody>
+      </p:sp>
+      <p:sp>
+        <p:nvSpPr>
+          <p:cNvPr id="105" name="TextBox 104"/>
+          <p:cNvSpPr txBox="1"/>
+          <p:nvPr/>
+        </p:nvSpPr>
+        <p:spPr>
+          <a:xfrm>
+            <a:off x="29589526" y="23618123"/>
+            <a:ext cx="2597353" cy="365760"/>
+          </a:xfrm>
+          <a:prstGeom prst="rect">
+            <a:avLst/>
+          </a:prstGeom>
+          <a:noFill/>
+        </p:spPr>
+        <p:txBody>
+          <a:bodyPr wrap="square" lIns="0" rIns="0" tIns="0" bIns="0">
+            <a:spAutoFit/>
+          </a:bodyPr>
+          <a:lstStyle/>
+          <a:p>
+            <a:pPr algn="r">
+              <a:lnSpc>
+                <a:spcPct val="100000"/>
+              </a:lnSpc>
+              <a:spcAft>
+                <a:spcPts val="0"/>
+              </a:spcAft>
+            </a:pPr>
+            <a:r>
+              <a:rPr sz="1300" b="1">
+                <a:solidFill>
+                  <a:srgbClr val="1C6FB5"/>
+                </a:solidFill>
+                <a:latin typeface="Arial"/>
+              </a:rPr>
+              <a:t>0.212</a:t>
+            </a:r>
+          </a:p>
+        </p:txBody>
+      </p:sp>
+      <p:sp>
+        <p:nvSpPr>
+          <p:cNvPr id="106" name="Rectangle 105"/>
+          <p:cNvSpPr/>
+          <p:nvPr/>
+        </p:nvSpPr>
+        <p:spPr>
+          <a:xfrm>
+            <a:off x="22197060" y="23947307"/>
+            <a:ext cx="9989819" cy="20116"/>
+          </a:xfrm>
+          <a:prstGeom prst="rect">
+            <a:avLst/>
+          </a:prstGeom>
+          <a:solidFill>
+            <a:srgbClr val="1E293B"/>
+          </a:solidFill>
+          <a:ln>
+            <a:noFill/>
+          </a:ln>
+          <a:effectLst/>
+        </p:spPr>
+        <p:style>
+          <a:lnRef idx="1">
+            <a:schemeClr val="accent1"/>
+          </a:lnRef>
+          <a:fillRef idx="3">
+            <a:schemeClr val="accent1"/>
+          </a:fillRef>
+          <a:effectRef idx="2">
+            <a:schemeClr val="accent1"/>
+          </a:effectRef>
+          <a:fontRef idx="minor">
+            <a:schemeClr val="lt1"/>
+          </a:fontRef>
+        </p:style>
+        <p:txBody>
+          <a:bodyPr rtlCol="0" anchor="ctr"/>
+          <a:lstStyle/>
+          <a:p>
+            <a:pPr algn="ctr"/>
+          </a:p>
+        </p:txBody>
+      </p:sp>
+      <p:sp>
+        <p:nvSpPr>
+          <p:cNvPr id="107" name="TextBox 106"/>
+          <p:cNvSpPr txBox="1"/>
+          <p:nvPr/>
+        </p:nvSpPr>
+        <p:spPr>
+          <a:xfrm>
+            <a:off x="22197060" y="24148475"/>
+            <a:ext cx="9989819" cy="365760"/>
+          </a:xfrm>
+          <a:prstGeom prst="rect">
+            <a:avLst/>
+          </a:prstGeom>
+          <a:noFill/>
+        </p:spPr>
+        <p:txBody>
+          <a:bodyPr wrap="square" lIns="0" rIns="0" tIns="0" bIns="0">
+            <a:spAutoFit/>
+          </a:bodyPr>
+          <a:lstStyle/>
+          <a:p>
+            <a:pPr algn="l">
+              <a:lnSpc>
+                <a:spcPct val="122000"/>
+              </a:lnSpc>
+              <a:spcAft>
+                <a:spcPts val="1000"/>
+              </a:spcAft>
+            </a:pPr>
+            <a:r>
+              <a:rPr sz="1250" b="0">
+                <a:solidFill>
+                  <a:srgbClr val="556575"/>
+                </a:solidFill>
+                <a:latin typeface="Arial"/>
+              </a:rPr>
+              <a:t>Three open models reading the same artifacts all reach 0.70–0.80 recall. What separates them is the false-alarm rate. Model choice buys precision here, not detection — the 14B reaches its recall by flagging 21 of the 33 controls.</a:t>
+            </a:r>
+          </a:p>
+        </p:txBody>
+      </p:sp>
+      <p:sp>
+        <p:nvSpPr>
+          <p:cNvPr id="108" name="TextBox 107"/>
+          <p:cNvSpPr txBox="1"/>
+          <p:nvPr/>
+        </p:nvSpPr>
+        <p:spPr>
+          <a:xfrm>
+            <a:off x="11704320" y="27705357"/>
+            <a:ext cx="20482560" cy="365760"/>
+          </a:xfrm>
+          <a:prstGeom prst="rect">
+            <a:avLst/>
+          </a:prstGeom>
+          <a:noFill/>
+        </p:spPr>
+        <p:txBody>
+          <a:bodyPr wrap="square" lIns="0" rIns="0" tIns="0" bIns="0">
+            <a:spAutoFit/>
+          </a:bodyPr>
+          <a:lstStyle/>
+          <a:p>
+            <a:pPr algn="l">
+              <a:lnSpc>
+                <a:spcPct val="100000"/>
+              </a:lnSpc>
+              <a:spcAft>
+                <a:spcPts val="0"/>
+              </a:spcAft>
+            </a:pPr>
+            <a:r>
+              <a:rPr sz="1800" b="1">
+                <a:solidFill>
+                  <a:srgbClr val="1E293B"/>
+                </a:solidFill>
+                <a:latin typeface="Arial"/>
+              </a:rPr>
+              <a:t>Why the loop looked like it was learning</a:t>
+            </a:r>
+          </a:p>
+        </p:txBody>
+      </p:sp>
+      <p:pic>
+        <p:nvPicPr>
+          <p:cNvPr id="109" name="Picture 108" descr="f_rounds.png"/>
+          <p:cNvPicPr>
+            <a:picLocks noChangeAspect="1"/>
+          </p:cNvPicPr>
+          <p:nvPr/>
+        </p:nvPicPr>
+        <p:blipFill>
+          <a:blip r:embed="rId8"/>
+          <a:stretch>
+            <a:fillRect/>
+          </a:stretch>
+        </p:blipFill>
+        <p:spPr>
+          <a:xfrm>
+            <a:off x="11704320" y="28016253"/>
+            <a:ext cx="20482560" cy="4202735"/>
+          </a:xfrm>
+          <a:prstGeom prst="rect">
+            <a:avLst/>
+          </a:prstGeom>
+        </p:spPr>
+      </p:pic>
+      <p:sp>
+        <p:nvSpPr>
+          <p:cNvPr id="110" name="TextBox 109"/>
+          <p:cNvSpPr txBox="1"/>
+          <p:nvPr/>
+        </p:nvSpPr>
+        <p:spPr>
+          <a:xfrm>
+            <a:off x="11704320" y="32310428"/>
+            <a:ext cx="20482560" cy="365760"/>
+          </a:xfrm>
+          <a:prstGeom prst="rect">
+            <a:avLst/>
+          </a:prstGeom>
+          <a:noFill/>
+        </p:spPr>
+        <p:txBody>
+          <a:bodyPr wrap="square" lIns="0" rIns="0" tIns="0" bIns="0">
+            <a:spAutoFit/>
+          </a:bodyPr>
+          <a:lstStyle/>
+          <a:p>
+            <a:pPr algn="l">
+              <a:lnSpc>
+                <a:spcPct val="120000"/>
+              </a:lnSpc>
+              <a:spcAft>
+                <a:spcPts val="0"/>
+              </a:spcAft>
+            </a:pPr>
+            <a:r>
+              <a:rPr sz="1200" b="0">
+                <a:solidFill>
+                  <a:srgbClr val="556575"/>
+                </a:solidFill>
+                <a:latin typeface="Arial"/>
+              </a:rPr>
+              <a:t>Figure 7.  (f) Fifteen unattended rounds on a fixed holdout. (g) On round 15's exact dataset and schedule, starting fresh instead of from the previous round's weights.</a:t>
+            </a:r>
+          </a:p>
+        </p:txBody>
+      </p:sp>
+      <p:sp>
+        <p:nvSpPr>
+          <p:cNvPr id="111" name="TextBox 110"/>
+          <p:cNvSpPr txBox="1"/>
+          <p:nvPr/>
+        </p:nvSpPr>
+        <p:spPr>
+          <a:xfrm>
+            <a:off x="32552640" y="4846320"/>
+            <a:ext cx="10607040" cy="365760"/>
+          </a:xfrm>
+          <a:prstGeom prst="rect">
+            <a:avLst/>
+          </a:prstGeom>
+          <a:noFill/>
+        </p:spPr>
+        <p:txBody>
+          <a:bodyPr wrap="square" lIns="0" rIns="0" tIns="0" bIns="0">
+            <a:spAutoFit/>
+          </a:bodyPr>
+          <a:lstStyle/>
+          <a:p>
+            <a:pPr algn="l">
+              <a:lnSpc>
+                <a:spcPct val="95000"/>
+              </a:lnSpc>
+              <a:spcAft>
+                <a:spcPts val="0"/>
+              </a:spcAft>
+            </a:pPr>
+            <a:r>
+              <a:rPr sz="2800" b="1">
+                <a:solidFill>
+                  <a:srgbClr val="14314E"/>
+                </a:solidFill>
+                <a:latin typeface="Arial"/>
+              </a:rPr>
+              <a:t>GENERALISATION</a:t>
+            </a:r>
+          </a:p>
+        </p:txBody>
+      </p:sp>
+      <p:sp>
+        <p:nvSpPr>
+          <p:cNvPr id="112" name="Rectangle 111"/>
+          <p:cNvSpPr/>
+          <p:nvPr/>
+        </p:nvSpPr>
+        <p:spPr>
+          <a:xfrm>
+            <a:off x="32552640" y="5321808"/>
+            <a:ext cx="10607040" cy="25603"/>
+          </a:xfrm>
+          <a:prstGeom prst="rect">
+            <a:avLst/>
+          </a:prstGeom>
+          <a:solidFill>
+            <a:srgbClr val="1C6FB5"/>
+          </a:solidFill>
+          <a:ln>
+            <a:noFill/>
+          </a:ln>
+          <a:effectLst/>
+        </p:spPr>
+        <p:style>
+          <a:lnRef idx="1">
+            <a:schemeClr val="accent1"/>
+          </a:lnRef>
+          <a:fillRef idx="3">
+            <a:schemeClr val="accent1"/>
+          </a:fillRef>
+          <a:effectRef idx="2">
+            <a:schemeClr val="accent1"/>
+          </a:effectRef>
+          <a:fontRef idx="minor">
+            <a:schemeClr val="lt1"/>
+          </a:fontRef>
+        </p:style>
+        <p:txBody>
+          <a:bodyPr rtlCol="0" anchor="ctr"/>
+          <a:lstStyle/>
+          <a:p>
+            <a:pPr algn="ctr"/>
+          </a:p>
+        </p:txBody>
+      </p:sp>
+      <p:pic>
+        <p:nvPicPr>
+          <p:cNvPr id="113" name="Picture 112" descr="d_wall.png"/>
+          <p:cNvPicPr>
+            <a:picLocks noChangeAspect="1"/>
+          </p:cNvPicPr>
+          <p:nvPr/>
+        </p:nvPicPr>
+        <p:blipFill>
+          <a:blip r:embed="rId9"/>
+          <a:stretch>
+            <a:fillRect/>
+          </a:stretch>
+        </p:blipFill>
+        <p:spPr>
+          <a:xfrm>
+            <a:off x="32552640" y="5577840"/>
+            <a:ext cx="10607040" cy="6362678"/>
+          </a:xfrm>
+          <a:prstGeom prst="rect">
+            <a:avLst/>
+          </a:prstGeom>
+        </p:spPr>
+      </p:pic>
+      <p:sp>
+        <p:nvSpPr>
+          <p:cNvPr id="114" name="TextBox 113"/>
+          <p:cNvSpPr txBox="1"/>
+          <p:nvPr/>
+        </p:nvSpPr>
+        <p:spPr>
+          <a:xfrm>
+            <a:off x="32552640" y="12031958"/>
+            <a:ext cx="10607040" cy="365760"/>
+          </a:xfrm>
+          <a:prstGeom prst="rect">
+            <a:avLst/>
+          </a:prstGeom>
+          <a:noFill/>
+        </p:spPr>
+        <p:txBody>
+          <a:bodyPr wrap="square" lIns="0" rIns="0" tIns="0" bIns="0">
+            <a:spAutoFit/>
+          </a:bodyPr>
+          <a:lstStyle/>
+          <a:p>
+            <a:pPr algn="l">
+              <a:lnSpc>
+                <a:spcPct val="120000"/>
+              </a:lnSpc>
+              <a:spcAft>
+                <a:spcPts val="0"/>
+              </a:spcAft>
+            </a:pPr>
+            <a:r>
+              <a:rPr sz="1200" b="0">
+                <a:solidFill>
+                  <a:srgbClr val="556575"/>
+                </a:solidFill>
+                <a:latin typeface="Arial"/>
+              </a:rPr>
+              <a:t>Figure 8.  The same three checkpoints and the same matcher on both sides, so the evaluator offset cancels. A detector trained on one field does not transfer to another.</a:t>
+            </a:r>
+          </a:p>
+        </p:txBody>
+      </p:sp>
+      <p:pic>
+        <p:nvPicPr>
+          <p:cNvPr id="115" name="Picture 114" descr="j_species.png"/>
+          <p:cNvPicPr>
+            <a:picLocks noChangeAspect="1"/>
+          </p:cNvPicPr>
+          <p:nvPr/>
+        </p:nvPicPr>
+        <p:blipFill>
+          <a:blip r:embed="rId10"/>
+          <a:stretch>
+            <a:fillRect/>
+          </a:stretch>
+        </p:blipFill>
+        <p:spPr>
+          <a:xfrm>
+            <a:off x="32552640" y="12672038"/>
+            <a:ext cx="10607040" cy="5429067"/>
+          </a:xfrm>
+          <a:prstGeom prst="rect">
+            <a:avLst/>
+          </a:prstGeom>
+        </p:spPr>
+      </p:pic>
+      <p:sp>
+        <p:nvSpPr>
+          <p:cNvPr id="116" name="TextBox 115"/>
+          <p:cNvSpPr txBox="1"/>
+          <p:nvPr/>
+        </p:nvSpPr>
+        <p:spPr>
+          <a:xfrm>
+            <a:off x="32552640" y="18192545"/>
+            <a:ext cx="10607040" cy="365760"/>
+          </a:xfrm>
+          <a:prstGeom prst="rect">
+            <a:avLst/>
+          </a:prstGeom>
+          <a:noFill/>
+        </p:spPr>
+        <p:txBody>
+          <a:bodyPr wrap="square" lIns="0" rIns="0" tIns="0" bIns="0">
+            <a:spAutoFit/>
+          </a:bodyPr>
+          <a:lstStyle/>
+          <a:p>
+            <a:pPr algn="l">
+              <a:lnSpc>
+                <a:spcPct val="120000"/>
+              </a:lnSpc>
+              <a:spcAft>
+                <a:spcPts val="0"/>
+              </a:spcAft>
+            </a:pPr>
+            <a:r>
+              <a:rPr sz="1200" b="0">
+                <a:solidFill>
+                  <a:srgbClr val="556575"/>
+                </a:solidFill>
+                <a:latin typeface="Arial"/>
+              </a:rPr>
+              <a:t>Figure 9.  Per-species performance of the deployable checkpoint. The spread across the twelve classes is 0.214, roughly seventy times the seed noise.</a:t>
+            </a:r>
+          </a:p>
+        </p:txBody>
+      </p:sp>
+      <p:sp>
+        <p:nvSpPr>
+          <p:cNvPr id="117" name="TextBox 116"/>
+          <p:cNvSpPr txBox="1"/>
+          <p:nvPr/>
+        </p:nvSpPr>
+        <p:spPr>
+          <a:xfrm>
+            <a:off x="32552640" y="18878345"/>
+            <a:ext cx="10607040" cy="365760"/>
+          </a:xfrm>
+          <a:prstGeom prst="rect">
+            <a:avLst/>
+          </a:prstGeom>
+          <a:noFill/>
+        </p:spPr>
+        <p:txBody>
+          <a:bodyPr wrap="square" lIns="0" rIns="0" tIns="0" bIns="0">
+            <a:spAutoFit/>
+          </a:bodyPr>
+          <a:lstStyle/>
+          <a:p>
+            <a:pPr algn="l">
+              <a:lnSpc>
+                <a:spcPct val="95000"/>
+              </a:lnSpc>
+              <a:spcAft>
+                <a:spcPts val="0"/>
+              </a:spcAft>
+            </a:pPr>
+            <a:r>
+              <a:rPr sz="2800" b="1">
+                <a:solidFill>
+                  <a:srgbClr val="14314E"/>
+                </a:solidFill>
+                <a:latin typeface="Arial"/>
+              </a:rPr>
+              <a:t>CONCLUSIONS</a:t>
+            </a:r>
+          </a:p>
+        </p:txBody>
+      </p:sp>
+      <p:sp>
+        <p:nvSpPr>
+          <p:cNvPr id="118" name="Rectangle 117"/>
+          <p:cNvSpPr/>
+          <p:nvPr/>
+        </p:nvSpPr>
+        <p:spPr>
+          <a:xfrm>
+            <a:off x="32552640" y="19353833"/>
+            <a:ext cx="10607040" cy="25603"/>
+          </a:xfrm>
+          <a:prstGeom prst="rect">
+            <a:avLst/>
+          </a:prstGeom>
+          <a:solidFill>
+            <a:srgbClr val="1C6FB5"/>
+          </a:solidFill>
+          <a:ln>
+            <a:noFill/>
+          </a:ln>
+          <a:effectLst/>
+        </p:spPr>
+        <p:style>
+          <a:lnRef idx="1">
+            <a:schemeClr val="accent1"/>
+          </a:lnRef>
+          <a:fillRef idx="3">
+            <a:schemeClr val="accent1"/>
+          </a:fillRef>
+          <a:effectRef idx="2">
+            <a:schemeClr val="accent1"/>
+          </a:effectRef>
+          <a:fontRef idx="minor">
+            <a:schemeClr val="lt1"/>
+          </a:fontRef>
+        </p:style>
+        <p:txBody>
+          <a:bodyPr rtlCol="0" anchor="ctr"/>
+          <a:lstStyle/>
+          <a:p>
+            <a:pPr algn="ctr"/>
+          </a:p>
+        </p:txBody>
+      </p:sp>
+      <p:sp>
+        <p:nvSpPr>
+          <p:cNvPr id="119" name="TextBox 118"/>
+          <p:cNvSpPr txBox="1"/>
+          <p:nvPr/>
+        </p:nvSpPr>
+        <p:spPr>
+          <a:xfrm>
+            <a:off x="32552640" y="19609865"/>
+            <a:ext cx="10607040" cy="365760"/>
+          </a:xfrm>
+          <a:prstGeom prst="rect">
+            <a:avLst/>
+          </a:prstGeom>
+          <a:noFill/>
+        </p:spPr>
+        <p:txBody>
+          <a:bodyPr wrap="square" lIns="0" rIns="0" tIns="0" bIns="0">
+            <a:spAutoFit/>
+          </a:bodyPr>
+          <a:lstStyle/>
+          <a:p>
+            <a:pPr algn="l">
+              <a:lnSpc>
+                <a:spcPct val="122000"/>
+              </a:lnSpc>
+              <a:spcAft>
+                <a:spcPts val="800"/>
+              </a:spcAft>
+            </a:pPr>
+            <a:r>
+              <a:rPr sz="1300" b="0">
+                <a:solidFill>
+                  <a:srgbClr val="1E293B"/>
+                </a:solidFill>
+                <a:latin typeface="Arial"/>
+              </a:rPr>
+              <a:t>1.   Initialisation beats architecture beats data. Pretraining is worth +0.0714, architecture at equal initialisation +0.0225, and forty thousand harvested web images −0.020. The data-collection lever the system was built around is the weakest of the three.</a:t>
+            </a:r>
+          </a:p>
+        </p:txBody>
+      </p:sp>
+      <p:sp>
+        <p:nvSpPr>
+          <p:cNvPr id="120" name="TextBox 119"/>
+          <p:cNvSpPr txBox="1"/>
+          <p:nvPr/>
+        </p:nvSpPr>
+        <p:spPr>
+          <a:xfrm>
+            <a:off x="32552640" y="20315731"/>
+            <a:ext cx="10607040" cy="365760"/>
+          </a:xfrm>
+          <a:prstGeom prst="rect">
+            <a:avLst/>
+          </a:prstGeom>
+          <a:noFill/>
+        </p:spPr>
+        <p:txBody>
+          <a:bodyPr wrap="square" lIns="0" rIns="0" tIns="0" bIns="0">
+            <a:spAutoFit/>
+          </a:bodyPr>
+          <a:lstStyle/>
+          <a:p>
+            <a:pPr algn="l">
+              <a:lnSpc>
+                <a:spcPct val="122000"/>
+              </a:lnSpc>
+              <a:spcAft>
+                <a:spcPts val="800"/>
+              </a:spcAft>
+            </a:pPr>
+            <a:r>
+              <a:rPr sz="1300" b="0">
+                <a:solidFill>
+                  <a:srgbClr val="1E293B"/>
+                </a:solidFill>
+                <a:latin typeface="Arial"/>
+              </a:rPr>
+              <a:t>2.   The detector does not travel. 0.873 in-domain becomes 0.100 on another weed dataset, class-agnostic, with the same matcher on both sides.</a:t>
+            </a:r>
+          </a:p>
+        </p:txBody>
+      </p:sp>
+      <p:sp>
+        <p:nvSpPr>
+          <p:cNvPr id="121" name="TextBox 120"/>
+          <p:cNvSpPr txBox="1"/>
+          <p:nvPr/>
+        </p:nvSpPr>
+        <p:spPr>
+          <a:xfrm>
+            <a:off x="32552640" y="20820175"/>
+            <a:ext cx="10607040" cy="365760"/>
+          </a:xfrm>
+          <a:prstGeom prst="rect">
+            <a:avLst/>
+          </a:prstGeom>
+          <a:noFill/>
+        </p:spPr>
+        <p:txBody>
+          <a:bodyPr wrap="square" lIns="0" rIns="0" tIns="0" bIns="0">
+            <a:spAutoFit/>
+          </a:bodyPr>
+          <a:lstStyle/>
+          <a:p>
+            <a:pPr algn="l">
+              <a:lnSpc>
+                <a:spcPct val="122000"/>
+              </a:lnSpc>
+              <a:spcAft>
+                <a:spcPts val="800"/>
+              </a:spcAft>
+            </a:pPr>
+            <a:r>
+              <a:rPr sz="1300" b="0">
+                <a:solidFill>
+                  <a:srgbClr val="1E293B"/>
+                </a:solidFill>
+                <a:latin typeface="Arial"/>
+              </a:rPr>
+              <a:t>3.   Web harvest supplies volume, not supervision: one of six audited sources clears a 0.90 label-precision bar, and 44,750 of 156,521 images are cross-dataset duplicates.</a:t>
+            </a:r>
+          </a:p>
+        </p:txBody>
+      </p:sp>
+      <p:sp>
+        <p:nvSpPr>
+          <p:cNvPr id="122" name="TextBox 121"/>
+          <p:cNvSpPr txBox="1"/>
+          <p:nvPr/>
+        </p:nvSpPr>
+        <p:spPr>
+          <a:xfrm>
+            <a:off x="32552640" y="21324619"/>
+            <a:ext cx="10607040" cy="365760"/>
+          </a:xfrm>
+          <a:prstGeom prst="rect">
+            <a:avLst/>
+          </a:prstGeom>
+          <a:noFill/>
+        </p:spPr>
+        <p:txBody>
+          <a:bodyPr wrap="square" lIns="0" rIns="0" tIns="0" bIns="0">
+            <a:spAutoFit/>
+          </a:bodyPr>
+          <a:lstStyle/>
+          <a:p>
+            <a:pPr algn="l">
+              <a:lnSpc>
+                <a:spcPct val="122000"/>
+              </a:lnSpc>
+              <a:spcAft>
+                <a:spcPts val="800"/>
+              </a:spcAft>
+            </a:pPr>
+            <a:r>
+              <a:rPr sz="1300" b="0">
+                <a:solidFill>
+                  <a:srgbClr val="1E293B"/>
+                </a:solidFill>
+                <a:latin typeface="Arial"/>
+              </a:rPr>
+              <a:t>4.   Retrospective supervision needs the artifacts, not the status fields. A scripted watchdog over status fields caught none of 116 real incidents; a model reading the artifacts caught 93.</a:t>
+            </a:r>
+          </a:p>
+        </p:txBody>
+      </p:sp>
+      <p:sp>
+        <p:nvSpPr>
+          <p:cNvPr id="123" name="TextBox 122"/>
+          <p:cNvSpPr txBox="1"/>
+          <p:nvPr/>
+        </p:nvSpPr>
+        <p:spPr>
+          <a:xfrm>
+            <a:off x="32552640" y="21829063"/>
+            <a:ext cx="10607040" cy="365760"/>
+          </a:xfrm>
+          <a:prstGeom prst="rect">
+            <a:avLst/>
+          </a:prstGeom>
+          <a:noFill/>
+        </p:spPr>
+        <p:txBody>
+          <a:bodyPr wrap="square" lIns="0" rIns="0" tIns="0" bIns="0">
+            <a:spAutoFit/>
+          </a:bodyPr>
+          <a:lstStyle/>
+          <a:p>
+            <a:pPr algn="l">
+              <a:lnSpc>
+                <a:spcPct val="122000"/>
+              </a:lnSpc>
+              <a:spcAft>
+                <a:spcPts val="800"/>
+              </a:spcAft>
+            </a:pPr>
+            <a:r>
+              <a:rPr sz="1300" b="0">
+                <a:solidFill>
+                  <a:srgbClr val="1E293B"/>
+                </a:solidFill>
+                <a:latin typeface="Arial"/>
+              </a:rPr>
+              <a:t>5.   An unattended loop can report success for eight consecutive rounds while collecting nothing. Absence of a failure signal is not evidence of success.</a:t>
+            </a:r>
+          </a:p>
+        </p:txBody>
+      </p:sp>
+      <p:sp>
+        <p:nvSpPr>
+          <p:cNvPr id="124" name="TextBox 123"/>
+          <p:cNvSpPr txBox="1"/>
+          <p:nvPr/>
+        </p:nvSpPr>
+        <p:spPr>
+          <a:xfrm>
+            <a:off x="32552640" y="22424947"/>
+            <a:ext cx="10607040" cy="365760"/>
+          </a:xfrm>
+          <a:prstGeom prst="rect">
+            <a:avLst/>
+          </a:prstGeom>
+          <a:noFill/>
+        </p:spPr>
+        <p:txBody>
+          <a:bodyPr wrap="square" lIns="0" rIns="0" tIns="0" bIns="0">
+            <a:spAutoFit/>
+          </a:bodyPr>
+          <a:lstStyle/>
+          <a:p>
+            <a:pPr algn="l">
+              <a:lnSpc>
+                <a:spcPct val="95000"/>
+              </a:lnSpc>
+              <a:spcAft>
+                <a:spcPts val="0"/>
+              </a:spcAft>
+            </a:pPr>
+            <a:r>
+              <a:rPr sz="2800" b="1">
+                <a:solidFill>
+                  <a:srgbClr val="14314E"/>
+                </a:solidFill>
+                <a:latin typeface="Arial"/>
+              </a:rPr>
+              <a:t>LIMITATIONS</a:t>
+            </a:r>
+          </a:p>
+        </p:txBody>
+      </p:sp>
+      <p:sp>
+        <p:nvSpPr>
+          <p:cNvPr id="125" name="Rectangle 124"/>
+          <p:cNvSpPr/>
+          <p:nvPr/>
+        </p:nvSpPr>
+        <p:spPr>
+          <a:xfrm>
+            <a:off x="32552640" y="22900435"/>
+            <a:ext cx="10607040" cy="25603"/>
+          </a:xfrm>
+          <a:prstGeom prst="rect">
+            <a:avLst/>
+          </a:prstGeom>
+          <a:solidFill>
+            <a:srgbClr val="1C6FB5"/>
+          </a:solidFill>
+          <a:ln>
+            <a:noFill/>
+          </a:ln>
+          <a:effectLst/>
+        </p:spPr>
+        <p:style>
+          <a:lnRef idx="1">
+            <a:schemeClr val="accent1"/>
+          </a:lnRef>
+          <a:fillRef idx="3">
+            <a:schemeClr val="accent1"/>
+          </a:fillRef>
+          <a:effectRef idx="2">
+            <a:schemeClr val="accent1"/>
+          </a:effectRef>
+          <a:fontRef idx="minor">
+            <a:schemeClr val="lt1"/>
+          </a:fontRef>
+        </p:style>
+        <p:txBody>
+          <a:bodyPr rtlCol="0" anchor="ctr"/>
+          <a:lstStyle/>
+          <a:p>
+            <a:pPr algn="ctr"/>
+          </a:p>
+        </p:txBody>
+      </p:sp>
+      <p:sp>
+        <p:nvSpPr>
+          <p:cNvPr id="126" name="TextBox 125"/>
+          <p:cNvSpPr txBox="1"/>
+          <p:nvPr/>
+        </p:nvSpPr>
+        <p:spPr>
+          <a:xfrm>
+            <a:off x="32552640" y="23156467"/>
+            <a:ext cx="10607040" cy="365760"/>
+          </a:xfrm>
+          <a:prstGeom prst="rect">
+            <a:avLst/>
+          </a:prstGeom>
+          <a:noFill/>
+        </p:spPr>
+        <p:txBody>
+          <a:bodyPr wrap="square" lIns="0" rIns="0" tIns="0" bIns="0">
+            <a:spAutoFit/>
+          </a:bodyPr>
+          <a:lstStyle/>
+          <a:p>
+            <a:pPr algn="l">
+              <a:lnSpc>
+                <a:spcPct val="122000"/>
+              </a:lnSpc>
+              <a:spcAft>
+                <a:spcPts val="1000"/>
+              </a:spcAft>
+            </a:pPr>
+            <a:r>
+              <a:rPr sz="1250" b="0">
+                <a:solidFill>
+                  <a:srgbClr val="556575"/>
+                </a:solidFill>
+                <a:latin typeface="Arial"/>
+              </a:rPr>
+              <a:t>The evaluation set doubles as the validation set, so every number is a maximum over many evaluations on the reported set; the optimism is measured but not removed. The +40,000 rung and the fresh-start control are single runs with seed repeats in flight. One supervision arm is 78 of 149 cases. The incident corpus was labelled from this project's own record by the same system that wrote the reviewer prompt, and its held-out split is 13 cases — too small to separate methods. None of the 2,686 robot frames is labelled, and the laser cart carries no GPS or IMU, so the sensor-fusion result is robot 241 only.</a:t>
+            </a:r>
+          </a:p>
+        </p:txBody>
+      </p:sp>
+      <p:sp>
+        <p:nvSpPr>
+          <p:cNvPr id="127" name="TextBox 126"/>
+          <p:cNvSpPr txBox="1"/>
+          <p:nvPr/>
+        </p:nvSpPr>
+        <p:spPr>
+          <a:xfrm>
+            <a:off x="32552640" y="24324994"/>
+            <a:ext cx="10607040" cy="365760"/>
+          </a:xfrm>
+          <a:prstGeom prst="rect">
+            <a:avLst/>
+          </a:prstGeom>
+          <a:noFill/>
+        </p:spPr>
+        <p:txBody>
+          <a:bodyPr wrap="square" lIns="0" rIns="0" tIns="0" bIns="0">
+            <a:spAutoFit/>
+          </a:bodyPr>
+          <a:lstStyle/>
+          <a:p>
+            <a:pPr algn="l">
+              <a:lnSpc>
+                <a:spcPct val="95000"/>
+              </a:lnSpc>
+              <a:spcAft>
+                <a:spcPts val="0"/>
+              </a:spcAft>
+            </a:pPr>
+            <a:r>
+              <a:rPr sz="2800" b="1">
+                <a:solidFill>
+                  <a:srgbClr val="14314E"/>
+                </a:solidFill>
+                <a:latin typeface="Arial"/>
+              </a:rPr>
+              <a:t>REPRODUCIBILITY</a:t>
+            </a:r>
+          </a:p>
+        </p:txBody>
+      </p:sp>
+      <p:sp>
+        <p:nvSpPr>
+          <p:cNvPr id="128" name="Rectangle 127"/>
+          <p:cNvSpPr/>
+          <p:nvPr/>
+        </p:nvSpPr>
+        <p:spPr>
+          <a:xfrm>
+            <a:off x="32552640" y="24800482"/>
+            <a:ext cx="10607040" cy="25603"/>
+          </a:xfrm>
+          <a:prstGeom prst="rect">
+            <a:avLst/>
+          </a:prstGeom>
+          <a:solidFill>
+            <a:srgbClr val="1C6FB5"/>
+          </a:solidFill>
+          <a:ln>
+            <a:noFill/>
+          </a:ln>
+          <a:effectLst/>
+        </p:spPr>
+        <p:style>
+          <a:lnRef idx="1">
+            <a:schemeClr val="accent1"/>
+          </a:lnRef>
+          <a:fillRef idx="3">
+            <a:schemeClr val="accent1"/>
+          </a:fillRef>
+          <a:effectRef idx="2">
+            <a:schemeClr val="accent1"/>
+          </a:effectRef>
+          <a:fontRef idx="minor">
+            <a:schemeClr val="lt1"/>
+          </a:fontRef>
+        </p:style>
+        <p:txBody>
+          <a:bodyPr rtlCol="0" anchor="ctr"/>
+          <a:lstStyle/>
+          <a:p>
+            <a:pPr algn="ctr"/>
+          </a:p>
+        </p:txBody>
+      </p:sp>
+      <p:sp>
+        <p:nvSpPr>
+          <p:cNvPr id="129" name="TextBox 128"/>
+          <p:cNvSpPr txBox="1"/>
+          <p:nvPr/>
+        </p:nvSpPr>
+        <p:spPr>
+          <a:xfrm>
+            <a:off x="32552640" y="25056514"/>
+            <a:ext cx="10607040" cy="365760"/>
+          </a:xfrm>
+          <a:prstGeom prst="rect">
+            <a:avLst/>
+          </a:prstGeom>
+          <a:noFill/>
+        </p:spPr>
+        <p:txBody>
+          <a:bodyPr wrap="square" lIns="0" rIns="0" tIns="0" bIns="0">
+            <a:spAutoFit/>
+          </a:bodyPr>
+          <a:lstStyle/>
+          <a:p>
+            <a:pPr algn="l">
+              <a:lnSpc>
+                <a:spcPct val="122000"/>
+              </a:lnSpc>
+              <a:spcAft>
+                <a:spcPts val="1000"/>
+              </a:spcAft>
+            </a:pPr>
+            <a:r>
+              <a:rPr sz="1250" b="0">
+                <a:solidFill>
+                  <a:srgbClr val="556575"/>
+                </a:solidFill>
+                <a:latin typeface="Arial"/>
+              </a:rPr>
+              <a:t>Every figure on this poster is regenerated from checked-in artifacts by one command, and every number names the results file it was read from. Numbers that must never be quoted without their caveat are listed in the project's results ledger alongside the reason.</a:t>
             </a:r>
           </a:p>
         </p:txBody>

--- a/docs/poster/MTSU_WeedAgent_Poster.pptx
+++ b/docs/poster/MTSU_WeedAgent_Poster.pptx
@@ -5660,7 +5660,7 @@
         <p:spPr>
           <a:xfrm>
             <a:off x="11704320" y="14258176"/>
-            <a:ext cx="9989819" cy="6090839"/>
+            <a:ext cx="9989819" cy="2543654"/>
           </a:xfrm>
           <a:prstGeom prst="rect">
             <a:avLst/>
@@ -5675,7 +5675,7 @@
         </p:nvSpPr>
         <p:spPr>
           <a:xfrm>
-            <a:off x="11704320" y="20440456"/>
+            <a:off x="11704320" y="16893271"/>
             <a:ext cx="9989819" cy="365760"/>
           </a:xfrm>
           <a:prstGeom prst="rect">
@@ -5704,7 +5704,7 @@
                 </a:solidFill>
                 <a:latin typeface="Arial"/>
               </a:rPr>
-              <a:t>Figure 5.  Twelve times the training data. Error bars are the seed spread where three seeds exist; rungs still at one run are marked. The two class spaces differ only in the label a harvested box carries.</a:t>
+              <a:t>Figure 5.  (c) Twelve times the training data costs 0.0189, three seeds at every rung. (d) The same eight checkpoints on a second dataset, class-agnostic, nothing of which it saw in training and 0 images excluded by the leak check; the series labels in (c) apply to (d). Both exams fall, so the narrow metric is not what makes the ladder drop.</a:t>
             </a:r>
           </a:p>
         </p:txBody>
@@ -6563,7 +6563,7 @@
         </p:nvSpPr>
         <p:spPr>
           <a:xfrm>
-            <a:off x="11704320" y="21171976"/>
+            <a:off x="11704320" y="17807671"/>
             <a:ext cx="20482560" cy="365760"/>
           </a:xfrm>
           <a:prstGeom prst="rect">
@@ -6613,7 +6613,7 @@
         </p:blipFill>
         <p:spPr>
           <a:xfrm>
-            <a:off x="11704320" y="21482872"/>
+            <a:off x="11704320" y="18118567"/>
             <a:ext cx="9989819" cy="5399525"/>
           </a:xfrm>
           <a:prstGeom prst="rect">
@@ -6629,7 +6629,7 @@
         </p:nvSpPr>
         <p:spPr>
           <a:xfrm>
-            <a:off x="11704320" y="26973837"/>
+            <a:off x="11704320" y="23609532"/>
             <a:ext cx="9989819" cy="365760"/>
           </a:xfrm>
           <a:prstGeom prst="rect">
@@ -6671,7 +6671,7 @@
         </p:nvSpPr>
         <p:spPr>
           <a:xfrm>
-            <a:off x="22197060" y="21482872"/>
+            <a:off x="22197060" y="18118567"/>
             <a:ext cx="9989819" cy="365760"/>
           </a:xfrm>
           <a:prstGeom prst="rect">
@@ -6713,7 +6713,7 @@
         </p:nvSpPr>
         <p:spPr>
           <a:xfrm>
-            <a:off x="22197060" y="22237379"/>
+            <a:off x="22197060" y="18873074"/>
             <a:ext cx="9989819" cy="20116"/>
           </a:xfrm>
           <a:prstGeom prst="rect">
@@ -6757,7 +6757,7 @@
         </p:nvSpPr>
         <p:spPr>
           <a:xfrm>
-            <a:off x="22197060" y="22328819"/>
+            <a:off x="22197060" y="18964514"/>
             <a:ext cx="4795113" cy="365760"/>
           </a:xfrm>
           <a:prstGeom prst="rect">
@@ -6799,7 +6799,7 @@
         </p:nvSpPr>
         <p:spPr>
           <a:xfrm>
-            <a:off x="26992173" y="22328819"/>
+            <a:off x="26992173" y="18964514"/>
             <a:ext cx="2597353" cy="365760"/>
           </a:xfrm>
           <a:prstGeom prst="rect">
@@ -6841,7 +6841,7 @@
         </p:nvSpPr>
         <p:spPr>
           <a:xfrm>
-            <a:off x="29589526" y="22328819"/>
+            <a:off x="29589526" y="18964514"/>
             <a:ext cx="2597353" cy="365760"/>
           </a:xfrm>
           <a:prstGeom prst="rect">
@@ -6883,7 +6883,7 @@
         </p:nvSpPr>
         <p:spPr>
           <a:xfrm>
-            <a:off x="22197060" y="22603139"/>
+            <a:off x="22197060" y="19238834"/>
             <a:ext cx="9989819" cy="12801"/>
           </a:xfrm>
           <a:prstGeom prst="rect">
@@ -6927,7 +6927,7 @@
         </p:nvSpPr>
         <p:spPr>
           <a:xfrm>
-            <a:off x="22197060" y="22685435"/>
+            <a:off x="22197060" y="19321130"/>
             <a:ext cx="4795113" cy="365760"/>
           </a:xfrm>
           <a:prstGeom prst="rect">
@@ -6969,7 +6969,7 @@
         </p:nvSpPr>
         <p:spPr>
           <a:xfrm>
-            <a:off x="26992173" y="22685435"/>
+            <a:off x="26992173" y="19321130"/>
             <a:ext cx="2597353" cy="365760"/>
           </a:xfrm>
           <a:prstGeom prst="rect">
@@ -7011,7 +7011,7 @@
         </p:nvSpPr>
         <p:spPr>
           <a:xfrm>
-            <a:off x="29589526" y="22685435"/>
+            <a:off x="29589526" y="19321130"/>
             <a:ext cx="2597353" cy="365760"/>
           </a:xfrm>
           <a:prstGeom prst="rect">
@@ -7053,7 +7053,7 @@
         </p:nvSpPr>
         <p:spPr>
           <a:xfrm>
-            <a:off x="22197060" y="22996331"/>
+            <a:off x="22197060" y="19632026"/>
             <a:ext cx="4795113" cy="365760"/>
           </a:xfrm>
           <a:prstGeom prst="rect">
@@ -7095,7 +7095,7 @@
         </p:nvSpPr>
         <p:spPr>
           <a:xfrm>
-            <a:off x="26992173" y="22996331"/>
+            <a:off x="26992173" y="19632026"/>
             <a:ext cx="2597353" cy="365760"/>
           </a:xfrm>
           <a:prstGeom prst="rect">
@@ -7137,7 +7137,7 @@
         </p:nvSpPr>
         <p:spPr>
           <a:xfrm>
-            <a:off x="29589526" y="22996331"/>
+            <a:off x="29589526" y="19632026"/>
             <a:ext cx="2597353" cy="365760"/>
           </a:xfrm>
           <a:prstGeom prst="rect">
@@ -7179,7 +7179,7 @@
         </p:nvSpPr>
         <p:spPr>
           <a:xfrm>
-            <a:off x="22197060" y="23307227"/>
+            <a:off x="22197060" y="19942922"/>
             <a:ext cx="4795113" cy="365760"/>
           </a:xfrm>
           <a:prstGeom prst="rect">
@@ -7221,7 +7221,7 @@
         </p:nvSpPr>
         <p:spPr>
           <a:xfrm>
-            <a:off x="26992173" y="23307227"/>
+            <a:off x="26992173" y="19942922"/>
             <a:ext cx="2597353" cy="365760"/>
           </a:xfrm>
           <a:prstGeom prst="rect">
@@ -7263,7 +7263,7 @@
         </p:nvSpPr>
         <p:spPr>
           <a:xfrm>
-            <a:off x="29589526" y="23307227"/>
+            <a:off x="29589526" y="19942922"/>
             <a:ext cx="2597353" cy="365760"/>
           </a:xfrm>
           <a:prstGeom prst="rect">
@@ -7305,7 +7305,7 @@
         </p:nvSpPr>
         <p:spPr>
           <a:xfrm>
-            <a:off x="22197060" y="23618123"/>
+            <a:off x="22197060" y="20253818"/>
             <a:ext cx="4795113" cy="365760"/>
           </a:xfrm>
           <a:prstGeom prst="rect">
@@ -7347,7 +7347,7 @@
         </p:nvSpPr>
         <p:spPr>
           <a:xfrm>
-            <a:off x="26992173" y="23618123"/>
+            <a:off x="26992173" y="20253818"/>
             <a:ext cx="2597353" cy="365760"/>
           </a:xfrm>
           <a:prstGeom prst="rect">
@@ -7389,7 +7389,7 @@
         </p:nvSpPr>
         <p:spPr>
           <a:xfrm>
-            <a:off x="29589526" y="23618123"/>
+            <a:off x="29589526" y="20253818"/>
             <a:ext cx="2597353" cy="365760"/>
           </a:xfrm>
           <a:prstGeom prst="rect">
@@ -7431,7 +7431,7 @@
         </p:nvSpPr>
         <p:spPr>
           <a:xfrm>
-            <a:off x="22197060" y="23947307"/>
+            <a:off x="22197060" y="20583002"/>
             <a:ext cx="9989819" cy="20116"/>
           </a:xfrm>
           <a:prstGeom prst="rect">
@@ -7475,7 +7475,7 @@
         </p:nvSpPr>
         <p:spPr>
           <a:xfrm>
-            <a:off x="22197060" y="24148475"/>
+            <a:off x="22197060" y="20784170"/>
             <a:ext cx="9989819" cy="365760"/>
           </a:xfrm>
           <a:prstGeom prst="rect">
@@ -7517,7 +7517,7 @@
         </p:nvSpPr>
         <p:spPr>
           <a:xfrm>
-            <a:off x="11704320" y="27705357"/>
+            <a:off x="11704320" y="24341052"/>
             <a:ext cx="20482560" cy="365760"/>
           </a:xfrm>
           <a:prstGeom prst="rect">
@@ -7567,8 +7567,8 @@
         </p:blipFill>
         <p:spPr>
           <a:xfrm>
-            <a:off x="11704320" y="28016253"/>
-            <a:ext cx="20482560" cy="4202735"/>
+            <a:off x="11704320" y="24651948"/>
+            <a:ext cx="20482560" cy="4209062"/>
           </a:xfrm>
           <a:prstGeom prst="rect">
             <a:avLst/>
@@ -7583,7 +7583,7 @@
         </p:nvSpPr>
         <p:spPr>
           <a:xfrm>
-            <a:off x="11704320" y="32310428"/>
+            <a:off x="11704320" y="28952450"/>
             <a:ext cx="20482560" cy="365760"/>
           </a:xfrm>
           <a:prstGeom prst="rect">
@@ -7612,7 +7612,7 @@
                 </a:solidFill>
                 <a:latin typeface="Arial"/>
               </a:rPr>
-              <a:t>Figure 7.  (f) Fifteen unattended rounds on a fixed holdout. (g) On round 15's exact dataset and schedule, starting fresh instead of from the previous round's weights.</a:t>
+              <a:t>Figure 7.  (f) Fifteen unattended rounds on a fixed holdout. (g) Round 15's exact dataset, three ways. Bars 1 and 2 differ only in the starting weights, so their gap is the warm-start chain; bar 3 is the recipe the campaign ran, whose wall-clock cap truncates the cosine. Sigma throughout is that recipe's own seed spread, 0.0040 over three seeds, propagated to the difference being quoted. Completing the schedule is not the fix -- bar 2 sits below bar 3.</a:t>
             </a:r>
           </a:p>
         </p:txBody>

--- a/docs/poster/MTSU_WeedAgent_Poster.pptx
+++ b/docs/poster/MTSU_WeedAgent_Poster.pptx
@@ -3681,7 +3681,7 @@
       </p:sp>
       <p:pic>
         <p:nvPicPr>
-          <p:cNvPr id="15" name="Picture 14" descr="h_drive.png"/>
+          <p:cNvPr id="15" name="Picture 14" descr="l_robots.png"/>
           <p:cNvPicPr>
             <a:picLocks noChangeAspect="1"/>
           </p:cNvPicPr>
@@ -3696,7 +3696,7 @@
         <p:spPr>
           <a:xfrm>
             <a:off x="731520" y="9719436"/>
-            <a:ext cx="10607040" cy="4294410"/>
+            <a:ext cx="10607040" cy="1732684"/>
           </a:xfrm>
           <a:prstGeom prst="rect">
             <a:avLst/>
@@ -3711,7 +3711,7 @@
         </p:nvSpPr>
         <p:spPr>
           <a:xfrm>
-            <a:off x="731520" y="14105286"/>
+            <a:off x="731520" y="11543560"/>
             <a:ext cx="10607040" cy="365760"/>
           </a:xfrm>
           <a:prstGeom prst="rect">
@@ -3740,14 +3740,14 @@
                 </a:solidFill>
                 <a:latin typeface="Arial"/>
               </a:rPr>
-              <a:t>Figure 1.  Robot 241, 2026-08-29: one 213 s pass through a crop plot. (h) GPS track from the board fix. (i) IMU heading over the same pass.</a:t>
+              <a:t>Figure 1.  Frames as recorded, unenhanced. 2686 frames across 26 sessions and 2 robots sit on the platform and 0 of them are labelled: robot 241 contributes 2259 at 640 x 360 and 1 Hz, the laser cart 427 of which 75 are in a field. The boxes in (n) are the cart's own detector drawing on its own video, not ground truth.</a:t>
             </a:r>
           </a:p>
         </p:txBody>
       </p:sp>
       <p:pic>
         <p:nvPicPr>
-          <p:cNvPr id="17" name="Picture 16" descr="k_funnel.png"/>
+          <p:cNvPr id="17" name="Picture 16" descr="h_drive.png"/>
           <p:cNvPicPr>
             <a:picLocks noChangeAspect="1"/>
           </p:cNvPicPr>
@@ -3761,7 +3761,73 @@
         </p:blipFill>
         <p:spPr>
           <a:xfrm>
-            <a:off x="731520" y="14562486"/>
+            <a:off x="731520" y="12366520"/>
+            <a:ext cx="10607040" cy="4294410"/>
+          </a:xfrm>
+          <a:prstGeom prst="rect">
+            <a:avLst/>
+          </a:prstGeom>
+        </p:spPr>
+      </p:pic>
+      <p:sp>
+        <p:nvSpPr>
+          <p:cNvPr id="18" name="TextBox 17"/>
+          <p:cNvSpPr txBox="1"/>
+          <p:nvPr/>
+        </p:nvSpPr>
+        <p:spPr>
+          <a:xfrm>
+            <a:off x="731520" y="16752371"/>
+            <a:ext cx="10607040" cy="365760"/>
+          </a:xfrm>
+          <a:prstGeom prst="rect">
+            <a:avLst/>
+          </a:prstGeom>
+          <a:noFill/>
+        </p:spPr>
+        <p:txBody>
+          <a:bodyPr wrap="square" lIns="0" rIns="0" tIns="0" bIns="0">
+            <a:spAutoFit/>
+          </a:bodyPr>
+          <a:lstStyle/>
+          <a:p>
+            <a:pPr algn="l">
+              <a:lnSpc>
+                <a:spcPct val="120000"/>
+              </a:lnSpc>
+              <a:spcAft>
+                <a:spcPts val="0"/>
+              </a:spcAft>
+            </a:pPr>
+            <a:r>
+              <a:rPr sz="1200" b="0">
+                <a:solidFill>
+                  <a:srgbClr val="556575"/>
+                </a:solidFill>
+                <a:latin typeface="Arial"/>
+              </a:rPr>
+              <a:t>Figure 2.  Robot 241, 2026-08-29: one 213 s pass through a crop plot. (h) GPS track from the board fix. (i) IMU heading over the same pass.</a:t>
+            </a:r>
+          </a:p>
+        </p:txBody>
+      </p:sp>
+      <p:pic>
+        <p:nvPicPr>
+          <p:cNvPr id="19" name="Picture 18" descr="k_funnel.png"/>
+          <p:cNvPicPr>
+            <a:picLocks noChangeAspect="1"/>
+          </p:cNvPicPr>
+          <p:nvPr/>
+        </p:nvPicPr>
+        <p:blipFill>
+          <a:blip r:embed="rId4"/>
+          <a:stretch>
+            <a:fillRect/>
+          </a:stretch>
+        </p:blipFill>
+        <p:spPr>
+          <a:xfrm>
+            <a:off x="731520" y="17209571"/>
             <a:ext cx="10607040" cy="4525878"/>
           </a:xfrm>
           <a:prstGeom prst="rect">
@@ -3771,13 +3837,13 @@
       </p:pic>
       <p:sp>
         <p:nvSpPr>
-          <p:cNvPr id="18" name="TextBox 17"/>
-          <p:cNvSpPr txBox="1"/>
-          <p:nvPr/>
-        </p:nvSpPr>
-        <p:spPr>
-          <a:xfrm>
-            <a:off x="731520" y="19179804"/>
+          <p:cNvPr id="20" name="TextBox 19"/>
+          <p:cNvSpPr txBox="1"/>
+          <p:nvPr/>
+        </p:nvSpPr>
+        <p:spPr>
+          <a:xfrm>
+            <a:off x="731520" y="21826889"/>
             <a:ext cx="10607040" cy="365760"/>
           </a:xfrm>
           <a:prstGeom prst="rect">
@@ -3806,20 +3872,20 @@
                 </a:solidFill>
                 <a:latin typeface="Arial"/>
               </a:rPr>
-              <a:t>Figure 2.  One of six audited harvested sources clears the label-precision bar. The audit probe reads 1.000 on human-labelled cwd12, so the low scores are the data.</a:t>
-            </a:r>
-          </a:p>
-        </p:txBody>
-      </p:sp>
-      <p:sp>
-        <p:nvSpPr>
-          <p:cNvPr id="19" name="TextBox 18"/>
-          <p:cNvSpPr txBox="1"/>
-          <p:nvPr/>
-        </p:nvSpPr>
-        <p:spPr>
-          <a:xfrm>
-            <a:off x="731520" y="19865604"/>
+              <a:t>Figure 3.  One of six audited harvested sources clears the label-precision bar. The audit probe reads 1.000 on human-labelled cwd12, so the low scores are the data.</a:t>
+            </a:r>
+          </a:p>
+        </p:txBody>
+      </p:sp>
+      <p:sp>
+        <p:nvSpPr>
+          <p:cNvPr id="21" name="TextBox 20"/>
+          <p:cNvSpPr txBox="1"/>
+          <p:nvPr/>
+        </p:nvSpPr>
+        <p:spPr>
+          <a:xfrm>
+            <a:off x="731520" y="22512689"/>
             <a:ext cx="10607040" cy="365760"/>
           </a:xfrm>
           <a:prstGeom prst="rect">
@@ -3855,13 +3921,13 @@
       </p:sp>
       <p:sp>
         <p:nvSpPr>
-          <p:cNvPr id="20" name="Rectangle 19"/>
+          <p:cNvPr id="22" name="Rectangle 21"/>
           <p:cNvSpPr/>
           <p:nvPr/>
         </p:nvSpPr>
         <p:spPr>
           <a:xfrm>
-            <a:off x="731520" y="20341092"/>
+            <a:off x="731520" y="22988177"/>
             <a:ext cx="10607040" cy="25603"/>
           </a:xfrm>
           <a:prstGeom prst="rect">
@@ -3899,13 +3965,13 @@
       </p:sp>
       <p:sp>
         <p:nvSpPr>
-          <p:cNvPr id="21" name="TextBox 20"/>
-          <p:cNvSpPr txBox="1"/>
-          <p:nvPr/>
-        </p:nvSpPr>
-        <p:spPr>
-          <a:xfrm>
-            <a:off x="731520" y="20597124"/>
+          <p:cNvPr id="23" name="TextBox 22"/>
+          <p:cNvSpPr txBox="1"/>
+          <p:nvPr/>
+        </p:nvSpPr>
+        <p:spPr>
+          <a:xfrm>
+            <a:off x="731520" y="23244209"/>
             <a:ext cx="10607040" cy="365760"/>
           </a:xfrm>
           <a:prstGeom prst="rect">
@@ -3941,13 +4007,13 @@
       </p:sp>
       <p:sp>
         <p:nvSpPr>
-          <p:cNvPr id="22" name="TextBox 21"/>
-          <p:cNvSpPr txBox="1"/>
-          <p:nvPr/>
-        </p:nvSpPr>
-        <p:spPr>
-          <a:xfrm>
-            <a:off x="731520" y="21560800"/>
+          <p:cNvPr id="24" name="TextBox 23"/>
+          <p:cNvSpPr txBox="1"/>
+          <p:nvPr/>
+        </p:nvSpPr>
+        <p:spPr>
+          <a:xfrm>
+            <a:off x="731520" y="24207885"/>
             <a:ext cx="10607040" cy="365760"/>
           </a:xfrm>
           <a:prstGeom prst="rect">
@@ -3983,13 +4049,13 @@
       </p:sp>
       <p:sp>
         <p:nvSpPr>
-          <p:cNvPr id="23" name="TextBox 22"/>
-          <p:cNvSpPr txBox="1"/>
-          <p:nvPr/>
-        </p:nvSpPr>
-        <p:spPr>
-          <a:xfrm>
-            <a:off x="731520" y="22166591"/>
+          <p:cNvPr id="25" name="TextBox 24"/>
+          <p:cNvSpPr txBox="1"/>
+          <p:nvPr/>
+        </p:nvSpPr>
+        <p:spPr>
+          <a:xfrm>
+            <a:off x="731520" y="24813675"/>
             <a:ext cx="10607040" cy="365760"/>
           </a:xfrm>
           <a:prstGeom prst="rect">
@@ -4025,13 +4091,13 @@
       </p:sp>
       <p:sp>
         <p:nvSpPr>
-          <p:cNvPr id="24" name="Rectangle 23"/>
+          <p:cNvPr id="26" name="Rectangle 25"/>
           <p:cNvSpPr/>
           <p:nvPr/>
         </p:nvSpPr>
         <p:spPr>
           <a:xfrm>
-            <a:off x="731520" y="22642079"/>
+            <a:off x="731520" y="25289163"/>
             <a:ext cx="10607040" cy="25603"/>
           </a:xfrm>
           <a:prstGeom prst="rect">
@@ -4069,13 +4135,13 @@
       </p:sp>
       <p:sp>
         <p:nvSpPr>
-          <p:cNvPr id="25" name="TextBox 24"/>
-          <p:cNvSpPr txBox="1"/>
-          <p:nvPr/>
-        </p:nvSpPr>
-        <p:spPr>
-          <a:xfrm>
-            <a:off x="731520" y="22898111"/>
+          <p:cNvPr id="27" name="TextBox 26"/>
+          <p:cNvSpPr txBox="1"/>
+          <p:nvPr/>
+        </p:nvSpPr>
+        <p:spPr>
+          <a:xfrm>
+            <a:off x="731520" y="25545195"/>
             <a:ext cx="10607040" cy="365760"/>
           </a:xfrm>
           <a:prstGeom prst="rect">
@@ -4111,13 +4177,13 @@
       </p:sp>
       <p:sp>
         <p:nvSpPr>
-          <p:cNvPr id="26" name="Rectangle 25"/>
+          <p:cNvPr id="28" name="Rectangle 27"/>
           <p:cNvSpPr/>
           <p:nvPr/>
         </p:nvSpPr>
         <p:spPr>
           <a:xfrm>
-            <a:off x="731520" y="23443449"/>
+            <a:off x="731520" y="26090533"/>
             <a:ext cx="10607040" cy="20116"/>
           </a:xfrm>
           <a:prstGeom prst="rect">
@@ -4155,13 +4221,13 @@
       </p:sp>
       <p:sp>
         <p:nvSpPr>
-          <p:cNvPr id="27" name="TextBox 26"/>
-          <p:cNvSpPr txBox="1"/>
-          <p:nvPr/>
-        </p:nvSpPr>
-        <p:spPr>
-          <a:xfrm>
-            <a:off x="731520" y="23534889"/>
+          <p:cNvPr id="29" name="TextBox 28"/>
+          <p:cNvSpPr txBox="1"/>
+          <p:nvPr/>
+        </p:nvSpPr>
+        <p:spPr>
+          <a:xfrm>
+            <a:off x="731520" y="26181973"/>
             <a:ext cx="6576364" cy="365760"/>
           </a:xfrm>
           <a:prstGeom prst="rect">
@@ -4197,13 +4263,13 @@
       </p:sp>
       <p:sp>
         <p:nvSpPr>
-          <p:cNvPr id="28" name="TextBox 27"/>
-          <p:cNvSpPr txBox="1"/>
-          <p:nvPr/>
-        </p:nvSpPr>
-        <p:spPr>
-          <a:xfrm>
-            <a:off x="7307884" y="23534889"/>
+          <p:cNvPr id="30" name="TextBox 29"/>
+          <p:cNvSpPr txBox="1"/>
+          <p:nvPr/>
+        </p:nvSpPr>
+        <p:spPr>
+          <a:xfrm>
+            <a:off x="7307884" y="26181973"/>
             <a:ext cx="4030675" cy="365760"/>
           </a:xfrm>
           <a:prstGeom prst="rect">
@@ -4239,13 +4305,13 @@
       </p:sp>
       <p:sp>
         <p:nvSpPr>
-          <p:cNvPr id="29" name="Rectangle 28"/>
+          <p:cNvPr id="31" name="Rectangle 30"/>
           <p:cNvSpPr/>
           <p:nvPr/>
         </p:nvSpPr>
         <p:spPr>
           <a:xfrm>
-            <a:off x="731520" y="23809209"/>
+            <a:off x="731520" y="26456293"/>
             <a:ext cx="10607040" cy="12801"/>
           </a:xfrm>
           <a:prstGeom prst="rect">
@@ -4283,13 +4349,13 @@
       </p:sp>
       <p:sp>
         <p:nvSpPr>
-          <p:cNvPr id="30" name="TextBox 29"/>
-          <p:cNvSpPr txBox="1"/>
-          <p:nvPr/>
-        </p:nvSpPr>
-        <p:spPr>
-          <a:xfrm>
-            <a:off x="731520" y="23891505"/>
+          <p:cNvPr id="32" name="TextBox 31"/>
+          <p:cNvSpPr txBox="1"/>
+          <p:nvPr/>
+        </p:nvSpPr>
+        <p:spPr>
+          <a:xfrm>
+            <a:off x="731520" y="26538589"/>
             <a:ext cx="6576364" cy="365760"/>
           </a:xfrm>
           <a:prstGeom prst="rect">
@@ -4325,13 +4391,13 @@
       </p:sp>
       <p:sp>
         <p:nvSpPr>
-          <p:cNvPr id="31" name="TextBox 30"/>
-          <p:cNvSpPr txBox="1"/>
-          <p:nvPr/>
-        </p:nvSpPr>
-        <p:spPr>
-          <a:xfrm>
-            <a:off x="7307884" y="23891505"/>
+          <p:cNvPr id="33" name="TextBox 32"/>
+          <p:cNvSpPr txBox="1"/>
+          <p:nvPr/>
+        </p:nvSpPr>
+        <p:spPr>
+          <a:xfrm>
+            <a:off x="7307884" y="26538589"/>
             <a:ext cx="4030675" cy="365760"/>
           </a:xfrm>
           <a:prstGeom prst="rect">
@@ -4367,13 +4433,13 @@
       </p:sp>
       <p:sp>
         <p:nvSpPr>
-          <p:cNvPr id="32" name="TextBox 31"/>
-          <p:cNvSpPr txBox="1"/>
-          <p:nvPr/>
-        </p:nvSpPr>
-        <p:spPr>
-          <a:xfrm>
-            <a:off x="731520" y="24202401"/>
+          <p:cNvPr id="34" name="TextBox 33"/>
+          <p:cNvSpPr txBox="1"/>
+          <p:nvPr/>
+        </p:nvSpPr>
+        <p:spPr>
+          <a:xfrm>
+            <a:off x="731520" y="26849485"/>
             <a:ext cx="6576364" cy="365760"/>
           </a:xfrm>
           <a:prstGeom prst="rect">
@@ -4409,13 +4475,13 @@
       </p:sp>
       <p:sp>
         <p:nvSpPr>
-          <p:cNvPr id="33" name="TextBox 32"/>
-          <p:cNvSpPr txBox="1"/>
-          <p:nvPr/>
-        </p:nvSpPr>
-        <p:spPr>
-          <a:xfrm>
-            <a:off x="7307884" y="24202401"/>
+          <p:cNvPr id="35" name="TextBox 34"/>
+          <p:cNvSpPr txBox="1"/>
+          <p:nvPr/>
+        </p:nvSpPr>
+        <p:spPr>
+          <a:xfrm>
+            <a:off x="7307884" y="26849485"/>
             <a:ext cx="4030675" cy="365760"/>
           </a:xfrm>
           <a:prstGeom prst="rect">
@@ -4451,13 +4517,13 @@
       </p:sp>
       <p:sp>
         <p:nvSpPr>
-          <p:cNvPr id="34" name="TextBox 33"/>
-          <p:cNvSpPr txBox="1"/>
-          <p:nvPr/>
-        </p:nvSpPr>
-        <p:spPr>
-          <a:xfrm>
-            <a:off x="731520" y="24513297"/>
+          <p:cNvPr id="36" name="TextBox 35"/>
+          <p:cNvSpPr txBox="1"/>
+          <p:nvPr/>
+        </p:nvSpPr>
+        <p:spPr>
+          <a:xfrm>
+            <a:off x="731520" y="27160381"/>
             <a:ext cx="6576364" cy="365760"/>
           </a:xfrm>
           <a:prstGeom prst="rect">
@@ -4493,13 +4559,13 @@
       </p:sp>
       <p:sp>
         <p:nvSpPr>
-          <p:cNvPr id="35" name="TextBox 34"/>
-          <p:cNvSpPr txBox="1"/>
-          <p:nvPr/>
-        </p:nvSpPr>
-        <p:spPr>
-          <a:xfrm>
-            <a:off x="7307884" y="24513297"/>
+          <p:cNvPr id="37" name="TextBox 36"/>
+          <p:cNvSpPr txBox="1"/>
+          <p:nvPr/>
+        </p:nvSpPr>
+        <p:spPr>
+          <a:xfrm>
+            <a:off x="7307884" y="27160381"/>
             <a:ext cx="4030675" cy="365760"/>
           </a:xfrm>
           <a:prstGeom prst="rect">
@@ -4535,13 +4601,13 @@
       </p:sp>
       <p:sp>
         <p:nvSpPr>
-          <p:cNvPr id="36" name="TextBox 35"/>
-          <p:cNvSpPr txBox="1"/>
-          <p:nvPr/>
-        </p:nvSpPr>
-        <p:spPr>
-          <a:xfrm>
-            <a:off x="731520" y="24824193"/>
+          <p:cNvPr id="38" name="TextBox 37"/>
+          <p:cNvSpPr txBox="1"/>
+          <p:nvPr/>
+        </p:nvSpPr>
+        <p:spPr>
+          <a:xfrm>
+            <a:off x="731520" y="27471277"/>
             <a:ext cx="6576364" cy="365760"/>
           </a:xfrm>
           <a:prstGeom prst="rect">
@@ -4577,13 +4643,13 @@
       </p:sp>
       <p:sp>
         <p:nvSpPr>
-          <p:cNvPr id="37" name="TextBox 36"/>
-          <p:cNvSpPr txBox="1"/>
-          <p:nvPr/>
-        </p:nvSpPr>
-        <p:spPr>
-          <a:xfrm>
-            <a:off x="7307884" y="24824193"/>
+          <p:cNvPr id="39" name="TextBox 38"/>
+          <p:cNvSpPr txBox="1"/>
+          <p:nvPr/>
+        </p:nvSpPr>
+        <p:spPr>
+          <a:xfrm>
+            <a:off x="7307884" y="27471277"/>
             <a:ext cx="4030675" cy="365760"/>
           </a:xfrm>
           <a:prstGeom prst="rect">
@@ -4619,13 +4685,13 @@
       </p:sp>
       <p:sp>
         <p:nvSpPr>
-          <p:cNvPr id="38" name="Rectangle 37"/>
+          <p:cNvPr id="40" name="Rectangle 39"/>
           <p:cNvSpPr/>
           <p:nvPr/>
         </p:nvSpPr>
         <p:spPr>
           <a:xfrm>
-            <a:off x="731520" y="25153377"/>
+            <a:off x="731520" y="27800461"/>
             <a:ext cx="10607040" cy="20116"/>
           </a:xfrm>
           <a:prstGeom prst="rect">
@@ -4663,7 +4729,7 @@
       </p:sp>
       <p:sp>
         <p:nvSpPr>
-          <p:cNvPr id="39" name="TextBox 38"/>
+          <p:cNvPr id="41" name="TextBox 40"/>
           <p:cNvSpPr txBox="1"/>
           <p:nvPr/>
         </p:nvSpPr>
@@ -4705,7 +4771,7 @@
       </p:sp>
       <p:sp>
         <p:nvSpPr>
-          <p:cNvPr id="40" name="Rectangle 39"/>
+          <p:cNvPr id="42" name="Rectangle 41"/>
           <p:cNvSpPr/>
           <p:nvPr/>
         </p:nvSpPr>
@@ -4749,7 +4815,7 @@
       </p:sp>
       <p:sp>
         <p:nvSpPr>
-          <p:cNvPr id="41" name="Rectangle 40"/>
+          <p:cNvPr id="43" name="Rectangle 42"/>
           <p:cNvSpPr/>
           <p:nvPr/>
         </p:nvSpPr>
@@ -4793,7 +4859,7 @@
       </p:sp>
       <p:sp>
         <p:nvSpPr>
-          <p:cNvPr id="42" name="TextBox 41"/>
+          <p:cNvPr id="44" name="TextBox 43"/>
           <p:cNvSpPr txBox="1"/>
           <p:nvPr/>
         </p:nvSpPr>
@@ -4835,7 +4901,7 @@
       </p:sp>
       <p:sp>
         <p:nvSpPr>
-          <p:cNvPr id="43" name="TextBox 42"/>
+          <p:cNvPr id="45" name="TextBox 44"/>
           <p:cNvSpPr txBox="1"/>
           <p:nvPr/>
         </p:nvSpPr>
@@ -4877,7 +4943,7 @@
       </p:sp>
       <p:sp>
         <p:nvSpPr>
-          <p:cNvPr id="44" name="TextBox 43"/>
+          <p:cNvPr id="46" name="TextBox 45"/>
           <p:cNvSpPr txBox="1"/>
           <p:nvPr/>
         </p:nvSpPr>
@@ -4919,7 +4985,7 @@
       </p:sp>
       <p:sp>
         <p:nvSpPr>
-          <p:cNvPr id="45" name="Rectangle 44"/>
+          <p:cNvPr id="47" name="Rectangle 46"/>
           <p:cNvSpPr/>
           <p:nvPr/>
         </p:nvSpPr>
@@ -4963,7 +5029,7 @@
       </p:sp>
       <p:sp>
         <p:nvSpPr>
-          <p:cNvPr id="46" name="TextBox 45"/>
+          <p:cNvPr id="48" name="TextBox 47"/>
           <p:cNvSpPr txBox="1"/>
           <p:nvPr/>
         </p:nvSpPr>
@@ -5005,7 +5071,7 @@
       </p:sp>
       <p:sp>
         <p:nvSpPr>
-          <p:cNvPr id="47" name="TextBox 46"/>
+          <p:cNvPr id="49" name="TextBox 48"/>
           <p:cNvSpPr txBox="1"/>
           <p:nvPr/>
         </p:nvSpPr>
@@ -5047,7 +5113,7 @@
       </p:sp>
       <p:sp>
         <p:nvSpPr>
-          <p:cNvPr id="48" name="TextBox 47"/>
+          <p:cNvPr id="50" name="TextBox 49"/>
           <p:cNvSpPr txBox="1"/>
           <p:nvPr/>
         </p:nvSpPr>
@@ -5089,7 +5155,7 @@
       </p:sp>
       <p:sp>
         <p:nvSpPr>
-          <p:cNvPr id="49" name="Rectangle 48"/>
+          <p:cNvPr id="51" name="Rectangle 50"/>
           <p:cNvSpPr/>
           <p:nvPr/>
         </p:nvSpPr>
@@ -5133,7 +5199,7 @@
       </p:sp>
       <p:sp>
         <p:nvSpPr>
-          <p:cNvPr id="50" name="TextBox 49"/>
+          <p:cNvPr id="52" name="TextBox 51"/>
           <p:cNvSpPr txBox="1"/>
           <p:nvPr/>
         </p:nvSpPr>
@@ -5168,14 +5234,14 @@
                 </a:solidFill>
                 <a:latin typeface="Arial"/>
               </a:rPr>
-              <a:t>0 of 116</a:t>
-            </a:r>
-          </a:p>
-        </p:txBody>
-      </p:sp>
-      <p:sp>
-        <p:nvSpPr>
-          <p:cNvPr id="51" name="TextBox 50"/>
+              <a:t>149 of 149</a:t>
+            </a:r>
+          </a:p>
+        </p:txBody>
+      </p:sp>
+      <p:sp>
+        <p:nvSpPr>
+          <p:cNvPr id="53" name="TextBox 52"/>
           <p:cNvSpPr txBox="1"/>
           <p:nvPr/>
         </p:nvSpPr>
@@ -5210,14 +5276,14 @@
                 </a:solidFill>
                 <a:latin typeface="Arial"/>
               </a:rPr>
-              <a:t>incidents a scripted watchdog caught</a:t>
-            </a:r>
-          </a:p>
-        </p:txBody>
-      </p:sp>
-      <p:sp>
-        <p:nvSpPr>
-          <p:cNvPr id="52" name="TextBox 51"/>
+              <a:t>cases the watchdog could not decide</a:t>
+            </a:r>
+          </a:p>
+        </p:txBody>
+      </p:sp>
+      <p:sp>
+        <p:nvSpPr>
+          <p:cNvPr id="54" name="TextBox 53"/>
           <p:cNvSpPr txBox="1"/>
           <p:nvPr/>
         </p:nvSpPr>
@@ -5252,14 +5318,14 @@
                 </a:solidFill>
                 <a:latin typeface="Arial"/>
               </a:rPr>
-              <a:t>149 cases, none flagged</a:t>
-            </a:r>
-          </a:p>
-        </p:txBody>
-      </p:sp>
-      <p:sp>
-        <p:nvSpPr>
-          <p:cNvPr id="53" name="Rectangle 52"/>
+              <a:t>116 incidents among them</a:t>
+            </a:r>
+          </a:p>
+        </p:txBody>
+      </p:sp>
+      <p:sp>
+        <p:nvSpPr>
+          <p:cNvPr id="55" name="Rectangle 54"/>
           <p:cNvSpPr/>
           <p:nvPr/>
         </p:nvSpPr>
@@ -5303,7 +5369,7 @@
       </p:sp>
       <p:sp>
         <p:nvSpPr>
-          <p:cNvPr id="54" name="TextBox 53"/>
+          <p:cNvPr id="56" name="TextBox 55"/>
           <p:cNvSpPr txBox="1"/>
           <p:nvPr/>
         </p:nvSpPr>
@@ -5345,7 +5411,7 @@
       </p:sp>
       <p:sp>
         <p:nvSpPr>
-          <p:cNvPr id="55" name="TextBox 54"/>
+          <p:cNvPr id="57" name="TextBox 56"/>
           <p:cNvSpPr txBox="1"/>
           <p:nvPr/>
         </p:nvSpPr>
@@ -5387,7 +5453,7 @@
       </p:sp>
       <p:sp>
         <p:nvSpPr>
-          <p:cNvPr id="56" name="TextBox 55"/>
+          <p:cNvPr id="58" name="TextBox 57"/>
           <p:cNvSpPr txBox="1"/>
           <p:nvPr/>
         </p:nvSpPr>
@@ -5429,7 +5495,7 @@
       </p:sp>
       <p:sp>
         <p:nvSpPr>
-          <p:cNvPr id="57" name="TextBox 56"/>
+          <p:cNvPr id="59" name="TextBox 58"/>
           <p:cNvSpPr txBox="1"/>
           <p:nvPr/>
         </p:nvSpPr>
@@ -5471,73 +5537,7 @@
       </p:sp>
       <p:pic>
         <p:nvPicPr>
-          <p:cNvPr id="58" name="Picture 57" descr="a_families.png"/>
-          <p:cNvPicPr>
-            <a:picLocks noChangeAspect="1"/>
-          </p:cNvPicPr>
-          <p:nvPr/>
-        </p:nvPicPr>
-        <p:blipFill>
-          <a:blip r:embed="rId4"/>
-          <a:stretch>
-            <a:fillRect/>
-          </a:stretch>
-        </p:blipFill>
-        <p:spPr>
-          <a:xfrm>
-            <a:off x="11704320" y="7763255"/>
-            <a:ext cx="9989819" cy="5361065"/>
-          </a:xfrm>
-          <a:prstGeom prst="rect">
-            <a:avLst/>
-          </a:prstGeom>
-        </p:spPr>
-      </p:pic>
-      <p:sp>
-        <p:nvSpPr>
-          <p:cNvPr id="59" name="TextBox 58"/>
-          <p:cNvSpPr txBox="1"/>
-          <p:nvPr/>
-        </p:nvSpPr>
-        <p:spPr>
-          <a:xfrm>
-            <a:off x="11704320" y="13215760"/>
-            <a:ext cx="9989819" cy="365760"/>
-          </a:xfrm>
-          <a:prstGeom prst="rect">
-            <a:avLst/>
-          </a:prstGeom>
-          <a:noFill/>
-        </p:spPr>
-        <p:txBody>
-          <a:bodyPr wrap="square" lIns="0" rIns="0" tIns="0" bIns="0">
-            <a:spAutoFit/>
-          </a:bodyPr>
-          <a:lstStyle/>
-          <a:p>
-            <a:pPr algn="l">
-              <a:lnSpc>
-                <a:spcPct val="120000"/>
-              </a:lnSpc>
-              <a:spcAft>
-                <a:spcPts val="0"/>
-              </a:spcAft>
-            </a:pPr>
-            <a:r>
-              <a:rPr sz="1200" b="0">
-                <a:solidFill>
-                  <a:srgbClr val="556575"/>
-                </a:solidFill>
-                <a:latin typeface="Arial"/>
-              </a:rPr>
-              <a:t>Figure 3.  Three detector families on the CottonWeedDet12 holdout, three seeds each. How the network is initialised is worth three times what the architecture is worth.</a:t>
-            </a:r>
-          </a:p>
-        </p:txBody>
-      </p:sp>
-      <p:pic>
-        <p:nvPicPr>
-          <p:cNvPr id="60" name="Picture 59" descr="b_zeroshot.png"/>
+          <p:cNvPr id="60" name="Picture 59" descr="a_families.png"/>
           <p:cNvPicPr>
             <a:picLocks noChangeAspect="1"/>
           </p:cNvPicPr>
@@ -5551,8 +5551,8 @@
         </p:blipFill>
         <p:spPr>
           <a:xfrm>
-            <a:off x="22197060" y="7763255"/>
-            <a:ext cx="9989819" cy="4817913"/>
+            <a:off x="11704320" y="7763255"/>
+            <a:ext cx="9989819" cy="5361065"/>
           </a:xfrm>
           <a:prstGeom prst="rect">
             <a:avLst/>
@@ -5567,7 +5567,7 @@
         </p:nvSpPr>
         <p:spPr>
           <a:xfrm>
-            <a:off x="22197060" y="12672608"/>
+            <a:off x="11704320" y="13215760"/>
             <a:ext cx="9989819" cy="365760"/>
           </a:xfrm>
           <a:prstGeom prst="rect">
@@ -5596,56 +5596,14 @@
                 </a:solidFill>
                 <a:latin typeface="Arial"/>
               </a:rPr>
-              <a:t>Figure 4.  One deterministic pass per model, no repeats. Fifteen zero-shot vision-language models against the fine-tuned detector: the best of them reaches 0.434 against 0.929, and five produce no usable grounding at all.</a:t>
-            </a:r>
-          </a:p>
-        </p:txBody>
-      </p:sp>
-      <p:sp>
-        <p:nvSpPr>
-          <p:cNvPr id="62" name="TextBox 61"/>
-          <p:cNvSpPr txBox="1"/>
-          <p:nvPr/>
-        </p:nvSpPr>
-        <p:spPr>
-          <a:xfrm>
-            <a:off x="11704320" y="13947281"/>
-            <a:ext cx="20482560" cy="365760"/>
-          </a:xfrm>
-          <a:prstGeom prst="rect">
-            <a:avLst/>
-          </a:prstGeom>
-          <a:noFill/>
-        </p:spPr>
-        <p:txBody>
-          <a:bodyPr wrap="square" lIns="0" rIns="0" tIns="0" bIns="0">
-            <a:spAutoFit/>
-          </a:bodyPr>
-          <a:lstStyle/>
-          <a:p>
-            <a:pPr algn="l">
-              <a:lnSpc>
-                <a:spcPct val="100000"/>
-              </a:lnSpc>
-              <a:spcAft>
-                <a:spcPts val="0"/>
-              </a:spcAft>
-            </a:pPr>
-            <a:r>
-              <a:rPr sz="1800" b="1">
-                <a:solidFill>
-                  <a:srgbClr val="1E293B"/>
-                </a:solidFill>
-                <a:latin typeface="Arial"/>
-              </a:rPr>
-              <a:t>Does more harvested data help?</a:t>
+              <a:t>Figure 4.  Three detector families on the CottonWeedDet12 holdout, three seeds each. How the network is initialised is worth three times what the architecture is worth.</a:t>
             </a:r>
           </a:p>
         </p:txBody>
       </p:sp>
       <p:pic>
         <p:nvPicPr>
-          <p:cNvPr id="63" name="Picture 62" descr="c_ladder.png"/>
+          <p:cNvPr id="62" name="Picture 61" descr="b_zeroshot.png"/>
           <p:cNvPicPr>
             <a:picLocks noChangeAspect="1"/>
           </p:cNvPicPr>
@@ -5659,6 +5617,114 @@
         </p:blipFill>
         <p:spPr>
           <a:xfrm>
+            <a:off x="22197060" y="7763255"/>
+            <a:ext cx="9989819" cy="4817913"/>
+          </a:xfrm>
+          <a:prstGeom prst="rect">
+            <a:avLst/>
+          </a:prstGeom>
+        </p:spPr>
+      </p:pic>
+      <p:sp>
+        <p:nvSpPr>
+          <p:cNvPr id="63" name="TextBox 62"/>
+          <p:cNvSpPr txBox="1"/>
+          <p:nvPr/>
+        </p:nvSpPr>
+        <p:spPr>
+          <a:xfrm>
+            <a:off x="22197060" y="12672608"/>
+            <a:ext cx="9989819" cy="365760"/>
+          </a:xfrm>
+          <a:prstGeom prst="rect">
+            <a:avLst/>
+          </a:prstGeom>
+          <a:noFill/>
+        </p:spPr>
+        <p:txBody>
+          <a:bodyPr wrap="square" lIns="0" rIns="0" tIns="0" bIns="0">
+            <a:spAutoFit/>
+          </a:bodyPr>
+          <a:lstStyle/>
+          <a:p>
+            <a:pPr algn="l">
+              <a:lnSpc>
+                <a:spcPct val="120000"/>
+              </a:lnSpc>
+              <a:spcAft>
+                <a:spcPts val="0"/>
+              </a:spcAft>
+            </a:pPr>
+            <a:r>
+              <a:rPr sz="1200" b="0">
+                <a:solidFill>
+                  <a:srgbClr val="556575"/>
+                </a:solidFill>
+                <a:latin typeface="Arial"/>
+              </a:rPr>
+              <a:t>Figure 5.  One deterministic pass per model, no repeats. Fifteen zero-shot vision-language models against the fine-tuned detector: the best of them reaches 0.434 against 0.929, and five produce no usable grounding at all.</a:t>
+            </a:r>
+          </a:p>
+        </p:txBody>
+      </p:sp>
+      <p:sp>
+        <p:nvSpPr>
+          <p:cNvPr id="64" name="TextBox 63"/>
+          <p:cNvSpPr txBox="1"/>
+          <p:nvPr/>
+        </p:nvSpPr>
+        <p:spPr>
+          <a:xfrm>
+            <a:off x="11704320" y="13947281"/>
+            <a:ext cx="20482560" cy="365760"/>
+          </a:xfrm>
+          <a:prstGeom prst="rect">
+            <a:avLst/>
+          </a:prstGeom>
+          <a:noFill/>
+        </p:spPr>
+        <p:txBody>
+          <a:bodyPr wrap="square" lIns="0" rIns="0" tIns="0" bIns="0">
+            <a:spAutoFit/>
+          </a:bodyPr>
+          <a:lstStyle/>
+          <a:p>
+            <a:pPr algn="l">
+              <a:lnSpc>
+                <a:spcPct val="100000"/>
+              </a:lnSpc>
+              <a:spcAft>
+                <a:spcPts val="0"/>
+              </a:spcAft>
+            </a:pPr>
+            <a:r>
+              <a:rPr sz="1800" b="1">
+                <a:solidFill>
+                  <a:srgbClr val="1E293B"/>
+                </a:solidFill>
+                <a:latin typeface="Arial"/>
+              </a:rPr>
+              <a:t>Does more harvested data help?</a:t>
+            </a:r>
+          </a:p>
+        </p:txBody>
+      </p:sp>
+      <p:pic>
+        <p:nvPicPr>
+          <p:cNvPr id="65" name="Picture 64" descr="c_ladder.png"/>
+          <p:cNvPicPr>
+            <a:picLocks noChangeAspect="1"/>
+          </p:cNvPicPr>
+          <p:nvPr/>
+        </p:nvPicPr>
+        <p:blipFill>
+          <a:blip r:embed="rId7"/>
+          <a:stretch>
+            <a:fillRect/>
+          </a:stretch>
+        </p:blipFill>
+        <p:spPr>
+          <a:xfrm>
             <a:off x="11704320" y="14258176"/>
             <a:ext cx="9989819" cy="2543654"/>
           </a:xfrm>
@@ -5669,7 +5735,7 @@
       </p:pic>
       <p:sp>
         <p:nvSpPr>
-          <p:cNvPr id="64" name="TextBox 63"/>
+          <p:cNvPr id="66" name="TextBox 65"/>
           <p:cNvSpPr txBox="1"/>
           <p:nvPr/>
         </p:nvSpPr>
@@ -5704,14 +5770,14 @@
                 </a:solidFill>
                 <a:latin typeface="Arial"/>
               </a:rPr>
-              <a:t>Figure 5.  (c) Twelve times the training data costs 0.0189, three seeds at every rung. (d) The same eight checkpoints on a second dataset, class-agnostic, nothing of which it saw in training and 0 images excluded by the leak check; the series labels in (c) apply to (d). Both exams fall, so the narrow metric is not what makes the ladder drop.</a:t>
-            </a:r>
-          </a:p>
-        </p:txBody>
-      </p:sp>
-      <p:sp>
-        <p:nvSpPr>
-          <p:cNvPr id="65" name="TextBox 64"/>
+              <a:t>Figure 6.  (c) Twelve times the training data costs 0.0189, three seeds at every rung. (d) The same eight checkpoints on a second dataset, class-agnostic, nothing of which it saw in training and 0 images excluded by the leak check; the series labels in (c) apply to (d). Both exams fall, so the narrow metric is not what makes the ladder drop.</a:t>
+            </a:r>
+          </a:p>
+        </p:txBody>
+      </p:sp>
+      <p:sp>
+        <p:nvSpPr>
+          <p:cNvPr id="67" name="TextBox 66"/>
           <p:cNvSpPr txBox="1"/>
           <p:nvPr/>
         </p:nvSpPr>
@@ -5753,7 +5819,7 @@
       </p:sp>
       <p:sp>
         <p:nvSpPr>
-          <p:cNvPr id="66" name="Rectangle 65"/>
+          <p:cNvPr id="68" name="Rectangle 67"/>
           <p:cNvSpPr/>
           <p:nvPr/>
         </p:nvSpPr>
@@ -5797,7 +5863,7 @@
       </p:sp>
       <p:sp>
         <p:nvSpPr>
-          <p:cNvPr id="67" name="TextBox 66"/>
+          <p:cNvPr id="69" name="TextBox 68"/>
           <p:cNvSpPr txBox="1"/>
           <p:nvPr/>
         </p:nvSpPr>
@@ -5839,7 +5905,7 @@
       </p:sp>
       <p:sp>
         <p:nvSpPr>
-          <p:cNvPr id="68" name="TextBox 67"/>
+          <p:cNvPr id="70" name="TextBox 69"/>
           <p:cNvSpPr txBox="1"/>
           <p:nvPr/>
         </p:nvSpPr>
@@ -5881,7 +5947,7 @@
       </p:sp>
       <p:sp>
         <p:nvSpPr>
-          <p:cNvPr id="69" name="TextBox 68"/>
+          <p:cNvPr id="71" name="TextBox 70"/>
           <p:cNvSpPr txBox="1"/>
           <p:nvPr/>
         </p:nvSpPr>
@@ -5923,7 +5989,7 @@
       </p:sp>
       <p:sp>
         <p:nvSpPr>
-          <p:cNvPr id="70" name="Rectangle 69"/>
+          <p:cNvPr id="72" name="Rectangle 71"/>
           <p:cNvSpPr/>
           <p:nvPr/>
         </p:nvSpPr>
@@ -5967,7 +6033,7 @@
       </p:sp>
       <p:sp>
         <p:nvSpPr>
-          <p:cNvPr id="71" name="TextBox 70"/>
+          <p:cNvPr id="73" name="TextBox 72"/>
           <p:cNvSpPr txBox="1"/>
           <p:nvPr/>
         </p:nvSpPr>
@@ -6009,7 +6075,7 @@
       </p:sp>
       <p:sp>
         <p:nvSpPr>
-          <p:cNvPr id="72" name="TextBox 71"/>
+          <p:cNvPr id="74" name="TextBox 73"/>
           <p:cNvSpPr txBox="1"/>
           <p:nvPr/>
         </p:nvSpPr>
@@ -6051,7 +6117,7 @@
       </p:sp>
       <p:sp>
         <p:nvSpPr>
-          <p:cNvPr id="73" name="TextBox 72"/>
+          <p:cNvPr id="75" name="TextBox 74"/>
           <p:cNvSpPr txBox="1"/>
           <p:nvPr/>
         </p:nvSpPr>
@@ -6093,7 +6159,7 @@
       </p:sp>
       <p:sp>
         <p:nvSpPr>
-          <p:cNvPr id="74" name="TextBox 73"/>
+          <p:cNvPr id="76" name="TextBox 75"/>
           <p:cNvSpPr txBox="1"/>
           <p:nvPr/>
         </p:nvSpPr>
@@ -6135,7 +6201,7 @@
       </p:sp>
       <p:sp>
         <p:nvSpPr>
-          <p:cNvPr id="75" name="TextBox 74"/>
+          <p:cNvPr id="77" name="TextBox 76"/>
           <p:cNvSpPr txBox="1"/>
           <p:nvPr/>
         </p:nvSpPr>
@@ -6177,7 +6243,7 @@
       </p:sp>
       <p:sp>
         <p:nvSpPr>
-          <p:cNvPr id="76" name="TextBox 75"/>
+          <p:cNvPr id="78" name="TextBox 77"/>
           <p:cNvSpPr txBox="1"/>
           <p:nvPr/>
         </p:nvSpPr>
@@ -6219,7 +6285,7 @@
       </p:sp>
       <p:sp>
         <p:nvSpPr>
-          <p:cNvPr id="77" name="TextBox 76"/>
+          <p:cNvPr id="79" name="TextBox 78"/>
           <p:cNvSpPr txBox="1"/>
           <p:nvPr/>
         </p:nvSpPr>
@@ -6261,7 +6327,7 @@
       </p:sp>
       <p:sp>
         <p:nvSpPr>
-          <p:cNvPr id="78" name="TextBox 77"/>
+          <p:cNvPr id="80" name="TextBox 79"/>
           <p:cNvSpPr txBox="1"/>
           <p:nvPr/>
         </p:nvSpPr>
@@ -6303,7 +6369,7 @@
       </p:sp>
       <p:sp>
         <p:nvSpPr>
-          <p:cNvPr id="79" name="TextBox 78"/>
+          <p:cNvPr id="81" name="TextBox 80"/>
           <p:cNvSpPr txBox="1"/>
           <p:nvPr/>
         </p:nvSpPr>
@@ -6345,7 +6411,7 @@
       </p:sp>
       <p:sp>
         <p:nvSpPr>
-          <p:cNvPr id="80" name="TextBox 79"/>
+          <p:cNvPr id="82" name="TextBox 81"/>
           <p:cNvSpPr txBox="1"/>
           <p:nvPr/>
         </p:nvSpPr>
@@ -6387,7 +6453,7 @@
       </p:sp>
       <p:sp>
         <p:nvSpPr>
-          <p:cNvPr id="81" name="TextBox 80"/>
+          <p:cNvPr id="83" name="TextBox 82"/>
           <p:cNvSpPr txBox="1"/>
           <p:nvPr/>
         </p:nvSpPr>
@@ -6429,7 +6495,7 @@
       </p:sp>
       <p:sp>
         <p:nvSpPr>
-          <p:cNvPr id="82" name="TextBox 81"/>
+          <p:cNvPr id="84" name="TextBox 83"/>
           <p:cNvSpPr txBox="1"/>
           <p:nvPr/>
         </p:nvSpPr>
@@ -6471,7 +6537,7 @@
       </p:sp>
       <p:sp>
         <p:nvSpPr>
-          <p:cNvPr id="83" name="Rectangle 82"/>
+          <p:cNvPr id="85" name="Rectangle 84"/>
           <p:cNvSpPr/>
           <p:nvPr/>
         </p:nvSpPr>
@@ -6515,7 +6581,7 @@
       </p:sp>
       <p:sp>
         <p:nvSpPr>
-          <p:cNvPr id="84" name="TextBox 83"/>
+          <p:cNvPr id="86" name="TextBox 85"/>
           <p:cNvSpPr txBox="1"/>
           <p:nvPr/>
         </p:nvSpPr>
@@ -6557,7 +6623,7 @@
       </p:sp>
       <p:sp>
         <p:nvSpPr>
-          <p:cNvPr id="85" name="TextBox 84"/>
+          <p:cNvPr id="87" name="TextBox 86"/>
           <p:cNvSpPr txBox="1"/>
           <p:nvPr/>
         </p:nvSpPr>
@@ -6599,14 +6665,14 @@
       </p:sp>
       <p:pic>
         <p:nvPicPr>
-          <p:cNvPr id="86" name="Picture 85" descr="e_supervision.png"/>
+          <p:cNvPr id="88" name="Picture 87" descr="e_supervision.png"/>
           <p:cNvPicPr>
             <a:picLocks noChangeAspect="1"/>
           </p:cNvPicPr>
           <p:nvPr/>
         </p:nvPicPr>
         <p:blipFill>
-          <a:blip r:embed="rId7"/>
+          <a:blip r:embed="rId8"/>
           <a:stretch>
             <a:fillRect/>
           </a:stretch>
@@ -6614,7 +6680,7 @@
         <p:spPr>
           <a:xfrm>
             <a:off x="11704320" y="18118567"/>
-            <a:ext cx="9989819" cy="5399525"/>
+            <a:ext cx="9989819" cy="5906650"/>
           </a:xfrm>
           <a:prstGeom prst="rect">
             <a:avLst/>
@@ -6623,13 +6689,13 @@
       </p:pic>
       <p:sp>
         <p:nvSpPr>
-          <p:cNvPr id="87" name="TextBox 86"/>
-          <p:cNvSpPr txBox="1"/>
-          <p:nvPr/>
-        </p:nvSpPr>
-        <p:spPr>
-          <a:xfrm>
-            <a:off x="11704320" y="23609532"/>
+          <p:cNvPr id="89" name="TextBox 88"/>
+          <p:cNvSpPr txBox="1"/>
+          <p:nvPr/>
+        </p:nvSpPr>
+        <p:spPr>
+          <a:xfrm>
+            <a:off x="11704320" y="24116657"/>
             <a:ext cx="9989819" cy="365760"/>
           </a:xfrm>
           <a:prstGeom prst="rect">
@@ -6658,14 +6724,14 @@
                 </a:solidFill>
                 <a:latin typeface="Arial"/>
               </a:rPr>
-              <a:t>Figure 6.  Every arm on one frozen corpus of 162 real incidents from this project's own history. Up and to the left is better. The scripted watchdog sits at the origin: it flagged nothing, 149 times out of 149.</a:t>
-            </a:r>
-          </a:p>
-        </p:txBody>
-      </p:sp>
-      <p:sp>
-        <p:nvSpPr>
-          <p:cNvPr id="88" name="TextBox 87"/>
+              <a:t>Figure 7.  Every arm on one frozen corpus of real incidents from this project's own history -- 116 incidents and 33 controls -- scored by the project's own scorer, which requires the finding to be about the incident and not merely that the arm raised something. Up and to the left is better. Open circle: the model reads raw artifact excerpts. Filled: the same model with a retrieval round over the same artifacts. The retrieval tier is worth +0.149 recall to the 27B and +0.012 to the 14B, so tiering pays where the model can use it and not otherwise.</a:t>
+            </a:r>
+          </a:p>
+        </p:txBody>
+      </p:sp>
+      <p:sp>
+        <p:nvSpPr>
+          <p:cNvPr id="90" name="TextBox 89"/>
           <p:cNvSpPr txBox="1"/>
           <p:nvPr/>
         </p:nvSpPr>
@@ -6700,20 +6766,20 @@
                 </a:solidFill>
                 <a:latin typeface="Arial"/>
               </a:rPr>
-              <a:t>A frozen corpus of 162 real incidents from this project's own engineering record, scored on the dev split: 116 incidents and 33 controls. Recall is over incidents, the false-alarm rate over controls, and an arm that cannot decide a case is counted as a miss.</a:t>
-            </a:r>
-          </a:p>
-        </p:txBody>
-      </p:sp>
-      <p:sp>
-        <p:nvSpPr>
-          <p:cNvPr id="89" name="Rectangle 88"/>
+              <a:t>A frozen corpus of 162 real incidents from this project's own engineering record, scored on the dev split: 116 incidents and 33 controls. Recall is over incidents and the false-alarm rate over controls, both by the project's own scorer re-reading committed verdicts, which requires the finding to be about the incident rather than merely that the arm raised something. L2 reads raw artifact excerpts; L3 adds a retrieval round over the same artifacts.</a:t>
+            </a:r>
+          </a:p>
+        </p:txBody>
+      </p:sp>
+      <p:sp>
+        <p:nvSpPr>
+          <p:cNvPr id="91" name="Rectangle 90"/>
           <p:cNvSpPr/>
           <p:nvPr/>
         </p:nvSpPr>
         <p:spPr>
           <a:xfrm>
-            <a:off x="22197060" y="18873074"/>
+            <a:off x="22197060" y="19082243"/>
             <a:ext cx="9989819" cy="20116"/>
           </a:xfrm>
           <a:prstGeom prst="rect">
@@ -6751,14 +6817,14 @@
       </p:sp>
       <p:sp>
         <p:nvSpPr>
-          <p:cNvPr id="90" name="TextBox 89"/>
-          <p:cNvSpPr txBox="1"/>
-          <p:nvPr/>
-        </p:nvSpPr>
-        <p:spPr>
-          <a:xfrm>
-            <a:off x="22197060" y="18964514"/>
-            <a:ext cx="4795113" cy="365760"/>
+          <p:cNvPr id="92" name="TextBox 91"/>
+          <p:cNvSpPr txBox="1"/>
+          <p:nvPr/>
+        </p:nvSpPr>
+        <p:spPr>
+          <a:xfrm>
+            <a:off x="22197060" y="19173683"/>
+            <a:ext cx="2996945" cy="365760"/>
           </a:xfrm>
           <a:prstGeom prst="rect">
             <a:avLst/>
@@ -6793,14 +6859,14 @@
       </p:sp>
       <p:sp>
         <p:nvSpPr>
-          <p:cNvPr id="91" name="TextBox 90"/>
-          <p:cNvSpPr txBox="1"/>
-          <p:nvPr/>
-        </p:nvSpPr>
-        <p:spPr>
-          <a:xfrm>
-            <a:off x="26992173" y="18964514"/>
-            <a:ext cx="2597353" cy="365760"/>
+          <p:cNvPr id="93" name="TextBox 92"/>
+          <p:cNvSpPr txBox="1"/>
+          <p:nvPr/>
+        </p:nvSpPr>
+        <p:spPr>
+          <a:xfrm>
+            <a:off x="25194006" y="19173683"/>
+            <a:ext cx="2996945" cy="365760"/>
           </a:xfrm>
           <a:prstGeom prst="rect">
             <a:avLst/>
@@ -6828,6 +6894,48 @@
                 </a:solidFill>
                 <a:latin typeface="Arial"/>
               </a:rPr>
+              <a:t>reads</a:t>
+            </a:r>
+          </a:p>
+        </p:txBody>
+      </p:sp>
+      <p:sp>
+        <p:nvSpPr>
+          <p:cNvPr id="94" name="TextBox 93"/>
+          <p:cNvSpPr txBox="1"/>
+          <p:nvPr/>
+        </p:nvSpPr>
+        <p:spPr>
+          <a:xfrm>
+            <a:off x="28190952" y="19173683"/>
+            <a:ext cx="1398574" cy="365760"/>
+          </a:xfrm>
+          <a:prstGeom prst="rect">
+            <a:avLst/>
+          </a:prstGeom>
+          <a:noFill/>
+        </p:spPr>
+        <p:txBody>
+          <a:bodyPr wrap="square" lIns="0" rIns="0" tIns="0" bIns="0">
+            <a:spAutoFit/>
+          </a:bodyPr>
+          <a:lstStyle/>
+          <a:p>
+            <a:pPr algn="r">
+              <a:lnSpc>
+                <a:spcPct val="100000"/>
+              </a:lnSpc>
+              <a:spcAft>
+                <a:spcPts val="0"/>
+              </a:spcAft>
+            </a:pPr>
+            <a:r>
+              <a:rPr sz="1250" b="1">
+                <a:solidFill>
+                  <a:srgbClr val="1E293B"/>
+                </a:solidFill>
+                <a:latin typeface="Arial"/>
+              </a:rPr>
               <a:t>recall</a:t>
             </a:r>
           </a:p>
@@ -6835,14 +6943,14 @@
       </p:sp>
       <p:sp>
         <p:nvSpPr>
-          <p:cNvPr id="92" name="TextBox 91"/>
-          <p:cNvSpPr txBox="1"/>
-          <p:nvPr/>
-        </p:nvSpPr>
-        <p:spPr>
-          <a:xfrm>
-            <a:off x="29589526" y="18964514"/>
-            <a:ext cx="2597353" cy="365760"/>
+          <p:cNvPr id="95" name="TextBox 94"/>
+          <p:cNvSpPr txBox="1"/>
+          <p:nvPr/>
+        </p:nvSpPr>
+        <p:spPr>
+          <a:xfrm>
+            <a:off x="29589526" y="19173683"/>
+            <a:ext cx="1598371" cy="365760"/>
           </a:xfrm>
           <a:prstGeom prst="rect">
             <a:avLst/>
@@ -6877,13 +6985,55 @@
       </p:sp>
       <p:sp>
         <p:nvSpPr>
-          <p:cNvPr id="93" name="Rectangle 92"/>
+          <p:cNvPr id="96" name="TextBox 95"/>
+          <p:cNvSpPr txBox="1"/>
+          <p:nvPr/>
+        </p:nvSpPr>
+        <p:spPr>
+          <a:xfrm>
+            <a:off x="31187898" y="19173683"/>
+            <a:ext cx="998982" cy="365760"/>
+          </a:xfrm>
+          <a:prstGeom prst="rect">
+            <a:avLst/>
+          </a:prstGeom>
+          <a:noFill/>
+        </p:spPr>
+        <p:txBody>
+          <a:bodyPr wrap="square" lIns="0" rIns="0" tIns="0" bIns="0">
+            <a:spAutoFit/>
+          </a:bodyPr>
+          <a:lstStyle/>
+          <a:p>
+            <a:pPr algn="r">
+              <a:lnSpc>
+                <a:spcPct val="100000"/>
+              </a:lnSpc>
+              <a:spcAft>
+                <a:spcPts val="0"/>
+              </a:spcAft>
+            </a:pPr>
+            <a:r>
+              <a:rPr sz="1250" b="1">
+                <a:solidFill>
+                  <a:srgbClr val="1E293B"/>
+                </a:solidFill>
+                <a:latin typeface="Arial"/>
+              </a:rPr>
+              <a:t>cases</a:t>
+            </a:r>
+          </a:p>
+        </p:txBody>
+      </p:sp>
+      <p:sp>
+        <p:nvSpPr>
+          <p:cNvPr id="97" name="Rectangle 96"/>
           <p:cNvSpPr/>
           <p:nvPr/>
         </p:nvSpPr>
         <p:spPr>
           <a:xfrm>
-            <a:off x="22197060" y="19238834"/>
+            <a:off x="22197060" y="19448003"/>
             <a:ext cx="9989819" cy="12801"/>
           </a:xfrm>
           <a:prstGeom prst="rect">
@@ -6921,14 +7071,14 @@
       </p:sp>
       <p:sp>
         <p:nvSpPr>
-          <p:cNvPr id="94" name="TextBox 93"/>
-          <p:cNvSpPr txBox="1"/>
-          <p:nvPr/>
-        </p:nvSpPr>
-        <p:spPr>
-          <a:xfrm>
-            <a:off x="22197060" y="19321130"/>
-            <a:ext cx="4795113" cy="365760"/>
+          <p:cNvPr id="98" name="TextBox 97"/>
+          <p:cNvSpPr txBox="1"/>
+          <p:nvPr/>
+        </p:nvSpPr>
+        <p:spPr>
+          <a:xfrm>
+            <a:off x="22197060" y="19530299"/>
+            <a:ext cx="2996945" cy="365760"/>
           </a:xfrm>
           <a:prstGeom prst="rect">
             <a:avLst/>
@@ -6963,14 +7113,14 @@
       </p:sp>
       <p:sp>
         <p:nvSpPr>
-          <p:cNvPr id="95" name="TextBox 94"/>
-          <p:cNvSpPr txBox="1"/>
-          <p:nvPr/>
-        </p:nvSpPr>
-        <p:spPr>
-          <a:xfrm>
-            <a:off x="26992173" y="19321130"/>
-            <a:ext cx="2597353" cy="365760"/>
+          <p:cNvPr id="99" name="TextBox 98"/>
+          <p:cNvSpPr txBox="1"/>
+          <p:nvPr/>
+        </p:nvSpPr>
+        <p:spPr>
+          <a:xfrm>
+            <a:off x="25194006" y="19530299"/>
+            <a:ext cx="2996945" cy="365760"/>
           </a:xfrm>
           <a:prstGeom prst="rect">
             <a:avLst/>
@@ -6998,21 +7148,21 @@
                 </a:solidFill>
                 <a:latin typeface="Arial"/>
               </a:rPr>
-              <a:t>0.000</a:t>
-            </a:r>
-          </a:p>
-        </p:txBody>
-      </p:sp>
-      <p:sp>
-        <p:nvSpPr>
-          <p:cNvPr id="96" name="TextBox 95"/>
-          <p:cNvSpPr txBox="1"/>
-          <p:nvPr/>
-        </p:nvSpPr>
-        <p:spPr>
-          <a:xfrm>
-            <a:off x="29589526" y="19321130"/>
-            <a:ext cx="2597353" cy="365760"/>
+              <a:t>status fields</a:t>
+            </a:r>
+          </a:p>
+        </p:txBody>
+      </p:sp>
+      <p:sp>
+        <p:nvSpPr>
+          <p:cNvPr id="100" name="TextBox 99"/>
+          <p:cNvSpPr txBox="1"/>
+          <p:nvPr/>
+        </p:nvSpPr>
+        <p:spPr>
+          <a:xfrm>
+            <a:off x="28190952" y="19530299"/>
+            <a:ext cx="1398574" cy="365760"/>
           </a:xfrm>
           <a:prstGeom prst="rect">
             <a:avLst/>
@@ -7040,21 +7190,105 @@
                 </a:solidFill>
                 <a:latin typeface="Arial"/>
               </a:rPr>
-              <a:t>0.000</a:t>
-            </a:r>
-          </a:p>
-        </p:txBody>
-      </p:sp>
-      <p:sp>
-        <p:nvSpPr>
-          <p:cNvPr id="97" name="TextBox 96"/>
-          <p:cNvSpPr txBox="1"/>
-          <p:nvPr/>
-        </p:nvSpPr>
-        <p:spPr>
-          <a:xfrm>
-            <a:off x="22197060" y="19632026"/>
-            <a:ext cx="4795113" cy="365760"/>
+              <a:t>--</a:t>
+            </a:r>
+          </a:p>
+        </p:txBody>
+      </p:sp>
+      <p:sp>
+        <p:nvSpPr>
+          <p:cNvPr id="101" name="TextBox 100"/>
+          <p:cNvSpPr txBox="1"/>
+          <p:nvPr/>
+        </p:nvSpPr>
+        <p:spPr>
+          <a:xfrm>
+            <a:off x="29589526" y="19530299"/>
+            <a:ext cx="1598371" cy="365760"/>
+          </a:xfrm>
+          <a:prstGeom prst="rect">
+            <a:avLst/>
+          </a:prstGeom>
+          <a:noFill/>
+        </p:spPr>
+        <p:txBody>
+          <a:bodyPr wrap="square" lIns="0" rIns="0" tIns="0" bIns="0">
+            <a:spAutoFit/>
+          </a:bodyPr>
+          <a:lstStyle/>
+          <a:p>
+            <a:pPr algn="r">
+              <a:lnSpc>
+                <a:spcPct val="100000"/>
+              </a:lnSpc>
+              <a:spcAft>
+                <a:spcPts val="0"/>
+              </a:spcAft>
+            </a:pPr>
+            <a:r>
+              <a:rPr sz="1300" b="0">
+                <a:solidFill>
+                  <a:srgbClr val="1E293B"/>
+                </a:solidFill>
+                <a:latin typeface="Arial"/>
+              </a:rPr>
+              <a:t>--</a:t>
+            </a:r>
+          </a:p>
+        </p:txBody>
+      </p:sp>
+      <p:sp>
+        <p:nvSpPr>
+          <p:cNvPr id="102" name="TextBox 101"/>
+          <p:cNvSpPr txBox="1"/>
+          <p:nvPr/>
+        </p:nvSpPr>
+        <p:spPr>
+          <a:xfrm>
+            <a:off x="31187898" y="19530299"/>
+            <a:ext cx="998982" cy="365760"/>
+          </a:xfrm>
+          <a:prstGeom prst="rect">
+            <a:avLst/>
+          </a:prstGeom>
+          <a:noFill/>
+        </p:spPr>
+        <p:txBody>
+          <a:bodyPr wrap="square" lIns="0" rIns="0" tIns="0" bIns="0">
+            <a:spAutoFit/>
+          </a:bodyPr>
+          <a:lstStyle/>
+          <a:p>
+            <a:pPr algn="r">
+              <a:lnSpc>
+                <a:spcPct val="100000"/>
+              </a:lnSpc>
+              <a:spcAft>
+                <a:spcPts val="0"/>
+              </a:spcAft>
+            </a:pPr>
+            <a:r>
+              <a:rPr sz="1300" b="0">
+                <a:solidFill>
+                  <a:srgbClr val="1E293B"/>
+                </a:solidFill>
+                <a:latin typeface="Arial"/>
+              </a:rPr>
+              <a:t>149</a:t>
+            </a:r>
+          </a:p>
+        </p:txBody>
+      </p:sp>
+      <p:sp>
+        <p:nvSpPr>
+          <p:cNvPr id="103" name="TextBox 102"/>
+          <p:cNvSpPr txBox="1"/>
+          <p:nvPr/>
+        </p:nvSpPr>
+        <p:spPr>
+          <a:xfrm>
+            <a:off x="22197060" y="19841195"/>
+            <a:ext cx="2996945" cy="365760"/>
           </a:xfrm>
           <a:prstGeom prst="rect">
             <a:avLst/>
@@ -7089,14 +7323,14 @@
       </p:sp>
       <p:sp>
         <p:nvSpPr>
-          <p:cNvPr id="98" name="TextBox 97"/>
-          <p:cNvSpPr txBox="1"/>
-          <p:nvPr/>
-        </p:nvSpPr>
-        <p:spPr>
-          <a:xfrm>
-            <a:off x="26992173" y="19632026"/>
-            <a:ext cx="2597353" cy="365760"/>
+          <p:cNvPr id="104" name="TextBox 103"/>
+          <p:cNvSpPr txBox="1"/>
+          <p:nvPr/>
+        </p:nvSpPr>
+        <p:spPr>
+          <a:xfrm>
+            <a:off x="25194006" y="19841195"/>
+            <a:ext cx="2996945" cy="365760"/>
           </a:xfrm>
           <a:prstGeom prst="rect">
             <a:avLst/>
@@ -7124,6 +7358,48 @@
                 </a:solidFill>
                 <a:latin typeface="Arial"/>
               </a:rPr>
+              <a:t>12 checks</a:t>
+            </a:r>
+          </a:p>
+        </p:txBody>
+      </p:sp>
+      <p:sp>
+        <p:nvSpPr>
+          <p:cNvPr id="105" name="TextBox 104"/>
+          <p:cNvSpPr txBox="1"/>
+          <p:nvPr/>
+        </p:nvSpPr>
+        <p:spPr>
+          <a:xfrm>
+            <a:off x="28190952" y="19841195"/>
+            <a:ext cx="1398574" cy="365760"/>
+          </a:xfrm>
+          <a:prstGeom prst="rect">
+            <a:avLst/>
+          </a:prstGeom>
+          <a:noFill/>
+        </p:spPr>
+        <p:txBody>
+          <a:bodyPr wrap="square" lIns="0" rIns="0" tIns="0" bIns="0">
+            <a:spAutoFit/>
+          </a:bodyPr>
+          <a:lstStyle/>
+          <a:p>
+            <a:pPr algn="r">
+              <a:lnSpc>
+                <a:spcPct val="100000"/>
+              </a:lnSpc>
+              <a:spcAft>
+                <a:spcPts val="0"/>
+              </a:spcAft>
+            </a:pPr>
+            <a:r>
+              <a:rPr sz="1300" b="0">
+                <a:solidFill>
+                  <a:srgbClr val="1E293B"/>
+                </a:solidFill>
+                <a:latin typeface="Arial"/>
+              </a:rPr>
               <a:t>0.095</a:t>
             </a:r>
           </a:p>
@@ -7131,14 +7407,14 @@
       </p:sp>
       <p:sp>
         <p:nvSpPr>
-          <p:cNvPr id="99" name="TextBox 98"/>
-          <p:cNvSpPr txBox="1"/>
-          <p:nvPr/>
-        </p:nvSpPr>
-        <p:spPr>
-          <a:xfrm>
-            <a:off x="29589526" y="19632026"/>
-            <a:ext cx="2597353" cy="365760"/>
+          <p:cNvPr id="106" name="TextBox 105"/>
+          <p:cNvSpPr txBox="1"/>
+          <p:nvPr/>
+        </p:nvSpPr>
+        <p:spPr>
+          <a:xfrm>
+            <a:off x="29589526" y="19841195"/>
+            <a:ext cx="1598371" cy="365760"/>
           </a:xfrm>
           <a:prstGeom prst="rect">
             <a:avLst/>
@@ -7173,14 +7449,56 @@
       </p:sp>
       <p:sp>
         <p:nvSpPr>
-          <p:cNvPr id="100" name="TextBox 99"/>
-          <p:cNvSpPr txBox="1"/>
-          <p:nvPr/>
-        </p:nvSpPr>
-        <p:spPr>
-          <a:xfrm>
-            <a:off x="22197060" y="19942922"/>
-            <a:ext cx="4795113" cy="365760"/>
+          <p:cNvPr id="107" name="TextBox 106"/>
+          <p:cNvSpPr txBox="1"/>
+          <p:nvPr/>
+        </p:nvSpPr>
+        <p:spPr>
+          <a:xfrm>
+            <a:off x="31187898" y="19841195"/>
+            <a:ext cx="998982" cy="365760"/>
+          </a:xfrm>
+          <a:prstGeom prst="rect">
+            <a:avLst/>
+          </a:prstGeom>
+          <a:noFill/>
+        </p:spPr>
+        <p:txBody>
+          <a:bodyPr wrap="square" lIns="0" rIns="0" tIns="0" bIns="0">
+            <a:spAutoFit/>
+          </a:bodyPr>
+          <a:lstStyle/>
+          <a:p>
+            <a:pPr algn="r">
+              <a:lnSpc>
+                <a:spcPct val="100000"/>
+              </a:lnSpc>
+              <a:spcAft>
+                <a:spcPts val="0"/>
+              </a:spcAft>
+            </a:pPr>
+            <a:r>
+              <a:rPr sz="1300" b="0">
+                <a:solidFill>
+                  <a:srgbClr val="1E293B"/>
+                </a:solidFill>
+                <a:latin typeface="Arial"/>
+              </a:rPr>
+              <a:t>149</a:t>
+            </a:r>
+          </a:p>
+        </p:txBody>
+      </p:sp>
+      <p:sp>
+        <p:nvSpPr>
+          <p:cNvPr id="108" name="TextBox 107"/>
+          <p:cNvSpPr txBox="1"/>
+          <p:nvPr/>
+        </p:nvSpPr>
+        <p:spPr>
+          <a:xfrm>
+            <a:off x="22197060" y="20152091"/>
+            <a:ext cx="2996945" cy="365760"/>
           </a:xfrm>
           <a:prstGeom prst="rect">
             <a:avLst/>
@@ -7208,21 +7526,21 @@
                 </a:solidFill>
                 <a:latin typeface="Arial"/>
               </a:rPr>
-              <a:t>Qwen3-14B</a:t>
-            </a:r>
-          </a:p>
-        </p:txBody>
-      </p:sp>
-      <p:sp>
-        <p:nvSpPr>
-          <p:cNvPr id="101" name="TextBox 100"/>
-          <p:cNvSpPr txBox="1"/>
-          <p:nvPr/>
-        </p:nvSpPr>
-        <p:spPr>
-          <a:xfrm>
-            <a:off x="26992173" y="19942922"/>
-            <a:ext cx="2597353" cy="365760"/>
+              <a:t>Qwen3-14B  L2</a:t>
+            </a:r>
+          </a:p>
+        </p:txBody>
+      </p:sp>
+      <p:sp>
+        <p:nvSpPr>
+          <p:cNvPr id="109" name="TextBox 108"/>
+          <p:cNvSpPr txBox="1"/>
+          <p:nvPr/>
+        </p:nvSpPr>
+        <p:spPr>
+          <a:xfrm>
+            <a:off x="25194006" y="20152091"/>
+            <a:ext cx="2996945" cy="365760"/>
           </a:xfrm>
           <a:prstGeom prst="rect">
             <a:avLst/>
@@ -7250,21 +7568,21 @@
                 </a:solidFill>
                 <a:latin typeface="Arial"/>
               </a:rPr>
-              <a:t>0.707</a:t>
-            </a:r>
-          </a:p>
-        </p:txBody>
-      </p:sp>
-      <p:sp>
-        <p:nvSpPr>
-          <p:cNvPr id="102" name="TextBox 101"/>
-          <p:cNvSpPr txBox="1"/>
-          <p:nvPr/>
-        </p:nvSpPr>
-        <p:spPr>
-          <a:xfrm>
-            <a:off x="29589526" y="19942922"/>
-            <a:ext cx="2597353" cy="365760"/>
+              <a:t>artifacts</a:t>
+            </a:r>
+          </a:p>
+        </p:txBody>
+      </p:sp>
+      <p:sp>
+        <p:nvSpPr>
+          <p:cNvPr id="110" name="TextBox 109"/>
+          <p:cNvSpPr txBox="1"/>
+          <p:nvPr/>
+        </p:nvSpPr>
+        <p:spPr>
+          <a:xfrm>
+            <a:off x="28190952" y="20152091"/>
+            <a:ext cx="1398574" cy="365760"/>
           </a:xfrm>
           <a:prstGeom prst="rect">
             <a:avLst/>
@@ -7292,6 +7610,258 @@
                 </a:solidFill>
                 <a:latin typeface="Arial"/>
               </a:rPr>
+              <a:t>0.664</a:t>
+            </a:r>
+          </a:p>
+        </p:txBody>
+      </p:sp>
+      <p:sp>
+        <p:nvSpPr>
+          <p:cNvPr id="111" name="TextBox 110"/>
+          <p:cNvSpPr txBox="1"/>
+          <p:nvPr/>
+        </p:nvSpPr>
+        <p:spPr>
+          <a:xfrm>
+            <a:off x="29589526" y="20152091"/>
+            <a:ext cx="1598371" cy="365760"/>
+          </a:xfrm>
+          <a:prstGeom prst="rect">
+            <a:avLst/>
+          </a:prstGeom>
+          <a:noFill/>
+        </p:spPr>
+        <p:txBody>
+          <a:bodyPr wrap="square" lIns="0" rIns="0" tIns="0" bIns="0">
+            <a:spAutoFit/>
+          </a:bodyPr>
+          <a:lstStyle/>
+          <a:p>
+            <a:pPr algn="r">
+              <a:lnSpc>
+                <a:spcPct val="100000"/>
+              </a:lnSpc>
+              <a:spcAft>
+                <a:spcPts val="0"/>
+              </a:spcAft>
+            </a:pPr>
+            <a:r>
+              <a:rPr sz="1300" b="0">
+                <a:solidFill>
+                  <a:srgbClr val="1E293B"/>
+                </a:solidFill>
+                <a:latin typeface="Arial"/>
+              </a:rPr>
+              <a:t>0.606</a:t>
+            </a:r>
+          </a:p>
+        </p:txBody>
+      </p:sp>
+      <p:sp>
+        <p:nvSpPr>
+          <p:cNvPr id="112" name="TextBox 111"/>
+          <p:cNvSpPr txBox="1"/>
+          <p:nvPr/>
+        </p:nvSpPr>
+        <p:spPr>
+          <a:xfrm>
+            <a:off x="31187898" y="20152091"/>
+            <a:ext cx="998982" cy="365760"/>
+          </a:xfrm>
+          <a:prstGeom prst="rect">
+            <a:avLst/>
+          </a:prstGeom>
+          <a:noFill/>
+        </p:spPr>
+        <p:txBody>
+          <a:bodyPr wrap="square" lIns="0" rIns="0" tIns="0" bIns="0">
+            <a:spAutoFit/>
+          </a:bodyPr>
+          <a:lstStyle/>
+          <a:p>
+            <a:pPr algn="r">
+              <a:lnSpc>
+                <a:spcPct val="100000"/>
+              </a:lnSpc>
+              <a:spcAft>
+                <a:spcPts val="0"/>
+              </a:spcAft>
+            </a:pPr>
+            <a:r>
+              <a:rPr sz="1300" b="0">
+                <a:solidFill>
+                  <a:srgbClr val="1E293B"/>
+                </a:solidFill>
+                <a:latin typeface="Arial"/>
+              </a:rPr>
+              <a:t>149</a:t>
+            </a:r>
+          </a:p>
+        </p:txBody>
+      </p:sp>
+      <p:sp>
+        <p:nvSpPr>
+          <p:cNvPr id="113" name="TextBox 112"/>
+          <p:cNvSpPr txBox="1"/>
+          <p:nvPr/>
+        </p:nvSpPr>
+        <p:spPr>
+          <a:xfrm>
+            <a:off x="22197060" y="20462987"/>
+            <a:ext cx="2996945" cy="365760"/>
+          </a:xfrm>
+          <a:prstGeom prst="rect">
+            <a:avLst/>
+          </a:prstGeom>
+          <a:noFill/>
+        </p:spPr>
+        <p:txBody>
+          <a:bodyPr wrap="square" lIns="0" rIns="0" tIns="0" bIns="0">
+            <a:spAutoFit/>
+          </a:bodyPr>
+          <a:lstStyle/>
+          <a:p>
+            <a:pPr algn="l">
+              <a:lnSpc>
+                <a:spcPct val="100000"/>
+              </a:lnSpc>
+              <a:spcAft>
+                <a:spcPts val="0"/>
+              </a:spcAft>
+            </a:pPr>
+            <a:r>
+              <a:rPr sz="1300" b="0">
+                <a:solidFill>
+                  <a:srgbClr val="1E293B"/>
+                </a:solidFill>
+                <a:latin typeface="Arial"/>
+              </a:rPr>
+              <a:t>Qwen3-14B  L3</a:t>
+            </a:r>
+          </a:p>
+        </p:txBody>
+      </p:sp>
+      <p:sp>
+        <p:nvSpPr>
+          <p:cNvPr id="114" name="TextBox 113"/>
+          <p:cNvSpPr txBox="1"/>
+          <p:nvPr/>
+        </p:nvSpPr>
+        <p:spPr>
+          <a:xfrm>
+            <a:off x="25194006" y="20462987"/>
+            <a:ext cx="2996945" cy="365760"/>
+          </a:xfrm>
+          <a:prstGeom prst="rect">
+            <a:avLst/>
+          </a:prstGeom>
+          <a:noFill/>
+        </p:spPr>
+        <p:txBody>
+          <a:bodyPr wrap="square" lIns="0" rIns="0" tIns="0" bIns="0">
+            <a:spAutoFit/>
+          </a:bodyPr>
+          <a:lstStyle/>
+          <a:p>
+            <a:pPr algn="r">
+              <a:lnSpc>
+                <a:spcPct val="100000"/>
+              </a:lnSpc>
+              <a:spcAft>
+                <a:spcPts val="0"/>
+              </a:spcAft>
+            </a:pPr>
+            <a:r>
+              <a:rPr sz="1300" b="0">
+                <a:solidFill>
+                  <a:srgbClr val="1E293B"/>
+                </a:solidFill>
+                <a:latin typeface="Arial"/>
+              </a:rPr>
+              <a:t>artifacts + retrieval</a:t>
+            </a:r>
+          </a:p>
+        </p:txBody>
+      </p:sp>
+      <p:sp>
+        <p:nvSpPr>
+          <p:cNvPr id="115" name="TextBox 114"/>
+          <p:cNvSpPr txBox="1"/>
+          <p:nvPr/>
+        </p:nvSpPr>
+        <p:spPr>
+          <a:xfrm>
+            <a:off x="28190952" y="20462987"/>
+            <a:ext cx="1398574" cy="365760"/>
+          </a:xfrm>
+          <a:prstGeom prst="rect">
+            <a:avLst/>
+          </a:prstGeom>
+          <a:noFill/>
+        </p:spPr>
+        <p:txBody>
+          <a:bodyPr wrap="square" lIns="0" rIns="0" tIns="0" bIns="0">
+            <a:spAutoFit/>
+          </a:bodyPr>
+          <a:lstStyle/>
+          <a:p>
+            <a:pPr algn="r">
+              <a:lnSpc>
+                <a:spcPct val="100000"/>
+              </a:lnSpc>
+              <a:spcAft>
+                <a:spcPts val="0"/>
+              </a:spcAft>
+            </a:pPr>
+            <a:r>
+              <a:rPr sz="1300" b="0">
+                <a:solidFill>
+                  <a:srgbClr val="1E293B"/>
+                </a:solidFill>
+                <a:latin typeface="Arial"/>
+              </a:rPr>
+              <a:t>0.675</a:t>
+            </a:r>
+          </a:p>
+        </p:txBody>
+      </p:sp>
+      <p:sp>
+        <p:nvSpPr>
+          <p:cNvPr id="116" name="TextBox 115"/>
+          <p:cNvSpPr txBox="1"/>
+          <p:nvPr/>
+        </p:nvSpPr>
+        <p:spPr>
+          <a:xfrm>
+            <a:off x="29589526" y="20462987"/>
+            <a:ext cx="1598371" cy="365760"/>
+          </a:xfrm>
+          <a:prstGeom prst="rect">
+            <a:avLst/>
+          </a:prstGeom>
+          <a:noFill/>
+        </p:spPr>
+        <p:txBody>
+          <a:bodyPr wrap="square" lIns="0" rIns="0" tIns="0" bIns="0">
+            <a:spAutoFit/>
+          </a:bodyPr>
+          <a:lstStyle/>
+          <a:p>
+            <a:pPr algn="r">
+              <a:lnSpc>
+                <a:spcPct val="100000"/>
+              </a:lnSpc>
+              <a:spcAft>
+                <a:spcPts val="0"/>
+              </a:spcAft>
+            </a:pPr>
+            <a:r>
+              <a:rPr sz="1300" b="0">
+                <a:solidFill>
+                  <a:srgbClr val="1E293B"/>
+                </a:solidFill>
+                <a:latin typeface="Arial"/>
+              </a:rPr>
               <a:t>0.636</a:t>
             </a:r>
           </a:p>
@@ -7299,14 +7869,56 @@
       </p:sp>
       <p:sp>
         <p:nvSpPr>
-          <p:cNvPr id="103" name="TextBox 102"/>
-          <p:cNvSpPr txBox="1"/>
-          <p:nvPr/>
-        </p:nvSpPr>
-        <p:spPr>
-          <a:xfrm>
-            <a:off x="22197060" y="20253818"/>
-            <a:ext cx="4795113" cy="365760"/>
+          <p:cNvPr id="117" name="TextBox 116"/>
+          <p:cNvSpPr txBox="1"/>
+          <p:nvPr/>
+        </p:nvSpPr>
+        <p:spPr>
+          <a:xfrm>
+            <a:off x="31187898" y="20462987"/>
+            <a:ext cx="998982" cy="365760"/>
+          </a:xfrm>
+          <a:prstGeom prst="rect">
+            <a:avLst/>
+          </a:prstGeom>
+          <a:noFill/>
+        </p:spPr>
+        <p:txBody>
+          <a:bodyPr wrap="square" lIns="0" rIns="0" tIns="0" bIns="0">
+            <a:spAutoFit/>
+          </a:bodyPr>
+          <a:lstStyle/>
+          <a:p>
+            <a:pPr algn="r">
+              <a:lnSpc>
+                <a:spcPct val="100000"/>
+              </a:lnSpc>
+              <a:spcAft>
+                <a:spcPts val="0"/>
+              </a:spcAft>
+            </a:pPr>
+            <a:r>
+              <a:rPr sz="1300" b="0">
+                <a:solidFill>
+                  <a:srgbClr val="1E293B"/>
+                </a:solidFill>
+                <a:latin typeface="Arial"/>
+              </a:rPr>
+              <a:t>149</a:t>
+            </a:r>
+          </a:p>
+        </p:txBody>
+      </p:sp>
+      <p:sp>
+        <p:nvSpPr>
+          <p:cNvPr id="118" name="TextBox 117"/>
+          <p:cNvSpPr txBox="1"/>
+          <p:nvPr/>
+        </p:nvSpPr>
+        <p:spPr>
+          <a:xfrm>
+            <a:off x="22197060" y="20773883"/>
+            <a:ext cx="2996945" cy="365760"/>
           </a:xfrm>
           <a:prstGeom prst="rect">
             <a:avLst/>
@@ -7328,27 +7940,237 @@
               </a:spcAft>
             </a:pPr>
             <a:r>
+              <a:rPr sz="1300" b="0">
+                <a:solidFill>
+                  <a:srgbClr val="1E293B"/>
+                </a:solidFill>
+                <a:latin typeface="Arial"/>
+              </a:rPr>
+              <a:t>Qwen3.8-27B  L2</a:t>
+            </a:r>
+          </a:p>
+        </p:txBody>
+      </p:sp>
+      <p:sp>
+        <p:nvSpPr>
+          <p:cNvPr id="119" name="TextBox 118"/>
+          <p:cNvSpPr txBox="1"/>
+          <p:nvPr/>
+        </p:nvSpPr>
+        <p:spPr>
+          <a:xfrm>
+            <a:off x="25194006" y="20773883"/>
+            <a:ext cx="2996945" cy="365760"/>
+          </a:xfrm>
+          <a:prstGeom prst="rect">
+            <a:avLst/>
+          </a:prstGeom>
+          <a:noFill/>
+        </p:spPr>
+        <p:txBody>
+          <a:bodyPr wrap="square" lIns="0" rIns="0" tIns="0" bIns="0">
+            <a:spAutoFit/>
+          </a:bodyPr>
+          <a:lstStyle/>
+          <a:p>
+            <a:pPr algn="r">
+              <a:lnSpc>
+                <a:spcPct val="100000"/>
+              </a:lnSpc>
+              <a:spcAft>
+                <a:spcPts val="0"/>
+              </a:spcAft>
+            </a:pPr>
+            <a:r>
+              <a:rPr sz="1300" b="0">
+                <a:solidFill>
+                  <a:srgbClr val="1E293B"/>
+                </a:solidFill>
+                <a:latin typeface="Arial"/>
+              </a:rPr>
+              <a:t>artifacts</a:t>
+            </a:r>
+          </a:p>
+        </p:txBody>
+      </p:sp>
+      <p:sp>
+        <p:nvSpPr>
+          <p:cNvPr id="120" name="TextBox 119"/>
+          <p:cNvSpPr txBox="1"/>
+          <p:nvPr/>
+        </p:nvSpPr>
+        <p:spPr>
+          <a:xfrm>
+            <a:off x="28190952" y="20773883"/>
+            <a:ext cx="1398574" cy="365760"/>
+          </a:xfrm>
+          <a:prstGeom prst="rect">
+            <a:avLst/>
+          </a:prstGeom>
+          <a:noFill/>
+        </p:spPr>
+        <p:txBody>
+          <a:bodyPr wrap="square" lIns="0" rIns="0" tIns="0" bIns="0">
+            <a:spAutoFit/>
+          </a:bodyPr>
+          <a:lstStyle/>
+          <a:p>
+            <a:pPr algn="r">
+              <a:lnSpc>
+                <a:spcPct val="100000"/>
+              </a:lnSpc>
+              <a:spcAft>
+                <a:spcPts val="0"/>
+              </a:spcAft>
+            </a:pPr>
+            <a:r>
+              <a:rPr sz="1300" b="0">
+                <a:solidFill>
+                  <a:srgbClr val="1E293B"/>
+                </a:solidFill>
+                <a:latin typeface="Arial"/>
+              </a:rPr>
+              <a:t>0.553</a:t>
+            </a:r>
+          </a:p>
+        </p:txBody>
+      </p:sp>
+      <p:sp>
+        <p:nvSpPr>
+          <p:cNvPr id="121" name="TextBox 120"/>
+          <p:cNvSpPr txBox="1"/>
+          <p:nvPr/>
+        </p:nvSpPr>
+        <p:spPr>
+          <a:xfrm>
+            <a:off x="29589526" y="20773883"/>
+            <a:ext cx="1598371" cy="365760"/>
+          </a:xfrm>
+          <a:prstGeom prst="rect">
+            <a:avLst/>
+          </a:prstGeom>
+          <a:noFill/>
+        </p:spPr>
+        <p:txBody>
+          <a:bodyPr wrap="square" lIns="0" rIns="0" tIns="0" bIns="0">
+            <a:spAutoFit/>
+          </a:bodyPr>
+          <a:lstStyle/>
+          <a:p>
+            <a:pPr algn="r">
+              <a:lnSpc>
+                <a:spcPct val="100000"/>
+              </a:lnSpc>
+              <a:spcAft>
+                <a:spcPts val="0"/>
+              </a:spcAft>
+            </a:pPr>
+            <a:r>
+              <a:rPr sz="1300" b="0">
+                <a:solidFill>
+                  <a:srgbClr val="1E293B"/>
+                </a:solidFill>
+                <a:latin typeface="Arial"/>
+              </a:rPr>
+              <a:t>0.212</a:t>
+            </a:r>
+          </a:p>
+        </p:txBody>
+      </p:sp>
+      <p:sp>
+        <p:nvSpPr>
+          <p:cNvPr id="122" name="TextBox 121"/>
+          <p:cNvSpPr txBox="1"/>
+          <p:nvPr/>
+        </p:nvSpPr>
+        <p:spPr>
+          <a:xfrm>
+            <a:off x="31187898" y="20773883"/>
+            <a:ext cx="998982" cy="365760"/>
+          </a:xfrm>
+          <a:prstGeom prst="rect">
+            <a:avLst/>
+          </a:prstGeom>
+          <a:noFill/>
+        </p:spPr>
+        <p:txBody>
+          <a:bodyPr wrap="square" lIns="0" rIns="0" tIns="0" bIns="0">
+            <a:spAutoFit/>
+          </a:bodyPr>
+          <a:lstStyle/>
+          <a:p>
+            <a:pPr algn="r">
+              <a:lnSpc>
+                <a:spcPct val="100000"/>
+              </a:lnSpc>
+              <a:spcAft>
+                <a:spcPts val="0"/>
+              </a:spcAft>
+            </a:pPr>
+            <a:r>
+              <a:rPr sz="1300" b="0">
+                <a:solidFill>
+                  <a:srgbClr val="1E293B"/>
+                </a:solidFill>
+                <a:latin typeface="Arial"/>
+              </a:rPr>
+              <a:t>149</a:t>
+            </a:r>
+          </a:p>
+        </p:txBody>
+      </p:sp>
+      <p:sp>
+        <p:nvSpPr>
+          <p:cNvPr id="123" name="TextBox 122"/>
+          <p:cNvSpPr txBox="1"/>
+          <p:nvPr/>
+        </p:nvSpPr>
+        <p:spPr>
+          <a:xfrm>
+            <a:off x="22197060" y="21084779"/>
+            <a:ext cx="2996945" cy="365760"/>
+          </a:xfrm>
+          <a:prstGeom prst="rect">
+            <a:avLst/>
+          </a:prstGeom>
+          <a:noFill/>
+        </p:spPr>
+        <p:txBody>
+          <a:bodyPr wrap="square" lIns="0" rIns="0" tIns="0" bIns="0">
+            <a:spAutoFit/>
+          </a:bodyPr>
+          <a:lstStyle/>
+          <a:p>
+            <a:pPr algn="l">
+              <a:lnSpc>
+                <a:spcPct val="100000"/>
+              </a:lnSpc>
+              <a:spcAft>
+                <a:spcPts val="0"/>
+              </a:spcAft>
+            </a:pPr>
+            <a:r>
               <a:rPr sz="1300" b="1">
                 <a:solidFill>
                   <a:srgbClr val="1C6FB5"/>
                 </a:solidFill>
                 <a:latin typeface="Arial"/>
               </a:rPr>
-              <a:t>Qwen3.8-27B</a:t>
-            </a:r>
-          </a:p>
-        </p:txBody>
-      </p:sp>
-      <p:sp>
-        <p:nvSpPr>
-          <p:cNvPr id="104" name="TextBox 103"/>
-          <p:cNvSpPr txBox="1"/>
-          <p:nvPr/>
-        </p:nvSpPr>
-        <p:spPr>
-          <a:xfrm>
-            <a:off x="26992173" y="20253818"/>
-            <a:ext cx="2597353" cy="365760"/>
+              <a:t>Qwen3.8-27B  L3</a:t>
+            </a:r>
+          </a:p>
+        </p:txBody>
+      </p:sp>
+      <p:sp>
+        <p:nvSpPr>
+          <p:cNvPr id="124" name="TextBox 123"/>
+          <p:cNvSpPr txBox="1"/>
+          <p:nvPr/>
+        </p:nvSpPr>
+        <p:spPr>
+          <a:xfrm>
+            <a:off x="25194006" y="21084779"/>
+            <a:ext cx="2996945" cy="365760"/>
           </a:xfrm>
           <a:prstGeom prst="rect">
             <a:avLst/>
@@ -7376,21 +8198,21 @@
                 </a:solidFill>
                 <a:latin typeface="Arial"/>
               </a:rPr>
-              <a:t>0.802</a:t>
-            </a:r>
-          </a:p>
-        </p:txBody>
-      </p:sp>
-      <p:sp>
-        <p:nvSpPr>
-          <p:cNvPr id="105" name="TextBox 104"/>
-          <p:cNvSpPr txBox="1"/>
-          <p:nvPr/>
-        </p:nvSpPr>
-        <p:spPr>
-          <a:xfrm>
-            <a:off x="29589526" y="20253818"/>
-            <a:ext cx="2597353" cy="365760"/>
+              <a:t>artifacts + retrieval</a:t>
+            </a:r>
+          </a:p>
+        </p:txBody>
+      </p:sp>
+      <p:sp>
+        <p:nvSpPr>
+          <p:cNvPr id="125" name="TextBox 124"/>
+          <p:cNvSpPr txBox="1"/>
+          <p:nvPr/>
+        </p:nvSpPr>
+        <p:spPr>
+          <a:xfrm>
+            <a:off x="28190952" y="21084779"/>
+            <a:ext cx="1398574" cy="365760"/>
           </a:xfrm>
           <a:prstGeom prst="rect">
             <a:avLst/>
@@ -7418,20 +8240,314 @@
                 </a:solidFill>
                 <a:latin typeface="Arial"/>
               </a:rPr>
-              <a:t>0.212</a:t>
-            </a:r>
-          </a:p>
-        </p:txBody>
-      </p:sp>
-      <p:sp>
-        <p:nvSpPr>
-          <p:cNvPr id="106" name="Rectangle 105"/>
+              <a:t>0.702</a:t>
+            </a:r>
+          </a:p>
+        </p:txBody>
+      </p:sp>
+      <p:sp>
+        <p:nvSpPr>
+          <p:cNvPr id="126" name="TextBox 125"/>
+          <p:cNvSpPr txBox="1"/>
+          <p:nvPr/>
+        </p:nvSpPr>
+        <p:spPr>
+          <a:xfrm>
+            <a:off x="29589526" y="21084779"/>
+            <a:ext cx="1598371" cy="365760"/>
+          </a:xfrm>
+          <a:prstGeom prst="rect">
+            <a:avLst/>
+          </a:prstGeom>
+          <a:noFill/>
+        </p:spPr>
+        <p:txBody>
+          <a:bodyPr wrap="square" lIns="0" rIns="0" tIns="0" bIns="0">
+            <a:spAutoFit/>
+          </a:bodyPr>
+          <a:lstStyle/>
+          <a:p>
+            <a:pPr algn="r">
+              <a:lnSpc>
+                <a:spcPct val="100000"/>
+              </a:lnSpc>
+              <a:spcAft>
+                <a:spcPts val="0"/>
+              </a:spcAft>
+            </a:pPr>
+            <a:r>
+              <a:rPr sz="1300" b="1">
+                <a:solidFill>
+                  <a:srgbClr val="1C6FB5"/>
+                </a:solidFill>
+                <a:latin typeface="Arial"/>
+              </a:rPr>
+              <a:t>0.242</a:t>
+            </a:r>
+          </a:p>
+        </p:txBody>
+      </p:sp>
+      <p:sp>
+        <p:nvSpPr>
+          <p:cNvPr id="127" name="TextBox 126"/>
+          <p:cNvSpPr txBox="1"/>
+          <p:nvPr/>
+        </p:nvSpPr>
+        <p:spPr>
+          <a:xfrm>
+            <a:off x="31187898" y="21084779"/>
+            <a:ext cx="998982" cy="365760"/>
+          </a:xfrm>
+          <a:prstGeom prst="rect">
+            <a:avLst/>
+          </a:prstGeom>
+          <a:noFill/>
+        </p:spPr>
+        <p:txBody>
+          <a:bodyPr wrap="square" lIns="0" rIns="0" tIns="0" bIns="0">
+            <a:spAutoFit/>
+          </a:bodyPr>
+          <a:lstStyle/>
+          <a:p>
+            <a:pPr algn="r">
+              <a:lnSpc>
+                <a:spcPct val="100000"/>
+              </a:lnSpc>
+              <a:spcAft>
+                <a:spcPts val="0"/>
+              </a:spcAft>
+            </a:pPr>
+            <a:r>
+              <a:rPr sz="1300" b="1">
+                <a:solidFill>
+                  <a:srgbClr val="1C6FB5"/>
+                </a:solidFill>
+                <a:latin typeface="Arial"/>
+              </a:rPr>
+              <a:t>92</a:t>
+            </a:r>
+          </a:p>
+        </p:txBody>
+      </p:sp>
+      <p:sp>
+        <p:nvSpPr>
+          <p:cNvPr id="128" name="TextBox 127"/>
+          <p:cNvSpPr txBox="1"/>
+          <p:nvPr/>
+        </p:nvSpPr>
+        <p:spPr>
+          <a:xfrm>
+            <a:off x="22197060" y="21395675"/>
+            <a:ext cx="2996945" cy="365760"/>
+          </a:xfrm>
+          <a:prstGeom prst="rect">
+            <a:avLst/>
+          </a:prstGeom>
+          <a:noFill/>
+        </p:spPr>
+        <p:txBody>
+          <a:bodyPr wrap="square" lIns="0" rIns="0" tIns="0" bIns="0">
+            <a:spAutoFit/>
+          </a:bodyPr>
+          <a:lstStyle/>
+          <a:p>
+            <a:pPr algn="l">
+              <a:lnSpc>
+                <a:spcPct val="100000"/>
+              </a:lnSpc>
+              <a:spcAft>
+                <a:spcPts val="0"/>
+              </a:spcAft>
+            </a:pPr>
+            <a:r>
+              <a:rPr sz="1300" b="0">
+                <a:solidFill>
+                  <a:srgbClr val="1E293B"/>
+                </a:solidFill>
+                <a:latin typeface="Arial"/>
+              </a:rPr>
+              <a:t>GLM-4.7-Flash  L2</a:t>
+            </a:r>
+          </a:p>
+        </p:txBody>
+      </p:sp>
+      <p:sp>
+        <p:nvSpPr>
+          <p:cNvPr id="129" name="TextBox 128"/>
+          <p:cNvSpPr txBox="1"/>
+          <p:nvPr/>
+        </p:nvSpPr>
+        <p:spPr>
+          <a:xfrm>
+            <a:off x="25194006" y="21395675"/>
+            <a:ext cx="2996945" cy="365760"/>
+          </a:xfrm>
+          <a:prstGeom prst="rect">
+            <a:avLst/>
+          </a:prstGeom>
+          <a:noFill/>
+        </p:spPr>
+        <p:txBody>
+          <a:bodyPr wrap="square" lIns="0" rIns="0" tIns="0" bIns="0">
+            <a:spAutoFit/>
+          </a:bodyPr>
+          <a:lstStyle/>
+          <a:p>
+            <a:pPr algn="r">
+              <a:lnSpc>
+                <a:spcPct val="100000"/>
+              </a:lnSpc>
+              <a:spcAft>
+                <a:spcPts val="0"/>
+              </a:spcAft>
+            </a:pPr>
+            <a:r>
+              <a:rPr sz="1300" b="0">
+                <a:solidFill>
+                  <a:srgbClr val="1E293B"/>
+                </a:solidFill>
+                <a:latin typeface="Arial"/>
+              </a:rPr>
+              <a:t>artifacts</a:t>
+            </a:r>
+          </a:p>
+        </p:txBody>
+      </p:sp>
+      <p:sp>
+        <p:nvSpPr>
+          <p:cNvPr id="130" name="TextBox 129"/>
+          <p:cNvSpPr txBox="1"/>
+          <p:nvPr/>
+        </p:nvSpPr>
+        <p:spPr>
+          <a:xfrm>
+            <a:off x="28190952" y="21395675"/>
+            <a:ext cx="1398574" cy="365760"/>
+          </a:xfrm>
+          <a:prstGeom prst="rect">
+            <a:avLst/>
+          </a:prstGeom>
+          <a:noFill/>
+        </p:spPr>
+        <p:txBody>
+          <a:bodyPr wrap="square" lIns="0" rIns="0" tIns="0" bIns="0">
+            <a:spAutoFit/>
+          </a:bodyPr>
+          <a:lstStyle/>
+          <a:p>
+            <a:pPr algn="r">
+              <a:lnSpc>
+                <a:spcPct val="100000"/>
+              </a:lnSpc>
+              <a:spcAft>
+                <a:spcPts val="0"/>
+              </a:spcAft>
+            </a:pPr>
+            <a:r>
+              <a:rPr sz="1300" b="0">
+                <a:solidFill>
+                  <a:srgbClr val="1E293B"/>
+                </a:solidFill>
+                <a:latin typeface="Arial"/>
+              </a:rPr>
+              <a:t>0.821</a:t>
+            </a:r>
+          </a:p>
+        </p:txBody>
+      </p:sp>
+      <p:sp>
+        <p:nvSpPr>
+          <p:cNvPr id="131" name="TextBox 130"/>
+          <p:cNvSpPr txBox="1"/>
+          <p:nvPr/>
+        </p:nvSpPr>
+        <p:spPr>
+          <a:xfrm>
+            <a:off x="29589526" y="21395675"/>
+            <a:ext cx="1598371" cy="365760"/>
+          </a:xfrm>
+          <a:prstGeom prst="rect">
+            <a:avLst/>
+          </a:prstGeom>
+          <a:noFill/>
+        </p:spPr>
+        <p:txBody>
+          <a:bodyPr wrap="square" lIns="0" rIns="0" tIns="0" bIns="0">
+            <a:spAutoFit/>
+          </a:bodyPr>
+          <a:lstStyle/>
+          <a:p>
+            <a:pPr algn="r">
+              <a:lnSpc>
+                <a:spcPct val="100000"/>
+              </a:lnSpc>
+              <a:spcAft>
+                <a:spcPts val="0"/>
+              </a:spcAft>
+            </a:pPr>
+            <a:r>
+              <a:rPr sz="1300" b="0">
+                <a:solidFill>
+                  <a:srgbClr val="1E293B"/>
+                </a:solidFill>
+                <a:latin typeface="Arial"/>
+              </a:rPr>
+              <a:t>0.200</a:t>
+            </a:r>
+          </a:p>
+        </p:txBody>
+      </p:sp>
+      <p:sp>
+        <p:nvSpPr>
+          <p:cNvPr id="132" name="TextBox 131"/>
+          <p:cNvSpPr txBox="1"/>
+          <p:nvPr/>
+        </p:nvSpPr>
+        <p:spPr>
+          <a:xfrm>
+            <a:off x="31187898" y="21395675"/>
+            <a:ext cx="998982" cy="365760"/>
+          </a:xfrm>
+          <a:prstGeom prst="rect">
+            <a:avLst/>
+          </a:prstGeom>
+          <a:noFill/>
+        </p:spPr>
+        <p:txBody>
+          <a:bodyPr wrap="square" lIns="0" rIns="0" tIns="0" bIns="0">
+            <a:spAutoFit/>
+          </a:bodyPr>
+          <a:lstStyle/>
+          <a:p>
+            <a:pPr algn="r">
+              <a:lnSpc>
+                <a:spcPct val="100000"/>
+              </a:lnSpc>
+              <a:spcAft>
+                <a:spcPts val="0"/>
+              </a:spcAft>
+            </a:pPr>
+            <a:r>
+              <a:rPr sz="1300" b="0">
+                <a:solidFill>
+                  <a:srgbClr val="1E293B"/>
+                </a:solidFill>
+                <a:latin typeface="Arial"/>
+              </a:rPr>
+              <a:t>78</a:t>
+            </a:r>
+          </a:p>
+        </p:txBody>
+      </p:sp>
+      <p:sp>
+        <p:nvSpPr>
+          <p:cNvPr id="133" name="Rectangle 132"/>
           <p:cNvSpPr/>
           <p:nvPr/>
         </p:nvSpPr>
         <p:spPr>
           <a:xfrm>
-            <a:off x="22197060" y="20583002"/>
+            <a:off x="22197060" y="21724859"/>
             <a:ext cx="9989819" cy="20116"/>
           </a:xfrm>
           <a:prstGeom prst="rect">
@@ -7469,13 +8585,13 @@
       </p:sp>
       <p:sp>
         <p:nvSpPr>
-          <p:cNvPr id="107" name="TextBox 106"/>
-          <p:cNvSpPr txBox="1"/>
-          <p:nvPr/>
-        </p:nvSpPr>
-        <p:spPr>
-          <a:xfrm>
-            <a:off x="22197060" y="20784170"/>
+          <p:cNvPr id="134" name="TextBox 133"/>
+          <p:cNvSpPr txBox="1"/>
+          <p:nvPr/>
+        </p:nvSpPr>
+        <p:spPr>
+          <a:xfrm>
+            <a:off x="22197060" y="21926027"/>
             <a:ext cx="9989819" cy="365760"/>
           </a:xfrm>
           <a:prstGeom prst="rect">
@@ -7504,20 +8620,20 @@
                 </a:solidFill>
                 <a:latin typeface="Arial"/>
               </a:rPr>
-              <a:t>Three open models reading the same artifacts all reach 0.70–0.80 recall. What separates them is the false-alarm rate. Model choice buys precision here, not detection — the 14B reaches its recall by flagging 21 of the 33 controls.</a:t>
-            </a:r>
-          </a:p>
-        </p:txBody>
-      </p:sp>
-      <p:sp>
-        <p:nvSpPr>
-          <p:cNvPr id="108" name="TextBox 107"/>
-          <p:cNvSpPr txBox="1"/>
-          <p:nvPr/>
-        </p:nvSpPr>
-        <p:spPr>
-          <a:xfrm>
-            <a:off x="11704320" y="24341052"/>
+              <a:t>The watchdog the pipeline actually ran never produced a decidable verdict about any of the 149 cases: “no signal fired” is not a judgement. Adding the retrieval tier is worth +0.149 recall to the 27B and +0.012 to the 14B, so the tier pays where the model can use it and not otherwise. Model choice buys precision, not detection: the 14B reaches its recall by flagging 64% of the controls against the 27B's 24%.</a:t>
+            </a:r>
+          </a:p>
+        </p:txBody>
+      </p:sp>
+      <p:sp>
+        <p:nvSpPr>
+          <p:cNvPr id="135" name="TextBox 134"/>
+          <p:cNvSpPr txBox="1"/>
+          <p:nvPr/>
+        </p:nvSpPr>
+        <p:spPr>
+          <a:xfrm>
+            <a:off x="11704320" y="25396817"/>
             <a:ext cx="20482560" cy="365760"/>
           </a:xfrm>
           <a:prstGeom prst="rect">
@@ -7553,21 +8669,21 @@
       </p:sp>
       <p:pic>
         <p:nvPicPr>
-          <p:cNvPr id="109" name="Picture 108" descr="f_rounds.png"/>
+          <p:cNvPr id="136" name="Picture 135" descr="f_rounds.png"/>
           <p:cNvPicPr>
             <a:picLocks noChangeAspect="1"/>
           </p:cNvPicPr>
           <p:nvPr/>
         </p:nvPicPr>
         <p:blipFill>
-          <a:blip r:embed="rId8"/>
+          <a:blip r:embed="rId9"/>
           <a:stretch>
             <a:fillRect/>
           </a:stretch>
         </p:blipFill>
         <p:spPr>
           <a:xfrm>
-            <a:off x="11704320" y="24651948"/>
+            <a:off x="11704320" y="25707713"/>
             <a:ext cx="20482560" cy="4209062"/>
           </a:xfrm>
           <a:prstGeom prst="rect">
@@ -7577,13 +8693,13 @@
       </p:pic>
       <p:sp>
         <p:nvSpPr>
-          <p:cNvPr id="110" name="TextBox 109"/>
-          <p:cNvSpPr txBox="1"/>
-          <p:nvPr/>
-        </p:nvSpPr>
-        <p:spPr>
-          <a:xfrm>
-            <a:off x="11704320" y="28952450"/>
+          <p:cNvPr id="137" name="TextBox 136"/>
+          <p:cNvSpPr txBox="1"/>
+          <p:nvPr/>
+        </p:nvSpPr>
+        <p:spPr>
+          <a:xfrm>
+            <a:off x="11704320" y="30008215"/>
             <a:ext cx="20482560" cy="365760"/>
           </a:xfrm>
           <a:prstGeom prst="rect">
@@ -7612,14 +8728,14 @@
                 </a:solidFill>
                 <a:latin typeface="Arial"/>
               </a:rPr>
-              <a:t>Figure 7.  (f) Fifteen unattended rounds on a fixed holdout. (g) Round 15's exact dataset, three ways. Bars 1 and 2 differ only in the starting weights, so their gap is the warm-start chain; bar 3 is the recipe the campaign ran, whose wall-clock cap truncates the cosine. Sigma throughout is that recipe's own seed spread, 0.0040 over three seeds, propagated to the difference being quoted. Completing the schedule is not the fix -- bar 2 sits below bar 3.</a:t>
-            </a:r>
-          </a:p>
-        </p:txBody>
-      </p:sp>
-      <p:sp>
-        <p:nvSpPr>
-          <p:cNvPr id="111" name="TextBox 110"/>
+              <a:t>Figure 8.  (f) Fifteen unattended rounds on a fixed holdout. (g) Round 15's exact dataset, three ways. Bars 1 and 2 differ only in the starting weights, so their gap is the warm-start chain; bar 3 is the recipe the campaign ran, whose wall-clock cap truncates the cosine. Sigma throughout is that recipe's own seed spread, 0.0040 over three seeds, propagated to the difference being quoted. Completing the schedule is not the fix -- bar 2 sits below bar 3.</a:t>
+            </a:r>
+          </a:p>
+        </p:txBody>
+      </p:sp>
+      <p:sp>
+        <p:nvSpPr>
+          <p:cNvPr id="138" name="TextBox 137"/>
           <p:cNvSpPr txBox="1"/>
           <p:nvPr/>
         </p:nvSpPr>
@@ -7661,7 +8777,7 @@
       </p:sp>
       <p:sp>
         <p:nvSpPr>
-          <p:cNvPr id="112" name="Rectangle 111"/>
+          <p:cNvPr id="139" name="Rectangle 138"/>
           <p:cNvSpPr/>
           <p:nvPr/>
         </p:nvSpPr>
@@ -7705,73 +8821,7 @@
       </p:sp>
       <p:pic>
         <p:nvPicPr>
-          <p:cNvPr id="113" name="Picture 112" descr="d_wall.png"/>
-          <p:cNvPicPr>
-            <a:picLocks noChangeAspect="1"/>
-          </p:cNvPicPr>
-          <p:nvPr/>
-        </p:nvPicPr>
-        <p:blipFill>
-          <a:blip r:embed="rId9"/>
-          <a:stretch>
-            <a:fillRect/>
-          </a:stretch>
-        </p:blipFill>
-        <p:spPr>
-          <a:xfrm>
-            <a:off x="32552640" y="5577840"/>
-            <a:ext cx="10607040" cy="6362678"/>
-          </a:xfrm>
-          <a:prstGeom prst="rect">
-            <a:avLst/>
-          </a:prstGeom>
-        </p:spPr>
-      </p:pic>
-      <p:sp>
-        <p:nvSpPr>
-          <p:cNvPr id="114" name="TextBox 113"/>
-          <p:cNvSpPr txBox="1"/>
-          <p:nvPr/>
-        </p:nvSpPr>
-        <p:spPr>
-          <a:xfrm>
-            <a:off x="32552640" y="12031958"/>
-            <a:ext cx="10607040" cy="365760"/>
-          </a:xfrm>
-          <a:prstGeom prst="rect">
-            <a:avLst/>
-          </a:prstGeom>
-          <a:noFill/>
-        </p:spPr>
-        <p:txBody>
-          <a:bodyPr wrap="square" lIns="0" rIns="0" tIns="0" bIns="0">
-            <a:spAutoFit/>
-          </a:bodyPr>
-          <a:lstStyle/>
-          <a:p>
-            <a:pPr algn="l">
-              <a:lnSpc>
-                <a:spcPct val="120000"/>
-              </a:lnSpc>
-              <a:spcAft>
-                <a:spcPts val="0"/>
-              </a:spcAft>
-            </a:pPr>
-            <a:r>
-              <a:rPr sz="1200" b="0">
-                <a:solidFill>
-                  <a:srgbClr val="556575"/>
-                </a:solidFill>
-                <a:latin typeface="Arial"/>
-              </a:rPr>
-              <a:t>Figure 8.  The same three checkpoints and the same matcher on both sides, so the evaluator offset cancels. A detector trained on one field does not transfer to another.</a:t>
-            </a:r>
-          </a:p>
-        </p:txBody>
-      </p:sp>
-      <p:pic>
-        <p:nvPicPr>
-          <p:cNvPr id="115" name="Picture 114" descr="j_species.png"/>
+          <p:cNvPr id="140" name="Picture 139" descr="d_wall.png"/>
           <p:cNvPicPr>
             <a:picLocks noChangeAspect="1"/>
           </p:cNvPicPr>
@@ -7785,6 +8835,72 @@
         </p:blipFill>
         <p:spPr>
           <a:xfrm>
+            <a:off x="32552640" y="5577840"/>
+            <a:ext cx="10607040" cy="6362678"/>
+          </a:xfrm>
+          <a:prstGeom prst="rect">
+            <a:avLst/>
+          </a:prstGeom>
+        </p:spPr>
+      </p:pic>
+      <p:sp>
+        <p:nvSpPr>
+          <p:cNvPr id="141" name="TextBox 140"/>
+          <p:cNvSpPr txBox="1"/>
+          <p:nvPr/>
+        </p:nvSpPr>
+        <p:spPr>
+          <a:xfrm>
+            <a:off x="32552640" y="12031958"/>
+            <a:ext cx="10607040" cy="365760"/>
+          </a:xfrm>
+          <a:prstGeom prst="rect">
+            <a:avLst/>
+          </a:prstGeom>
+          <a:noFill/>
+        </p:spPr>
+        <p:txBody>
+          <a:bodyPr wrap="square" lIns="0" rIns="0" tIns="0" bIns="0">
+            <a:spAutoFit/>
+          </a:bodyPr>
+          <a:lstStyle/>
+          <a:p>
+            <a:pPr algn="l">
+              <a:lnSpc>
+                <a:spcPct val="120000"/>
+              </a:lnSpc>
+              <a:spcAft>
+                <a:spcPts val="0"/>
+              </a:spcAft>
+            </a:pPr>
+            <a:r>
+              <a:rPr sz="1200" b="0">
+                <a:solidFill>
+                  <a:srgbClr val="556575"/>
+                </a:solidFill>
+                <a:latin typeface="Arial"/>
+              </a:rPr>
+              <a:t>Figure 9.  The same three checkpoints and the same matcher on both sides, so the evaluator offset cancels. A detector trained on one field does not transfer to another.</a:t>
+            </a:r>
+          </a:p>
+        </p:txBody>
+      </p:sp>
+      <p:pic>
+        <p:nvPicPr>
+          <p:cNvPr id="142" name="Picture 141" descr="j_species.png"/>
+          <p:cNvPicPr>
+            <a:picLocks noChangeAspect="1"/>
+          </p:cNvPicPr>
+          <p:nvPr/>
+        </p:nvPicPr>
+        <p:blipFill>
+          <a:blip r:embed="rId11"/>
+          <a:stretch>
+            <a:fillRect/>
+          </a:stretch>
+        </p:blipFill>
+        <p:spPr>
+          <a:xfrm>
             <a:off x="32552640" y="12672038"/>
             <a:ext cx="10607040" cy="5429067"/>
           </a:xfrm>
@@ -7795,7 +8911,7 @@
       </p:pic>
       <p:sp>
         <p:nvSpPr>
-          <p:cNvPr id="116" name="TextBox 115"/>
+          <p:cNvPr id="143" name="TextBox 142"/>
           <p:cNvSpPr txBox="1"/>
           <p:nvPr/>
         </p:nvSpPr>
@@ -7830,14 +8946,14 @@
                 </a:solidFill>
                 <a:latin typeface="Arial"/>
               </a:rPr>
-              <a:t>Figure 9.  Per-species performance of the deployable checkpoint. The spread across the twelve classes is 0.214, roughly seventy times the seed noise.</a:t>
-            </a:r>
-          </a:p>
-        </p:txBody>
-      </p:sp>
-      <p:sp>
-        <p:nvSpPr>
-          <p:cNvPr id="117" name="TextBox 116"/>
+              <a:t>Figure 10.  Per-species performance of the deployable checkpoint. The spread across the twelve classes is 0.214, roughly seventy times the seed noise.</a:t>
+            </a:r>
+          </a:p>
+        </p:txBody>
+      </p:sp>
+      <p:sp>
+        <p:nvSpPr>
+          <p:cNvPr id="144" name="TextBox 143"/>
           <p:cNvSpPr txBox="1"/>
           <p:nvPr/>
         </p:nvSpPr>
@@ -7879,7 +8995,7 @@
       </p:sp>
       <p:sp>
         <p:nvSpPr>
-          <p:cNvPr id="118" name="Rectangle 117"/>
+          <p:cNvPr id="145" name="Rectangle 144"/>
           <p:cNvSpPr/>
           <p:nvPr/>
         </p:nvSpPr>
@@ -7923,7 +9039,7 @@
       </p:sp>
       <p:sp>
         <p:nvSpPr>
-          <p:cNvPr id="119" name="TextBox 118"/>
+          <p:cNvPr id="146" name="TextBox 145"/>
           <p:cNvSpPr txBox="1"/>
           <p:nvPr/>
         </p:nvSpPr>
@@ -7965,7 +9081,7 @@
       </p:sp>
       <p:sp>
         <p:nvSpPr>
-          <p:cNvPr id="120" name="TextBox 119"/>
+          <p:cNvPr id="147" name="TextBox 146"/>
           <p:cNvSpPr txBox="1"/>
           <p:nvPr/>
         </p:nvSpPr>
@@ -8007,7 +9123,7 @@
       </p:sp>
       <p:sp>
         <p:nvSpPr>
-          <p:cNvPr id="121" name="TextBox 120"/>
+          <p:cNvPr id="148" name="TextBox 147"/>
           <p:cNvSpPr txBox="1"/>
           <p:nvPr/>
         </p:nvSpPr>
@@ -8049,7 +9165,7 @@
       </p:sp>
       <p:sp>
         <p:nvSpPr>
-          <p:cNvPr id="122" name="TextBox 121"/>
+          <p:cNvPr id="149" name="TextBox 148"/>
           <p:cNvSpPr txBox="1"/>
           <p:nvPr/>
         </p:nvSpPr>
@@ -8084,20 +9200,20 @@
                 </a:solidFill>
                 <a:latin typeface="Arial"/>
               </a:rPr>
-              <a:t>4.   Retrospective supervision needs the artifacts, not the status fields. A scripted watchdog over status fields caught none of 116 real incidents; a model reading the artifacts caught 93.</a:t>
-            </a:r>
-          </a:p>
-        </p:txBody>
-      </p:sp>
-      <p:sp>
-        <p:nvSpPr>
-          <p:cNvPr id="123" name="TextBox 122"/>
-          <p:cNvSpPr txBox="1"/>
-          <p:nvPr/>
-        </p:nvSpPr>
-        <p:spPr>
-          <a:xfrm>
-            <a:off x="32552640" y="21829063"/>
+              <a:t>4.   Retrospective supervision needs the artifacts, not the status fields. The watchdog reading status fields returned no decidable verdict on any of 149 cases, while a model reading the raw artifacts reaches 0.70 recall over the 116 incidents; adding a retrieval tier over those same artifacts is worth another +0.149 to the 27B and +0.011 to the 14B.</a:t>
+            </a:r>
+          </a:p>
+        </p:txBody>
+      </p:sp>
+      <p:sp>
+        <p:nvSpPr>
+          <p:cNvPr id="150" name="TextBox 149"/>
+          <p:cNvSpPr txBox="1"/>
+          <p:nvPr/>
+        </p:nvSpPr>
+        <p:spPr>
+          <a:xfrm>
+            <a:off x="32552640" y="22030485"/>
             <a:ext cx="10607040" cy="365760"/>
           </a:xfrm>
           <a:prstGeom prst="rect">
@@ -8133,13 +9249,13 @@
       </p:sp>
       <p:sp>
         <p:nvSpPr>
-          <p:cNvPr id="124" name="TextBox 123"/>
-          <p:cNvSpPr txBox="1"/>
-          <p:nvPr/>
-        </p:nvSpPr>
-        <p:spPr>
-          <a:xfrm>
-            <a:off x="32552640" y="22424947"/>
+          <p:cNvPr id="151" name="TextBox 150"/>
+          <p:cNvSpPr txBox="1"/>
+          <p:nvPr/>
+        </p:nvSpPr>
+        <p:spPr>
+          <a:xfrm>
+            <a:off x="32552640" y="22626369"/>
             <a:ext cx="10607040" cy="365760"/>
           </a:xfrm>
           <a:prstGeom prst="rect">
@@ -8175,13 +9291,13 @@
       </p:sp>
       <p:sp>
         <p:nvSpPr>
-          <p:cNvPr id="125" name="Rectangle 124"/>
+          <p:cNvPr id="152" name="Rectangle 151"/>
           <p:cNvSpPr/>
           <p:nvPr/>
         </p:nvSpPr>
         <p:spPr>
           <a:xfrm>
-            <a:off x="32552640" y="22900435"/>
+            <a:off x="32552640" y="23101857"/>
             <a:ext cx="10607040" cy="25603"/>
           </a:xfrm>
           <a:prstGeom prst="rect">
@@ -8219,13 +9335,13 @@
       </p:sp>
       <p:sp>
         <p:nvSpPr>
-          <p:cNvPr id="126" name="TextBox 125"/>
-          <p:cNvSpPr txBox="1"/>
-          <p:nvPr/>
-        </p:nvSpPr>
-        <p:spPr>
-          <a:xfrm>
-            <a:off x="32552640" y="23156467"/>
+          <p:cNvPr id="153" name="TextBox 152"/>
+          <p:cNvSpPr txBox="1"/>
+          <p:nvPr/>
+        </p:nvSpPr>
+        <p:spPr>
+          <a:xfrm>
+            <a:off x="32552640" y="23357889"/>
             <a:ext cx="10607040" cy="365760"/>
           </a:xfrm>
           <a:prstGeom prst="rect">
@@ -8261,13 +9377,13 @@
       </p:sp>
       <p:sp>
         <p:nvSpPr>
-          <p:cNvPr id="127" name="TextBox 126"/>
-          <p:cNvSpPr txBox="1"/>
-          <p:nvPr/>
-        </p:nvSpPr>
-        <p:spPr>
-          <a:xfrm>
-            <a:off x="32552640" y="24324994"/>
+          <p:cNvPr id="154" name="TextBox 153"/>
+          <p:cNvSpPr txBox="1"/>
+          <p:nvPr/>
+        </p:nvSpPr>
+        <p:spPr>
+          <a:xfrm>
+            <a:off x="32552640" y="24526416"/>
             <a:ext cx="10607040" cy="365760"/>
           </a:xfrm>
           <a:prstGeom prst="rect">
@@ -8303,13 +9419,13 @@
       </p:sp>
       <p:sp>
         <p:nvSpPr>
-          <p:cNvPr id="128" name="Rectangle 127"/>
+          <p:cNvPr id="155" name="Rectangle 154"/>
           <p:cNvSpPr/>
           <p:nvPr/>
         </p:nvSpPr>
         <p:spPr>
           <a:xfrm>
-            <a:off x="32552640" y="24800482"/>
+            <a:off x="32552640" y="25001904"/>
             <a:ext cx="10607040" cy="25603"/>
           </a:xfrm>
           <a:prstGeom prst="rect">
@@ -8347,13 +9463,13 @@
       </p:sp>
       <p:sp>
         <p:nvSpPr>
-          <p:cNvPr id="129" name="TextBox 128"/>
-          <p:cNvSpPr txBox="1"/>
-          <p:nvPr/>
-        </p:nvSpPr>
-        <p:spPr>
-          <a:xfrm>
-            <a:off x="32552640" y="25056514"/>
+          <p:cNvPr id="156" name="TextBox 155"/>
+          <p:cNvSpPr txBox="1"/>
+          <p:nvPr/>
+        </p:nvSpPr>
+        <p:spPr>
+          <a:xfrm>
+            <a:off x="32552640" y="25257936"/>
             <a:ext cx="10607040" cy="365760"/>
           </a:xfrm>
           <a:prstGeom prst="rect">

--- a/docs/poster/MTSU_WeedAgent_Poster.pptx
+++ b/docs/poster/MTSU_WeedAgent_Poster.pptx
@@ -6488,7 +6488,7 @@
                 </a:solidFill>
                 <a:latin typeface="Arial"/>
               </a:rPr>
-              <a:t>0.8436</a:t>
+              <a:t>0.8448 ± 0.0018</a:t>
             </a:r>
           </a:p>
         </p:txBody>
@@ -6530,7 +6530,7 @@
                 </a:solidFill>
                 <a:latin typeface="Arial"/>
               </a:rPr>
-              <a:t>1</a:t>
+              <a:t>3</a:t>
             </a:r>
           </a:p>
         </p:txBody>
@@ -6616,7 +6616,7 @@
                 </a:solidFill>
                 <a:latin typeface="Arial"/>
               </a:rPr>
-              <a:t>−0.0028 and −0.0057 sit inside pooled seed spreads of 0.0032 and 0.0039, so neither is separable. Only +40,000 is, and it is still a single run.</a:t>
+              <a:t>The first two steps sit inside the pooled seed spread and are not separable. The full +40,000 is: −0.0189 against the core, 8.2 σ, three seeds at every rung.</a:t>
             </a:r>
           </a:p>
         </p:txBody>
@@ -6766,7 +6766,7 @@
                 </a:solidFill>
                 <a:latin typeface="Arial"/>
               </a:rPr>
-              <a:t>A frozen corpus of 162 real incidents from this project's own engineering record, scored on the dev split: 116 incidents and 33 controls. Recall is over incidents and the false-alarm rate over controls, both by the project's own scorer re-reading committed verdicts, which requires the finding to be about the incident rather than merely that the arm raised something. L2 reads raw artifact excerpts; L3 adds a retrieval round over the same artifacts.</a:t>
+              <a:t>A frozen corpus of 162 real incidents from this project's own engineering record, scored on the dev split: 116 incidents and 33 controls, by the project's own scorer re-reading committed verdicts, which requires the finding to be about the incident and not merely that the arm raised something. L2 reads raw artifact excerpts; L3 adds a retrieval round over them.</a:t>
             </a:r>
           </a:p>
         </p:txBody>
@@ -8620,7 +8620,7 @@
                 </a:solidFill>
                 <a:latin typeface="Arial"/>
               </a:rPr>
-              <a:t>The watchdog the pipeline actually ran never produced a decidable verdict about any of the 149 cases: “no signal fired” is not a judgement. Adding the retrieval tier is worth +0.149 recall to the 27B and +0.012 to the 14B, so the tier pays where the model can use it and not otherwise. Model choice buys precision, not detection: the 14B reaches its recall by flagging 64% of the controls against the 27B's 24%.</a:t>
+              <a:t>The watchdog the pipeline ran never produced a decidable verdict on any of the 149 cases: “no signal fired” is not a judgement. The retrieval tier is worth +0.149 recall to the 27B and +0.012 to the 14B, so it pays where the model can use it and not otherwise. Model choice buys precision, not detection: the 14B reaches its recall by flagging 64% of the controls against the 27B's 24%.</a:t>
             </a:r>
           </a:p>
         </p:txBody>
@@ -8633,8 +8633,8 @@
         </p:nvSpPr>
         <p:spPr>
           <a:xfrm>
-            <a:off x="11704320" y="25396817"/>
-            <a:ext cx="20482560" cy="365760"/>
+            <a:off x="22197060" y="22882591"/>
+            <a:ext cx="9989819" cy="365760"/>
           </a:xfrm>
           <a:prstGeom prst="rect">
             <a:avLst/>
@@ -8662,14 +8662,14 @@
                 </a:solidFill>
                 <a:latin typeface="Arial"/>
               </a:rPr>
-              <a:t>Why the loop looked like it was learning</a:t>
+              <a:t>What inference-time compute can buy</a:t>
             </a:r>
           </a:p>
         </p:txBody>
       </p:sp>
       <p:pic>
         <p:nvPicPr>
-          <p:cNvPr id="136" name="Picture 135" descr="f_rounds.png"/>
+          <p:cNvPr id="136" name="Picture 135" descr="r_tta.png"/>
           <p:cNvPicPr>
             <a:picLocks noChangeAspect="1"/>
           </p:cNvPicPr>
@@ -8683,8 +8683,8 @@
         </p:blipFill>
         <p:spPr>
           <a:xfrm>
-            <a:off x="11704320" y="25707713"/>
-            <a:ext cx="20482560" cy="4209062"/>
+            <a:off x="22197060" y="23193487"/>
+            <a:ext cx="9989819" cy="3405620"/>
           </a:xfrm>
           <a:prstGeom prst="rect">
             <a:avLst/>
@@ -8699,7 +8699,49 @@
         </p:nvSpPr>
         <p:spPr>
           <a:xfrm>
-            <a:off x="11704320" y="30008215"/>
+            <a:off x="22197060" y="26690547"/>
+            <a:ext cx="9989819" cy="365760"/>
+          </a:xfrm>
+          <a:prstGeom prst="rect">
+            <a:avLst/>
+          </a:prstGeom>
+          <a:noFill/>
+        </p:spPr>
+        <p:txBody>
+          <a:bodyPr wrap="square" lIns="0" rIns="0" tIns="0" bIns="0">
+            <a:spAutoFit/>
+          </a:bodyPr>
+          <a:lstStyle/>
+          <a:p>
+            <a:pPr algn="l">
+              <a:lnSpc>
+                <a:spcPct val="120000"/>
+              </a:lnSpc>
+              <a:spcAft>
+                <a:spcPts val="0"/>
+              </a:spcAft>
+            </a:pPr>
+            <a:r>
+              <a:rPr sz="1200" b="0">
+                <a:solidFill>
+                  <a:srgbClr val="556575"/>
+                </a:solidFill>
+                <a:latin typeface="Arial"/>
+              </a:rPr>
+              <a:t>Figure 8.  Test-time compute on the deployable checkpoint. Fusion with no extra views is nothing; multi-scale with h-flip and a 3-seed ensemble are each worth about +0.017 and stack to +0.028. At 2.44 s per image against the deployed 3.7 ms this is a ceiling on what inference-time compute can buy, not a deployment option -- and it is still smaller than the +0.0714 that initialisation is worth.</a:t>
+            </a:r>
+          </a:p>
+        </p:txBody>
+      </p:sp>
+      <p:sp>
+        <p:nvSpPr>
+          <p:cNvPr id="138" name="TextBox 137"/>
+          <p:cNvSpPr txBox="1"/>
+          <p:nvPr/>
+        </p:nvSpPr>
+        <p:spPr>
+          <a:xfrm>
+            <a:off x="11704320" y="27787827"/>
             <a:ext cx="20482560" cy="365760"/>
           </a:xfrm>
           <a:prstGeom prst="rect">
@@ -8715,6 +8757,72 @@
           <a:p>
             <a:pPr algn="l">
               <a:lnSpc>
+                <a:spcPct val="100000"/>
+              </a:lnSpc>
+              <a:spcAft>
+                <a:spcPts val="0"/>
+              </a:spcAft>
+            </a:pPr>
+            <a:r>
+              <a:rPr sz="1800" b="1">
+                <a:solidFill>
+                  <a:srgbClr val="1E293B"/>
+                </a:solidFill>
+                <a:latin typeface="Arial"/>
+              </a:rPr>
+              <a:t>Why the loop looked like it was learning</a:t>
+            </a:r>
+          </a:p>
+        </p:txBody>
+      </p:sp>
+      <p:pic>
+        <p:nvPicPr>
+          <p:cNvPr id="139" name="Picture 138" descr="f_rounds.png"/>
+          <p:cNvPicPr>
+            <a:picLocks noChangeAspect="1"/>
+          </p:cNvPicPr>
+          <p:nvPr/>
+        </p:nvPicPr>
+        <p:blipFill>
+          <a:blip r:embed="rId10"/>
+          <a:stretch>
+            <a:fillRect/>
+          </a:stretch>
+        </p:blipFill>
+        <p:spPr>
+          <a:xfrm>
+            <a:off x="11704320" y="28098723"/>
+            <a:ext cx="20482560" cy="3749135"/>
+          </a:xfrm>
+          <a:prstGeom prst="rect">
+            <a:avLst/>
+          </a:prstGeom>
+        </p:spPr>
+      </p:pic>
+      <p:sp>
+        <p:nvSpPr>
+          <p:cNvPr id="140" name="TextBox 139"/>
+          <p:cNvSpPr txBox="1"/>
+          <p:nvPr/>
+        </p:nvSpPr>
+        <p:spPr>
+          <a:xfrm>
+            <a:off x="11704320" y="31939298"/>
+            <a:ext cx="20482560" cy="365760"/>
+          </a:xfrm>
+          <a:prstGeom prst="rect">
+            <a:avLst/>
+          </a:prstGeom>
+          <a:noFill/>
+        </p:spPr>
+        <p:txBody>
+          <a:bodyPr wrap="square" lIns="0" rIns="0" tIns="0" bIns="0">
+            <a:spAutoFit/>
+          </a:bodyPr>
+          <a:lstStyle/>
+          <a:p>
+            <a:pPr algn="l">
+              <a:lnSpc>
                 <a:spcPct val="120000"/>
               </a:lnSpc>
               <a:spcAft>
@@ -8728,14 +8836,14 @@
                 </a:solidFill>
                 <a:latin typeface="Arial"/>
               </a:rPr>
-              <a:t>Figure 8.  (f) Fifteen unattended rounds on a fixed holdout. (g) Round 15's exact dataset, three ways. Bars 1 and 2 differ only in the starting weights, so their gap is the warm-start chain; bar 3 is the recipe the campaign ran, whose wall-clock cap truncates the cosine. Sigma throughout is that recipe's own seed spread, 0.0040 over three seeds, propagated to the difference being quoted. Completing the schedule is not the fix -- bar 2 sits below bar 3.</a:t>
-            </a:r>
-          </a:p>
-        </p:txBody>
-      </p:sp>
-      <p:sp>
-        <p:nvSpPr>
-          <p:cNvPr id="138" name="TextBox 137"/>
+              <a:t>Figure 9.  (f) Fifteen unattended rounds on a fixed holdout. (g) Round 15's exact dataset, three ways. Bars 1 and 2 differ only in the starting weights, so their gap is the warm-start chain; bar 3 is the recipe the campaign ran, whose wall-clock cap truncates the cosine. Sigma throughout is that recipe's own seed spread, 0.0040 over three seeds, propagated to the difference being quoted. Completing the schedule is not the fix -- bar 2 sits below bar 3.</a:t>
+            </a:r>
+          </a:p>
+        </p:txBody>
+      </p:sp>
+      <p:sp>
+        <p:nvSpPr>
+          <p:cNvPr id="141" name="TextBox 140"/>
           <p:cNvSpPr txBox="1"/>
           <p:nvPr/>
         </p:nvSpPr>
@@ -8777,7 +8885,7 @@
       </p:sp>
       <p:sp>
         <p:nvSpPr>
-          <p:cNvPr id="139" name="Rectangle 138"/>
+          <p:cNvPr id="142" name="Rectangle 141"/>
           <p:cNvSpPr/>
           <p:nvPr/>
         </p:nvSpPr>
@@ -8821,73 +8929,7 @@
       </p:sp>
       <p:pic>
         <p:nvPicPr>
-          <p:cNvPr id="140" name="Picture 139" descr="d_wall.png"/>
-          <p:cNvPicPr>
-            <a:picLocks noChangeAspect="1"/>
-          </p:cNvPicPr>
-          <p:nvPr/>
-        </p:nvPicPr>
-        <p:blipFill>
-          <a:blip r:embed="rId10"/>
-          <a:stretch>
-            <a:fillRect/>
-          </a:stretch>
-        </p:blipFill>
-        <p:spPr>
-          <a:xfrm>
-            <a:off x="32552640" y="5577840"/>
-            <a:ext cx="10607040" cy="6362678"/>
-          </a:xfrm>
-          <a:prstGeom prst="rect">
-            <a:avLst/>
-          </a:prstGeom>
-        </p:spPr>
-      </p:pic>
-      <p:sp>
-        <p:nvSpPr>
-          <p:cNvPr id="141" name="TextBox 140"/>
-          <p:cNvSpPr txBox="1"/>
-          <p:nvPr/>
-        </p:nvSpPr>
-        <p:spPr>
-          <a:xfrm>
-            <a:off x="32552640" y="12031958"/>
-            <a:ext cx="10607040" cy="365760"/>
-          </a:xfrm>
-          <a:prstGeom prst="rect">
-            <a:avLst/>
-          </a:prstGeom>
-          <a:noFill/>
-        </p:spPr>
-        <p:txBody>
-          <a:bodyPr wrap="square" lIns="0" rIns="0" tIns="0" bIns="0">
-            <a:spAutoFit/>
-          </a:bodyPr>
-          <a:lstStyle/>
-          <a:p>
-            <a:pPr algn="l">
-              <a:lnSpc>
-                <a:spcPct val="120000"/>
-              </a:lnSpc>
-              <a:spcAft>
-                <a:spcPts val="0"/>
-              </a:spcAft>
-            </a:pPr>
-            <a:r>
-              <a:rPr sz="1200" b="0">
-                <a:solidFill>
-                  <a:srgbClr val="556575"/>
-                </a:solidFill>
-                <a:latin typeface="Arial"/>
-              </a:rPr>
-              <a:t>Figure 9.  The same three checkpoints and the same matcher on both sides, so the evaluator offset cancels. A detector trained on one field does not transfer to another.</a:t>
-            </a:r>
-          </a:p>
-        </p:txBody>
-      </p:sp>
-      <p:pic>
-        <p:nvPicPr>
-          <p:cNvPr id="142" name="Picture 141" descr="j_species.png"/>
+          <p:cNvPr id="143" name="Picture 142" descr="d_wall.png"/>
           <p:cNvPicPr>
             <a:picLocks noChangeAspect="1"/>
           </p:cNvPicPr>
@@ -8901,7 +8943,139 @@
         </p:blipFill>
         <p:spPr>
           <a:xfrm>
+            <a:off x="32552640" y="5577840"/>
+            <a:ext cx="10607040" cy="6362678"/>
+          </a:xfrm>
+          <a:prstGeom prst="rect">
+            <a:avLst/>
+          </a:prstGeom>
+        </p:spPr>
+      </p:pic>
+      <p:sp>
+        <p:nvSpPr>
+          <p:cNvPr id="144" name="TextBox 143"/>
+          <p:cNvSpPr txBox="1"/>
+          <p:nvPr/>
+        </p:nvSpPr>
+        <p:spPr>
+          <a:xfrm>
+            <a:off x="32552640" y="12031958"/>
+            <a:ext cx="10607040" cy="365760"/>
+          </a:xfrm>
+          <a:prstGeom prst="rect">
+            <a:avLst/>
+          </a:prstGeom>
+          <a:noFill/>
+        </p:spPr>
+        <p:txBody>
+          <a:bodyPr wrap="square" lIns="0" rIns="0" tIns="0" bIns="0">
+            <a:spAutoFit/>
+          </a:bodyPr>
+          <a:lstStyle/>
+          <a:p>
+            <a:pPr algn="l">
+              <a:lnSpc>
+                <a:spcPct val="120000"/>
+              </a:lnSpc>
+              <a:spcAft>
+                <a:spcPts val="0"/>
+              </a:spcAft>
+            </a:pPr>
+            <a:r>
+              <a:rPr sz="1200" b="0">
+                <a:solidFill>
+                  <a:srgbClr val="556575"/>
+                </a:solidFill>
+                <a:latin typeface="Arial"/>
+              </a:rPr>
+              <a:t>Figure 10.  The same three checkpoints and the same matcher on both sides, so the evaluator offset cancels. A detector trained on one field does not transfer to another.</a:t>
+            </a:r>
+          </a:p>
+        </p:txBody>
+      </p:sp>
+      <p:pic>
+        <p:nvPicPr>
+          <p:cNvPr id="145" name="Picture 144" descr="p_field.png"/>
+          <p:cNvPicPr>
+            <a:picLocks noChangeAspect="1"/>
+          </p:cNvPicPr>
+          <p:nvPr/>
+        </p:nvPicPr>
+        <p:blipFill>
+          <a:blip r:embed="rId12"/>
+          <a:stretch>
+            <a:fillRect/>
+          </a:stretch>
+        </p:blipFill>
+        <p:spPr>
+          <a:xfrm>
             <a:off x="32552640" y="12672038"/>
+            <a:ext cx="10607040" cy="5360041"/>
+          </a:xfrm>
+          <a:prstGeom prst="rect">
+            <a:avLst/>
+          </a:prstGeom>
+        </p:spPr>
+      </p:pic>
+      <p:sp>
+        <p:nvSpPr>
+          <p:cNvPr id="146" name="TextBox 145"/>
+          <p:cNvSpPr txBox="1"/>
+          <p:nvPr/>
+        </p:nvSpPr>
+        <p:spPr>
+          <a:xfrm>
+            <a:off x="32552640" y="18123519"/>
+            <a:ext cx="10607040" cy="365760"/>
+          </a:xfrm>
+          <a:prstGeom prst="rect">
+            <a:avLst/>
+          </a:prstGeom>
+          <a:noFill/>
+        </p:spPr>
+        <p:txBody>
+          <a:bodyPr wrap="square" lIns="0" rIns="0" tIns="0" bIns="0">
+            <a:spAutoFit/>
+          </a:bodyPr>
+          <a:lstStyle/>
+          <a:p>
+            <a:pPr algn="l">
+              <a:lnSpc>
+                <a:spcPct val="120000"/>
+              </a:lnSpc>
+              <a:spcAft>
+                <a:spcPts val="0"/>
+              </a:spcAft>
+            </a:pPr>
+            <a:r>
+              <a:rPr sz="1200" b="0">
+                <a:solidFill>
+                  <a:srgbClr val="556575"/>
+                </a:solidFill>
+                <a:latin typeface="Arial"/>
+              </a:rPr>
+              <a:t>Figure 11.  The deployable checkpoint over every frame the two robots recorded, at the confidence the cart deploys at. There is no ground truth for these frames, so this is the rate at which the detector produces a box at all -- not recall and not precision. Vegetation is excess green over a thumbnail, so "nothing to detect" does not account for it: 1157 frames clear that bar and 21 of them draw a box. 24 of the 25 boxes it does draw are the same class.</a:t>
+            </a:r>
+          </a:p>
+        </p:txBody>
+      </p:sp>
+      <p:pic>
+        <p:nvPicPr>
+          <p:cNvPr id="147" name="Picture 146" descr="j_species.png"/>
+          <p:cNvPicPr>
+            <a:picLocks noChangeAspect="1"/>
+          </p:cNvPicPr>
+          <p:nvPr/>
+        </p:nvPicPr>
+        <p:blipFill>
+          <a:blip r:embed="rId13"/>
+          <a:stretch>
+            <a:fillRect/>
+          </a:stretch>
+        </p:blipFill>
+        <p:spPr>
+          <a:xfrm>
+            <a:off x="32552640" y="19129359"/>
             <a:ext cx="10607040" cy="5429067"/>
           </a:xfrm>
           <a:prstGeom prst="rect">
@@ -8911,13 +9085,13 @@
       </p:pic>
       <p:sp>
         <p:nvSpPr>
-          <p:cNvPr id="143" name="TextBox 142"/>
-          <p:cNvSpPr txBox="1"/>
-          <p:nvPr/>
-        </p:nvSpPr>
-        <p:spPr>
-          <a:xfrm>
-            <a:off x="32552640" y="18192545"/>
+          <p:cNvPr id="148" name="TextBox 147"/>
+          <p:cNvSpPr txBox="1"/>
+          <p:nvPr/>
+        </p:nvSpPr>
+        <p:spPr>
+          <a:xfrm>
+            <a:off x="32552640" y="24649866"/>
             <a:ext cx="10607040" cy="365760"/>
           </a:xfrm>
           <a:prstGeom prst="rect">
@@ -8946,20 +9120,20 @@
                 </a:solidFill>
                 <a:latin typeface="Arial"/>
               </a:rPr>
-              <a:t>Figure 10.  Per-species performance of the deployable checkpoint. The spread across the twelve classes is 0.214, roughly seventy times the seed noise.</a:t>
-            </a:r>
-          </a:p>
-        </p:txBody>
-      </p:sp>
-      <p:sp>
-        <p:nvSpPr>
-          <p:cNvPr id="144" name="TextBox 143"/>
-          <p:cNvSpPr txBox="1"/>
-          <p:nvPr/>
-        </p:nvSpPr>
-        <p:spPr>
-          <a:xfrm>
-            <a:off x="32552640" y="18878345"/>
+              <a:t>Figure 12.  Per-species performance of the deployable checkpoint. The spread across the twelve classes is 0.214, roughly seventy times the seed noise.</a:t>
+            </a:r>
+          </a:p>
+        </p:txBody>
+      </p:sp>
+      <p:sp>
+        <p:nvSpPr>
+          <p:cNvPr id="149" name="TextBox 148"/>
+          <p:cNvSpPr txBox="1"/>
+          <p:nvPr/>
+        </p:nvSpPr>
+        <p:spPr>
+          <a:xfrm>
+            <a:off x="32552640" y="25335666"/>
             <a:ext cx="10607040" cy="365760"/>
           </a:xfrm>
           <a:prstGeom prst="rect">
@@ -8995,13 +9169,13 @@
       </p:sp>
       <p:sp>
         <p:nvSpPr>
-          <p:cNvPr id="145" name="Rectangle 144"/>
+          <p:cNvPr id="150" name="Rectangle 149"/>
           <p:cNvSpPr/>
           <p:nvPr/>
         </p:nvSpPr>
         <p:spPr>
           <a:xfrm>
-            <a:off x="32552640" y="19353833"/>
+            <a:off x="32552640" y="25811154"/>
             <a:ext cx="10607040" cy="25603"/>
           </a:xfrm>
           <a:prstGeom prst="rect">
@@ -9039,13 +9213,13 @@
       </p:sp>
       <p:sp>
         <p:nvSpPr>
-          <p:cNvPr id="146" name="TextBox 145"/>
-          <p:cNvSpPr txBox="1"/>
-          <p:nvPr/>
-        </p:nvSpPr>
-        <p:spPr>
-          <a:xfrm>
-            <a:off x="32552640" y="19609865"/>
+          <p:cNvPr id="151" name="TextBox 150"/>
+          <p:cNvSpPr txBox="1"/>
+          <p:nvPr/>
+        </p:nvSpPr>
+        <p:spPr>
+          <a:xfrm>
+            <a:off x="32552640" y="26067186"/>
             <a:ext cx="10607040" cy="365760"/>
           </a:xfrm>
           <a:prstGeom prst="rect">
@@ -9081,13 +9255,13 @@
       </p:sp>
       <p:sp>
         <p:nvSpPr>
-          <p:cNvPr id="147" name="TextBox 146"/>
-          <p:cNvSpPr txBox="1"/>
-          <p:nvPr/>
-        </p:nvSpPr>
-        <p:spPr>
-          <a:xfrm>
-            <a:off x="32552640" y="20315731"/>
+          <p:cNvPr id="152" name="TextBox 151"/>
+          <p:cNvSpPr txBox="1"/>
+          <p:nvPr/>
+        </p:nvSpPr>
+        <p:spPr>
+          <a:xfrm>
+            <a:off x="32552640" y="26773052"/>
             <a:ext cx="10607040" cy="365760"/>
           </a:xfrm>
           <a:prstGeom prst="rect">
@@ -9123,13 +9297,13 @@
       </p:sp>
       <p:sp>
         <p:nvSpPr>
-          <p:cNvPr id="148" name="TextBox 147"/>
-          <p:cNvSpPr txBox="1"/>
-          <p:nvPr/>
-        </p:nvSpPr>
-        <p:spPr>
-          <a:xfrm>
-            <a:off x="32552640" y="20820175"/>
+          <p:cNvPr id="153" name="TextBox 152"/>
+          <p:cNvSpPr txBox="1"/>
+          <p:nvPr/>
+        </p:nvSpPr>
+        <p:spPr>
+          <a:xfrm>
+            <a:off x="32552640" y="27277496"/>
             <a:ext cx="10607040" cy="365760"/>
           </a:xfrm>
           <a:prstGeom prst="rect">
@@ -9165,13 +9339,13 @@
       </p:sp>
       <p:sp>
         <p:nvSpPr>
-          <p:cNvPr id="149" name="TextBox 148"/>
-          <p:cNvSpPr txBox="1"/>
-          <p:nvPr/>
-        </p:nvSpPr>
-        <p:spPr>
-          <a:xfrm>
-            <a:off x="32552640" y="21324619"/>
+          <p:cNvPr id="154" name="TextBox 153"/>
+          <p:cNvSpPr txBox="1"/>
+          <p:nvPr/>
+        </p:nvSpPr>
+        <p:spPr>
+          <a:xfrm>
+            <a:off x="32552640" y="27781940"/>
             <a:ext cx="10607040" cy="365760"/>
           </a:xfrm>
           <a:prstGeom prst="rect">
@@ -9207,13 +9381,13 @@
       </p:sp>
       <p:sp>
         <p:nvSpPr>
-          <p:cNvPr id="150" name="TextBox 149"/>
-          <p:cNvSpPr txBox="1"/>
-          <p:nvPr/>
-        </p:nvSpPr>
-        <p:spPr>
-          <a:xfrm>
-            <a:off x="32552640" y="22030485"/>
+          <p:cNvPr id="155" name="TextBox 154"/>
+          <p:cNvSpPr txBox="1"/>
+          <p:nvPr/>
+        </p:nvSpPr>
+        <p:spPr>
+          <a:xfrm>
+            <a:off x="32552640" y="28487806"/>
             <a:ext cx="10607040" cy="365760"/>
           </a:xfrm>
           <a:prstGeom prst="rect">
@@ -9249,13 +9423,13 @@
       </p:sp>
       <p:sp>
         <p:nvSpPr>
-          <p:cNvPr id="151" name="TextBox 150"/>
-          <p:cNvSpPr txBox="1"/>
-          <p:nvPr/>
-        </p:nvSpPr>
-        <p:spPr>
-          <a:xfrm>
-            <a:off x="32552640" y="22626369"/>
+          <p:cNvPr id="156" name="TextBox 155"/>
+          <p:cNvSpPr txBox="1"/>
+          <p:nvPr/>
+        </p:nvSpPr>
+        <p:spPr>
+          <a:xfrm>
+            <a:off x="32552640" y="28992250"/>
             <a:ext cx="10607040" cy="365760"/>
           </a:xfrm>
           <a:prstGeom prst="rect">
@@ -9271,6 +9445,48 @@
           <a:p>
             <a:pPr algn="l">
               <a:lnSpc>
+                <a:spcPct val="122000"/>
+              </a:lnSpc>
+              <a:spcAft>
+                <a:spcPts val="800"/>
+              </a:spcAft>
+            </a:pPr>
+            <a:r>
+              <a:rPr sz="1300" b="0">
+                <a:solidFill>
+                  <a:srgbClr val="1E293B"/>
+                </a:solidFill>
+                <a:latin typeface="Arial"/>
+              </a:rPr>
+              <a:t>6.   The gap shows up on our own video too. Over all 2,686 frames the two robots recorded, 1,157 of them more than a third vegetation, the deployable checkpoint draws a box on 25 frames at the deployment threshold and 8 at conf 0.40 — and 24 of those 25 boxes are the same class. These frames carry no ground truth, so that is a fire rate and not a recall.</a:t>
+            </a:r>
+          </a:p>
+        </p:txBody>
+      </p:sp>
+      <p:sp>
+        <p:nvSpPr>
+          <p:cNvPr id="157" name="TextBox 156"/>
+          <p:cNvSpPr txBox="1"/>
+          <p:nvPr/>
+        </p:nvSpPr>
+        <p:spPr>
+          <a:xfrm>
+            <a:off x="32552640" y="29789556"/>
+            <a:ext cx="10607040" cy="365760"/>
+          </a:xfrm>
+          <a:prstGeom prst="rect">
+            <a:avLst/>
+          </a:prstGeom>
+          <a:noFill/>
+        </p:spPr>
+        <p:txBody>
+          <a:bodyPr wrap="square" lIns="0" rIns="0" tIns="0" bIns="0">
+            <a:spAutoFit/>
+          </a:bodyPr>
+          <a:lstStyle/>
+          <a:p>
+            <a:pPr algn="l">
+              <a:lnSpc>
                 <a:spcPct val="95000"/>
               </a:lnSpc>
               <a:spcAft>
@@ -9291,13 +9507,13 @@
       </p:sp>
       <p:sp>
         <p:nvSpPr>
-          <p:cNvPr id="152" name="Rectangle 151"/>
+          <p:cNvPr id="158" name="Rectangle 157"/>
           <p:cNvSpPr/>
           <p:nvPr/>
         </p:nvSpPr>
         <p:spPr>
           <a:xfrm>
-            <a:off x="32552640" y="23101857"/>
+            <a:off x="32552640" y="30265044"/>
             <a:ext cx="10607040" cy="25603"/>
           </a:xfrm>
           <a:prstGeom prst="rect">
@@ -9335,13 +9551,13 @@
       </p:sp>
       <p:sp>
         <p:nvSpPr>
-          <p:cNvPr id="153" name="TextBox 152"/>
-          <p:cNvSpPr txBox="1"/>
-          <p:nvPr/>
-        </p:nvSpPr>
-        <p:spPr>
-          <a:xfrm>
-            <a:off x="32552640" y="23357889"/>
+          <p:cNvPr id="159" name="TextBox 158"/>
+          <p:cNvSpPr txBox="1"/>
+          <p:nvPr/>
+        </p:nvSpPr>
+        <p:spPr>
+          <a:xfrm>
+            <a:off x="32552640" y="30521076"/>
             <a:ext cx="10607040" cy="365760"/>
           </a:xfrm>
           <a:prstGeom prst="rect">
@@ -9377,13 +9593,13 @@
       </p:sp>
       <p:sp>
         <p:nvSpPr>
-          <p:cNvPr id="154" name="TextBox 153"/>
-          <p:cNvSpPr txBox="1"/>
-          <p:nvPr/>
-        </p:nvSpPr>
-        <p:spPr>
-          <a:xfrm>
-            <a:off x="32552640" y="24526416"/>
+          <p:cNvPr id="160" name="TextBox 159"/>
+          <p:cNvSpPr txBox="1"/>
+          <p:nvPr/>
+        </p:nvSpPr>
+        <p:spPr>
+          <a:xfrm>
+            <a:off x="32552640" y="31689602"/>
             <a:ext cx="10607040" cy="365760"/>
           </a:xfrm>
           <a:prstGeom prst="rect">
@@ -9419,13 +9635,13 @@
       </p:sp>
       <p:sp>
         <p:nvSpPr>
-          <p:cNvPr id="155" name="Rectangle 154"/>
+          <p:cNvPr id="161" name="Rectangle 160"/>
           <p:cNvSpPr/>
           <p:nvPr/>
         </p:nvSpPr>
         <p:spPr>
           <a:xfrm>
-            <a:off x="32552640" y="25001904"/>
+            <a:off x="32552640" y="32165091"/>
             <a:ext cx="10607040" cy="25603"/>
           </a:xfrm>
           <a:prstGeom prst="rect">
@@ -9463,13 +9679,13 @@
       </p:sp>
       <p:sp>
         <p:nvSpPr>
-          <p:cNvPr id="156" name="TextBox 155"/>
-          <p:cNvSpPr txBox="1"/>
-          <p:nvPr/>
-        </p:nvSpPr>
-        <p:spPr>
-          <a:xfrm>
-            <a:off x="32552640" y="25257936"/>
+          <p:cNvPr id="162" name="TextBox 161"/>
+          <p:cNvSpPr txBox="1"/>
+          <p:nvPr/>
+        </p:nvSpPr>
+        <p:spPr>
+          <a:xfrm>
+            <a:off x="32552640" y="32421122"/>
             <a:ext cx="10607040" cy="365760"/>
           </a:xfrm>
           <a:prstGeom prst="rect">

--- a/docs/poster/MTSU_WeedAgent_Poster.pptx
+++ b/docs/poster/MTSU_WeedAgent_Poster.pptx
@@ -6724,7 +6724,7 @@
                 </a:solidFill>
                 <a:latin typeface="Arial"/>
               </a:rPr>
-              <a:t>Figure 7.  Every arm on one frozen corpus of real incidents from this project's own history -- 116 incidents and 33 controls -- scored by the project's own scorer, which requires the finding to be about the incident and not merely that the arm raised something. Up and to the left is better. Open circle: the model reads raw artifact excerpts. Filled: the same model with a retrieval round over the same artifacts. The retrieval tier is worth +0.149 recall to the 27B and +0.012 to the 14B, so tiering pays where the model can use it and not otherwise.</a:t>
+              <a:t>Figure 7.  Every arm on one frozen corpus of real incidents from this project's own history -- 116 incidents and 33 controls -- scored by the project's own scorer: a detection counts only when the arm returns an issue verdict carrying a finding at or above a severity bar, and a case that produced no answer leaves the denominator rather than counting as a miss. Up and to the left is better. Open circle: the model reads raw artifact excerpts. Filled: the same model with a retrieval round over the same artifacts. The retrieval tier is worth +0.149 recall to the 27B and +0.012 to the 14B, so tiering pays where the model can use it and not otherwise.</a:t>
             </a:r>
           </a:p>
         </p:txBody>
@@ -6766,7 +6766,7 @@
                 </a:solidFill>
                 <a:latin typeface="Arial"/>
               </a:rPr>
-              <a:t>A frozen corpus of 162 real incidents from this project's own engineering record, scored on the dev split: 116 incidents and 33 controls, by the project's own scorer re-reading committed verdicts, which requires the finding to be about the incident and not merely that the arm raised something. L2 reads raw artifact excerpts; L3 adds a retrieval round over them.</a:t>
+              <a:t>A frozen corpus of 162 real incidents from this project's own engineering record, scored on the dev split: 116 incidents and 33 controls, by the project's own scorer re-reading committed verdicts. A detection counts only when the arm returns an issue verdict carrying a finding at or above a severity bar; “grounded” additionally requires that finding to quote a line that resolves in the artifact. L2 reads raw artifact excerpts; L3 adds a retrieval round over them.</a:t>
             </a:r>
           </a:p>
         </p:txBody>
@@ -6779,7 +6779,7 @@
         </p:nvSpPr>
         <p:spPr>
           <a:xfrm>
-            <a:off x="22197060" y="19082243"/>
+            <a:off x="22197060" y="19291412"/>
             <a:ext cx="9989819" cy="20116"/>
           </a:xfrm>
           <a:prstGeom prst="rect">
@@ -6823,8 +6823,8 @@
         </p:nvSpPr>
         <p:spPr>
           <a:xfrm>
-            <a:off x="22197060" y="19173683"/>
-            <a:ext cx="2996945" cy="365760"/>
+            <a:off x="22197060" y="19382852"/>
+            <a:ext cx="2597353" cy="365760"/>
           </a:xfrm>
           <a:prstGeom prst="rect">
             <a:avLst/>
@@ -6865,8 +6865,8 @@
         </p:nvSpPr>
         <p:spPr>
           <a:xfrm>
-            <a:off x="25194006" y="19173683"/>
-            <a:ext cx="2996945" cy="365760"/>
+            <a:off x="24794413" y="19382852"/>
+            <a:ext cx="2597353" cy="365760"/>
           </a:xfrm>
           <a:prstGeom prst="rect">
             <a:avLst/>
@@ -6907,7 +6907,49 @@
         </p:nvSpPr>
         <p:spPr>
           <a:xfrm>
-            <a:off x="28190952" y="19173683"/>
+            <a:off x="27391766" y="19382852"/>
+            <a:ext cx="1298676" cy="365760"/>
+          </a:xfrm>
+          <a:prstGeom prst="rect">
+            <a:avLst/>
+          </a:prstGeom>
+          <a:noFill/>
+        </p:spPr>
+        <p:txBody>
+          <a:bodyPr wrap="square" lIns="0" rIns="0" tIns="0" bIns="0">
+            <a:spAutoFit/>
+          </a:bodyPr>
+          <a:lstStyle/>
+          <a:p>
+            <a:pPr algn="r">
+              <a:lnSpc>
+                <a:spcPct val="100000"/>
+              </a:lnSpc>
+              <a:spcAft>
+                <a:spcPts val="0"/>
+              </a:spcAft>
+            </a:pPr>
+            <a:r>
+              <a:rPr sz="1250" b="1">
+                <a:solidFill>
+                  <a:srgbClr val="1E293B"/>
+                </a:solidFill>
+                <a:latin typeface="Arial"/>
+              </a:rPr>
+              <a:t>recall</a:t>
+            </a:r>
+          </a:p>
+        </p:txBody>
+      </p:sp>
+      <p:sp>
+        <p:nvSpPr>
+          <p:cNvPr id="95" name="TextBox 94"/>
+          <p:cNvSpPr txBox="1"/>
+          <p:nvPr/>
+        </p:nvSpPr>
+        <p:spPr>
+          <a:xfrm>
+            <a:off x="28690443" y="19382852"/>
             <a:ext cx="1398574" cy="365760"/>
           </a:xfrm>
           <a:prstGeom prst="rect">
@@ -6936,21 +6978,21 @@
                 </a:solidFill>
                 <a:latin typeface="Arial"/>
               </a:rPr>
-              <a:t>recall</a:t>
-            </a:r>
-          </a:p>
-        </p:txBody>
-      </p:sp>
-      <p:sp>
-        <p:nvSpPr>
-          <p:cNvPr id="95" name="TextBox 94"/>
-          <p:cNvSpPr txBox="1"/>
-          <p:nvPr/>
-        </p:nvSpPr>
-        <p:spPr>
-          <a:xfrm>
-            <a:off x="29589526" y="19173683"/>
-            <a:ext cx="1598371" cy="365760"/>
+              <a:t>grounded</a:t>
+            </a:r>
+          </a:p>
+        </p:txBody>
+      </p:sp>
+      <p:sp>
+        <p:nvSpPr>
+          <p:cNvPr id="96" name="TextBox 95"/>
+          <p:cNvSpPr txBox="1"/>
+          <p:nvPr/>
+        </p:nvSpPr>
+        <p:spPr>
+          <a:xfrm>
+            <a:off x="30089017" y="19382852"/>
+            <a:ext cx="1298676" cy="365760"/>
           </a:xfrm>
           <a:prstGeom prst="rect">
             <a:avLst/>
@@ -6985,14 +7027,14 @@
       </p:sp>
       <p:sp>
         <p:nvSpPr>
-          <p:cNvPr id="96" name="TextBox 95"/>
-          <p:cNvSpPr txBox="1"/>
-          <p:nvPr/>
-        </p:nvSpPr>
-        <p:spPr>
-          <a:xfrm>
-            <a:off x="31187898" y="19173683"/>
-            <a:ext cx="998982" cy="365760"/>
+          <p:cNvPr id="97" name="TextBox 96"/>
+          <p:cNvSpPr txBox="1"/>
+          <p:nvPr/>
+        </p:nvSpPr>
+        <p:spPr>
+          <a:xfrm>
+            <a:off x="31387694" y="19382852"/>
+            <a:ext cx="799185" cy="365760"/>
           </a:xfrm>
           <a:prstGeom prst="rect">
             <a:avLst/>
@@ -7027,13 +7069,13 @@
       </p:sp>
       <p:sp>
         <p:nvSpPr>
-          <p:cNvPr id="97" name="Rectangle 96"/>
+          <p:cNvPr id="98" name="Rectangle 97"/>
           <p:cNvSpPr/>
           <p:nvPr/>
         </p:nvSpPr>
         <p:spPr>
           <a:xfrm>
-            <a:off x="22197060" y="19448003"/>
+            <a:off x="22197060" y="19657172"/>
             <a:ext cx="9989819" cy="12801"/>
           </a:xfrm>
           <a:prstGeom prst="rect">
@@ -7071,14 +7113,14 @@
       </p:sp>
       <p:sp>
         <p:nvSpPr>
-          <p:cNvPr id="98" name="TextBox 97"/>
-          <p:cNvSpPr txBox="1"/>
-          <p:nvPr/>
-        </p:nvSpPr>
-        <p:spPr>
-          <a:xfrm>
-            <a:off x="22197060" y="19530299"/>
-            <a:ext cx="2996945" cy="365760"/>
+          <p:cNvPr id="99" name="TextBox 98"/>
+          <p:cNvSpPr txBox="1"/>
+          <p:nvPr/>
+        </p:nvSpPr>
+        <p:spPr>
+          <a:xfrm>
+            <a:off x="22197060" y="19739468"/>
+            <a:ext cx="2597353" cy="365760"/>
           </a:xfrm>
           <a:prstGeom prst="rect">
             <a:avLst/>
@@ -7113,14 +7155,14 @@
       </p:sp>
       <p:sp>
         <p:nvSpPr>
-          <p:cNvPr id="99" name="TextBox 98"/>
-          <p:cNvSpPr txBox="1"/>
-          <p:nvPr/>
-        </p:nvSpPr>
-        <p:spPr>
-          <a:xfrm>
-            <a:off x="25194006" y="19530299"/>
-            <a:ext cx="2996945" cy="365760"/>
+          <p:cNvPr id="100" name="TextBox 99"/>
+          <p:cNvSpPr txBox="1"/>
+          <p:nvPr/>
+        </p:nvSpPr>
+        <p:spPr>
+          <a:xfrm>
+            <a:off x="24794413" y="19739468"/>
+            <a:ext cx="2597353" cy="365760"/>
           </a:xfrm>
           <a:prstGeom prst="rect">
             <a:avLst/>
@@ -7155,13 +7197,55 @@
       </p:sp>
       <p:sp>
         <p:nvSpPr>
-          <p:cNvPr id="100" name="TextBox 99"/>
-          <p:cNvSpPr txBox="1"/>
-          <p:nvPr/>
-        </p:nvSpPr>
-        <p:spPr>
-          <a:xfrm>
-            <a:off x="28190952" y="19530299"/>
+          <p:cNvPr id="101" name="TextBox 100"/>
+          <p:cNvSpPr txBox="1"/>
+          <p:nvPr/>
+        </p:nvSpPr>
+        <p:spPr>
+          <a:xfrm>
+            <a:off x="27391766" y="19739468"/>
+            <a:ext cx="1298676" cy="365760"/>
+          </a:xfrm>
+          <a:prstGeom prst="rect">
+            <a:avLst/>
+          </a:prstGeom>
+          <a:noFill/>
+        </p:spPr>
+        <p:txBody>
+          <a:bodyPr wrap="square" lIns="0" rIns="0" tIns="0" bIns="0">
+            <a:spAutoFit/>
+          </a:bodyPr>
+          <a:lstStyle/>
+          <a:p>
+            <a:pPr algn="r">
+              <a:lnSpc>
+                <a:spcPct val="100000"/>
+              </a:lnSpc>
+              <a:spcAft>
+                <a:spcPts val="0"/>
+              </a:spcAft>
+            </a:pPr>
+            <a:r>
+              <a:rPr sz="1300" b="0">
+                <a:solidFill>
+                  <a:srgbClr val="1E293B"/>
+                </a:solidFill>
+                <a:latin typeface="Arial"/>
+              </a:rPr>
+              <a:t>--</a:t>
+            </a:r>
+          </a:p>
+        </p:txBody>
+      </p:sp>
+      <p:sp>
+        <p:nvSpPr>
+          <p:cNvPr id="102" name="TextBox 101"/>
+          <p:cNvSpPr txBox="1"/>
+          <p:nvPr/>
+        </p:nvSpPr>
+        <p:spPr>
+          <a:xfrm>
+            <a:off x="28690443" y="19739468"/>
             <a:ext cx="1398574" cy="365760"/>
           </a:xfrm>
           <a:prstGeom prst="rect">
@@ -7197,14 +7281,14 @@
       </p:sp>
       <p:sp>
         <p:nvSpPr>
-          <p:cNvPr id="101" name="TextBox 100"/>
-          <p:cNvSpPr txBox="1"/>
-          <p:nvPr/>
-        </p:nvSpPr>
-        <p:spPr>
-          <a:xfrm>
-            <a:off x="29589526" y="19530299"/>
-            <a:ext cx="1598371" cy="365760"/>
+          <p:cNvPr id="103" name="TextBox 102"/>
+          <p:cNvSpPr txBox="1"/>
+          <p:nvPr/>
+        </p:nvSpPr>
+        <p:spPr>
+          <a:xfrm>
+            <a:off x="30089017" y="19739468"/>
+            <a:ext cx="1298676" cy="365760"/>
           </a:xfrm>
           <a:prstGeom prst="rect">
             <a:avLst/>
@@ -7239,14 +7323,14 @@
       </p:sp>
       <p:sp>
         <p:nvSpPr>
-          <p:cNvPr id="102" name="TextBox 101"/>
-          <p:cNvSpPr txBox="1"/>
-          <p:nvPr/>
-        </p:nvSpPr>
-        <p:spPr>
-          <a:xfrm>
-            <a:off x="31187898" y="19530299"/>
-            <a:ext cx="998982" cy="365760"/>
+          <p:cNvPr id="104" name="TextBox 103"/>
+          <p:cNvSpPr txBox="1"/>
+          <p:nvPr/>
+        </p:nvSpPr>
+        <p:spPr>
+          <a:xfrm>
+            <a:off x="31387694" y="19739468"/>
+            <a:ext cx="799185" cy="365760"/>
           </a:xfrm>
           <a:prstGeom prst="rect">
             <a:avLst/>
@@ -7281,14 +7365,14 @@
       </p:sp>
       <p:sp>
         <p:nvSpPr>
-          <p:cNvPr id="103" name="TextBox 102"/>
-          <p:cNvSpPr txBox="1"/>
-          <p:nvPr/>
-        </p:nvSpPr>
-        <p:spPr>
-          <a:xfrm>
-            <a:off x="22197060" y="19841195"/>
-            <a:ext cx="2996945" cy="365760"/>
+          <p:cNvPr id="105" name="TextBox 104"/>
+          <p:cNvSpPr txBox="1"/>
+          <p:nvPr/>
+        </p:nvSpPr>
+        <p:spPr>
+          <a:xfrm>
+            <a:off x="22197060" y="20050364"/>
+            <a:ext cx="2597353" cy="365760"/>
           </a:xfrm>
           <a:prstGeom prst="rect">
             <a:avLst/>
@@ -7323,14 +7407,14 @@
       </p:sp>
       <p:sp>
         <p:nvSpPr>
-          <p:cNvPr id="104" name="TextBox 103"/>
-          <p:cNvSpPr txBox="1"/>
-          <p:nvPr/>
-        </p:nvSpPr>
-        <p:spPr>
-          <a:xfrm>
-            <a:off x="25194006" y="19841195"/>
-            <a:ext cx="2996945" cy="365760"/>
+          <p:cNvPr id="106" name="TextBox 105"/>
+          <p:cNvSpPr txBox="1"/>
+          <p:nvPr/>
+        </p:nvSpPr>
+        <p:spPr>
+          <a:xfrm>
+            <a:off x="24794413" y="20050364"/>
+            <a:ext cx="2597353" cy="365760"/>
           </a:xfrm>
           <a:prstGeom prst="rect">
             <a:avLst/>
@@ -7365,13 +7449,55 @@
       </p:sp>
       <p:sp>
         <p:nvSpPr>
-          <p:cNvPr id="105" name="TextBox 104"/>
-          <p:cNvSpPr txBox="1"/>
-          <p:nvPr/>
-        </p:nvSpPr>
-        <p:spPr>
-          <a:xfrm>
-            <a:off x="28190952" y="19841195"/>
+          <p:cNvPr id="107" name="TextBox 106"/>
+          <p:cNvSpPr txBox="1"/>
+          <p:nvPr/>
+        </p:nvSpPr>
+        <p:spPr>
+          <a:xfrm>
+            <a:off x="27391766" y="20050364"/>
+            <a:ext cx="1298676" cy="365760"/>
+          </a:xfrm>
+          <a:prstGeom prst="rect">
+            <a:avLst/>
+          </a:prstGeom>
+          <a:noFill/>
+        </p:spPr>
+        <p:txBody>
+          <a:bodyPr wrap="square" lIns="0" rIns="0" tIns="0" bIns="0">
+            <a:spAutoFit/>
+          </a:bodyPr>
+          <a:lstStyle/>
+          <a:p>
+            <a:pPr algn="r">
+              <a:lnSpc>
+                <a:spcPct val="100000"/>
+              </a:lnSpc>
+              <a:spcAft>
+                <a:spcPts val="0"/>
+              </a:spcAft>
+            </a:pPr>
+            <a:r>
+              <a:rPr sz="1300" b="0">
+                <a:solidFill>
+                  <a:srgbClr val="1E293B"/>
+                </a:solidFill>
+                <a:latin typeface="Arial"/>
+              </a:rPr>
+              <a:t>0.095</a:t>
+            </a:r>
+          </a:p>
+        </p:txBody>
+      </p:sp>
+      <p:sp>
+        <p:nvSpPr>
+          <p:cNvPr id="108" name="TextBox 107"/>
+          <p:cNvSpPr txBox="1"/>
+          <p:nvPr/>
+        </p:nvSpPr>
+        <p:spPr>
+          <a:xfrm>
+            <a:off x="28690443" y="20050364"/>
             <a:ext cx="1398574" cy="365760"/>
           </a:xfrm>
           <a:prstGeom prst="rect">
@@ -7407,14 +7533,14 @@
       </p:sp>
       <p:sp>
         <p:nvSpPr>
-          <p:cNvPr id="106" name="TextBox 105"/>
-          <p:cNvSpPr txBox="1"/>
-          <p:nvPr/>
-        </p:nvSpPr>
-        <p:spPr>
-          <a:xfrm>
-            <a:off x="29589526" y="19841195"/>
-            <a:ext cx="1598371" cy="365760"/>
+          <p:cNvPr id="109" name="TextBox 108"/>
+          <p:cNvSpPr txBox="1"/>
+          <p:nvPr/>
+        </p:nvSpPr>
+        <p:spPr>
+          <a:xfrm>
+            <a:off x="30089017" y="20050364"/>
+            <a:ext cx="1298676" cy="365760"/>
           </a:xfrm>
           <a:prstGeom prst="rect">
             <a:avLst/>
@@ -7449,14 +7575,14 @@
       </p:sp>
       <p:sp>
         <p:nvSpPr>
-          <p:cNvPr id="107" name="TextBox 106"/>
-          <p:cNvSpPr txBox="1"/>
-          <p:nvPr/>
-        </p:nvSpPr>
-        <p:spPr>
-          <a:xfrm>
-            <a:off x="31187898" y="19841195"/>
-            <a:ext cx="998982" cy="365760"/>
+          <p:cNvPr id="110" name="TextBox 109"/>
+          <p:cNvSpPr txBox="1"/>
+          <p:nvPr/>
+        </p:nvSpPr>
+        <p:spPr>
+          <a:xfrm>
+            <a:off x="31387694" y="20050364"/>
+            <a:ext cx="799185" cy="365760"/>
           </a:xfrm>
           <a:prstGeom prst="rect">
             <a:avLst/>
@@ -7491,14 +7617,14 @@
       </p:sp>
       <p:sp>
         <p:nvSpPr>
-          <p:cNvPr id="108" name="TextBox 107"/>
-          <p:cNvSpPr txBox="1"/>
-          <p:nvPr/>
-        </p:nvSpPr>
-        <p:spPr>
-          <a:xfrm>
-            <a:off x="22197060" y="20152091"/>
-            <a:ext cx="2996945" cy="365760"/>
+          <p:cNvPr id="111" name="TextBox 110"/>
+          <p:cNvSpPr txBox="1"/>
+          <p:nvPr/>
+        </p:nvSpPr>
+        <p:spPr>
+          <a:xfrm>
+            <a:off x="22197060" y="20361260"/>
+            <a:ext cx="2597353" cy="365760"/>
           </a:xfrm>
           <a:prstGeom prst="rect">
             <a:avLst/>
@@ -7533,14 +7659,14 @@
       </p:sp>
       <p:sp>
         <p:nvSpPr>
-          <p:cNvPr id="109" name="TextBox 108"/>
-          <p:cNvSpPr txBox="1"/>
-          <p:nvPr/>
-        </p:nvSpPr>
-        <p:spPr>
-          <a:xfrm>
-            <a:off x="25194006" y="20152091"/>
-            <a:ext cx="2996945" cy="365760"/>
+          <p:cNvPr id="112" name="TextBox 111"/>
+          <p:cNvSpPr txBox="1"/>
+          <p:nvPr/>
+        </p:nvSpPr>
+        <p:spPr>
+          <a:xfrm>
+            <a:off x="24794413" y="20361260"/>
+            <a:ext cx="2597353" cy="365760"/>
           </a:xfrm>
           <a:prstGeom prst="rect">
             <a:avLst/>
@@ -7575,13 +7701,55 @@
       </p:sp>
       <p:sp>
         <p:nvSpPr>
-          <p:cNvPr id="110" name="TextBox 109"/>
-          <p:cNvSpPr txBox="1"/>
-          <p:nvPr/>
-        </p:nvSpPr>
-        <p:spPr>
-          <a:xfrm>
-            <a:off x="28190952" y="20152091"/>
+          <p:cNvPr id="113" name="TextBox 112"/>
+          <p:cNvSpPr txBox="1"/>
+          <p:nvPr/>
+        </p:nvSpPr>
+        <p:spPr>
+          <a:xfrm>
+            <a:off x="27391766" y="20361260"/>
+            <a:ext cx="1298676" cy="365760"/>
+          </a:xfrm>
+          <a:prstGeom prst="rect">
+            <a:avLst/>
+          </a:prstGeom>
+          <a:noFill/>
+        </p:spPr>
+        <p:txBody>
+          <a:bodyPr wrap="square" lIns="0" rIns="0" tIns="0" bIns="0">
+            <a:spAutoFit/>
+          </a:bodyPr>
+          <a:lstStyle/>
+          <a:p>
+            <a:pPr algn="r">
+              <a:lnSpc>
+                <a:spcPct val="100000"/>
+              </a:lnSpc>
+              <a:spcAft>
+                <a:spcPts val="0"/>
+              </a:spcAft>
+            </a:pPr>
+            <a:r>
+              <a:rPr sz="1300" b="0">
+                <a:solidFill>
+                  <a:srgbClr val="1E293B"/>
+                </a:solidFill>
+                <a:latin typeface="Arial"/>
+              </a:rPr>
+              <a:t>0.664</a:t>
+            </a:r>
+          </a:p>
+        </p:txBody>
+      </p:sp>
+      <p:sp>
+        <p:nvSpPr>
+          <p:cNvPr id="114" name="TextBox 113"/>
+          <p:cNvSpPr txBox="1"/>
+          <p:nvPr/>
+        </p:nvSpPr>
+        <p:spPr>
+          <a:xfrm>
+            <a:off x="28690443" y="20361260"/>
             <a:ext cx="1398574" cy="365760"/>
           </a:xfrm>
           <a:prstGeom prst="rect">
@@ -7610,21 +7778,21 @@
                 </a:solidFill>
                 <a:latin typeface="Arial"/>
               </a:rPr>
-              <a:t>0.664</a:t>
-            </a:r>
-          </a:p>
-        </p:txBody>
-      </p:sp>
-      <p:sp>
-        <p:nvSpPr>
-          <p:cNvPr id="111" name="TextBox 110"/>
-          <p:cNvSpPr txBox="1"/>
-          <p:nvPr/>
-        </p:nvSpPr>
-        <p:spPr>
-          <a:xfrm>
-            <a:off x="29589526" y="20152091"/>
-            <a:ext cx="1598371" cy="365760"/>
+              <a:t>0.602</a:t>
+            </a:r>
+          </a:p>
+        </p:txBody>
+      </p:sp>
+      <p:sp>
+        <p:nvSpPr>
+          <p:cNvPr id="115" name="TextBox 114"/>
+          <p:cNvSpPr txBox="1"/>
+          <p:nvPr/>
+        </p:nvSpPr>
+        <p:spPr>
+          <a:xfrm>
+            <a:off x="30089017" y="20361260"/>
+            <a:ext cx="1298676" cy="365760"/>
           </a:xfrm>
           <a:prstGeom prst="rect">
             <a:avLst/>
@@ -7659,14 +7827,14 @@
       </p:sp>
       <p:sp>
         <p:nvSpPr>
-          <p:cNvPr id="112" name="TextBox 111"/>
-          <p:cNvSpPr txBox="1"/>
-          <p:nvPr/>
-        </p:nvSpPr>
-        <p:spPr>
-          <a:xfrm>
-            <a:off x="31187898" y="20152091"/>
-            <a:ext cx="998982" cy="365760"/>
+          <p:cNvPr id="116" name="TextBox 115"/>
+          <p:cNvSpPr txBox="1"/>
+          <p:nvPr/>
+        </p:nvSpPr>
+        <p:spPr>
+          <a:xfrm>
+            <a:off x="31387694" y="20361260"/>
+            <a:ext cx="799185" cy="365760"/>
           </a:xfrm>
           <a:prstGeom prst="rect">
             <a:avLst/>
@@ -7701,14 +7869,14 @@
       </p:sp>
       <p:sp>
         <p:nvSpPr>
-          <p:cNvPr id="113" name="TextBox 112"/>
-          <p:cNvSpPr txBox="1"/>
-          <p:nvPr/>
-        </p:nvSpPr>
-        <p:spPr>
-          <a:xfrm>
-            <a:off x="22197060" y="20462987"/>
-            <a:ext cx="2996945" cy="365760"/>
+          <p:cNvPr id="117" name="TextBox 116"/>
+          <p:cNvSpPr txBox="1"/>
+          <p:nvPr/>
+        </p:nvSpPr>
+        <p:spPr>
+          <a:xfrm>
+            <a:off x="22197060" y="20672156"/>
+            <a:ext cx="2597353" cy="365760"/>
           </a:xfrm>
           <a:prstGeom prst="rect">
             <a:avLst/>
@@ -7743,14 +7911,14 @@
       </p:sp>
       <p:sp>
         <p:nvSpPr>
-          <p:cNvPr id="114" name="TextBox 113"/>
-          <p:cNvSpPr txBox="1"/>
-          <p:nvPr/>
-        </p:nvSpPr>
-        <p:spPr>
-          <a:xfrm>
-            <a:off x="25194006" y="20462987"/>
-            <a:ext cx="2996945" cy="365760"/>
+          <p:cNvPr id="118" name="TextBox 117"/>
+          <p:cNvSpPr txBox="1"/>
+          <p:nvPr/>
+        </p:nvSpPr>
+        <p:spPr>
+          <a:xfrm>
+            <a:off x="24794413" y="20672156"/>
+            <a:ext cx="2597353" cy="365760"/>
           </a:xfrm>
           <a:prstGeom prst="rect">
             <a:avLst/>
@@ -7785,13 +7953,55 @@
       </p:sp>
       <p:sp>
         <p:nvSpPr>
-          <p:cNvPr id="115" name="TextBox 114"/>
-          <p:cNvSpPr txBox="1"/>
-          <p:nvPr/>
-        </p:nvSpPr>
-        <p:spPr>
-          <a:xfrm>
-            <a:off x="28190952" y="20462987"/>
+          <p:cNvPr id="119" name="TextBox 118"/>
+          <p:cNvSpPr txBox="1"/>
+          <p:nvPr/>
+        </p:nvSpPr>
+        <p:spPr>
+          <a:xfrm>
+            <a:off x="27391766" y="20672156"/>
+            <a:ext cx="1298676" cy="365760"/>
+          </a:xfrm>
+          <a:prstGeom prst="rect">
+            <a:avLst/>
+          </a:prstGeom>
+          <a:noFill/>
+        </p:spPr>
+        <p:txBody>
+          <a:bodyPr wrap="square" lIns="0" rIns="0" tIns="0" bIns="0">
+            <a:spAutoFit/>
+          </a:bodyPr>
+          <a:lstStyle/>
+          <a:p>
+            <a:pPr algn="r">
+              <a:lnSpc>
+                <a:spcPct val="100000"/>
+              </a:lnSpc>
+              <a:spcAft>
+                <a:spcPts val="0"/>
+              </a:spcAft>
+            </a:pPr>
+            <a:r>
+              <a:rPr sz="1300" b="0">
+                <a:solidFill>
+                  <a:srgbClr val="1E293B"/>
+                </a:solidFill>
+                <a:latin typeface="Arial"/>
+              </a:rPr>
+              <a:t>0.675</a:t>
+            </a:r>
+          </a:p>
+        </p:txBody>
+      </p:sp>
+      <p:sp>
+        <p:nvSpPr>
+          <p:cNvPr id="120" name="TextBox 119"/>
+          <p:cNvSpPr txBox="1"/>
+          <p:nvPr/>
+        </p:nvSpPr>
+        <p:spPr>
+          <a:xfrm>
+            <a:off x="28690443" y="20672156"/>
             <a:ext cx="1398574" cy="365760"/>
           </a:xfrm>
           <a:prstGeom prst="rect">
@@ -7820,21 +8030,21 @@
                 </a:solidFill>
                 <a:latin typeface="Arial"/>
               </a:rPr>
-              <a:t>0.675</a:t>
-            </a:r>
-          </a:p>
-        </p:txBody>
-      </p:sp>
-      <p:sp>
-        <p:nvSpPr>
-          <p:cNvPr id="116" name="TextBox 115"/>
-          <p:cNvSpPr txBox="1"/>
-          <p:nvPr/>
-        </p:nvSpPr>
-        <p:spPr>
-          <a:xfrm>
-            <a:off x="29589526" y="20462987"/>
-            <a:ext cx="1598371" cy="365760"/>
+              <a:t>0.614</a:t>
+            </a:r>
+          </a:p>
+        </p:txBody>
+      </p:sp>
+      <p:sp>
+        <p:nvSpPr>
+          <p:cNvPr id="121" name="TextBox 120"/>
+          <p:cNvSpPr txBox="1"/>
+          <p:nvPr/>
+        </p:nvSpPr>
+        <p:spPr>
+          <a:xfrm>
+            <a:off x="30089017" y="20672156"/>
+            <a:ext cx="1298676" cy="365760"/>
           </a:xfrm>
           <a:prstGeom prst="rect">
             <a:avLst/>
@@ -7869,14 +8079,14 @@
       </p:sp>
       <p:sp>
         <p:nvSpPr>
-          <p:cNvPr id="117" name="TextBox 116"/>
-          <p:cNvSpPr txBox="1"/>
-          <p:nvPr/>
-        </p:nvSpPr>
-        <p:spPr>
-          <a:xfrm>
-            <a:off x="31187898" y="20462987"/>
-            <a:ext cx="998982" cy="365760"/>
+          <p:cNvPr id="122" name="TextBox 121"/>
+          <p:cNvSpPr txBox="1"/>
+          <p:nvPr/>
+        </p:nvSpPr>
+        <p:spPr>
+          <a:xfrm>
+            <a:off x="31387694" y="20672156"/>
+            <a:ext cx="799185" cy="365760"/>
           </a:xfrm>
           <a:prstGeom prst="rect">
             <a:avLst/>
@@ -7911,14 +8121,14 @@
       </p:sp>
       <p:sp>
         <p:nvSpPr>
-          <p:cNvPr id="118" name="TextBox 117"/>
-          <p:cNvSpPr txBox="1"/>
-          <p:nvPr/>
-        </p:nvSpPr>
-        <p:spPr>
-          <a:xfrm>
-            <a:off x="22197060" y="20773883"/>
-            <a:ext cx="2996945" cy="365760"/>
+          <p:cNvPr id="123" name="TextBox 122"/>
+          <p:cNvSpPr txBox="1"/>
+          <p:nvPr/>
+        </p:nvSpPr>
+        <p:spPr>
+          <a:xfrm>
+            <a:off x="22197060" y="20983052"/>
+            <a:ext cx="2597353" cy="365760"/>
           </a:xfrm>
           <a:prstGeom prst="rect">
             <a:avLst/>
@@ -7953,14 +8163,14 @@
       </p:sp>
       <p:sp>
         <p:nvSpPr>
-          <p:cNvPr id="119" name="TextBox 118"/>
-          <p:cNvSpPr txBox="1"/>
-          <p:nvPr/>
-        </p:nvSpPr>
-        <p:spPr>
-          <a:xfrm>
-            <a:off x="25194006" y="20773883"/>
-            <a:ext cx="2996945" cy="365760"/>
+          <p:cNvPr id="124" name="TextBox 123"/>
+          <p:cNvSpPr txBox="1"/>
+          <p:nvPr/>
+        </p:nvSpPr>
+        <p:spPr>
+          <a:xfrm>
+            <a:off x="24794413" y="20983052"/>
+            <a:ext cx="2597353" cy="365760"/>
           </a:xfrm>
           <a:prstGeom prst="rect">
             <a:avLst/>
@@ -7995,13 +8205,55 @@
       </p:sp>
       <p:sp>
         <p:nvSpPr>
-          <p:cNvPr id="120" name="TextBox 119"/>
-          <p:cNvSpPr txBox="1"/>
-          <p:nvPr/>
-        </p:nvSpPr>
-        <p:spPr>
-          <a:xfrm>
-            <a:off x="28190952" y="20773883"/>
+          <p:cNvPr id="125" name="TextBox 124"/>
+          <p:cNvSpPr txBox="1"/>
+          <p:nvPr/>
+        </p:nvSpPr>
+        <p:spPr>
+          <a:xfrm>
+            <a:off x="27391766" y="20983052"/>
+            <a:ext cx="1298676" cy="365760"/>
+          </a:xfrm>
+          <a:prstGeom prst="rect">
+            <a:avLst/>
+          </a:prstGeom>
+          <a:noFill/>
+        </p:spPr>
+        <p:txBody>
+          <a:bodyPr wrap="square" lIns="0" rIns="0" tIns="0" bIns="0">
+            <a:spAutoFit/>
+          </a:bodyPr>
+          <a:lstStyle/>
+          <a:p>
+            <a:pPr algn="r">
+              <a:lnSpc>
+                <a:spcPct val="100000"/>
+              </a:lnSpc>
+              <a:spcAft>
+                <a:spcPts val="0"/>
+              </a:spcAft>
+            </a:pPr>
+            <a:r>
+              <a:rPr sz="1300" b="0">
+                <a:solidFill>
+                  <a:srgbClr val="1E293B"/>
+                </a:solidFill>
+                <a:latin typeface="Arial"/>
+              </a:rPr>
+              <a:t>0.553</a:t>
+            </a:r>
+          </a:p>
+        </p:txBody>
+      </p:sp>
+      <p:sp>
+        <p:nvSpPr>
+          <p:cNvPr id="126" name="TextBox 125"/>
+          <p:cNvSpPr txBox="1"/>
+          <p:nvPr/>
+        </p:nvSpPr>
+        <p:spPr>
+          <a:xfrm>
+            <a:off x="28690443" y="20983052"/>
             <a:ext cx="1398574" cy="365760"/>
           </a:xfrm>
           <a:prstGeom prst="rect">
@@ -8030,21 +8282,21 @@
                 </a:solidFill>
                 <a:latin typeface="Arial"/>
               </a:rPr>
-              <a:t>0.553</a:t>
-            </a:r>
-          </a:p>
-        </p:txBody>
-      </p:sp>
-      <p:sp>
-        <p:nvSpPr>
-          <p:cNvPr id="121" name="TextBox 120"/>
-          <p:cNvSpPr txBox="1"/>
-          <p:nvPr/>
-        </p:nvSpPr>
-        <p:spPr>
-          <a:xfrm>
-            <a:off x="29589526" y="20773883"/>
-            <a:ext cx="1598371" cy="365760"/>
+              <a:t>0.518</a:t>
+            </a:r>
+          </a:p>
+        </p:txBody>
+      </p:sp>
+      <p:sp>
+        <p:nvSpPr>
+          <p:cNvPr id="127" name="TextBox 126"/>
+          <p:cNvSpPr txBox="1"/>
+          <p:nvPr/>
+        </p:nvSpPr>
+        <p:spPr>
+          <a:xfrm>
+            <a:off x="30089017" y="20983052"/>
+            <a:ext cx="1298676" cy="365760"/>
           </a:xfrm>
           <a:prstGeom prst="rect">
             <a:avLst/>
@@ -8079,14 +8331,14 @@
       </p:sp>
       <p:sp>
         <p:nvSpPr>
-          <p:cNvPr id="122" name="TextBox 121"/>
-          <p:cNvSpPr txBox="1"/>
-          <p:nvPr/>
-        </p:nvSpPr>
-        <p:spPr>
-          <a:xfrm>
-            <a:off x="31187898" y="20773883"/>
-            <a:ext cx="998982" cy="365760"/>
+          <p:cNvPr id="128" name="TextBox 127"/>
+          <p:cNvSpPr txBox="1"/>
+          <p:nvPr/>
+        </p:nvSpPr>
+        <p:spPr>
+          <a:xfrm>
+            <a:off x="31387694" y="20983052"/>
+            <a:ext cx="799185" cy="365760"/>
           </a:xfrm>
           <a:prstGeom prst="rect">
             <a:avLst/>
@@ -8121,14 +8373,14 @@
       </p:sp>
       <p:sp>
         <p:nvSpPr>
-          <p:cNvPr id="123" name="TextBox 122"/>
-          <p:cNvSpPr txBox="1"/>
-          <p:nvPr/>
-        </p:nvSpPr>
-        <p:spPr>
-          <a:xfrm>
-            <a:off x="22197060" y="21084779"/>
-            <a:ext cx="2996945" cy="365760"/>
+          <p:cNvPr id="129" name="TextBox 128"/>
+          <p:cNvSpPr txBox="1"/>
+          <p:nvPr/>
+        </p:nvSpPr>
+        <p:spPr>
+          <a:xfrm>
+            <a:off x="22197060" y="21293948"/>
+            <a:ext cx="2597353" cy="365760"/>
           </a:xfrm>
           <a:prstGeom prst="rect">
             <a:avLst/>
@@ -8163,14 +8415,14 @@
       </p:sp>
       <p:sp>
         <p:nvSpPr>
-          <p:cNvPr id="124" name="TextBox 123"/>
-          <p:cNvSpPr txBox="1"/>
-          <p:nvPr/>
-        </p:nvSpPr>
-        <p:spPr>
-          <a:xfrm>
-            <a:off x="25194006" y="21084779"/>
-            <a:ext cx="2996945" cy="365760"/>
+          <p:cNvPr id="130" name="TextBox 129"/>
+          <p:cNvSpPr txBox="1"/>
+          <p:nvPr/>
+        </p:nvSpPr>
+        <p:spPr>
+          <a:xfrm>
+            <a:off x="24794413" y="21293948"/>
+            <a:ext cx="2597353" cy="365760"/>
           </a:xfrm>
           <a:prstGeom prst="rect">
             <a:avLst/>
@@ -8205,13 +8457,55 @@
       </p:sp>
       <p:sp>
         <p:nvSpPr>
-          <p:cNvPr id="125" name="TextBox 124"/>
-          <p:cNvSpPr txBox="1"/>
-          <p:nvPr/>
-        </p:nvSpPr>
-        <p:spPr>
-          <a:xfrm>
-            <a:off x="28190952" y="21084779"/>
+          <p:cNvPr id="131" name="TextBox 130"/>
+          <p:cNvSpPr txBox="1"/>
+          <p:nvPr/>
+        </p:nvSpPr>
+        <p:spPr>
+          <a:xfrm>
+            <a:off x="27391766" y="21293948"/>
+            <a:ext cx="1298676" cy="365760"/>
+          </a:xfrm>
+          <a:prstGeom prst="rect">
+            <a:avLst/>
+          </a:prstGeom>
+          <a:noFill/>
+        </p:spPr>
+        <p:txBody>
+          <a:bodyPr wrap="square" lIns="0" rIns="0" tIns="0" bIns="0">
+            <a:spAutoFit/>
+          </a:bodyPr>
+          <a:lstStyle/>
+          <a:p>
+            <a:pPr algn="r">
+              <a:lnSpc>
+                <a:spcPct val="100000"/>
+              </a:lnSpc>
+              <a:spcAft>
+                <a:spcPts val="0"/>
+              </a:spcAft>
+            </a:pPr>
+            <a:r>
+              <a:rPr sz="1300" b="1">
+                <a:solidFill>
+                  <a:srgbClr val="1C6FB5"/>
+                </a:solidFill>
+                <a:latin typeface="Arial"/>
+              </a:rPr>
+              <a:t>0.702</a:t>
+            </a:r>
+          </a:p>
+        </p:txBody>
+      </p:sp>
+      <p:sp>
+        <p:nvSpPr>
+          <p:cNvPr id="132" name="TextBox 131"/>
+          <p:cNvSpPr txBox="1"/>
+          <p:nvPr/>
+        </p:nvSpPr>
+        <p:spPr>
+          <a:xfrm>
+            <a:off x="28690443" y="21293948"/>
             <a:ext cx="1398574" cy="365760"/>
           </a:xfrm>
           <a:prstGeom prst="rect">
@@ -8247,14 +8541,14 @@
       </p:sp>
       <p:sp>
         <p:nvSpPr>
-          <p:cNvPr id="126" name="TextBox 125"/>
-          <p:cNvSpPr txBox="1"/>
-          <p:nvPr/>
-        </p:nvSpPr>
-        <p:spPr>
-          <a:xfrm>
-            <a:off x="29589526" y="21084779"/>
-            <a:ext cx="1598371" cy="365760"/>
+          <p:cNvPr id="133" name="TextBox 132"/>
+          <p:cNvSpPr txBox="1"/>
+          <p:nvPr/>
+        </p:nvSpPr>
+        <p:spPr>
+          <a:xfrm>
+            <a:off x="30089017" y="21293948"/>
+            <a:ext cx="1298676" cy="365760"/>
           </a:xfrm>
           <a:prstGeom prst="rect">
             <a:avLst/>
@@ -8289,14 +8583,14 @@
       </p:sp>
       <p:sp>
         <p:nvSpPr>
-          <p:cNvPr id="127" name="TextBox 126"/>
-          <p:cNvSpPr txBox="1"/>
-          <p:nvPr/>
-        </p:nvSpPr>
-        <p:spPr>
-          <a:xfrm>
-            <a:off x="31187898" y="21084779"/>
-            <a:ext cx="998982" cy="365760"/>
+          <p:cNvPr id="134" name="TextBox 133"/>
+          <p:cNvSpPr txBox="1"/>
+          <p:nvPr/>
+        </p:nvSpPr>
+        <p:spPr>
+          <a:xfrm>
+            <a:off x="31387694" y="21293948"/>
+            <a:ext cx="799185" cy="365760"/>
           </a:xfrm>
           <a:prstGeom prst="rect">
             <a:avLst/>
@@ -8331,14 +8625,14 @@
       </p:sp>
       <p:sp>
         <p:nvSpPr>
-          <p:cNvPr id="128" name="TextBox 127"/>
-          <p:cNvSpPr txBox="1"/>
-          <p:nvPr/>
-        </p:nvSpPr>
-        <p:spPr>
-          <a:xfrm>
-            <a:off x="22197060" y="21395675"/>
-            <a:ext cx="2996945" cy="365760"/>
+          <p:cNvPr id="135" name="TextBox 134"/>
+          <p:cNvSpPr txBox="1"/>
+          <p:nvPr/>
+        </p:nvSpPr>
+        <p:spPr>
+          <a:xfrm>
+            <a:off x="22197060" y="21604844"/>
+            <a:ext cx="2597353" cy="365760"/>
           </a:xfrm>
           <a:prstGeom prst="rect">
             <a:avLst/>
@@ -8373,14 +8667,14 @@
       </p:sp>
       <p:sp>
         <p:nvSpPr>
-          <p:cNvPr id="129" name="TextBox 128"/>
-          <p:cNvSpPr txBox="1"/>
-          <p:nvPr/>
-        </p:nvSpPr>
-        <p:spPr>
-          <a:xfrm>
-            <a:off x="25194006" y="21395675"/>
-            <a:ext cx="2996945" cy="365760"/>
+          <p:cNvPr id="136" name="TextBox 135"/>
+          <p:cNvSpPr txBox="1"/>
+          <p:nvPr/>
+        </p:nvSpPr>
+        <p:spPr>
+          <a:xfrm>
+            <a:off x="24794413" y="21604844"/>
+            <a:ext cx="2597353" cy="365760"/>
           </a:xfrm>
           <a:prstGeom prst="rect">
             <a:avLst/>
@@ -8415,13 +8709,55 @@
       </p:sp>
       <p:sp>
         <p:nvSpPr>
-          <p:cNvPr id="130" name="TextBox 129"/>
-          <p:cNvSpPr txBox="1"/>
-          <p:nvPr/>
-        </p:nvSpPr>
-        <p:spPr>
-          <a:xfrm>
-            <a:off x="28190952" y="21395675"/>
+          <p:cNvPr id="137" name="TextBox 136"/>
+          <p:cNvSpPr txBox="1"/>
+          <p:nvPr/>
+        </p:nvSpPr>
+        <p:spPr>
+          <a:xfrm>
+            <a:off x="27391766" y="21604844"/>
+            <a:ext cx="1298676" cy="365760"/>
+          </a:xfrm>
+          <a:prstGeom prst="rect">
+            <a:avLst/>
+          </a:prstGeom>
+          <a:noFill/>
+        </p:spPr>
+        <p:txBody>
+          <a:bodyPr wrap="square" lIns="0" rIns="0" tIns="0" bIns="0">
+            <a:spAutoFit/>
+          </a:bodyPr>
+          <a:lstStyle/>
+          <a:p>
+            <a:pPr algn="r">
+              <a:lnSpc>
+                <a:spcPct val="100000"/>
+              </a:lnSpc>
+              <a:spcAft>
+                <a:spcPts val="0"/>
+              </a:spcAft>
+            </a:pPr>
+            <a:r>
+              <a:rPr sz="1300" b="0">
+                <a:solidFill>
+                  <a:srgbClr val="1E293B"/>
+                </a:solidFill>
+                <a:latin typeface="Arial"/>
+              </a:rPr>
+              <a:t>0.821</a:t>
+            </a:r>
+          </a:p>
+        </p:txBody>
+      </p:sp>
+      <p:sp>
+        <p:nvSpPr>
+          <p:cNvPr id="138" name="TextBox 137"/>
+          <p:cNvSpPr txBox="1"/>
+          <p:nvPr/>
+        </p:nvSpPr>
+        <p:spPr>
+          <a:xfrm>
+            <a:off x="28690443" y="21604844"/>
             <a:ext cx="1398574" cy="365760"/>
           </a:xfrm>
           <a:prstGeom prst="rect">
@@ -8450,21 +8786,21 @@
                 </a:solidFill>
                 <a:latin typeface="Arial"/>
               </a:rPr>
-              <a:t>0.821</a:t>
-            </a:r>
-          </a:p>
-        </p:txBody>
-      </p:sp>
-      <p:sp>
-        <p:nvSpPr>
-          <p:cNvPr id="131" name="TextBox 130"/>
-          <p:cNvSpPr txBox="1"/>
-          <p:nvPr/>
-        </p:nvSpPr>
-        <p:spPr>
-          <a:xfrm>
-            <a:off x="29589526" y="21395675"/>
-            <a:ext cx="1598371" cy="365760"/>
+              <a:t>0.769</a:t>
+            </a:r>
+          </a:p>
+        </p:txBody>
+      </p:sp>
+      <p:sp>
+        <p:nvSpPr>
+          <p:cNvPr id="139" name="TextBox 138"/>
+          <p:cNvSpPr txBox="1"/>
+          <p:nvPr/>
+        </p:nvSpPr>
+        <p:spPr>
+          <a:xfrm>
+            <a:off x="30089017" y="21604844"/>
+            <a:ext cx="1298676" cy="365760"/>
           </a:xfrm>
           <a:prstGeom prst="rect">
             <a:avLst/>
@@ -8499,14 +8835,14 @@
       </p:sp>
       <p:sp>
         <p:nvSpPr>
-          <p:cNvPr id="132" name="TextBox 131"/>
-          <p:cNvSpPr txBox="1"/>
-          <p:nvPr/>
-        </p:nvSpPr>
-        <p:spPr>
-          <a:xfrm>
-            <a:off x="31187898" y="21395675"/>
-            <a:ext cx="998982" cy="365760"/>
+          <p:cNvPr id="140" name="TextBox 139"/>
+          <p:cNvSpPr txBox="1"/>
+          <p:nvPr/>
+        </p:nvSpPr>
+        <p:spPr>
+          <a:xfrm>
+            <a:off x="31387694" y="21604844"/>
+            <a:ext cx="799185" cy="365760"/>
           </a:xfrm>
           <a:prstGeom prst="rect">
             <a:avLst/>
@@ -8541,13 +8877,13 @@
       </p:sp>
       <p:sp>
         <p:nvSpPr>
-          <p:cNvPr id="133" name="Rectangle 132"/>
+          <p:cNvPr id="141" name="Rectangle 140"/>
           <p:cNvSpPr/>
           <p:nvPr/>
         </p:nvSpPr>
         <p:spPr>
           <a:xfrm>
-            <a:off x="22197060" y="21724859"/>
+            <a:off x="22197060" y="21934028"/>
             <a:ext cx="9989819" cy="20116"/>
           </a:xfrm>
           <a:prstGeom prst="rect">
@@ -8585,13 +8921,13 @@
       </p:sp>
       <p:sp>
         <p:nvSpPr>
-          <p:cNvPr id="134" name="TextBox 133"/>
-          <p:cNvSpPr txBox="1"/>
-          <p:nvPr/>
-        </p:nvSpPr>
-        <p:spPr>
-          <a:xfrm>
-            <a:off x="22197060" y="21926027"/>
+          <p:cNvPr id="142" name="TextBox 141"/>
+          <p:cNvSpPr txBox="1"/>
+          <p:nvPr/>
+        </p:nvSpPr>
+        <p:spPr>
+          <a:xfrm>
+            <a:off x="22197060" y="22135196"/>
             <a:ext cx="9989819" cy="365760"/>
           </a:xfrm>
           <a:prstGeom prst="rect">
@@ -8627,13 +8963,13 @@
       </p:sp>
       <p:sp>
         <p:nvSpPr>
-          <p:cNvPr id="135" name="TextBox 134"/>
-          <p:cNvSpPr txBox="1"/>
-          <p:nvPr/>
-        </p:nvSpPr>
-        <p:spPr>
-          <a:xfrm>
-            <a:off x="22197060" y="22882591"/>
+          <p:cNvPr id="143" name="TextBox 142"/>
+          <p:cNvSpPr txBox="1"/>
+          <p:nvPr/>
+        </p:nvSpPr>
+        <p:spPr>
+          <a:xfrm>
+            <a:off x="22197060" y="23091760"/>
             <a:ext cx="9989819" cy="365760"/>
           </a:xfrm>
           <a:prstGeom prst="rect">
@@ -8669,7 +9005,7 @@
       </p:sp>
       <p:pic>
         <p:nvPicPr>
-          <p:cNvPr id="136" name="Picture 135" descr="r_tta.png"/>
+          <p:cNvPr id="144" name="Picture 143" descr="r_tta.png"/>
           <p:cNvPicPr>
             <a:picLocks noChangeAspect="1"/>
           </p:cNvPicPr>
@@ -8683,7 +9019,7 @@
         </p:blipFill>
         <p:spPr>
           <a:xfrm>
-            <a:off x="22197060" y="23193487"/>
+            <a:off x="22197060" y="23402656"/>
             <a:ext cx="9989819" cy="3405620"/>
           </a:xfrm>
           <a:prstGeom prst="rect">
@@ -8693,13 +9029,13 @@
       </p:pic>
       <p:sp>
         <p:nvSpPr>
-          <p:cNvPr id="137" name="TextBox 136"/>
-          <p:cNvSpPr txBox="1"/>
-          <p:nvPr/>
-        </p:nvSpPr>
-        <p:spPr>
-          <a:xfrm>
-            <a:off x="22197060" y="26690547"/>
+          <p:cNvPr id="145" name="TextBox 144"/>
+          <p:cNvSpPr txBox="1"/>
+          <p:nvPr/>
+        </p:nvSpPr>
+        <p:spPr>
+          <a:xfrm>
+            <a:off x="22197060" y="26899716"/>
             <a:ext cx="9989819" cy="365760"/>
           </a:xfrm>
           <a:prstGeom prst="rect">
@@ -8735,13 +9071,13 @@
       </p:sp>
       <p:sp>
         <p:nvSpPr>
-          <p:cNvPr id="138" name="TextBox 137"/>
-          <p:cNvSpPr txBox="1"/>
-          <p:nvPr/>
-        </p:nvSpPr>
-        <p:spPr>
-          <a:xfrm>
-            <a:off x="11704320" y="27787827"/>
+          <p:cNvPr id="146" name="TextBox 145"/>
+          <p:cNvSpPr txBox="1"/>
+          <p:nvPr/>
+        </p:nvSpPr>
+        <p:spPr>
+          <a:xfrm>
+            <a:off x="11704320" y="27996996"/>
             <a:ext cx="20482560" cy="365760"/>
           </a:xfrm>
           <a:prstGeom prst="rect">
@@ -8777,7 +9113,7 @@
       </p:sp>
       <p:pic>
         <p:nvPicPr>
-          <p:cNvPr id="139" name="Picture 138" descr="f_rounds.png"/>
+          <p:cNvPr id="147" name="Picture 146" descr="f_rounds.png"/>
           <p:cNvPicPr>
             <a:picLocks noChangeAspect="1"/>
           </p:cNvPicPr>
@@ -8791,7 +9127,7 @@
         </p:blipFill>
         <p:spPr>
           <a:xfrm>
-            <a:off x="11704320" y="28098723"/>
+            <a:off x="11704320" y="28307892"/>
             <a:ext cx="20482560" cy="3749135"/>
           </a:xfrm>
           <a:prstGeom prst="rect">
@@ -8801,13 +9137,13 @@
       </p:pic>
       <p:sp>
         <p:nvSpPr>
-          <p:cNvPr id="140" name="TextBox 139"/>
-          <p:cNvSpPr txBox="1"/>
-          <p:nvPr/>
-        </p:nvSpPr>
-        <p:spPr>
-          <a:xfrm>
-            <a:off x="11704320" y="31939298"/>
+          <p:cNvPr id="148" name="TextBox 147"/>
+          <p:cNvSpPr txBox="1"/>
+          <p:nvPr/>
+        </p:nvSpPr>
+        <p:spPr>
+          <a:xfrm>
+            <a:off x="11704320" y="32148467"/>
             <a:ext cx="20482560" cy="365760"/>
           </a:xfrm>
           <a:prstGeom prst="rect">
@@ -8843,7 +9179,7 @@
       </p:sp>
       <p:sp>
         <p:nvSpPr>
-          <p:cNvPr id="141" name="TextBox 140"/>
+          <p:cNvPr id="149" name="TextBox 148"/>
           <p:cNvSpPr txBox="1"/>
           <p:nvPr/>
         </p:nvSpPr>
@@ -8885,7 +9221,7 @@
       </p:sp>
       <p:sp>
         <p:nvSpPr>
-          <p:cNvPr id="142" name="Rectangle 141"/>
+          <p:cNvPr id="150" name="Rectangle 149"/>
           <p:cNvSpPr/>
           <p:nvPr/>
         </p:nvSpPr>
@@ -8929,7 +9265,7 @@
       </p:sp>
       <p:pic>
         <p:nvPicPr>
-          <p:cNvPr id="143" name="Picture 142" descr="d_wall.png"/>
+          <p:cNvPr id="151" name="Picture 150" descr="d_wall.png"/>
           <p:cNvPicPr>
             <a:picLocks noChangeAspect="1"/>
           </p:cNvPicPr>
@@ -8953,7 +9289,7 @@
       </p:pic>
       <p:sp>
         <p:nvSpPr>
-          <p:cNvPr id="144" name="TextBox 143"/>
+          <p:cNvPr id="152" name="TextBox 151"/>
           <p:cNvSpPr txBox="1"/>
           <p:nvPr/>
         </p:nvSpPr>
@@ -8995,7 +9331,7 @@
       </p:sp>
       <p:pic>
         <p:nvPicPr>
-          <p:cNvPr id="145" name="Picture 144" descr="p_field.png"/>
+          <p:cNvPr id="153" name="Picture 152" descr="p_field.png"/>
           <p:cNvPicPr>
             <a:picLocks noChangeAspect="1"/>
           </p:cNvPicPr>
@@ -9019,7 +9355,7 @@
       </p:pic>
       <p:sp>
         <p:nvSpPr>
-          <p:cNvPr id="146" name="TextBox 145"/>
+          <p:cNvPr id="154" name="TextBox 153"/>
           <p:cNvSpPr txBox="1"/>
           <p:nvPr/>
         </p:nvSpPr>
@@ -9061,7 +9397,7 @@
       </p:sp>
       <p:pic>
         <p:nvPicPr>
-          <p:cNvPr id="147" name="Picture 146" descr="j_species.png"/>
+          <p:cNvPr id="155" name="Picture 154" descr="j_species.png"/>
           <p:cNvPicPr>
             <a:picLocks noChangeAspect="1"/>
           </p:cNvPicPr>
@@ -9085,7 +9421,7 @@
       </p:pic>
       <p:sp>
         <p:nvSpPr>
-          <p:cNvPr id="148" name="TextBox 147"/>
+          <p:cNvPr id="156" name="TextBox 155"/>
           <p:cNvSpPr txBox="1"/>
           <p:nvPr/>
         </p:nvSpPr>
@@ -9127,7 +9463,7 @@
       </p:sp>
       <p:sp>
         <p:nvSpPr>
-          <p:cNvPr id="149" name="TextBox 148"/>
+          <p:cNvPr id="157" name="TextBox 156"/>
           <p:cNvSpPr txBox="1"/>
           <p:nvPr/>
         </p:nvSpPr>
@@ -9169,7 +9505,7 @@
       </p:sp>
       <p:sp>
         <p:nvSpPr>
-          <p:cNvPr id="150" name="Rectangle 149"/>
+          <p:cNvPr id="158" name="Rectangle 157"/>
           <p:cNvSpPr/>
           <p:nvPr/>
         </p:nvSpPr>
@@ -9213,7 +9549,7 @@
       </p:sp>
       <p:sp>
         <p:nvSpPr>
-          <p:cNvPr id="151" name="TextBox 150"/>
+          <p:cNvPr id="159" name="TextBox 158"/>
           <p:cNvSpPr txBox="1"/>
           <p:nvPr/>
         </p:nvSpPr>
@@ -9255,7 +9591,7 @@
       </p:sp>
       <p:sp>
         <p:nvSpPr>
-          <p:cNvPr id="152" name="TextBox 151"/>
+          <p:cNvPr id="160" name="TextBox 159"/>
           <p:cNvSpPr txBox="1"/>
           <p:nvPr/>
         </p:nvSpPr>
@@ -9297,7 +9633,7 @@
       </p:sp>
       <p:sp>
         <p:nvSpPr>
-          <p:cNvPr id="153" name="TextBox 152"/>
+          <p:cNvPr id="161" name="TextBox 160"/>
           <p:cNvSpPr txBox="1"/>
           <p:nvPr/>
         </p:nvSpPr>
@@ -9339,7 +9675,7 @@
       </p:sp>
       <p:sp>
         <p:nvSpPr>
-          <p:cNvPr id="154" name="TextBox 153"/>
+          <p:cNvPr id="162" name="TextBox 161"/>
           <p:cNvSpPr txBox="1"/>
           <p:nvPr/>
         </p:nvSpPr>
@@ -9374,14 +9710,14 @@
                 </a:solidFill>
                 <a:latin typeface="Arial"/>
               </a:rPr>
-              <a:t>4.   Retrospective supervision needs the artifacts, not the status fields. The watchdog reading status fields returned no decidable verdict on any of 149 cases, while a model reading the raw artifacts reaches 0.70 recall over the 116 incidents; adding a retrieval tier over those same artifacts is worth another +0.149 to the 27B and +0.011 to the 14B.</a:t>
-            </a:r>
-          </a:p>
-        </p:txBody>
-      </p:sp>
-      <p:sp>
-        <p:nvSpPr>
-          <p:cNvPr id="155" name="TextBox 154"/>
+              <a:t>4.   Retrospective supervision needs the artifacts, not the status fields. The watchdog reading status fields returned no decidable verdict on any of 149 cases, while a model reading the raw artifacts reaches 0.70 recall over the 116 incidents; adding a retrieval tier over those same artifacts is worth another +0.149 to the 27B and +0.012 to the 14B.</a:t>
+            </a:r>
+          </a:p>
+        </p:txBody>
+      </p:sp>
+      <p:sp>
+        <p:nvSpPr>
+          <p:cNvPr id="163" name="TextBox 162"/>
           <p:cNvSpPr txBox="1"/>
           <p:nvPr/>
         </p:nvSpPr>
@@ -9423,7 +9759,7 @@
       </p:sp>
       <p:sp>
         <p:nvSpPr>
-          <p:cNvPr id="156" name="TextBox 155"/>
+          <p:cNvPr id="164" name="TextBox 163"/>
           <p:cNvSpPr txBox="1"/>
           <p:nvPr/>
         </p:nvSpPr>
@@ -9465,7 +9801,7 @@
       </p:sp>
       <p:sp>
         <p:nvSpPr>
-          <p:cNvPr id="157" name="TextBox 156"/>
+          <p:cNvPr id="165" name="TextBox 164"/>
           <p:cNvSpPr txBox="1"/>
           <p:nvPr/>
         </p:nvSpPr>
@@ -9507,7 +9843,7 @@
       </p:sp>
       <p:sp>
         <p:nvSpPr>
-          <p:cNvPr id="158" name="Rectangle 157"/>
+          <p:cNvPr id="166" name="Rectangle 165"/>
           <p:cNvSpPr/>
           <p:nvPr/>
         </p:nvSpPr>
@@ -9551,7 +9887,7 @@
       </p:sp>
       <p:sp>
         <p:nvSpPr>
-          <p:cNvPr id="159" name="TextBox 158"/>
+          <p:cNvPr id="167" name="TextBox 166"/>
           <p:cNvSpPr txBox="1"/>
           <p:nvPr/>
         </p:nvSpPr>
@@ -9593,7 +9929,7 @@
       </p:sp>
       <p:sp>
         <p:nvSpPr>
-          <p:cNvPr id="160" name="TextBox 159"/>
+          <p:cNvPr id="168" name="TextBox 167"/>
           <p:cNvSpPr txBox="1"/>
           <p:nvPr/>
         </p:nvSpPr>
@@ -9635,7 +9971,7 @@
       </p:sp>
       <p:sp>
         <p:nvSpPr>
-          <p:cNvPr id="161" name="Rectangle 160"/>
+          <p:cNvPr id="169" name="Rectangle 168"/>
           <p:cNvSpPr/>
           <p:nvPr/>
         </p:nvSpPr>
@@ -9679,7 +10015,7 @@
       </p:sp>
       <p:sp>
         <p:nvSpPr>
-          <p:cNvPr id="162" name="TextBox 161"/>
+          <p:cNvPr id="170" name="TextBox 169"/>
           <p:cNvSpPr txBox="1"/>
           <p:nvPr/>
         </p:nvSpPr>

--- a/docs/poster/MTSU_WeedAgent_Poster.pptx
+++ b/docs/poster/MTSU_WeedAgent_Poster.pptx
@@ -3877,15 +3877,39 @@
           </a:p>
         </p:txBody>
       </p:sp>
-      <p:sp>
-        <p:nvSpPr>
-          <p:cNvPr id="21" name="TextBox 20"/>
-          <p:cNvSpPr txBox="1"/>
-          <p:nvPr/>
-        </p:nvSpPr>
-        <p:spPr>
-          <a:xfrm>
-            <a:off x="731520" y="22512689"/>
+      <p:pic>
+        <p:nvPicPr>
+          <p:cNvPr id="21" name="Picture 20" descr="s_sources.png"/>
+          <p:cNvPicPr>
+            <a:picLocks noChangeAspect="1"/>
+          </p:cNvPicPr>
+          <p:nvPr/>
+        </p:nvPicPr>
+        <p:blipFill>
+          <a:blip r:embed="rId5"/>
+          <a:stretch>
+            <a:fillRect/>
+          </a:stretch>
+        </p:blipFill>
+        <p:spPr>
+          <a:xfrm>
+            <a:off x="731520" y="22466969"/>
+            <a:ext cx="10607040" cy="4125268"/>
+          </a:xfrm>
+          <a:prstGeom prst="rect">
+            <a:avLst/>
+          </a:prstGeom>
+        </p:spPr>
+      </p:pic>
+      <p:sp>
+        <p:nvSpPr>
+          <p:cNvPr id="22" name="TextBox 21"/>
+          <p:cNvSpPr txBox="1"/>
+          <p:nvPr/>
+        </p:nvSpPr>
+        <p:spPr>
+          <a:xfrm>
+            <a:off x="731520" y="26683677"/>
             <a:ext cx="10607040" cy="365760"/>
           </a:xfrm>
           <a:prstGeom prst="rect">
@@ -3901,6 +3925,48 @@
           <a:p>
             <a:pPr algn="l">
               <a:lnSpc>
+                <a:spcPct val="120000"/>
+              </a:lnSpc>
+              <a:spcAft>
+                <a:spcPts val="0"/>
+              </a:spcAft>
+            </a:pPr>
+            <a:r>
+              <a:rPr sz="1200" b="0">
+                <a:solidFill>
+                  <a:srgbClr val="556575"/>
+                </a:solidFill>
+                <a:latin typeface="Arial"/>
+              </a:rPr>
+              <a:t>Figure 4.  The six audited harvested sources. The same probe reads 1.000 on human-labelled CottonWeedDet12, so a source at 0.184 is the data and not the instrument. Only the source at the top clears the bar, and it supplies 3,208 of the 13,527 audited images.</a:t>
+            </a:r>
+          </a:p>
+        </p:txBody>
+      </p:sp>
+      <p:sp>
+        <p:nvSpPr>
+          <p:cNvPr id="23" name="TextBox 22"/>
+          <p:cNvSpPr txBox="1"/>
+          <p:nvPr/>
+        </p:nvSpPr>
+        <p:spPr>
+          <a:xfrm>
+            <a:off x="731520" y="27369477"/>
+            <a:ext cx="10607040" cy="365760"/>
+          </a:xfrm>
+          <a:prstGeom prst="rect">
+            <a:avLst/>
+          </a:prstGeom>
+          <a:noFill/>
+        </p:spPr>
+        <p:txBody>
+          <a:bodyPr wrap="square" lIns="0" rIns="0" tIns="0" bIns="0">
+            <a:spAutoFit/>
+          </a:bodyPr>
+          <a:lstStyle/>
+          <a:p>
+            <a:pPr algn="l">
+              <a:lnSpc>
                 <a:spcPct val="95000"/>
               </a:lnSpc>
               <a:spcAft>
@@ -3921,13 +3987,13 @@
       </p:sp>
       <p:sp>
         <p:nvSpPr>
-          <p:cNvPr id="22" name="Rectangle 21"/>
+          <p:cNvPr id="24" name="Rectangle 23"/>
           <p:cNvSpPr/>
           <p:nvPr/>
         </p:nvSpPr>
         <p:spPr>
           <a:xfrm>
-            <a:off x="731520" y="22988177"/>
+            <a:off x="731520" y="27844965"/>
             <a:ext cx="10607040" cy="25603"/>
           </a:xfrm>
           <a:prstGeom prst="rect">
@@ -3965,13 +4031,13 @@
       </p:sp>
       <p:sp>
         <p:nvSpPr>
-          <p:cNvPr id="23" name="TextBox 22"/>
-          <p:cNvSpPr txBox="1"/>
-          <p:nvPr/>
-        </p:nvSpPr>
-        <p:spPr>
-          <a:xfrm>
-            <a:off x="731520" y="23244209"/>
+          <p:cNvPr id="25" name="TextBox 24"/>
+          <p:cNvSpPr txBox="1"/>
+          <p:nvPr/>
+        </p:nvSpPr>
+        <p:spPr>
+          <a:xfrm>
+            <a:off x="731520" y="28100997"/>
             <a:ext cx="10607040" cy="365760"/>
           </a:xfrm>
           <a:prstGeom prst="rect">
@@ -4007,13 +4073,13 @@
       </p:sp>
       <p:sp>
         <p:nvSpPr>
-          <p:cNvPr id="24" name="TextBox 23"/>
-          <p:cNvSpPr txBox="1"/>
-          <p:nvPr/>
-        </p:nvSpPr>
-        <p:spPr>
-          <a:xfrm>
-            <a:off x="731520" y="24207885"/>
+          <p:cNvPr id="26" name="TextBox 25"/>
+          <p:cNvSpPr txBox="1"/>
+          <p:nvPr/>
+        </p:nvSpPr>
+        <p:spPr>
+          <a:xfrm>
+            <a:off x="731520" y="29064673"/>
             <a:ext cx="10607040" cy="365760"/>
           </a:xfrm>
           <a:prstGeom prst="rect">
@@ -4049,13 +4115,13 @@
       </p:sp>
       <p:sp>
         <p:nvSpPr>
-          <p:cNvPr id="25" name="TextBox 24"/>
-          <p:cNvSpPr txBox="1"/>
-          <p:nvPr/>
-        </p:nvSpPr>
-        <p:spPr>
-          <a:xfrm>
-            <a:off x="731520" y="24813675"/>
+          <p:cNvPr id="27" name="TextBox 26"/>
+          <p:cNvSpPr txBox="1"/>
+          <p:nvPr/>
+        </p:nvSpPr>
+        <p:spPr>
+          <a:xfrm>
+            <a:off x="731520" y="29670463"/>
             <a:ext cx="10607040" cy="365760"/>
           </a:xfrm>
           <a:prstGeom prst="rect">
@@ -4091,13 +4157,13 @@
       </p:sp>
       <p:sp>
         <p:nvSpPr>
-          <p:cNvPr id="26" name="Rectangle 25"/>
+          <p:cNvPr id="28" name="Rectangle 27"/>
           <p:cNvSpPr/>
           <p:nvPr/>
         </p:nvSpPr>
         <p:spPr>
           <a:xfrm>
-            <a:off x="731520" y="25289163"/>
+            <a:off x="731520" y="30145951"/>
             <a:ext cx="10607040" cy="25603"/>
           </a:xfrm>
           <a:prstGeom prst="rect">
@@ -4135,13 +4201,13 @@
       </p:sp>
       <p:sp>
         <p:nvSpPr>
-          <p:cNvPr id="27" name="TextBox 26"/>
-          <p:cNvSpPr txBox="1"/>
-          <p:nvPr/>
-        </p:nvSpPr>
-        <p:spPr>
-          <a:xfrm>
-            <a:off x="731520" y="25545195"/>
+          <p:cNvPr id="29" name="TextBox 28"/>
+          <p:cNvSpPr txBox="1"/>
+          <p:nvPr/>
+        </p:nvSpPr>
+        <p:spPr>
+          <a:xfrm>
+            <a:off x="731520" y="30401983"/>
             <a:ext cx="10607040" cy="365760"/>
           </a:xfrm>
           <a:prstGeom prst="rect">
@@ -4177,13 +4243,13 @@
       </p:sp>
       <p:sp>
         <p:nvSpPr>
-          <p:cNvPr id="28" name="Rectangle 27"/>
+          <p:cNvPr id="30" name="Rectangle 29"/>
           <p:cNvSpPr/>
           <p:nvPr/>
         </p:nvSpPr>
         <p:spPr>
           <a:xfrm>
-            <a:off x="731520" y="26090533"/>
+            <a:off x="731520" y="30947321"/>
             <a:ext cx="10607040" cy="20116"/>
           </a:xfrm>
           <a:prstGeom prst="rect">
@@ -4221,13 +4287,13 @@
       </p:sp>
       <p:sp>
         <p:nvSpPr>
-          <p:cNvPr id="29" name="TextBox 28"/>
-          <p:cNvSpPr txBox="1"/>
-          <p:nvPr/>
-        </p:nvSpPr>
-        <p:spPr>
-          <a:xfrm>
-            <a:off x="731520" y="26181973"/>
+          <p:cNvPr id="31" name="TextBox 30"/>
+          <p:cNvSpPr txBox="1"/>
+          <p:nvPr/>
+        </p:nvSpPr>
+        <p:spPr>
+          <a:xfrm>
+            <a:off x="731520" y="31038761"/>
             <a:ext cx="6576364" cy="365760"/>
           </a:xfrm>
           <a:prstGeom prst="rect">
@@ -4263,13 +4329,13 @@
       </p:sp>
       <p:sp>
         <p:nvSpPr>
-          <p:cNvPr id="30" name="TextBox 29"/>
-          <p:cNvSpPr txBox="1"/>
-          <p:nvPr/>
-        </p:nvSpPr>
-        <p:spPr>
-          <a:xfrm>
-            <a:off x="7307884" y="26181973"/>
+          <p:cNvPr id="32" name="TextBox 31"/>
+          <p:cNvSpPr txBox="1"/>
+          <p:nvPr/>
+        </p:nvSpPr>
+        <p:spPr>
+          <a:xfrm>
+            <a:off x="7307884" y="31038761"/>
             <a:ext cx="4030675" cy="365760"/>
           </a:xfrm>
           <a:prstGeom prst="rect">
@@ -4305,13 +4371,13 @@
       </p:sp>
       <p:sp>
         <p:nvSpPr>
-          <p:cNvPr id="31" name="Rectangle 30"/>
+          <p:cNvPr id="33" name="Rectangle 32"/>
           <p:cNvSpPr/>
           <p:nvPr/>
         </p:nvSpPr>
         <p:spPr>
           <a:xfrm>
-            <a:off x="731520" y="26456293"/>
+            <a:off x="731520" y="31313081"/>
             <a:ext cx="10607040" cy="12801"/>
           </a:xfrm>
           <a:prstGeom prst="rect">
@@ -4349,13 +4415,13 @@
       </p:sp>
       <p:sp>
         <p:nvSpPr>
-          <p:cNvPr id="32" name="TextBox 31"/>
-          <p:cNvSpPr txBox="1"/>
-          <p:nvPr/>
-        </p:nvSpPr>
-        <p:spPr>
-          <a:xfrm>
-            <a:off x="731520" y="26538589"/>
+          <p:cNvPr id="34" name="TextBox 33"/>
+          <p:cNvSpPr txBox="1"/>
+          <p:nvPr/>
+        </p:nvSpPr>
+        <p:spPr>
+          <a:xfrm>
+            <a:off x="731520" y="31395377"/>
             <a:ext cx="6576364" cy="365760"/>
           </a:xfrm>
           <a:prstGeom prst="rect">
@@ -4391,13 +4457,13 @@
       </p:sp>
       <p:sp>
         <p:nvSpPr>
-          <p:cNvPr id="33" name="TextBox 32"/>
-          <p:cNvSpPr txBox="1"/>
-          <p:nvPr/>
-        </p:nvSpPr>
-        <p:spPr>
-          <a:xfrm>
-            <a:off x="7307884" y="26538589"/>
+          <p:cNvPr id="35" name="TextBox 34"/>
+          <p:cNvSpPr txBox="1"/>
+          <p:nvPr/>
+        </p:nvSpPr>
+        <p:spPr>
+          <a:xfrm>
+            <a:off x="7307884" y="31395377"/>
             <a:ext cx="4030675" cy="365760"/>
           </a:xfrm>
           <a:prstGeom prst="rect">
@@ -4433,13 +4499,13 @@
       </p:sp>
       <p:sp>
         <p:nvSpPr>
-          <p:cNvPr id="34" name="TextBox 33"/>
-          <p:cNvSpPr txBox="1"/>
-          <p:nvPr/>
-        </p:nvSpPr>
-        <p:spPr>
-          <a:xfrm>
-            <a:off x="731520" y="26849485"/>
+          <p:cNvPr id="36" name="TextBox 35"/>
+          <p:cNvSpPr txBox="1"/>
+          <p:nvPr/>
+        </p:nvSpPr>
+        <p:spPr>
+          <a:xfrm>
+            <a:off x="731520" y="31706273"/>
             <a:ext cx="6576364" cy="365760"/>
           </a:xfrm>
           <a:prstGeom prst="rect">
@@ -4475,13 +4541,13 @@
       </p:sp>
       <p:sp>
         <p:nvSpPr>
-          <p:cNvPr id="35" name="TextBox 34"/>
-          <p:cNvSpPr txBox="1"/>
-          <p:nvPr/>
-        </p:nvSpPr>
-        <p:spPr>
-          <a:xfrm>
-            <a:off x="7307884" y="26849485"/>
+          <p:cNvPr id="37" name="TextBox 36"/>
+          <p:cNvSpPr txBox="1"/>
+          <p:nvPr/>
+        </p:nvSpPr>
+        <p:spPr>
+          <a:xfrm>
+            <a:off x="7307884" y="31706273"/>
             <a:ext cx="4030675" cy="365760"/>
           </a:xfrm>
           <a:prstGeom prst="rect">
@@ -4517,13 +4583,13 @@
       </p:sp>
       <p:sp>
         <p:nvSpPr>
-          <p:cNvPr id="36" name="TextBox 35"/>
-          <p:cNvSpPr txBox="1"/>
-          <p:nvPr/>
-        </p:nvSpPr>
-        <p:spPr>
-          <a:xfrm>
-            <a:off x="731520" y="27160381"/>
+          <p:cNvPr id="38" name="TextBox 37"/>
+          <p:cNvSpPr txBox="1"/>
+          <p:nvPr/>
+        </p:nvSpPr>
+        <p:spPr>
+          <a:xfrm>
+            <a:off x="731520" y="32017169"/>
             <a:ext cx="6576364" cy="365760"/>
           </a:xfrm>
           <a:prstGeom prst="rect">
@@ -4559,13 +4625,13 @@
       </p:sp>
       <p:sp>
         <p:nvSpPr>
-          <p:cNvPr id="37" name="TextBox 36"/>
-          <p:cNvSpPr txBox="1"/>
-          <p:nvPr/>
-        </p:nvSpPr>
-        <p:spPr>
-          <a:xfrm>
-            <a:off x="7307884" y="27160381"/>
+          <p:cNvPr id="39" name="TextBox 38"/>
+          <p:cNvSpPr txBox="1"/>
+          <p:nvPr/>
+        </p:nvSpPr>
+        <p:spPr>
+          <a:xfrm>
+            <a:off x="7307884" y="32017169"/>
             <a:ext cx="4030675" cy="365760"/>
           </a:xfrm>
           <a:prstGeom prst="rect">
@@ -4601,13 +4667,13 @@
       </p:sp>
       <p:sp>
         <p:nvSpPr>
-          <p:cNvPr id="38" name="TextBox 37"/>
-          <p:cNvSpPr txBox="1"/>
-          <p:nvPr/>
-        </p:nvSpPr>
-        <p:spPr>
-          <a:xfrm>
-            <a:off x="731520" y="27471277"/>
+          <p:cNvPr id="40" name="TextBox 39"/>
+          <p:cNvSpPr txBox="1"/>
+          <p:nvPr/>
+        </p:nvSpPr>
+        <p:spPr>
+          <a:xfrm>
+            <a:off x="731520" y="32328065"/>
             <a:ext cx="6576364" cy="365760"/>
           </a:xfrm>
           <a:prstGeom prst="rect">
@@ -4643,13 +4709,13 @@
       </p:sp>
       <p:sp>
         <p:nvSpPr>
-          <p:cNvPr id="39" name="TextBox 38"/>
-          <p:cNvSpPr txBox="1"/>
-          <p:nvPr/>
-        </p:nvSpPr>
-        <p:spPr>
-          <a:xfrm>
-            <a:off x="7307884" y="27471277"/>
+          <p:cNvPr id="41" name="TextBox 40"/>
+          <p:cNvSpPr txBox="1"/>
+          <p:nvPr/>
+        </p:nvSpPr>
+        <p:spPr>
+          <a:xfrm>
+            <a:off x="7307884" y="32328065"/>
             <a:ext cx="4030675" cy="365760"/>
           </a:xfrm>
           <a:prstGeom prst="rect">
@@ -4685,13 +4751,13 @@
       </p:sp>
       <p:sp>
         <p:nvSpPr>
-          <p:cNvPr id="40" name="Rectangle 39"/>
+          <p:cNvPr id="42" name="Rectangle 41"/>
           <p:cNvSpPr/>
           <p:nvPr/>
         </p:nvSpPr>
         <p:spPr>
           <a:xfrm>
-            <a:off x="731520" y="27800461"/>
+            <a:off x="731520" y="32657249"/>
             <a:ext cx="10607040" cy="20116"/>
           </a:xfrm>
           <a:prstGeom prst="rect">
@@ -4729,7 +4795,7 @@
       </p:sp>
       <p:sp>
         <p:nvSpPr>
-          <p:cNvPr id="41" name="TextBox 40"/>
+          <p:cNvPr id="43" name="TextBox 42"/>
           <p:cNvSpPr txBox="1"/>
           <p:nvPr/>
         </p:nvSpPr>
@@ -4771,7 +4837,7 @@
       </p:sp>
       <p:sp>
         <p:nvSpPr>
-          <p:cNvPr id="42" name="Rectangle 41"/>
+          <p:cNvPr id="44" name="Rectangle 43"/>
           <p:cNvSpPr/>
           <p:nvPr/>
         </p:nvSpPr>
@@ -4815,7 +4881,7 @@
       </p:sp>
       <p:sp>
         <p:nvSpPr>
-          <p:cNvPr id="43" name="Rectangle 42"/>
+          <p:cNvPr id="45" name="Rectangle 44"/>
           <p:cNvSpPr/>
           <p:nvPr/>
         </p:nvSpPr>
@@ -4859,7 +4925,7 @@
       </p:sp>
       <p:sp>
         <p:nvSpPr>
-          <p:cNvPr id="44" name="TextBox 43"/>
+          <p:cNvPr id="46" name="TextBox 45"/>
           <p:cNvSpPr txBox="1"/>
           <p:nvPr/>
         </p:nvSpPr>
@@ -4901,7 +4967,7 @@
       </p:sp>
       <p:sp>
         <p:nvSpPr>
-          <p:cNvPr id="45" name="TextBox 44"/>
+          <p:cNvPr id="47" name="TextBox 46"/>
           <p:cNvSpPr txBox="1"/>
           <p:nvPr/>
         </p:nvSpPr>
@@ -4943,7 +5009,7 @@
       </p:sp>
       <p:sp>
         <p:nvSpPr>
-          <p:cNvPr id="46" name="TextBox 45"/>
+          <p:cNvPr id="48" name="TextBox 47"/>
           <p:cNvSpPr txBox="1"/>
           <p:nvPr/>
         </p:nvSpPr>
@@ -4985,7 +5051,7 @@
       </p:sp>
       <p:sp>
         <p:nvSpPr>
-          <p:cNvPr id="47" name="Rectangle 46"/>
+          <p:cNvPr id="49" name="Rectangle 48"/>
           <p:cNvSpPr/>
           <p:nvPr/>
         </p:nvSpPr>
@@ -5029,7 +5095,7 @@
       </p:sp>
       <p:sp>
         <p:nvSpPr>
-          <p:cNvPr id="48" name="TextBox 47"/>
+          <p:cNvPr id="50" name="TextBox 49"/>
           <p:cNvSpPr txBox="1"/>
           <p:nvPr/>
         </p:nvSpPr>
@@ -5071,7 +5137,7 @@
       </p:sp>
       <p:sp>
         <p:nvSpPr>
-          <p:cNvPr id="49" name="TextBox 48"/>
+          <p:cNvPr id="51" name="TextBox 50"/>
           <p:cNvSpPr txBox="1"/>
           <p:nvPr/>
         </p:nvSpPr>
@@ -5113,7 +5179,7 @@
       </p:sp>
       <p:sp>
         <p:nvSpPr>
-          <p:cNvPr id="50" name="TextBox 49"/>
+          <p:cNvPr id="52" name="TextBox 51"/>
           <p:cNvSpPr txBox="1"/>
           <p:nvPr/>
         </p:nvSpPr>
@@ -5155,7 +5221,7 @@
       </p:sp>
       <p:sp>
         <p:nvSpPr>
-          <p:cNvPr id="51" name="Rectangle 50"/>
+          <p:cNvPr id="53" name="Rectangle 52"/>
           <p:cNvSpPr/>
           <p:nvPr/>
         </p:nvSpPr>
@@ -5199,7 +5265,7 @@
       </p:sp>
       <p:sp>
         <p:nvSpPr>
-          <p:cNvPr id="52" name="TextBox 51"/>
+          <p:cNvPr id="54" name="TextBox 53"/>
           <p:cNvSpPr txBox="1"/>
           <p:nvPr/>
         </p:nvSpPr>
@@ -5241,7 +5307,7 @@
       </p:sp>
       <p:sp>
         <p:nvSpPr>
-          <p:cNvPr id="53" name="TextBox 52"/>
+          <p:cNvPr id="55" name="TextBox 54"/>
           <p:cNvSpPr txBox="1"/>
           <p:nvPr/>
         </p:nvSpPr>
@@ -5283,7 +5349,7 @@
       </p:sp>
       <p:sp>
         <p:nvSpPr>
-          <p:cNvPr id="54" name="TextBox 53"/>
+          <p:cNvPr id="56" name="TextBox 55"/>
           <p:cNvSpPr txBox="1"/>
           <p:nvPr/>
         </p:nvSpPr>
@@ -5325,7 +5391,7 @@
       </p:sp>
       <p:sp>
         <p:nvSpPr>
-          <p:cNvPr id="55" name="Rectangle 54"/>
+          <p:cNvPr id="57" name="Rectangle 56"/>
           <p:cNvSpPr/>
           <p:nvPr/>
         </p:nvSpPr>
@@ -5369,7 +5435,7 @@
       </p:sp>
       <p:sp>
         <p:nvSpPr>
-          <p:cNvPr id="56" name="TextBox 55"/>
+          <p:cNvPr id="58" name="TextBox 57"/>
           <p:cNvSpPr txBox="1"/>
           <p:nvPr/>
         </p:nvSpPr>
@@ -5411,7 +5477,7 @@
       </p:sp>
       <p:sp>
         <p:nvSpPr>
-          <p:cNvPr id="57" name="TextBox 56"/>
+          <p:cNvPr id="59" name="TextBox 58"/>
           <p:cNvSpPr txBox="1"/>
           <p:nvPr/>
         </p:nvSpPr>
@@ -5453,7 +5519,7 @@
       </p:sp>
       <p:sp>
         <p:nvSpPr>
-          <p:cNvPr id="58" name="TextBox 57"/>
+          <p:cNvPr id="60" name="TextBox 59"/>
           <p:cNvSpPr txBox="1"/>
           <p:nvPr/>
         </p:nvSpPr>
@@ -5495,7 +5561,7 @@
       </p:sp>
       <p:sp>
         <p:nvSpPr>
-          <p:cNvPr id="59" name="TextBox 58"/>
+          <p:cNvPr id="61" name="TextBox 60"/>
           <p:cNvSpPr txBox="1"/>
           <p:nvPr/>
         </p:nvSpPr>
@@ -5537,73 +5603,7 @@
       </p:sp>
       <p:pic>
         <p:nvPicPr>
-          <p:cNvPr id="60" name="Picture 59" descr="a_families.png"/>
-          <p:cNvPicPr>
-            <a:picLocks noChangeAspect="1"/>
-          </p:cNvPicPr>
-          <p:nvPr/>
-        </p:nvPicPr>
-        <p:blipFill>
-          <a:blip r:embed="rId5"/>
-          <a:stretch>
-            <a:fillRect/>
-          </a:stretch>
-        </p:blipFill>
-        <p:spPr>
-          <a:xfrm>
-            <a:off x="11704320" y="7763255"/>
-            <a:ext cx="9989819" cy="5361065"/>
-          </a:xfrm>
-          <a:prstGeom prst="rect">
-            <a:avLst/>
-          </a:prstGeom>
-        </p:spPr>
-      </p:pic>
-      <p:sp>
-        <p:nvSpPr>
-          <p:cNvPr id="61" name="TextBox 60"/>
-          <p:cNvSpPr txBox="1"/>
-          <p:nvPr/>
-        </p:nvSpPr>
-        <p:spPr>
-          <a:xfrm>
-            <a:off x="11704320" y="13215760"/>
-            <a:ext cx="9989819" cy="365760"/>
-          </a:xfrm>
-          <a:prstGeom prst="rect">
-            <a:avLst/>
-          </a:prstGeom>
-          <a:noFill/>
-        </p:spPr>
-        <p:txBody>
-          <a:bodyPr wrap="square" lIns="0" rIns="0" tIns="0" bIns="0">
-            <a:spAutoFit/>
-          </a:bodyPr>
-          <a:lstStyle/>
-          <a:p>
-            <a:pPr algn="l">
-              <a:lnSpc>
-                <a:spcPct val="120000"/>
-              </a:lnSpc>
-              <a:spcAft>
-                <a:spcPts val="0"/>
-              </a:spcAft>
-            </a:pPr>
-            <a:r>
-              <a:rPr sz="1200" b="0">
-                <a:solidFill>
-                  <a:srgbClr val="556575"/>
-                </a:solidFill>
-                <a:latin typeface="Arial"/>
-              </a:rPr>
-              <a:t>Figure 4.  Three detector families on the CottonWeedDet12 holdout, three seeds each. How the network is initialised is worth three times what the architecture is worth.</a:t>
-            </a:r>
-          </a:p>
-        </p:txBody>
-      </p:sp>
-      <p:pic>
-        <p:nvPicPr>
-          <p:cNvPr id="62" name="Picture 61" descr="b_zeroshot.png"/>
+          <p:cNvPr id="62" name="Picture 61" descr="a_families.png"/>
           <p:cNvPicPr>
             <a:picLocks noChangeAspect="1"/>
           </p:cNvPicPr>
@@ -5617,8 +5617,8 @@
         </p:blipFill>
         <p:spPr>
           <a:xfrm>
-            <a:off x="22197060" y="7763255"/>
-            <a:ext cx="9989819" cy="4817913"/>
+            <a:off x="11704320" y="7763255"/>
+            <a:ext cx="9989819" cy="5361065"/>
           </a:xfrm>
           <a:prstGeom prst="rect">
             <a:avLst/>
@@ -5633,7 +5633,7 @@
         </p:nvSpPr>
         <p:spPr>
           <a:xfrm>
-            <a:off x="22197060" y="12672608"/>
+            <a:off x="11704320" y="13215760"/>
             <a:ext cx="9989819" cy="365760"/>
           </a:xfrm>
           <a:prstGeom prst="rect">
@@ -5662,56 +5662,14 @@
                 </a:solidFill>
                 <a:latin typeface="Arial"/>
               </a:rPr>
-              <a:t>Figure 5.  One deterministic pass per model, no repeats. Fifteen zero-shot vision-language models against the fine-tuned detector: the best of them reaches 0.434 against 0.929, and five produce no usable grounding at all.</a:t>
-            </a:r>
-          </a:p>
-        </p:txBody>
-      </p:sp>
-      <p:sp>
-        <p:nvSpPr>
-          <p:cNvPr id="64" name="TextBox 63"/>
-          <p:cNvSpPr txBox="1"/>
-          <p:nvPr/>
-        </p:nvSpPr>
-        <p:spPr>
-          <a:xfrm>
-            <a:off x="11704320" y="13947281"/>
-            <a:ext cx="20482560" cy="365760"/>
-          </a:xfrm>
-          <a:prstGeom prst="rect">
-            <a:avLst/>
-          </a:prstGeom>
-          <a:noFill/>
-        </p:spPr>
-        <p:txBody>
-          <a:bodyPr wrap="square" lIns="0" rIns="0" tIns="0" bIns="0">
-            <a:spAutoFit/>
-          </a:bodyPr>
-          <a:lstStyle/>
-          <a:p>
-            <a:pPr algn="l">
-              <a:lnSpc>
-                <a:spcPct val="100000"/>
-              </a:lnSpc>
-              <a:spcAft>
-                <a:spcPts val="0"/>
-              </a:spcAft>
-            </a:pPr>
-            <a:r>
-              <a:rPr sz="1800" b="1">
-                <a:solidFill>
-                  <a:srgbClr val="1E293B"/>
-                </a:solidFill>
-                <a:latin typeface="Arial"/>
-              </a:rPr>
-              <a:t>Does more harvested data help?</a:t>
+              <a:t>Figure 5.  Three detector families on the CottonWeedDet12 holdout, three seeds each. How the network is initialised is worth three times what the architecture is worth.</a:t>
             </a:r>
           </a:p>
         </p:txBody>
       </p:sp>
       <p:pic>
         <p:nvPicPr>
-          <p:cNvPr id="65" name="Picture 64" descr="c_ladder.png"/>
+          <p:cNvPr id="64" name="Picture 63" descr="b_zeroshot.png"/>
           <p:cNvPicPr>
             <a:picLocks noChangeAspect="1"/>
           </p:cNvPicPr>
@@ -5725,6 +5683,114 @@
         </p:blipFill>
         <p:spPr>
           <a:xfrm>
+            <a:off x="22197060" y="7763255"/>
+            <a:ext cx="9989819" cy="4817913"/>
+          </a:xfrm>
+          <a:prstGeom prst="rect">
+            <a:avLst/>
+          </a:prstGeom>
+        </p:spPr>
+      </p:pic>
+      <p:sp>
+        <p:nvSpPr>
+          <p:cNvPr id="65" name="TextBox 64"/>
+          <p:cNvSpPr txBox="1"/>
+          <p:nvPr/>
+        </p:nvSpPr>
+        <p:spPr>
+          <a:xfrm>
+            <a:off x="22197060" y="12672608"/>
+            <a:ext cx="9989819" cy="365760"/>
+          </a:xfrm>
+          <a:prstGeom prst="rect">
+            <a:avLst/>
+          </a:prstGeom>
+          <a:noFill/>
+        </p:spPr>
+        <p:txBody>
+          <a:bodyPr wrap="square" lIns="0" rIns="0" tIns="0" bIns="0">
+            <a:spAutoFit/>
+          </a:bodyPr>
+          <a:lstStyle/>
+          <a:p>
+            <a:pPr algn="l">
+              <a:lnSpc>
+                <a:spcPct val="120000"/>
+              </a:lnSpc>
+              <a:spcAft>
+                <a:spcPts val="0"/>
+              </a:spcAft>
+            </a:pPr>
+            <a:r>
+              <a:rPr sz="1200" b="0">
+                <a:solidFill>
+                  <a:srgbClr val="556575"/>
+                </a:solidFill>
+                <a:latin typeface="Arial"/>
+              </a:rPr>
+              <a:t>Figure 6.  One deterministic pass per model, no repeats. Fifteen zero-shot vision-language models against the fine-tuned detector: the best of them reaches 0.434 against 0.929, and five produce no usable grounding at all.</a:t>
+            </a:r>
+          </a:p>
+        </p:txBody>
+      </p:sp>
+      <p:sp>
+        <p:nvSpPr>
+          <p:cNvPr id="66" name="TextBox 65"/>
+          <p:cNvSpPr txBox="1"/>
+          <p:nvPr/>
+        </p:nvSpPr>
+        <p:spPr>
+          <a:xfrm>
+            <a:off x="11704320" y="13947281"/>
+            <a:ext cx="20482560" cy="365760"/>
+          </a:xfrm>
+          <a:prstGeom prst="rect">
+            <a:avLst/>
+          </a:prstGeom>
+          <a:noFill/>
+        </p:spPr>
+        <p:txBody>
+          <a:bodyPr wrap="square" lIns="0" rIns="0" tIns="0" bIns="0">
+            <a:spAutoFit/>
+          </a:bodyPr>
+          <a:lstStyle/>
+          <a:p>
+            <a:pPr algn="l">
+              <a:lnSpc>
+                <a:spcPct val="100000"/>
+              </a:lnSpc>
+              <a:spcAft>
+                <a:spcPts val="0"/>
+              </a:spcAft>
+            </a:pPr>
+            <a:r>
+              <a:rPr sz="1800" b="1">
+                <a:solidFill>
+                  <a:srgbClr val="1E293B"/>
+                </a:solidFill>
+                <a:latin typeface="Arial"/>
+              </a:rPr>
+              <a:t>Does more harvested data help?</a:t>
+            </a:r>
+          </a:p>
+        </p:txBody>
+      </p:sp>
+      <p:pic>
+        <p:nvPicPr>
+          <p:cNvPr id="67" name="Picture 66" descr="c_ladder.png"/>
+          <p:cNvPicPr>
+            <a:picLocks noChangeAspect="1"/>
+          </p:cNvPicPr>
+          <p:nvPr/>
+        </p:nvPicPr>
+        <p:blipFill>
+          <a:blip r:embed="rId8"/>
+          <a:stretch>
+            <a:fillRect/>
+          </a:stretch>
+        </p:blipFill>
+        <p:spPr>
+          <a:xfrm>
             <a:off x="11704320" y="14258176"/>
             <a:ext cx="9989819" cy="2543654"/>
           </a:xfrm>
@@ -5735,7 +5801,7 @@
       </p:pic>
       <p:sp>
         <p:nvSpPr>
-          <p:cNvPr id="66" name="TextBox 65"/>
+          <p:cNvPr id="68" name="TextBox 67"/>
           <p:cNvSpPr txBox="1"/>
           <p:nvPr/>
         </p:nvSpPr>
@@ -5770,14 +5836,14 @@
                 </a:solidFill>
                 <a:latin typeface="Arial"/>
               </a:rPr>
-              <a:t>Figure 6.  (c) Twelve times the training data costs 0.0189, three seeds at every rung. (d) The same eight checkpoints on a second dataset, class-agnostic, nothing of which it saw in training and 0 images excluded by the leak check; the series labels in (c) apply to (d). Both exams fall, so the narrow metric is not what makes the ladder drop.</a:t>
-            </a:r>
-          </a:p>
-        </p:txBody>
-      </p:sp>
-      <p:sp>
-        <p:nvSpPr>
-          <p:cNvPr id="67" name="TextBox 66"/>
+              <a:t>Figure 7.  (c) Twelve times the training data costs 0.0189, three seeds at every rung. (d) The same eight checkpoints on a second dataset, class-agnostic, nothing of which it saw in training and 0 images excluded by the leak check; the series labels in (c) apply to (d). Both exams fall, so the narrow metric is not what makes the ladder drop.</a:t>
+            </a:r>
+          </a:p>
+        </p:txBody>
+      </p:sp>
+      <p:sp>
+        <p:nvSpPr>
+          <p:cNvPr id="69" name="TextBox 68"/>
           <p:cNvSpPr txBox="1"/>
           <p:nvPr/>
         </p:nvSpPr>
@@ -5819,7 +5885,7 @@
       </p:sp>
       <p:sp>
         <p:nvSpPr>
-          <p:cNvPr id="68" name="Rectangle 67"/>
+          <p:cNvPr id="70" name="Rectangle 69"/>
           <p:cNvSpPr/>
           <p:nvPr/>
         </p:nvSpPr>
@@ -5863,7 +5929,7 @@
       </p:sp>
       <p:sp>
         <p:nvSpPr>
-          <p:cNvPr id="69" name="TextBox 68"/>
+          <p:cNvPr id="71" name="TextBox 70"/>
           <p:cNvSpPr txBox="1"/>
           <p:nvPr/>
         </p:nvSpPr>
@@ -5905,7 +5971,7 @@
       </p:sp>
       <p:sp>
         <p:nvSpPr>
-          <p:cNvPr id="70" name="TextBox 69"/>
+          <p:cNvPr id="72" name="TextBox 71"/>
           <p:cNvSpPr txBox="1"/>
           <p:nvPr/>
         </p:nvSpPr>
@@ -5947,7 +6013,7 @@
       </p:sp>
       <p:sp>
         <p:nvSpPr>
-          <p:cNvPr id="71" name="TextBox 70"/>
+          <p:cNvPr id="73" name="TextBox 72"/>
           <p:cNvSpPr txBox="1"/>
           <p:nvPr/>
         </p:nvSpPr>
@@ -5989,7 +6055,7 @@
       </p:sp>
       <p:sp>
         <p:nvSpPr>
-          <p:cNvPr id="72" name="Rectangle 71"/>
+          <p:cNvPr id="74" name="Rectangle 73"/>
           <p:cNvSpPr/>
           <p:nvPr/>
         </p:nvSpPr>
@@ -6033,7 +6099,7 @@
       </p:sp>
       <p:sp>
         <p:nvSpPr>
-          <p:cNvPr id="73" name="TextBox 72"/>
+          <p:cNvPr id="75" name="TextBox 74"/>
           <p:cNvSpPr txBox="1"/>
           <p:nvPr/>
         </p:nvSpPr>
@@ -6075,7 +6141,7 @@
       </p:sp>
       <p:sp>
         <p:nvSpPr>
-          <p:cNvPr id="74" name="TextBox 73"/>
+          <p:cNvPr id="76" name="TextBox 75"/>
           <p:cNvSpPr txBox="1"/>
           <p:nvPr/>
         </p:nvSpPr>
@@ -6117,7 +6183,7 @@
       </p:sp>
       <p:sp>
         <p:nvSpPr>
-          <p:cNvPr id="75" name="TextBox 74"/>
+          <p:cNvPr id="77" name="TextBox 76"/>
           <p:cNvSpPr txBox="1"/>
           <p:nvPr/>
         </p:nvSpPr>
@@ -6159,7 +6225,7 @@
       </p:sp>
       <p:sp>
         <p:nvSpPr>
-          <p:cNvPr id="76" name="TextBox 75"/>
+          <p:cNvPr id="78" name="TextBox 77"/>
           <p:cNvSpPr txBox="1"/>
           <p:nvPr/>
         </p:nvSpPr>
@@ -6201,7 +6267,7 @@
       </p:sp>
       <p:sp>
         <p:nvSpPr>
-          <p:cNvPr id="77" name="TextBox 76"/>
+          <p:cNvPr id="79" name="TextBox 78"/>
           <p:cNvSpPr txBox="1"/>
           <p:nvPr/>
         </p:nvSpPr>
@@ -6243,7 +6309,7 @@
       </p:sp>
       <p:sp>
         <p:nvSpPr>
-          <p:cNvPr id="78" name="TextBox 77"/>
+          <p:cNvPr id="80" name="TextBox 79"/>
           <p:cNvSpPr txBox="1"/>
           <p:nvPr/>
         </p:nvSpPr>
@@ -6285,7 +6351,7 @@
       </p:sp>
       <p:sp>
         <p:nvSpPr>
-          <p:cNvPr id="79" name="TextBox 78"/>
+          <p:cNvPr id="81" name="TextBox 80"/>
           <p:cNvSpPr txBox="1"/>
           <p:nvPr/>
         </p:nvSpPr>
@@ -6327,7 +6393,7 @@
       </p:sp>
       <p:sp>
         <p:nvSpPr>
-          <p:cNvPr id="80" name="TextBox 79"/>
+          <p:cNvPr id="82" name="TextBox 81"/>
           <p:cNvSpPr txBox="1"/>
           <p:nvPr/>
         </p:nvSpPr>
@@ -6369,7 +6435,7 @@
       </p:sp>
       <p:sp>
         <p:nvSpPr>
-          <p:cNvPr id="81" name="TextBox 80"/>
+          <p:cNvPr id="83" name="TextBox 82"/>
           <p:cNvSpPr txBox="1"/>
           <p:nvPr/>
         </p:nvSpPr>
@@ -6411,7 +6477,7 @@
       </p:sp>
       <p:sp>
         <p:nvSpPr>
-          <p:cNvPr id="82" name="TextBox 81"/>
+          <p:cNvPr id="84" name="TextBox 83"/>
           <p:cNvSpPr txBox="1"/>
           <p:nvPr/>
         </p:nvSpPr>
@@ -6453,7 +6519,7 @@
       </p:sp>
       <p:sp>
         <p:nvSpPr>
-          <p:cNvPr id="83" name="TextBox 82"/>
+          <p:cNvPr id="85" name="TextBox 84"/>
           <p:cNvSpPr txBox="1"/>
           <p:nvPr/>
         </p:nvSpPr>
@@ -6495,7 +6561,7 @@
       </p:sp>
       <p:sp>
         <p:nvSpPr>
-          <p:cNvPr id="84" name="TextBox 83"/>
+          <p:cNvPr id="86" name="TextBox 85"/>
           <p:cNvSpPr txBox="1"/>
           <p:nvPr/>
         </p:nvSpPr>
@@ -6537,7 +6603,7 @@
       </p:sp>
       <p:sp>
         <p:nvSpPr>
-          <p:cNvPr id="85" name="Rectangle 84"/>
+          <p:cNvPr id="87" name="Rectangle 86"/>
           <p:cNvSpPr/>
           <p:nvPr/>
         </p:nvSpPr>
@@ -6581,7 +6647,7 @@
       </p:sp>
       <p:sp>
         <p:nvSpPr>
-          <p:cNvPr id="86" name="TextBox 85"/>
+          <p:cNvPr id="88" name="TextBox 87"/>
           <p:cNvSpPr txBox="1"/>
           <p:nvPr/>
         </p:nvSpPr>
@@ -6623,7 +6689,7 @@
       </p:sp>
       <p:sp>
         <p:nvSpPr>
-          <p:cNvPr id="87" name="TextBox 86"/>
+          <p:cNvPr id="89" name="TextBox 88"/>
           <p:cNvSpPr txBox="1"/>
           <p:nvPr/>
         </p:nvSpPr>
@@ -6665,14 +6731,14 @@
       </p:sp>
       <p:pic>
         <p:nvPicPr>
-          <p:cNvPr id="88" name="Picture 87" descr="e_supervision.png"/>
+          <p:cNvPr id="90" name="Picture 89" descr="e_supervision.png"/>
           <p:cNvPicPr>
             <a:picLocks noChangeAspect="1"/>
           </p:cNvPicPr>
           <p:nvPr/>
         </p:nvPicPr>
         <p:blipFill>
-          <a:blip r:embed="rId8"/>
+          <a:blip r:embed="rId9"/>
           <a:stretch>
             <a:fillRect/>
           </a:stretch>
@@ -6689,7 +6755,7 @@
       </p:pic>
       <p:sp>
         <p:nvSpPr>
-          <p:cNvPr id="89" name="TextBox 88"/>
+          <p:cNvPr id="91" name="TextBox 90"/>
           <p:cNvSpPr txBox="1"/>
           <p:nvPr/>
         </p:nvSpPr>
@@ -6724,14 +6790,14 @@
                 </a:solidFill>
                 <a:latin typeface="Arial"/>
               </a:rPr>
-              <a:t>Figure 7.  Every arm on one frozen corpus of real incidents from this project's own history -- 116 incidents and 33 controls -- scored by the project's own scorer: a detection counts only when the arm returns an issue verdict carrying a finding at or above a severity bar, and a case that produced no answer leaves the denominator rather than counting as a miss. Up and to the left is better. Open circle: the model reads raw artifact excerpts. Filled: the same model with a retrieval round over the same artifacts. The retrieval tier is worth +0.149 recall to the 27B and +0.012 to the 14B, so tiering pays where the model can use it and not otherwise.</a:t>
-            </a:r>
-          </a:p>
-        </p:txBody>
-      </p:sp>
-      <p:sp>
-        <p:nvSpPr>
-          <p:cNvPr id="90" name="TextBox 89"/>
+              <a:t>Figure 8.  Every arm on one frozen corpus of real incidents from this project's own history -- 116 incidents and 33 controls -- scored by the project's own scorer: a detection counts only when the arm returns an issue verdict carrying a finding at or above a severity bar, and a case that produced no answer leaves the denominator rather than counting as a miss. Up and to the left is better. Open circle: the model reads raw artifact excerpts. Filled: the same model with a retrieval round over the same artifacts. The retrieval tier is worth +0.149 recall to the 27B and +0.012 to the 14B, so tiering pays where the model can use it and not otherwise.</a:t>
+            </a:r>
+          </a:p>
+        </p:txBody>
+      </p:sp>
+      <p:sp>
+        <p:nvSpPr>
+          <p:cNvPr id="92" name="TextBox 91"/>
           <p:cNvSpPr txBox="1"/>
           <p:nvPr/>
         </p:nvSpPr>
@@ -6773,7 +6839,7 @@
       </p:sp>
       <p:sp>
         <p:nvSpPr>
-          <p:cNvPr id="91" name="Rectangle 90"/>
+          <p:cNvPr id="93" name="Rectangle 92"/>
           <p:cNvSpPr/>
           <p:nvPr/>
         </p:nvSpPr>
@@ -6817,7 +6883,7 @@
       </p:sp>
       <p:sp>
         <p:nvSpPr>
-          <p:cNvPr id="92" name="TextBox 91"/>
+          <p:cNvPr id="94" name="TextBox 93"/>
           <p:cNvSpPr txBox="1"/>
           <p:nvPr/>
         </p:nvSpPr>
@@ -6859,7 +6925,7 @@
       </p:sp>
       <p:sp>
         <p:nvSpPr>
-          <p:cNvPr id="93" name="TextBox 92"/>
+          <p:cNvPr id="95" name="TextBox 94"/>
           <p:cNvSpPr txBox="1"/>
           <p:nvPr/>
         </p:nvSpPr>
@@ -6901,7 +6967,7 @@
       </p:sp>
       <p:sp>
         <p:nvSpPr>
-          <p:cNvPr id="94" name="TextBox 93"/>
+          <p:cNvPr id="96" name="TextBox 95"/>
           <p:cNvSpPr txBox="1"/>
           <p:nvPr/>
         </p:nvSpPr>
@@ -6943,7 +7009,7 @@
       </p:sp>
       <p:sp>
         <p:nvSpPr>
-          <p:cNvPr id="95" name="TextBox 94"/>
+          <p:cNvPr id="97" name="TextBox 96"/>
           <p:cNvSpPr txBox="1"/>
           <p:nvPr/>
         </p:nvSpPr>
@@ -6985,7 +7051,7 @@
       </p:sp>
       <p:sp>
         <p:nvSpPr>
-          <p:cNvPr id="96" name="TextBox 95"/>
+          <p:cNvPr id="98" name="TextBox 97"/>
           <p:cNvSpPr txBox="1"/>
           <p:nvPr/>
         </p:nvSpPr>
@@ -7027,7 +7093,7 @@
       </p:sp>
       <p:sp>
         <p:nvSpPr>
-          <p:cNvPr id="97" name="TextBox 96"/>
+          <p:cNvPr id="99" name="TextBox 98"/>
           <p:cNvSpPr txBox="1"/>
           <p:nvPr/>
         </p:nvSpPr>
@@ -7069,7 +7135,7 @@
       </p:sp>
       <p:sp>
         <p:nvSpPr>
-          <p:cNvPr id="98" name="Rectangle 97"/>
+          <p:cNvPr id="100" name="Rectangle 99"/>
           <p:cNvSpPr/>
           <p:nvPr/>
         </p:nvSpPr>
@@ -7113,7 +7179,7 @@
       </p:sp>
       <p:sp>
         <p:nvSpPr>
-          <p:cNvPr id="99" name="TextBox 98"/>
+          <p:cNvPr id="101" name="TextBox 100"/>
           <p:cNvSpPr txBox="1"/>
           <p:nvPr/>
         </p:nvSpPr>
@@ -7155,7 +7221,7 @@
       </p:sp>
       <p:sp>
         <p:nvSpPr>
-          <p:cNvPr id="100" name="TextBox 99"/>
+          <p:cNvPr id="102" name="TextBox 101"/>
           <p:cNvSpPr txBox="1"/>
           <p:nvPr/>
         </p:nvSpPr>
@@ -7197,7 +7263,7 @@
       </p:sp>
       <p:sp>
         <p:nvSpPr>
-          <p:cNvPr id="101" name="TextBox 100"/>
+          <p:cNvPr id="103" name="TextBox 102"/>
           <p:cNvSpPr txBox="1"/>
           <p:nvPr/>
         </p:nvSpPr>
@@ -7239,7 +7305,7 @@
       </p:sp>
       <p:sp>
         <p:nvSpPr>
-          <p:cNvPr id="102" name="TextBox 101"/>
+          <p:cNvPr id="104" name="TextBox 103"/>
           <p:cNvSpPr txBox="1"/>
           <p:nvPr/>
         </p:nvSpPr>
@@ -7281,7 +7347,7 @@
       </p:sp>
       <p:sp>
         <p:nvSpPr>
-          <p:cNvPr id="103" name="TextBox 102"/>
+          <p:cNvPr id="105" name="TextBox 104"/>
           <p:cNvSpPr txBox="1"/>
           <p:nvPr/>
         </p:nvSpPr>
@@ -7323,7 +7389,7 @@
       </p:sp>
       <p:sp>
         <p:nvSpPr>
-          <p:cNvPr id="104" name="TextBox 103"/>
+          <p:cNvPr id="106" name="TextBox 105"/>
           <p:cNvSpPr txBox="1"/>
           <p:nvPr/>
         </p:nvSpPr>
@@ -7365,7 +7431,7 @@
       </p:sp>
       <p:sp>
         <p:nvSpPr>
-          <p:cNvPr id="105" name="TextBox 104"/>
+          <p:cNvPr id="107" name="TextBox 106"/>
           <p:cNvSpPr txBox="1"/>
           <p:nvPr/>
         </p:nvSpPr>
@@ -7407,7 +7473,7 @@
       </p:sp>
       <p:sp>
         <p:nvSpPr>
-          <p:cNvPr id="106" name="TextBox 105"/>
+          <p:cNvPr id="108" name="TextBox 107"/>
           <p:cNvSpPr txBox="1"/>
           <p:nvPr/>
         </p:nvSpPr>
@@ -7449,7 +7515,7 @@
       </p:sp>
       <p:sp>
         <p:nvSpPr>
-          <p:cNvPr id="107" name="TextBox 106"/>
+          <p:cNvPr id="109" name="TextBox 108"/>
           <p:cNvSpPr txBox="1"/>
           <p:nvPr/>
         </p:nvSpPr>
@@ -7491,7 +7557,7 @@
       </p:sp>
       <p:sp>
         <p:nvSpPr>
-          <p:cNvPr id="108" name="TextBox 107"/>
+          <p:cNvPr id="110" name="TextBox 109"/>
           <p:cNvSpPr txBox="1"/>
           <p:nvPr/>
         </p:nvSpPr>
@@ -7533,7 +7599,7 @@
       </p:sp>
       <p:sp>
         <p:nvSpPr>
-          <p:cNvPr id="109" name="TextBox 108"/>
+          <p:cNvPr id="111" name="TextBox 110"/>
           <p:cNvSpPr txBox="1"/>
           <p:nvPr/>
         </p:nvSpPr>
@@ -7575,7 +7641,7 @@
       </p:sp>
       <p:sp>
         <p:nvSpPr>
-          <p:cNvPr id="110" name="TextBox 109"/>
+          <p:cNvPr id="112" name="TextBox 111"/>
           <p:cNvSpPr txBox="1"/>
           <p:nvPr/>
         </p:nvSpPr>
@@ -7617,7 +7683,7 @@
       </p:sp>
       <p:sp>
         <p:nvSpPr>
-          <p:cNvPr id="111" name="TextBox 110"/>
+          <p:cNvPr id="113" name="TextBox 112"/>
           <p:cNvSpPr txBox="1"/>
           <p:nvPr/>
         </p:nvSpPr>
@@ -7659,7 +7725,7 @@
       </p:sp>
       <p:sp>
         <p:nvSpPr>
-          <p:cNvPr id="112" name="TextBox 111"/>
+          <p:cNvPr id="114" name="TextBox 113"/>
           <p:cNvSpPr txBox="1"/>
           <p:nvPr/>
         </p:nvSpPr>
@@ -7701,7 +7767,7 @@
       </p:sp>
       <p:sp>
         <p:nvSpPr>
-          <p:cNvPr id="113" name="TextBox 112"/>
+          <p:cNvPr id="115" name="TextBox 114"/>
           <p:cNvSpPr txBox="1"/>
           <p:nvPr/>
         </p:nvSpPr>
@@ -7743,7 +7809,7 @@
       </p:sp>
       <p:sp>
         <p:nvSpPr>
-          <p:cNvPr id="114" name="TextBox 113"/>
+          <p:cNvPr id="116" name="TextBox 115"/>
           <p:cNvSpPr txBox="1"/>
           <p:nvPr/>
         </p:nvSpPr>
@@ -7785,7 +7851,7 @@
       </p:sp>
       <p:sp>
         <p:nvSpPr>
-          <p:cNvPr id="115" name="TextBox 114"/>
+          <p:cNvPr id="117" name="TextBox 116"/>
           <p:cNvSpPr txBox="1"/>
           <p:nvPr/>
         </p:nvSpPr>
@@ -7827,7 +7893,7 @@
       </p:sp>
       <p:sp>
         <p:nvSpPr>
-          <p:cNvPr id="116" name="TextBox 115"/>
+          <p:cNvPr id="118" name="TextBox 117"/>
           <p:cNvSpPr txBox="1"/>
           <p:nvPr/>
         </p:nvSpPr>
@@ -7869,7 +7935,7 @@
       </p:sp>
       <p:sp>
         <p:nvSpPr>
-          <p:cNvPr id="117" name="TextBox 116"/>
+          <p:cNvPr id="119" name="TextBox 118"/>
           <p:cNvSpPr txBox="1"/>
           <p:nvPr/>
         </p:nvSpPr>
@@ -7911,7 +7977,7 @@
       </p:sp>
       <p:sp>
         <p:nvSpPr>
-          <p:cNvPr id="118" name="TextBox 117"/>
+          <p:cNvPr id="120" name="TextBox 119"/>
           <p:cNvSpPr txBox="1"/>
           <p:nvPr/>
         </p:nvSpPr>
@@ -7953,7 +8019,7 @@
       </p:sp>
       <p:sp>
         <p:nvSpPr>
-          <p:cNvPr id="119" name="TextBox 118"/>
+          <p:cNvPr id="121" name="TextBox 120"/>
           <p:cNvSpPr txBox="1"/>
           <p:nvPr/>
         </p:nvSpPr>
@@ -7995,7 +8061,7 @@
       </p:sp>
       <p:sp>
         <p:nvSpPr>
-          <p:cNvPr id="120" name="TextBox 119"/>
+          <p:cNvPr id="122" name="TextBox 121"/>
           <p:cNvSpPr txBox="1"/>
           <p:nvPr/>
         </p:nvSpPr>
@@ -8037,7 +8103,7 @@
       </p:sp>
       <p:sp>
         <p:nvSpPr>
-          <p:cNvPr id="121" name="TextBox 120"/>
+          <p:cNvPr id="123" name="TextBox 122"/>
           <p:cNvSpPr txBox="1"/>
           <p:nvPr/>
         </p:nvSpPr>
@@ -8079,7 +8145,7 @@
       </p:sp>
       <p:sp>
         <p:nvSpPr>
-          <p:cNvPr id="122" name="TextBox 121"/>
+          <p:cNvPr id="124" name="TextBox 123"/>
           <p:cNvSpPr txBox="1"/>
           <p:nvPr/>
         </p:nvSpPr>
@@ -8121,7 +8187,7 @@
       </p:sp>
       <p:sp>
         <p:nvSpPr>
-          <p:cNvPr id="123" name="TextBox 122"/>
+          <p:cNvPr id="125" name="TextBox 124"/>
           <p:cNvSpPr txBox="1"/>
           <p:nvPr/>
         </p:nvSpPr>
@@ -8163,7 +8229,7 @@
       </p:sp>
       <p:sp>
         <p:nvSpPr>
-          <p:cNvPr id="124" name="TextBox 123"/>
+          <p:cNvPr id="126" name="TextBox 125"/>
           <p:cNvSpPr txBox="1"/>
           <p:nvPr/>
         </p:nvSpPr>
@@ -8205,7 +8271,7 @@
       </p:sp>
       <p:sp>
         <p:nvSpPr>
-          <p:cNvPr id="125" name="TextBox 124"/>
+          <p:cNvPr id="127" name="TextBox 126"/>
           <p:cNvSpPr txBox="1"/>
           <p:nvPr/>
         </p:nvSpPr>
@@ -8247,7 +8313,7 @@
       </p:sp>
       <p:sp>
         <p:nvSpPr>
-          <p:cNvPr id="126" name="TextBox 125"/>
+          <p:cNvPr id="128" name="TextBox 127"/>
           <p:cNvSpPr txBox="1"/>
           <p:nvPr/>
         </p:nvSpPr>
@@ -8289,7 +8355,7 @@
       </p:sp>
       <p:sp>
         <p:nvSpPr>
-          <p:cNvPr id="127" name="TextBox 126"/>
+          <p:cNvPr id="129" name="TextBox 128"/>
           <p:cNvSpPr txBox="1"/>
           <p:nvPr/>
         </p:nvSpPr>
@@ -8331,7 +8397,7 @@
       </p:sp>
       <p:sp>
         <p:nvSpPr>
-          <p:cNvPr id="128" name="TextBox 127"/>
+          <p:cNvPr id="130" name="TextBox 129"/>
           <p:cNvSpPr txBox="1"/>
           <p:nvPr/>
         </p:nvSpPr>
@@ -8373,7 +8439,7 @@
       </p:sp>
       <p:sp>
         <p:nvSpPr>
-          <p:cNvPr id="129" name="TextBox 128"/>
+          <p:cNvPr id="131" name="TextBox 130"/>
           <p:cNvSpPr txBox="1"/>
           <p:nvPr/>
         </p:nvSpPr>
@@ -8415,7 +8481,7 @@
       </p:sp>
       <p:sp>
         <p:nvSpPr>
-          <p:cNvPr id="130" name="TextBox 129"/>
+          <p:cNvPr id="132" name="TextBox 131"/>
           <p:cNvSpPr txBox="1"/>
           <p:nvPr/>
         </p:nvSpPr>
@@ -8457,7 +8523,7 @@
       </p:sp>
       <p:sp>
         <p:nvSpPr>
-          <p:cNvPr id="131" name="TextBox 130"/>
+          <p:cNvPr id="133" name="TextBox 132"/>
           <p:cNvSpPr txBox="1"/>
           <p:nvPr/>
         </p:nvSpPr>
@@ -8499,7 +8565,7 @@
       </p:sp>
       <p:sp>
         <p:nvSpPr>
-          <p:cNvPr id="132" name="TextBox 131"/>
+          <p:cNvPr id="134" name="TextBox 133"/>
           <p:cNvSpPr txBox="1"/>
           <p:nvPr/>
         </p:nvSpPr>
@@ -8541,7 +8607,7 @@
       </p:sp>
       <p:sp>
         <p:nvSpPr>
-          <p:cNvPr id="133" name="TextBox 132"/>
+          <p:cNvPr id="135" name="TextBox 134"/>
           <p:cNvSpPr txBox="1"/>
           <p:nvPr/>
         </p:nvSpPr>
@@ -8583,7 +8649,7 @@
       </p:sp>
       <p:sp>
         <p:nvSpPr>
-          <p:cNvPr id="134" name="TextBox 133"/>
+          <p:cNvPr id="136" name="TextBox 135"/>
           <p:cNvSpPr txBox="1"/>
           <p:nvPr/>
         </p:nvSpPr>
@@ -8625,7 +8691,7 @@
       </p:sp>
       <p:sp>
         <p:nvSpPr>
-          <p:cNvPr id="135" name="TextBox 134"/>
+          <p:cNvPr id="137" name="TextBox 136"/>
           <p:cNvSpPr txBox="1"/>
           <p:nvPr/>
         </p:nvSpPr>
@@ -8667,7 +8733,7 @@
       </p:sp>
       <p:sp>
         <p:nvSpPr>
-          <p:cNvPr id="136" name="TextBox 135"/>
+          <p:cNvPr id="138" name="TextBox 137"/>
           <p:cNvSpPr txBox="1"/>
           <p:nvPr/>
         </p:nvSpPr>
@@ -8709,7 +8775,7 @@
       </p:sp>
       <p:sp>
         <p:nvSpPr>
-          <p:cNvPr id="137" name="TextBox 136"/>
+          <p:cNvPr id="139" name="TextBox 138"/>
           <p:cNvSpPr txBox="1"/>
           <p:nvPr/>
         </p:nvSpPr>
@@ -8751,7 +8817,7 @@
       </p:sp>
       <p:sp>
         <p:nvSpPr>
-          <p:cNvPr id="138" name="TextBox 137"/>
+          <p:cNvPr id="140" name="TextBox 139"/>
           <p:cNvSpPr txBox="1"/>
           <p:nvPr/>
         </p:nvSpPr>
@@ -8793,7 +8859,7 @@
       </p:sp>
       <p:sp>
         <p:nvSpPr>
-          <p:cNvPr id="139" name="TextBox 138"/>
+          <p:cNvPr id="141" name="TextBox 140"/>
           <p:cNvSpPr txBox="1"/>
           <p:nvPr/>
         </p:nvSpPr>
@@ -8835,7 +8901,7 @@
       </p:sp>
       <p:sp>
         <p:nvSpPr>
-          <p:cNvPr id="140" name="TextBox 139"/>
+          <p:cNvPr id="142" name="TextBox 141"/>
           <p:cNvSpPr txBox="1"/>
           <p:nvPr/>
         </p:nvSpPr>
@@ -8877,7 +8943,7 @@
       </p:sp>
       <p:sp>
         <p:nvSpPr>
-          <p:cNvPr id="141" name="Rectangle 140"/>
+          <p:cNvPr id="143" name="Rectangle 142"/>
           <p:cNvSpPr/>
           <p:nvPr/>
         </p:nvSpPr>
@@ -8921,7 +8987,7 @@
       </p:sp>
       <p:sp>
         <p:nvSpPr>
-          <p:cNvPr id="142" name="TextBox 141"/>
+          <p:cNvPr id="144" name="TextBox 143"/>
           <p:cNvSpPr txBox="1"/>
           <p:nvPr/>
         </p:nvSpPr>
@@ -8963,7 +9029,7 @@
       </p:sp>
       <p:sp>
         <p:nvSpPr>
-          <p:cNvPr id="143" name="TextBox 142"/>
+          <p:cNvPr id="145" name="TextBox 144"/>
           <p:cNvSpPr txBox="1"/>
           <p:nvPr/>
         </p:nvSpPr>
@@ -9005,115 +9071,7 @@
       </p:sp>
       <p:pic>
         <p:nvPicPr>
-          <p:cNvPr id="144" name="Picture 143" descr="r_tta.png"/>
-          <p:cNvPicPr>
-            <a:picLocks noChangeAspect="1"/>
-          </p:cNvPicPr>
-          <p:nvPr/>
-        </p:nvPicPr>
-        <p:blipFill>
-          <a:blip r:embed="rId9"/>
-          <a:stretch>
-            <a:fillRect/>
-          </a:stretch>
-        </p:blipFill>
-        <p:spPr>
-          <a:xfrm>
-            <a:off x="22197060" y="23402656"/>
-            <a:ext cx="9989819" cy="3405620"/>
-          </a:xfrm>
-          <a:prstGeom prst="rect">
-            <a:avLst/>
-          </a:prstGeom>
-        </p:spPr>
-      </p:pic>
-      <p:sp>
-        <p:nvSpPr>
-          <p:cNvPr id="145" name="TextBox 144"/>
-          <p:cNvSpPr txBox="1"/>
-          <p:nvPr/>
-        </p:nvSpPr>
-        <p:spPr>
-          <a:xfrm>
-            <a:off x="22197060" y="26899716"/>
-            <a:ext cx="9989819" cy="365760"/>
-          </a:xfrm>
-          <a:prstGeom prst="rect">
-            <a:avLst/>
-          </a:prstGeom>
-          <a:noFill/>
-        </p:spPr>
-        <p:txBody>
-          <a:bodyPr wrap="square" lIns="0" rIns="0" tIns="0" bIns="0">
-            <a:spAutoFit/>
-          </a:bodyPr>
-          <a:lstStyle/>
-          <a:p>
-            <a:pPr algn="l">
-              <a:lnSpc>
-                <a:spcPct val="120000"/>
-              </a:lnSpc>
-              <a:spcAft>
-                <a:spcPts val="0"/>
-              </a:spcAft>
-            </a:pPr>
-            <a:r>
-              <a:rPr sz="1200" b="0">
-                <a:solidFill>
-                  <a:srgbClr val="556575"/>
-                </a:solidFill>
-                <a:latin typeface="Arial"/>
-              </a:rPr>
-              <a:t>Figure 8.  Test-time compute on the deployable checkpoint. Fusion with no extra views is nothing; multi-scale with h-flip and a 3-seed ensemble are each worth about +0.017 and stack to +0.028. At 2.44 s per image against the deployed 3.7 ms this is a ceiling on what inference-time compute can buy, not a deployment option -- and it is still smaller than the +0.0714 that initialisation is worth.</a:t>
-            </a:r>
-          </a:p>
-        </p:txBody>
-      </p:sp>
-      <p:sp>
-        <p:nvSpPr>
-          <p:cNvPr id="146" name="TextBox 145"/>
-          <p:cNvSpPr txBox="1"/>
-          <p:nvPr/>
-        </p:nvSpPr>
-        <p:spPr>
-          <a:xfrm>
-            <a:off x="11704320" y="27996996"/>
-            <a:ext cx="20482560" cy="365760"/>
-          </a:xfrm>
-          <a:prstGeom prst="rect">
-            <a:avLst/>
-          </a:prstGeom>
-          <a:noFill/>
-        </p:spPr>
-        <p:txBody>
-          <a:bodyPr wrap="square" lIns="0" rIns="0" tIns="0" bIns="0">
-            <a:spAutoFit/>
-          </a:bodyPr>
-          <a:lstStyle/>
-          <a:p>
-            <a:pPr algn="l">
-              <a:lnSpc>
-                <a:spcPct val="100000"/>
-              </a:lnSpc>
-              <a:spcAft>
-                <a:spcPts val="0"/>
-              </a:spcAft>
-            </a:pPr>
-            <a:r>
-              <a:rPr sz="1800" b="1">
-                <a:solidFill>
-                  <a:srgbClr val="1E293B"/>
-                </a:solidFill>
-                <a:latin typeface="Arial"/>
-              </a:rPr>
-              <a:t>Why the loop looked like it was learning</a:t>
-            </a:r>
-          </a:p>
-        </p:txBody>
-      </p:sp>
-      <p:pic>
-        <p:nvPicPr>
-          <p:cNvPr id="147" name="Picture 146" descr="f_rounds.png"/>
+          <p:cNvPr id="146" name="Picture 145" descr="r_tta.png"/>
           <p:cNvPicPr>
             <a:picLocks noChangeAspect="1"/>
           </p:cNvPicPr>
@@ -9127,7 +9085,115 @@
         </p:blipFill>
         <p:spPr>
           <a:xfrm>
-            <a:off x="11704320" y="28307892"/>
+            <a:off x="22197060" y="23402656"/>
+            <a:ext cx="9989819" cy="3348860"/>
+          </a:xfrm>
+          <a:prstGeom prst="rect">
+            <a:avLst/>
+          </a:prstGeom>
+        </p:spPr>
+      </p:pic>
+      <p:sp>
+        <p:nvSpPr>
+          <p:cNvPr id="147" name="TextBox 146"/>
+          <p:cNvSpPr txBox="1"/>
+          <p:nvPr/>
+        </p:nvSpPr>
+        <p:spPr>
+          <a:xfrm>
+            <a:off x="22197060" y="26842956"/>
+            <a:ext cx="9989819" cy="365760"/>
+          </a:xfrm>
+          <a:prstGeom prst="rect">
+            <a:avLst/>
+          </a:prstGeom>
+          <a:noFill/>
+        </p:spPr>
+        <p:txBody>
+          <a:bodyPr wrap="square" lIns="0" rIns="0" tIns="0" bIns="0">
+            <a:spAutoFit/>
+          </a:bodyPr>
+          <a:lstStyle/>
+          <a:p>
+            <a:pPr algn="l">
+              <a:lnSpc>
+                <a:spcPct val="120000"/>
+              </a:lnSpc>
+              <a:spcAft>
+                <a:spcPts val="0"/>
+              </a:spcAft>
+            </a:pPr>
+            <a:r>
+              <a:rPr sz="1200" b="0">
+                <a:solidFill>
+                  <a:srgbClr val="556575"/>
+                </a:solidFill>
+                <a:latin typeface="Arial"/>
+              </a:rPr>
+              <a:t>Figure 9.  Test-time compute on the deployable checkpoint. Fusion with no extra views is nothing; multi-scale with h-flip and a 3-seed ensemble are each worth about +0.017 and stack to +0.028. At 2.44 s per image against the deployed 3.7 ms this is a ceiling on what inference-time compute can buy, not a deployment option -- and it is still smaller than the +0.0714 that initialisation is worth.</a:t>
+            </a:r>
+          </a:p>
+        </p:txBody>
+      </p:sp>
+      <p:sp>
+        <p:nvSpPr>
+          <p:cNvPr id="148" name="TextBox 147"/>
+          <p:cNvSpPr txBox="1"/>
+          <p:nvPr/>
+        </p:nvSpPr>
+        <p:spPr>
+          <a:xfrm>
+            <a:off x="11704320" y="27940236"/>
+            <a:ext cx="20482560" cy="365760"/>
+          </a:xfrm>
+          <a:prstGeom prst="rect">
+            <a:avLst/>
+          </a:prstGeom>
+          <a:noFill/>
+        </p:spPr>
+        <p:txBody>
+          <a:bodyPr wrap="square" lIns="0" rIns="0" tIns="0" bIns="0">
+            <a:spAutoFit/>
+          </a:bodyPr>
+          <a:lstStyle/>
+          <a:p>
+            <a:pPr algn="l">
+              <a:lnSpc>
+                <a:spcPct val="100000"/>
+              </a:lnSpc>
+              <a:spcAft>
+                <a:spcPts val="0"/>
+              </a:spcAft>
+            </a:pPr>
+            <a:r>
+              <a:rPr sz="1800" b="1">
+                <a:solidFill>
+                  <a:srgbClr val="1E293B"/>
+                </a:solidFill>
+                <a:latin typeface="Arial"/>
+              </a:rPr>
+              <a:t>Why the loop looked like it was learning</a:t>
+            </a:r>
+          </a:p>
+        </p:txBody>
+      </p:sp>
+      <p:pic>
+        <p:nvPicPr>
+          <p:cNvPr id="149" name="Picture 148" descr="f_rounds.png"/>
+          <p:cNvPicPr>
+            <a:picLocks noChangeAspect="1"/>
+          </p:cNvPicPr>
+          <p:nvPr/>
+        </p:nvPicPr>
+        <p:blipFill>
+          <a:blip r:embed="rId11"/>
+          <a:stretch>
+            <a:fillRect/>
+          </a:stretch>
+        </p:blipFill>
+        <p:spPr>
+          <a:xfrm>
+            <a:off x="11704320" y="28251132"/>
             <a:ext cx="20482560" cy="3749135"/>
           </a:xfrm>
           <a:prstGeom prst="rect">
@@ -9137,13 +9203,13 @@
       </p:pic>
       <p:sp>
         <p:nvSpPr>
-          <p:cNvPr id="148" name="TextBox 147"/>
-          <p:cNvSpPr txBox="1"/>
-          <p:nvPr/>
-        </p:nvSpPr>
-        <p:spPr>
-          <a:xfrm>
-            <a:off x="11704320" y="32148467"/>
+          <p:cNvPr id="150" name="TextBox 149"/>
+          <p:cNvSpPr txBox="1"/>
+          <p:nvPr/>
+        </p:nvSpPr>
+        <p:spPr>
+          <a:xfrm>
+            <a:off x="11704320" y="32091707"/>
             <a:ext cx="20482560" cy="365760"/>
           </a:xfrm>
           <a:prstGeom prst="rect">
@@ -9172,14 +9238,14 @@
                 </a:solidFill>
                 <a:latin typeface="Arial"/>
               </a:rPr>
-              <a:t>Figure 9.  (f) Fifteen unattended rounds on a fixed holdout. (g) Round 15's exact dataset, three ways. Bars 1 and 2 differ only in the starting weights, so their gap is the warm-start chain; bar 3 is the recipe the campaign ran, whose wall-clock cap truncates the cosine. Sigma throughout is that recipe's own seed spread, 0.0040 over three seeds, propagated to the difference being quoted. Completing the schedule is not the fix -- bar 2 sits below bar 3.</a:t>
-            </a:r>
-          </a:p>
-        </p:txBody>
-      </p:sp>
-      <p:sp>
-        <p:nvSpPr>
-          <p:cNvPr id="149" name="TextBox 148"/>
+              <a:t>Figure 10.  (f) Fifteen unattended rounds on a fixed holdout. (g) Round 15's exact dataset, three ways. Bars 1 and 2 differ only in the starting weights, so their gap is the warm-start chain; bar 3 is the recipe the campaign ran, whose wall-clock cap truncates the cosine. Sigma throughout is that recipe's own seed spread, 0.0040 over three seeds, propagated to the difference being quoted. Completing the schedule is not the fix -- bar 2 sits below bar 3.</a:t>
+            </a:r>
+          </a:p>
+        </p:txBody>
+      </p:sp>
+      <p:sp>
+        <p:nvSpPr>
+          <p:cNvPr id="151" name="TextBox 150"/>
           <p:cNvSpPr txBox="1"/>
           <p:nvPr/>
         </p:nvSpPr>
@@ -9221,7 +9287,7 @@
       </p:sp>
       <p:sp>
         <p:nvSpPr>
-          <p:cNvPr id="150" name="Rectangle 149"/>
+          <p:cNvPr id="152" name="Rectangle 151"/>
           <p:cNvSpPr/>
           <p:nvPr/>
         </p:nvSpPr>
@@ -9265,73 +9331,7 @@
       </p:sp>
       <p:pic>
         <p:nvPicPr>
-          <p:cNvPr id="151" name="Picture 150" descr="d_wall.png"/>
-          <p:cNvPicPr>
-            <a:picLocks noChangeAspect="1"/>
-          </p:cNvPicPr>
-          <p:nvPr/>
-        </p:nvPicPr>
-        <p:blipFill>
-          <a:blip r:embed="rId11"/>
-          <a:stretch>
-            <a:fillRect/>
-          </a:stretch>
-        </p:blipFill>
-        <p:spPr>
-          <a:xfrm>
-            <a:off x="32552640" y="5577840"/>
-            <a:ext cx="10607040" cy="6362678"/>
-          </a:xfrm>
-          <a:prstGeom prst="rect">
-            <a:avLst/>
-          </a:prstGeom>
-        </p:spPr>
-      </p:pic>
-      <p:sp>
-        <p:nvSpPr>
-          <p:cNvPr id="152" name="TextBox 151"/>
-          <p:cNvSpPr txBox="1"/>
-          <p:nvPr/>
-        </p:nvSpPr>
-        <p:spPr>
-          <a:xfrm>
-            <a:off x="32552640" y="12031958"/>
-            <a:ext cx="10607040" cy="365760"/>
-          </a:xfrm>
-          <a:prstGeom prst="rect">
-            <a:avLst/>
-          </a:prstGeom>
-          <a:noFill/>
-        </p:spPr>
-        <p:txBody>
-          <a:bodyPr wrap="square" lIns="0" rIns="0" tIns="0" bIns="0">
-            <a:spAutoFit/>
-          </a:bodyPr>
-          <a:lstStyle/>
-          <a:p>
-            <a:pPr algn="l">
-              <a:lnSpc>
-                <a:spcPct val="120000"/>
-              </a:lnSpc>
-              <a:spcAft>
-                <a:spcPts val="0"/>
-              </a:spcAft>
-            </a:pPr>
-            <a:r>
-              <a:rPr sz="1200" b="0">
-                <a:solidFill>
-                  <a:srgbClr val="556575"/>
-                </a:solidFill>
-                <a:latin typeface="Arial"/>
-              </a:rPr>
-              <a:t>Figure 10.  The same three checkpoints and the same matcher on both sides, so the evaluator offset cancels. A detector trained on one field does not transfer to another.</a:t>
-            </a:r>
-          </a:p>
-        </p:txBody>
-      </p:sp>
-      <p:pic>
-        <p:nvPicPr>
-          <p:cNvPr id="153" name="Picture 152" descr="p_field.png"/>
+          <p:cNvPr id="153" name="Picture 152" descr="d_wall.png"/>
           <p:cNvPicPr>
             <a:picLocks noChangeAspect="1"/>
           </p:cNvPicPr>
@@ -9345,8 +9345,8 @@
         </p:blipFill>
         <p:spPr>
           <a:xfrm>
-            <a:off x="32552640" y="12672038"/>
-            <a:ext cx="10607040" cy="5360041"/>
+            <a:off x="32552640" y="5577840"/>
+            <a:ext cx="10607040" cy="6362678"/>
           </a:xfrm>
           <a:prstGeom prst="rect">
             <a:avLst/>
@@ -9361,7 +9361,7 @@
         </p:nvSpPr>
         <p:spPr>
           <a:xfrm>
-            <a:off x="32552640" y="18123519"/>
+            <a:off x="32552640" y="12031958"/>
             <a:ext cx="10607040" cy="365760"/>
           </a:xfrm>
           <a:prstGeom prst="rect">
@@ -9390,14 +9390,14 @@
                 </a:solidFill>
                 <a:latin typeface="Arial"/>
               </a:rPr>
-              <a:t>Figure 11.  The deployable checkpoint over every frame the two robots recorded, at the confidence the cart deploys at. There is no ground truth for these frames, so this is the rate at which the detector produces a box at all -- not recall and not precision. Vegetation is excess green over a thumbnail, so "nothing to detect" does not account for it: 1157 frames clear that bar and 21 of them draw a box. 24 of the 25 boxes it does draw are the same class.</a:t>
+              <a:t>Figure 11.  The same three checkpoints and the same matcher on both sides, so the evaluator offset cancels. A detector trained on one field does not transfer to another.</a:t>
             </a:r>
           </a:p>
         </p:txBody>
       </p:sp>
       <p:pic>
         <p:nvPicPr>
-          <p:cNvPr id="155" name="Picture 154" descr="j_species.png"/>
+          <p:cNvPr id="155" name="Picture 154" descr="p_field.png"/>
           <p:cNvPicPr>
             <a:picLocks noChangeAspect="1"/>
           </p:cNvPicPr>
@@ -9411,6 +9411,72 @@
         </p:blipFill>
         <p:spPr>
           <a:xfrm>
+            <a:off x="32552640" y="12672038"/>
+            <a:ext cx="10607040" cy="5360041"/>
+          </a:xfrm>
+          <a:prstGeom prst="rect">
+            <a:avLst/>
+          </a:prstGeom>
+        </p:spPr>
+      </p:pic>
+      <p:sp>
+        <p:nvSpPr>
+          <p:cNvPr id="156" name="TextBox 155"/>
+          <p:cNvSpPr txBox="1"/>
+          <p:nvPr/>
+        </p:nvSpPr>
+        <p:spPr>
+          <a:xfrm>
+            <a:off x="32552640" y="18123519"/>
+            <a:ext cx="10607040" cy="365760"/>
+          </a:xfrm>
+          <a:prstGeom prst="rect">
+            <a:avLst/>
+          </a:prstGeom>
+          <a:noFill/>
+        </p:spPr>
+        <p:txBody>
+          <a:bodyPr wrap="square" lIns="0" rIns="0" tIns="0" bIns="0">
+            <a:spAutoFit/>
+          </a:bodyPr>
+          <a:lstStyle/>
+          <a:p>
+            <a:pPr algn="l">
+              <a:lnSpc>
+                <a:spcPct val="120000"/>
+              </a:lnSpc>
+              <a:spcAft>
+                <a:spcPts val="0"/>
+              </a:spcAft>
+            </a:pPr>
+            <a:r>
+              <a:rPr sz="1200" b="0">
+                <a:solidFill>
+                  <a:srgbClr val="556575"/>
+                </a:solidFill>
+                <a:latin typeface="Arial"/>
+              </a:rPr>
+              <a:t>Figure 12.  The deployable checkpoint over every frame the two robots recorded, at the confidence the cart deploys at. There is no ground truth for these frames, so this is the rate at which the detector produces a box at all -- not recall and not precision. Vegetation is excess green over a thumbnail, so "nothing to detect" does not account for it: 1157 frames clear that bar and 21 of them draw a box. 24 of the 25 boxes it does draw are the same class.</a:t>
+            </a:r>
+          </a:p>
+        </p:txBody>
+      </p:sp>
+      <p:pic>
+        <p:nvPicPr>
+          <p:cNvPr id="157" name="Picture 156" descr="j_species.png"/>
+          <p:cNvPicPr>
+            <a:picLocks noChangeAspect="1"/>
+          </p:cNvPicPr>
+          <p:nvPr/>
+        </p:nvPicPr>
+        <p:blipFill>
+          <a:blip r:embed="rId14"/>
+          <a:stretch>
+            <a:fillRect/>
+          </a:stretch>
+        </p:blipFill>
+        <p:spPr>
+          <a:xfrm>
             <a:off x="32552640" y="19129359"/>
             <a:ext cx="10607040" cy="5429067"/>
           </a:xfrm>
@@ -9421,7 +9487,7 @@
       </p:pic>
       <p:sp>
         <p:nvSpPr>
-          <p:cNvPr id="156" name="TextBox 155"/>
+          <p:cNvPr id="158" name="TextBox 157"/>
           <p:cNvSpPr txBox="1"/>
           <p:nvPr/>
         </p:nvSpPr>
@@ -9456,14 +9522,14 @@
                 </a:solidFill>
                 <a:latin typeface="Arial"/>
               </a:rPr>
-              <a:t>Figure 12.  Per-species performance of the deployable checkpoint. The spread across the twelve classes is 0.214, roughly seventy times the seed noise.</a:t>
-            </a:r>
-          </a:p>
-        </p:txBody>
-      </p:sp>
-      <p:sp>
-        <p:nvSpPr>
-          <p:cNvPr id="157" name="TextBox 156"/>
+              <a:t>Figure 13.  Per-species performance of the deployable checkpoint. The spread across the twelve classes is 0.214, roughly seventy times the seed noise.</a:t>
+            </a:r>
+          </a:p>
+        </p:txBody>
+      </p:sp>
+      <p:sp>
+        <p:nvSpPr>
+          <p:cNvPr id="159" name="TextBox 158"/>
           <p:cNvSpPr txBox="1"/>
           <p:nvPr/>
         </p:nvSpPr>
@@ -9505,7 +9571,7 @@
       </p:sp>
       <p:sp>
         <p:nvSpPr>
-          <p:cNvPr id="158" name="Rectangle 157"/>
+          <p:cNvPr id="160" name="Rectangle 159"/>
           <p:cNvSpPr/>
           <p:nvPr/>
         </p:nvSpPr>
@@ -9549,7 +9615,7 @@
       </p:sp>
       <p:sp>
         <p:nvSpPr>
-          <p:cNvPr id="159" name="TextBox 158"/>
+          <p:cNvPr id="161" name="TextBox 160"/>
           <p:cNvSpPr txBox="1"/>
           <p:nvPr/>
         </p:nvSpPr>
@@ -9591,7 +9657,7 @@
       </p:sp>
       <p:sp>
         <p:nvSpPr>
-          <p:cNvPr id="160" name="TextBox 159"/>
+          <p:cNvPr id="162" name="TextBox 161"/>
           <p:cNvSpPr txBox="1"/>
           <p:nvPr/>
         </p:nvSpPr>
@@ -9633,7 +9699,7 @@
       </p:sp>
       <p:sp>
         <p:nvSpPr>
-          <p:cNvPr id="161" name="TextBox 160"/>
+          <p:cNvPr id="163" name="TextBox 162"/>
           <p:cNvSpPr txBox="1"/>
           <p:nvPr/>
         </p:nvSpPr>
@@ -9675,7 +9741,7 @@
       </p:sp>
       <p:sp>
         <p:nvSpPr>
-          <p:cNvPr id="162" name="TextBox 161"/>
+          <p:cNvPr id="164" name="TextBox 163"/>
           <p:cNvSpPr txBox="1"/>
           <p:nvPr/>
         </p:nvSpPr>
@@ -9717,7 +9783,7 @@
       </p:sp>
       <p:sp>
         <p:nvSpPr>
-          <p:cNvPr id="163" name="TextBox 162"/>
+          <p:cNvPr id="165" name="TextBox 164"/>
           <p:cNvSpPr txBox="1"/>
           <p:nvPr/>
         </p:nvSpPr>
@@ -9759,7 +9825,7 @@
       </p:sp>
       <p:sp>
         <p:nvSpPr>
-          <p:cNvPr id="164" name="TextBox 163"/>
+          <p:cNvPr id="166" name="TextBox 165"/>
           <p:cNvSpPr txBox="1"/>
           <p:nvPr/>
         </p:nvSpPr>
@@ -9801,7 +9867,7 @@
       </p:sp>
       <p:sp>
         <p:nvSpPr>
-          <p:cNvPr id="165" name="TextBox 164"/>
+          <p:cNvPr id="167" name="TextBox 166"/>
           <p:cNvSpPr txBox="1"/>
           <p:nvPr/>
         </p:nvSpPr>
@@ -9843,7 +9909,7 @@
       </p:sp>
       <p:sp>
         <p:nvSpPr>
-          <p:cNvPr id="166" name="Rectangle 165"/>
+          <p:cNvPr id="168" name="Rectangle 167"/>
           <p:cNvSpPr/>
           <p:nvPr/>
         </p:nvSpPr>
@@ -9887,7 +9953,7 @@
       </p:sp>
       <p:sp>
         <p:nvSpPr>
-          <p:cNvPr id="167" name="TextBox 166"/>
+          <p:cNvPr id="169" name="TextBox 168"/>
           <p:cNvSpPr txBox="1"/>
           <p:nvPr/>
         </p:nvSpPr>
@@ -9929,7 +9995,7 @@
       </p:sp>
       <p:sp>
         <p:nvSpPr>
-          <p:cNvPr id="168" name="TextBox 167"/>
+          <p:cNvPr id="170" name="TextBox 169"/>
           <p:cNvSpPr txBox="1"/>
           <p:nvPr/>
         </p:nvSpPr>
@@ -9971,7 +10037,7 @@
       </p:sp>
       <p:sp>
         <p:nvSpPr>
-          <p:cNvPr id="169" name="Rectangle 168"/>
+          <p:cNvPr id="171" name="Rectangle 170"/>
           <p:cNvSpPr/>
           <p:nvPr/>
         </p:nvSpPr>
@@ -10015,7 +10081,7 @@
       </p:sp>
       <p:sp>
         <p:nvSpPr>
-          <p:cNvPr id="170" name="TextBox 169"/>
+          <p:cNvPr id="172" name="TextBox 171"/>
           <p:cNvSpPr txBox="1"/>
           <p:nvPr/>
         </p:nvSpPr>

--- a/docs/poster/MTSU_WeedAgent_Poster.pptx
+++ b/docs/poster/MTSU_WeedAgent_Poster.pptx
@@ -6746,7 +6746,7 @@
         <p:spPr>
           <a:xfrm>
             <a:off x="11704320" y="18118567"/>
-            <a:ext cx="9989819" cy="5906650"/>
+            <a:ext cx="9989819" cy="2543654"/>
           </a:xfrm>
           <a:prstGeom prst="rect">
             <a:avLst/>
@@ -6761,7 +6761,7 @@
         </p:nvSpPr>
         <p:spPr>
           <a:xfrm>
-            <a:off x="11704320" y="24116657"/>
+            <a:off x="11704320" y="20753661"/>
             <a:ext cx="9989819" cy="365760"/>
           </a:xfrm>
           <a:prstGeom prst="rect">
@@ -6790,7 +6790,7 @@
                 </a:solidFill>
                 <a:latin typeface="Arial"/>
               </a:rPr>
-              <a:t>Figure 8.  Every arm on one frozen corpus of real incidents from this project's own history -- 116 incidents and 33 controls -- scored by the project's own scorer: a detection counts only when the arm returns an issue verdict carrying a finding at or above a severity bar, and a case that produced no answer leaves the denominator rather than counting as a miss. Up and to the left is better. Open circle: the model reads raw artifact excerpts. Filled: the same model with a retrieval round over the same artifacts. The retrieval tier is worth +0.149 recall to the 27B and +0.012 to the 14B, so tiering pays where the model can use it and not otherwise.</a:t>
+              <a:t>Figure 8.  (e) Every arm on one frozen corpus of real incidents from this project's own history -- 116 incidents, 33 controls -- scored by the project's own scorer. Open circle: the model reads raw artifact excerpts; filled: the same model with a retrieval round over them. The retrieval tier is worth +0.149 recall to the 27 B and +0.012 to the 14 B. (f) The same arms, asking how much of that detection quotes a line that resolves in the artifact. The 7 B has the highest recall on the page and 0.55 of it is unevidenced; the 27 B's gap is 0.00. Recall alone would have cleared the size class the campaign's own reviewer ran on for a week.</a:t>
             </a:r>
           </a:p>
         </p:txBody>
@@ -6890,7 +6890,7 @@
         <p:spPr>
           <a:xfrm>
             <a:off x="22197060" y="19382852"/>
-            <a:ext cx="2597353" cy="365760"/>
+            <a:ext cx="1698269" cy="365760"/>
           </a:xfrm>
           <a:prstGeom prst="rect">
             <a:avLst/>
@@ -6918,7 +6918,7 @@
                 </a:solidFill>
                 <a:latin typeface="Arial"/>
               </a:rPr>
-              <a:t>arm</a:t>
+              <a:t>reviewer</a:t>
             </a:r>
           </a:p>
         </p:txBody>
@@ -6931,8 +6931,8 @@
         </p:nvSpPr>
         <p:spPr>
           <a:xfrm>
-            <a:off x="24794413" y="19382852"/>
-            <a:ext cx="2597353" cy="365760"/>
+            <a:off x="23895329" y="19382852"/>
+            <a:ext cx="2397556" cy="365760"/>
           </a:xfrm>
           <a:prstGeom prst="rect">
             <a:avLst/>
@@ -6973,7 +6973,49 @@
         </p:nvSpPr>
         <p:spPr>
           <a:xfrm>
-            <a:off x="27391766" y="19382852"/>
+            <a:off x="26292886" y="19382852"/>
+            <a:ext cx="1198778" cy="365760"/>
+          </a:xfrm>
+          <a:prstGeom prst="rect">
+            <a:avLst/>
+          </a:prstGeom>
+          <a:noFill/>
+        </p:spPr>
+        <p:txBody>
+          <a:bodyPr wrap="square" lIns="0" rIns="0" tIns="0" bIns="0">
+            <a:spAutoFit/>
+          </a:bodyPr>
+          <a:lstStyle/>
+          <a:p>
+            <a:pPr algn="r">
+              <a:lnSpc>
+                <a:spcPct val="100000"/>
+              </a:lnSpc>
+              <a:spcAft>
+                <a:spcPts val="0"/>
+              </a:spcAft>
+            </a:pPr>
+            <a:r>
+              <a:rPr sz="1250" b="1">
+                <a:solidFill>
+                  <a:srgbClr val="1E293B"/>
+                </a:solidFill>
+                <a:latin typeface="Arial"/>
+              </a:rPr>
+              <a:t>recall</a:t>
+            </a:r>
+          </a:p>
+        </p:txBody>
+      </p:sp>
+      <p:sp>
+        <p:nvSpPr>
+          <p:cNvPr id="97" name="TextBox 96"/>
+          <p:cNvSpPr txBox="1"/>
+          <p:nvPr/>
+        </p:nvSpPr>
+        <p:spPr>
+          <a:xfrm>
+            <a:off x="27491664" y="19382852"/>
             <a:ext cx="1298676" cy="365760"/>
           </a:xfrm>
           <a:prstGeom prst="rect">
@@ -7002,20 +7044,20 @@
                 </a:solidFill>
                 <a:latin typeface="Arial"/>
               </a:rPr>
-              <a:t>recall</a:t>
-            </a:r>
-          </a:p>
-        </p:txBody>
-      </p:sp>
-      <p:sp>
-        <p:nvSpPr>
-          <p:cNvPr id="97" name="TextBox 96"/>
-          <p:cNvSpPr txBox="1"/>
-          <p:nvPr/>
-        </p:nvSpPr>
-        <p:spPr>
-          <a:xfrm>
-            <a:off x="28690443" y="19382852"/>
+              <a:t>grounded</a:t>
+            </a:r>
+          </a:p>
+        </p:txBody>
+      </p:sp>
+      <p:sp>
+        <p:nvSpPr>
+          <p:cNvPr id="98" name="TextBox 97"/>
+          <p:cNvSpPr txBox="1"/>
+          <p:nvPr/>
+        </p:nvSpPr>
+        <p:spPr>
+          <a:xfrm>
+            <a:off x="28790341" y="19382852"/>
             <a:ext cx="1398574" cy="365760"/>
           </a:xfrm>
           <a:prstGeom prst="rect">
@@ -7044,21 +7086,21 @@
                 </a:solidFill>
                 <a:latin typeface="Arial"/>
               </a:rPr>
-              <a:t>grounded</a:t>
-            </a:r>
-          </a:p>
-        </p:txBody>
-      </p:sp>
-      <p:sp>
-        <p:nvSpPr>
-          <p:cNvPr id="98" name="TextBox 97"/>
-          <p:cNvSpPr txBox="1"/>
-          <p:nvPr/>
-        </p:nvSpPr>
-        <p:spPr>
-          <a:xfrm>
-            <a:off x="30089017" y="19382852"/>
-            <a:ext cx="1298676" cy="365760"/>
+              <a:t>false alarms</a:t>
+            </a:r>
+          </a:p>
+        </p:txBody>
+      </p:sp>
+      <p:sp>
+        <p:nvSpPr>
+          <p:cNvPr id="99" name="TextBox 98"/>
+          <p:cNvSpPr txBox="1"/>
+          <p:nvPr/>
+        </p:nvSpPr>
+        <p:spPr>
+          <a:xfrm>
+            <a:off x="30188916" y="19382852"/>
+            <a:ext cx="1398574" cy="365760"/>
           </a:xfrm>
           <a:prstGeom prst="rect">
             <a:avLst/>
@@ -7086,21 +7128,21 @@
                 </a:solidFill>
                 <a:latin typeface="Arial"/>
               </a:rPr>
-              <a:t>false alarms</a:t>
-            </a:r>
-          </a:p>
-        </p:txBody>
-      </p:sp>
-      <p:sp>
-        <p:nvSpPr>
-          <p:cNvPr id="99" name="TextBox 98"/>
-          <p:cNvSpPr txBox="1"/>
-          <p:nvPr/>
-        </p:nvSpPr>
-        <p:spPr>
-          <a:xfrm>
-            <a:off x="31387694" y="19382852"/>
-            <a:ext cx="799185" cy="365760"/>
+              <a:t>citations valid</a:t>
+            </a:r>
+          </a:p>
+        </p:txBody>
+      </p:sp>
+      <p:sp>
+        <p:nvSpPr>
+          <p:cNvPr id="100" name="TextBox 99"/>
+          <p:cNvSpPr txBox="1"/>
+          <p:nvPr/>
+        </p:nvSpPr>
+        <p:spPr>
+          <a:xfrm>
+            <a:off x="31587490" y="19382852"/>
+            <a:ext cx="599389" cy="365760"/>
           </a:xfrm>
           <a:prstGeom prst="rect">
             <a:avLst/>
@@ -7135,7 +7177,7 @@
       </p:sp>
       <p:sp>
         <p:nvSpPr>
-          <p:cNvPr id="100" name="Rectangle 99"/>
+          <p:cNvPr id="101" name="Rectangle 100"/>
           <p:cNvSpPr/>
           <p:nvPr/>
         </p:nvSpPr>
@@ -7179,14 +7221,14 @@
       </p:sp>
       <p:sp>
         <p:nvSpPr>
-          <p:cNvPr id="101" name="TextBox 100"/>
+          <p:cNvPr id="102" name="TextBox 101"/>
           <p:cNvSpPr txBox="1"/>
           <p:nvPr/>
         </p:nvSpPr>
         <p:spPr>
           <a:xfrm>
             <a:off x="22197060" y="19739468"/>
-            <a:ext cx="2597353" cy="365760"/>
+            <a:ext cx="1698269" cy="365760"/>
           </a:xfrm>
           <a:prstGeom prst="rect">
             <a:avLst/>
@@ -7221,14 +7263,14 @@
       </p:sp>
       <p:sp>
         <p:nvSpPr>
-          <p:cNvPr id="102" name="TextBox 101"/>
-          <p:cNvSpPr txBox="1"/>
-          <p:nvPr/>
-        </p:nvSpPr>
-        <p:spPr>
-          <a:xfrm>
-            <a:off x="24794413" y="19739468"/>
-            <a:ext cx="2597353" cy="365760"/>
+          <p:cNvPr id="103" name="TextBox 102"/>
+          <p:cNvSpPr txBox="1"/>
+          <p:nvPr/>
+        </p:nvSpPr>
+        <p:spPr>
+          <a:xfrm>
+            <a:off x="23895329" y="19739468"/>
+            <a:ext cx="2397556" cy="365760"/>
           </a:xfrm>
           <a:prstGeom prst="rect">
             <a:avLst/>
@@ -7263,13 +7305,55 @@
       </p:sp>
       <p:sp>
         <p:nvSpPr>
-          <p:cNvPr id="103" name="TextBox 102"/>
-          <p:cNvSpPr txBox="1"/>
-          <p:nvPr/>
-        </p:nvSpPr>
-        <p:spPr>
-          <a:xfrm>
-            <a:off x="27391766" y="19739468"/>
+          <p:cNvPr id="104" name="TextBox 103"/>
+          <p:cNvSpPr txBox="1"/>
+          <p:nvPr/>
+        </p:nvSpPr>
+        <p:spPr>
+          <a:xfrm>
+            <a:off x="26292886" y="19739468"/>
+            <a:ext cx="1198778" cy="365760"/>
+          </a:xfrm>
+          <a:prstGeom prst="rect">
+            <a:avLst/>
+          </a:prstGeom>
+          <a:noFill/>
+        </p:spPr>
+        <p:txBody>
+          <a:bodyPr wrap="square" lIns="0" rIns="0" tIns="0" bIns="0">
+            <a:spAutoFit/>
+          </a:bodyPr>
+          <a:lstStyle/>
+          <a:p>
+            <a:pPr algn="r">
+              <a:lnSpc>
+                <a:spcPct val="100000"/>
+              </a:lnSpc>
+              <a:spcAft>
+                <a:spcPts val="0"/>
+              </a:spcAft>
+            </a:pPr>
+            <a:r>
+              <a:rPr sz="1300" b="0">
+                <a:solidFill>
+                  <a:srgbClr val="1E293B"/>
+                </a:solidFill>
+                <a:latin typeface="Arial"/>
+              </a:rPr>
+              <a:t>--</a:t>
+            </a:r>
+          </a:p>
+        </p:txBody>
+      </p:sp>
+      <p:sp>
+        <p:nvSpPr>
+          <p:cNvPr id="105" name="TextBox 104"/>
+          <p:cNvSpPr txBox="1"/>
+          <p:nvPr/>
+        </p:nvSpPr>
+        <p:spPr>
+          <a:xfrm>
+            <a:off x="27491664" y="19739468"/>
             <a:ext cx="1298676" cy="365760"/>
           </a:xfrm>
           <a:prstGeom prst="rect">
@@ -7305,13 +7389,13 @@
       </p:sp>
       <p:sp>
         <p:nvSpPr>
-          <p:cNvPr id="104" name="TextBox 103"/>
-          <p:cNvSpPr txBox="1"/>
-          <p:nvPr/>
-        </p:nvSpPr>
-        <p:spPr>
-          <a:xfrm>
-            <a:off x="28690443" y="19739468"/>
+          <p:cNvPr id="106" name="TextBox 105"/>
+          <p:cNvSpPr txBox="1"/>
+          <p:nvPr/>
+        </p:nvSpPr>
+        <p:spPr>
+          <a:xfrm>
+            <a:off x="28790341" y="19739468"/>
             <a:ext cx="1398574" cy="365760"/>
           </a:xfrm>
           <a:prstGeom prst="rect">
@@ -7347,13 +7431,223 @@
       </p:sp>
       <p:sp>
         <p:nvSpPr>
-          <p:cNvPr id="105" name="TextBox 104"/>
-          <p:cNvSpPr txBox="1"/>
-          <p:nvPr/>
-        </p:nvSpPr>
-        <p:spPr>
-          <a:xfrm>
-            <a:off x="30089017" y="19739468"/>
+          <p:cNvPr id="107" name="TextBox 106"/>
+          <p:cNvSpPr txBox="1"/>
+          <p:nvPr/>
+        </p:nvSpPr>
+        <p:spPr>
+          <a:xfrm>
+            <a:off x="30188916" y="19739468"/>
+            <a:ext cx="1398574" cy="365760"/>
+          </a:xfrm>
+          <a:prstGeom prst="rect">
+            <a:avLst/>
+          </a:prstGeom>
+          <a:noFill/>
+        </p:spPr>
+        <p:txBody>
+          <a:bodyPr wrap="square" lIns="0" rIns="0" tIns="0" bIns="0">
+            <a:spAutoFit/>
+          </a:bodyPr>
+          <a:lstStyle/>
+          <a:p>
+            <a:pPr algn="r">
+              <a:lnSpc>
+                <a:spcPct val="100000"/>
+              </a:lnSpc>
+              <a:spcAft>
+                <a:spcPts val="0"/>
+              </a:spcAft>
+            </a:pPr>
+            <a:r>
+              <a:rPr sz="1300" b="0">
+                <a:solidFill>
+                  <a:srgbClr val="1E293B"/>
+                </a:solidFill>
+                <a:latin typeface="Arial"/>
+              </a:rPr>
+              <a:t>--</a:t>
+            </a:r>
+          </a:p>
+        </p:txBody>
+      </p:sp>
+      <p:sp>
+        <p:nvSpPr>
+          <p:cNvPr id="108" name="TextBox 107"/>
+          <p:cNvSpPr txBox="1"/>
+          <p:nvPr/>
+        </p:nvSpPr>
+        <p:spPr>
+          <a:xfrm>
+            <a:off x="31587490" y="19739468"/>
+            <a:ext cx="599389" cy="365760"/>
+          </a:xfrm>
+          <a:prstGeom prst="rect">
+            <a:avLst/>
+          </a:prstGeom>
+          <a:noFill/>
+        </p:spPr>
+        <p:txBody>
+          <a:bodyPr wrap="square" lIns="0" rIns="0" tIns="0" bIns="0">
+            <a:spAutoFit/>
+          </a:bodyPr>
+          <a:lstStyle/>
+          <a:p>
+            <a:pPr algn="r">
+              <a:lnSpc>
+                <a:spcPct val="100000"/>
+              </a:lnSpc>
+              <a:spcAft>
+                <a:spcPts val="0"/>
+              </a:spcAft>
+            </a:pPr>
+            <a:r>
+              <a:rPr sz="1300" b="0">
+                <a:solidFill>
+                  <a:srgbClr val="1E293B"/>
+                </a:solidFill>
+                <a:latin typeface="Arial"/>
+              </a:rPr>
+              <a:t>149</a:t>
+            </a:r>
+          </a:p>
+        </p:txBody>
+      </p:sp>
+      <p:sp>
+        <p:nvSpPr>
+          <p:cNvPr id="109" name="TextBox 108"/>
+          <p:cNvSpPr txBox="1"/>
+          <p:nvPr/>
+        </p:nvSpPr>
+        <p:spPr>
+          <a:xfrm>
+            <a:off x="22197060" y="20050364"/>
+            <a:ext cx="1698269" cy="365760"/>
+          </a:xfrm>
+          <a:prstGeom prst="rect">
+            <a:avLst/>
+          </a:prstGeom>
+          <a:noFill/>
+        </p:spPr>
+        <p:txBody>
+          <a:bodyPr wrap="square" lIns="0" rIns="0" tIns="0" bIns="0">
+            <a:spAutoFit/>
+          </a:bodyPr>
+          <a:lstStyle/>
+          <a:p>
+            <a:pPr algn="l">
+              <a:lnSpc>
+                <a:spcPct val="100000"/>
+              </a:lnSpc>
+              <a:spcAft>
+                <a:spcPts val="0"/>
+              </a:spcAft>
+            </a:pPr>
+            <a:r>
+              <a:rPr sz="1300" b="0">
+                <a:solidFill>
+                  <a:srgbClr val="1E293B"/>
+                </a:solidFill>
+                <a:latin typeface="Arial"/>
+              </a:rPr>
+              <a:t>Deterministic signals</a:t>
+            </a:r>
+          </a:p>
+        </p:txBody>
+      </p:sp>
+      <p:sp>
+        <p:nvSpPr>
+          <p:cNvPr id="110" name="TextBox 109"/>
+          <p:cNvSpPr txBox="1"/>
+          <p:nvPr/>
+        </p:nvSpPr>
+        <p:spPr>
+          <a:xfrm>
+            <a:off x="23895329" y="20050364"/>
+            <a:ext cx="2397556" cy="365760"/>
+          </a:xfrm>
+          <a:prstGeom prst="rect">
+            <a:avLst/>
+          </a:prstGeom>
+          <a:noFill/>
+        </p:spPr>
+        <p:txBody>
+          <a:bodyPr wrap="square" lIns="0" rIns="0" tIns="0" bIns="0">
+            <a:spAutoFit/>
+          </a:bodyPr>
+          <a:lstStyle/>
+          <a:p>
+            <a:pPr algn="r">
+              <a:lnSpc>
+                <a:spcPct val="100000"/>
+              </a:lnSpc>
+              <a:spcAft>
+                <a:spcPts val="0"/>
+              </a:spcAft>
+            </a:pPr>
+            <a:r>
+              <a:rPr sz="1300" b="0">
+                <a:solidFill>
+                  <a:srgbClr val="1E293B"/>
+                </a:solidFill>
+                <a:latin typeface="Arial"/>
+              </a:rPr>
+              <a:t>12 checks</a:t>
+            </a:r>
+          </a:p>
+        </p:txBody>
+      </p:sp>
+      <p:sp>
+        <p:nvSpPr>
+          <p:cNvPr id="111" name="TextBox 110"/>
+          <p:cNvSpPr txBox="1"/>
+          <p:nvPr/>
+        </p:nvSpPr>
+        <p:spPr>
+          <a:xfrm>
+            <a:off x="26292886" y="20050364"/>
+            <a:ext cx="1198778" cy="365760"/>
+          </a:xfrm>
+          <a:prstGeom prst="rect">
+            <a:avLst/>
+          </a:prstGeom>
+          <a:noFill/>
+        </p:spPr>
+        <p:txBody>
+          <a:bodyPr wrap="square" lIns="0" rIns="0" tIns="0" bIns="0">
+            <a:spAutoFit/>
+          </a:bodyPr>
+          <a:lstStyle/>
+          <a:p>
+            <a:pPr algn="r">
+              <a:lnSpc>
+                <a:spcPct val="100000"/>
+              </a:lnSpc>
+              <a:spcAft>
+                <a:spcPts val="0"/>
+              </a:spcAft>
+            </a:pPr>
+            <a:r>
+              <a:rPr sz="1300" b="0">
+                <a:solidFill>
+                  <a:srgbClr val="1E293B"/>
+                </a:solidFill>
+                <a:latin typeface="Arial"/>
+              </a:rPr>
+              <a:t>0.095</a:t>
+            </a:r>
+          </a:p>
+        </p:txBody>
+      </p:sp>
+      <p:sp>
+        <p:nvSpPr>
+          <p:cNvPr id="112" name="TextBox 111"/>
+          <p:cNvSpPr txBox="1"/>
+          <p:nvPr/>
+        </p:nvSpPr>
+        <p:spPr>
+          <a:xfrm>
+            <a:off x="27491664" y="20050364"/>
             <a:ext cx="1298676" cy="365760"/>
           </a:xfrm>
           <a:prstGeom prst="rect">
@@ -7382,21 +7676,21 @@
                 </a:solidFill>
                 <a:latin typeface="Arial"/>
               </a:rPr>
-              <a:t>--</a:t>
-            </a:r>
-          </a:p>
-        </p:txBody>
-      </p:sp>
-      <p:sp>
-        <p:nvSpPr>
-          <p:cNvPr id="106" name="TextBox 105"/>
-          <p:cNvSpPr txBox="1"/>
-          <p:nvPr/>
-        </p:nvSpPr>
-        <p:spPr>
-          <a:xfrm>
-            <a:off x="31387694" y="19739468"/>
-            <a:ext cx="799185" cy="365760"/>
+              <a:t>0.095</a:t>
+            </a:r>
+          </a:p>
+        </p:txBody>
+      </p:sp>
+      <p:sp>
+        <p:nvSpPr>
+          <p:cNvPr id="113" name="TextBox 112"/>
+          <p:cNvSpPr txBox="1"/>
+          <p:nvPr/>
+        </p:nvSpPr>
+        <p:spPr>
+          <a:xfrm>
+            <a:off x="28790341" y="20050364"/>
+            <a:ext cx="1398574" cy="365760"/>
           </a:xfrm>
           <a:prstGeom prst="rect">
             <a:avLst/>
@@ -7424,6 +7718,90 @@
                 </a:solidFill>
                 <a:latin typeface="Arial"/>
               </a:rPr>
+              <a:t>0.061</a:t>
+            </a:r>
+          </a:p>
+        </p:txBody>
+      </p:sp>
+      <p:sp>
+        <p:nvSpPr>
+          <p:cNvPr id="114" name="TextBox 113"/>
+          <p:cNvSpPr txBox="1"/>
+          <p:nvPr/>
+        </p:nvSpPr>
+        <p:spPr>
+          <a:xfrm>
+            <a:off x="30188916" y="20050364"/>
+            <a:ext cx="1398574" cy="365760"/>
+          </a:xfrm>
+          <a:prstGeom prst="rect">
+            <a:avLst/>
+          </a:prstGeom>
+          <a:noFill/>
+        </p:spPr>
+        <p:txBody>
+          <a:bodyPr wrap="square" lIns="0" rIns="0" tIns="0" bIns="0">
+            <a:spAutoFit/>
+          </a:bodyPr>
+          <a:lstStyle/>
+          <a:p>
+            <a:pPr algn="r">
+              <a:lnSpc>
+                <a:spcPct val="100000"/>
+              </a:lnSpc>
+              <a:spcAft>
+                <a:spcPts val="0"/>
+              </a:spcAft>
+            </a:pPr>
+            <a:r>
+              <a:rPr sz="1300" b="0">
+                <a:solidFill>
+                  <a:srgbClr val="1E293B"/>
+                </a:solidFill>
+                <a:latin typeface="Arial"/>
+              </a:rPr>
+              <a:t>0.846</a:t>
+            </a:r>
+          </a:p>
+        </p:txBody>
+      </p:sp>
+      <p:sp>
+        <p:nvSpPr>
+          <p:cNvPr id="115" name="TextBox 114"/>
+          <p:cNvSpPr txBox="1"/>
+          <p:nvPr/>
+        </p:nvSpPr>
+        <p:spPr>
+          <a:xfrm>
+            <a:off x="31587490" y="20050364"/>
+            <a:ext cx="599389" cy="365760"/>
+          </a:xfrm>
+          <a:prstGeom prst="rect">
+            <a:avLst/>
+          </a:prstGeom>
+          <a:noFill/>
+        </p:spPr>
+        <p:txBody>
+          <a:bodyPr wrap="square" lIns="0" rIns="0" tIns="0" bIns="0">
+            <a:spAutoFit/>
+          </a:bodyPr>
+          <a:lstStyle/>
+          <a:p>
+            <a:pPr algn="r">
+              <a:lnSpc>
+                <a:spcPct val="100000"/>
+              </a:lnSpc>
+              <a:spcAft>
+                <a:spcPts val="0"/>
+              </a:spcAft>
+            </a:pPr>
+            <a:r>
+              <a:rPr sz="1300" b="0">
+                <a:solidFill>
+                  <a:srgbClr val="1E293B"/>
+                </a:solidFill>
+                <a:latin typeface="Arial"/>
+              </a:rPr>
               <a:t>149</a:t>
             </a:r>
           </a:p>
@@ -7431,14 +7809,14 @@
       </p:sp>
       <p:sp>
         <p:nvSpPr>
-          <p:cNvPr id="107" name="TextBox 106"/>
-          <p:cNvSpPr txBox="1"/>
-          <p:nvPr/>
-        </p:nvSpPr>
-        <p:spPr>
-          <a:xfrm>
-            <a:off x="22197060" y="20050364"/>
-            <a:ext cx="2597353" cy="365760"/>
+          <p:cNvPr id="116" name="TextBox 115"/>
+          <p:cNvSpPr txBox="1"/>
+          <p:nvPr/>
+        </p:nvSpPr>
+        <p:spPr>
+          <a:xfrm>
+            <a:off x="22197060" y="20361260"/>
+            <a:ext cx="1698269" cy="365760"/>
           </a:xfrm>
           <a:prstGeom prst="rect">
             <a:avLst/>
@@ -7466,21 +7844,21 @@
                 </a:solidFill>
                 <a:latin typeface="Arial"/>
               </a:rPr>
-              <a:t>Deterministic signals</a:t>
-            </a:r>
-          </a:p>
-        </p:txBody>
-      </p:sp>
-      <p:sp>
-        <p:nvSpPr>
-          <p:cNvPr id="108" name="TextBox 107"/>
-          <p:cNvSpPr txBox="1"/>
-          <p:nvPr/>
-        </p:nvSpPr>
-        <p:spPr>
-          <a:xfrm>
-            <a:off x="24794413" y="20050364"/>
-            <a:ext cx="2597353" cy="365760"/>
+              <a:t>7 B  L2</a:t>
+            </a:r>
+          </a:p>
+        </p:txBody>
+      </p:sp>
+      <p:sp>
+        <p:nvSpPr>
+          <p:cNvPr id="117" name="TextBox 116"/>
+          <p:cNvSpPr txBox="1"/>
+          <p:nvPr/>
+        </p:nvSpPr>
+        <p:spPr>
+          <a:xfrm>
+            <a:off x="23895329" y="20361260"/>
+            <a:ext cx="2397556" cy="365760"/>
           </a:xfrm>
           <a:prstGeom prst="rect">
             <a:avLst/>
@@ -7508,20 +7886,62 @@
                 </a:solidFill>
                 <a:latin typeface="Arial"/>
               </a:rPr>
-              <a:t>12 checks</a:t>
-            </a:r>
-          </a:p>
-        </p:txBody>
-      </p:sp>
-      <p:sp>
-        <p:nvSpPr>
-          <p:cNvPr id="109" name="TextBox 108"/>
-          <p:cNvSpPr txBox="1"/>
-          <p:nvPr/>
-        </p:nvSpPr>
-        <p:spPr>
-          <a:xfrm>
-            <a:off x="27391766" y="20050364"/>
+              <a:t>artifacts</a:t>
+            </a:r>
+          </a:p>
+        </p:txBody>
+      </p:sp>
+      <p:sp>
+        <p:nvSpPr>
+          <p:cNvPr id="118" name="TextBox 117"/>
+          <p:cNvSpPr txBox="1"/>
+          <p:nvPr/>
+        </p:nvSpPr>
+        <p:spPr>
+          <a:xfrm>
+            <a:off x="26292886" y="20361260"/>
+            <a:ext cx="1198778" cy="365760"/>
+          </a:xfrm>
+          <a:prstGeom prst="rect">
+            <a:avLst/>
+          </a:prstGeom>
+          <a:noFill/>
+        </p:spPr>
+        <p:txBody>
+          <a:bodyPr wrap="square" lIns="0" rIns="0" tIns="0" bIns="0">
+            <a:spAutoFit/>
+          </a:bodyPr>
+          <a:lstStyle/>
+          <a:p>
+            <a:pPr algn="r">
+              <a:lnSpc>
+                <a:spcPct val="100000"/>
+              </a:lnSpc>
+              <a:spcAft>
+                <a:spcPts val="0"/>
+              </a:spcAft>
+            </a:pPr>
+            <a:r>
+              <a:rPr sz="1300" b="0">
+                <a:solidFill>
+                  <a:srgbClr val="1E293B"/>
+                </a:solidFill>
+                <a:latin typeface="Arial"/>
+              </a:rPr>
+              <a:t>0.777</a:t>
+            </a:r>
+          </a:p>
+        </p:txBody>
+      </p:sp>
+      <p:sp>
+        <p:nvSpPr>
+          <p:cNvPr id="119" name="TextBox 118"/>
+          <p:cNvSpPr txBox="1"/>
+          <p:nvPr/>
+        </p:nvSpPr>
+        <p:spPr>
+          <a:xfrm>
+            <a:off x="27491664" y="20361260"/>
             <a:ext cx="1298676" cy="365760"/>
           </a:xfrm>
           <a:prstGeom prst="rect">
@@ -7550,20 +7970,20 @@
                 </a:solidFill>
                 <a:latin typeface="Arial"/>
               </a:rPr>
-              <a:t>0.095</a:t>
-            </a:r>
-          </a:p>
-        </p:txBody>
-      </p:sp>
-      <p:sp>
-        <p:nvSpPr>
-          <p:cNvPr id="110" name="TextBox 109"/>
-          <p:cNvSpPr txBox="1"/>
-          <p:nvPr/>
-        </p:nvSpPr>
-        <p:spPr>
-          <a:xfrm>
-            <a:off x="28690443" y="20050364"/>
+              <a:t>0.223</a:t>
+            </a:r>
+          </a:p>
+        </p:txBody>
+      </p:sp>
+      <p:sp>
+        <p:nvSpPr>
+          <p:cNvPr id="120" name="TextBox 119"/>
+          <p:cNvSpPr txBox="1"/>
+          <p:nvPr/>
+        </p:nvSpPr>
+        <p:spPr>
+          <a:xfrm>
+            <a:off x="28790341" y="20361260"/>
             <a:ext cx="1398574" cy="365760"/>
           </a:xfrm>
           <a:prstGeom prst="rect">
@@ -7592,20 +8012,230 @@
                 </a:solidFill>
                 <a:latin typeface="Arial"/>
               </a:rPr>
-              <a:t>0.095</a:t>
-            </a:r>
-          </a:p>
-        </p:txBody>
-      </p:sp>
-      <p:sp>
-        <p:nvSpPr>
-          <p:cNvPr id="111" name="TextBox 110"/>
-          <p:cNvSpPr txBox="1"/>
-          <p:nvPr/>
-        </p:nvSpPr>
-        <p:spPr>
-          <a:xfrm>
-            <a:off x="30089017" y="20050364"/>
+              <a:t>0.152</a:t>
+            </a:r>
+          </a:p>
+        </p:txBody>
+      </p:sp>
+      <p:sp>
+        <p:nvSpPr>
+          <p:cNvPr id="121" name="TextBox 120"/>
+          <p:cNvSpPr txBox="1"/>
+          <p:nvPr/>
+        </p:nvSpPr>
+        <p:spPr>
+          <a:xfrm>
+            <a:off x="30188916" y="20361260"/>
+            <a:ext cx="1398574" cy="365760"/>
+          </a:xfrm>
+          <a:prstGeom prst="rect">
+            <a:avLst/>
+          </a:prstGeom>
+          <a:noFill/>
+        </p:spPr>
+        <p:txBody>
+          <a:bodyPr wrap="square" lIns="0" rIns="0" tIns="0" bIns="0">
+            <a:spAutoFit/>
+          </a:bodyPr>
+          <a:lstStyle/>
+          <a:p>
+            <a:pPr algn="r">
+              <a:lnSpc>
+                <a:spcPct val="100000"/>
+              </a:lnSpc>
+              <a:spcAft>
+                <a:spcPts val="0"/>
+              </a:spcAft>
+            </a:pPr>
+            <a:r>
+              <a:rPr sz="1300" b="0">
+                <a:solidFill>
+                  <a:srgbClr val="1E293B"/>
+                </a:solidFill>
+                <a:latin typeface="Arial"/>
+              </a:rPr>
+              <a:t>0.304</a:t>
+            </a:r>
+          </a:p>
+        </p:txBody>
+      </p:sp>
+      <p:sp>
+        <p:nvSpPr>
+          <p:cNvPr id="122" name="TextBox 121"/>
+          <p:cNvSpPr txBox="1"/>
+          <p:nvPr/>
+        </p:nvSpPr>
+        <p:spPr>
+          <a:xfrm>
+            <a:off x="31587490" y="20361260"/>
+            <a:ext cx="599389" cy="365760"/>
+          </a:xfrm>
+          <a:prstGeom prst="rect">
+            <a:avLst/>
+          </a:prstGeom>
+          <a:noFill/>
+        </p:spPr>
+        <p:txBody>
+          <a:bodyPr wrap="square" lIns="0" rIns="0" tIns="0" bIns="0">
+            <a:spAutoFit/>
+          </a:bodyPr>
+          <a:lstStyle/>
+          <a:p>
+            <a:pPr algn="r">
+              <a:lnSpc>
+                <a:spcPct val="100000"/>
+              </a:lnSpc>
+              <a:spcAft>
+                <a:spcPts val="0"/>
+              </a:spcAft>
+            </a:pPr>
+            <a:r>
+              <a:rPr sz="1300" b="0">
+                <a:solidFill>
+                  <a:srgbClr val="1E293B"/>
+                </a:solidFill>
+                <a:latin typeface="Arial"/>
+              </a:rPr>
+              <a:t>149</a:t>
+            </a:r>
+          </a:p>
+        </p:txBody>
+      </p:sp>
+      <p:sp>
+        <p:nvSpPr>
+          <p:cNvPr id="123" name="TextBox 122"/>
+          <p:cNvSpPr txBox="1"/>
+          <p:nvPr/>
+        </p:nvSpPr>
+        <p:spPr>
+          <a:xfrm>
+            <a:off x="22197060" y="20672156"/>
+            <a:ext cx="1698269" cy="365760"/>
+          </a:xfrm>
+          <a:prstGeom prst="rect">
+            <a:avLst/>
+          </a:prstGeom>
+          <a:noFill/>
+        </p:spPr>
+        <p:txBody>
+          <a:bodyPr wrap="square" lIns="0" rIns="0" tIns="0" bIns="0">
+            <a:spAutoFit/>
+          </a:bodyPr>
+          <a:lstStyle/>
+          <a:p>
+            <a:pPr algn="l">
+              <a:lnSpc>
+                <a:spcPct val="100000"/>
+              </a:lnSpc>
+              <a:spcAft>
+                <a:spcPts val="0"/>
+              </a:spcAft>
+            </a:pPr>
+            <a:r>
+              <a:rPr sz="1300" b="0">
+                <a:solidFill>
+                  <a:srgbClr val="1E293B"/>
+                </a:solidFill>
+                <a:latin typeface="Arial"/>
+              </a:rPr>
+              <a:t>7 B  L3</a:t>
+            </a:r>
+          </a:p>
+        </p:txBody>
+      </p:sp>
+      <p:sp>
+        <p:nvSpPr>
+          <p:cNvPr id="124" name="TextBox 123"/>
+          <p:cNvSpPr txBox="1"/>
+          <p:nvPr/>
+        </p:nvSpPr>
+        <p:spPr>
+          <a:xfrm>
+            <a:off x="23895329" y="20672156"/>
+            <a:ext cx="2397556" cy="365760"/>
+          </a:xfrm>
+          <a:prstGeom prst="rect">
+            <a:avLst/>
+          </a:prstGeom>
+          <a:noFill/>
+        </p:spPr>
+        <p:txBody>
+          <a:bodyPr wrap="square" lIns="0" rIns="0" tIns="0" bIns="0">
+            <a:spAutoFit/>
+          </a:bodyPr>
+          <a:lstStyle/>
+          <a:p>
+            <a:pPr algn="r">
+              <a:lnSpc>
+                <a:spcPct val="100000"/>
+              </a:lnSpc>
+              <a:spcAft>
+                <a:spcPts val="0"/>
+              </a:spcAft>
+            </a:pPr>
+            <a:r>
+              <a:rPr sz="1300" b="0">
+                <a:solidFill>
+                  <a:srgbClr val="1E293B"/>
+                </a:solidFill>
+                <a:latin typeface="Arial"/>
+              </a:rPr>
+              <a:t>artifacts + retrieval</a:t>
+            </a:r>
+          </a:p>
+        </p:txBody>
+      </p:sp>
+      <p:sp>
+        <p:nvSpPr>
+          <p:cNvPr id="125" name="TextBox 124"/>
+          <p:cNvSpPr txBox="1"/>
+          <p:nvPr/>
+        </p:nvSpPr>
+        <p:spPr>
+          <a:xfrm>
+            <a:off x="26292886" y="20672156"/>
+            <a:ext cx="1198778" cy="365760"/>
+          </a:xfrm>
+          <a:prstGeom prst="rect">
+            <a:avLst/>
+          </a:prstGeom>
+          <a:noFill/>
+        </p:spPr>
+        <p:txBody>
+          <a:bodyPr wrap="square" lIns="0" rIns="0" tIns="0" bIns="0">
+            <a:spAutoFit/>
+          </a:bodyPr>
+          <a:lstStyle/>
+          <a:p>
+            <a:pPr algn="r">
+              <a:lnSpc>
+                <a:spcPct val="100000"/>
+              </a:lnSpc>
+              <a:spcAft>
+                <a:spcPts val="0"/>
+              </a:spcAft>
+            </a:pPr>
+            <a:r>
+              <a:rPr sz="1300" b="0">
+                <a:solidFill>
+                  <a:srgbClr val="1E293B"/>
+                </a:solidFill>
+                <a:latin typeface="Arial"/>
+              </a:rPr>
+              <a:t>0.823</a:t>
+            </a:r>
+          </a:p>
+        </p:txBody>
+      </p:sp>
+      <p:sp>
+        <p:nvSpPr>
+          <p:cNvPr id="126" name="TextBox 125"/>
+          <p:cNvSpPr txBox="1"/>
+          <p:nvPr/>
+        </p:nvSpPr>
+        <p:spPr>
+          <a:xfrm>
+            <a:off x="27491664" y="20672156"/>
             <a:ext cx="1298676" cy="365760"/>
           </a:xfrm>
           <a:prstGeom prst="rect">
@@ -7634,21 +8264,21 @@
                 </a:solidFill>
                 <a:latin typeface="Arial"/>
               </a:rPr>
-              <a:t>0.061</a:t>
-            </a:r>
-          </a:p>
-        </p:txBody>
-      </p:sp>
-      <p:sp>
-        <p:nvSpPr>
-          <p:cNvPr id="112" name="TextBox 111"/>
-          <p:cNvSpPr txBox="1"/>
-          <p:nvPr/>
-        </p:nvSpPr>
-        <p:spPr>
-          <a:xfrm>
-            <a:off x="31387694" y="20050364"/>
-            <a:ext cx="799185" cy="365760"/>
+              <a:t>0.274</a:t>
+            </a:r>
+          </a:p>
+        </p:txBody>
+      </p:sp>
+      <p:sp>
+        <p:nvSpPr>
+          <p:cNvPr id="127" name="TextBox 126"/>
+          <p:cNvSpPr txBox="1"/>
+          <p:nvPr/>
+        </p:nvSpPr>
+        <p:spPr>
+          <a:xfrm>
+            <a:off x="28790341" y="20672156"/>
+            <a:ext cx="1398574" cy="365760"/>
           </a:xfrm>
           <a:prstGeom prst="rect">
             <a:avLst/>
@@ -7676,6 +8306,90 @@
                 </a:solidFill>
                 <a:latin typeface="Arial"/>
               </a:rPr>
+              <a:t>0.273</a:t>
+            </a:r>
+          </a:p>
+        </p:txBody>
+      </p:sp>
+      <p:sp>
+        <p:nvSpPr>
+          <p:cNvPr id="128" name="TextBox 127"/>
+          <p:cNvSpPr txBox="1"/>
+          <p:nvPr/>
+        </p:nvSpPr>
+        <p:spPr>
+          <a:xfrm>
+            <a:off x="30188916" y="20672156"/>
+            <a:ext cx="1398574" cy="365760"/>
+          </a:xfrm>
+          <a:prstGeom prst="rect">
+            <a:avLst/>
+          </a:prstGeom>
+          <a:noFill/>
+        </p:spPr>
+        <p:txBody>
+          <a:bodyPr wrap="square" lIns="0" rIns="0" tIns="0" bIns="0">
+            <a:spAutoFit/>
+          </a:bodyPr>
+          <a:lstStyle/>
+          <a:p>
+            <a:pPr algn="r">
+              <a:lnSpc>
+                <a:spcPct val="100000"/>
+              </a:lnSpc>
+              <a:spcAft>
+                <a:spcPts val="0"/>
+              </a:spcAft>
+            </a:pPr>
+            <a:r>
+              <a:rPr sz="1300" b="0">
+                <a:solidFill>
+                  <a:srgbClr val="1E293B"/>
+                </a:solidFill>
+                <a:latin typeface="Arial"/>
+              </a:rPr>
+              <a:t>0.195</a:t>
+            </a:r>
+          </a:p>
+        </p:txBody>
+      </p:sp>
+      <p:sp>
+        <p:nvSpPr>
+          <p:cNvPr id="129" name="TextBox 128"/>
+          <p:cNvSpPr txBox="1"/>
+          <p:nvPr/>
+        </p:nvSpPr>
+        <p:spPr>
+          <a:xfrm>
+            <a:off x="31587490" y="20672156"/>
+            <a:ext cx="599389" cy="365760"/>
+          </a:xfrm>
+          <a:prstGeom prst="rect">
+            <a:avLst/>
+          </a:prstGeom>
+          <a:noFill/>
+        </p:spPr>
+        <p:txBody>
+          <a:bodyPr wrap="square" lIns="0" rIns="0" tIns="0" bIns="0">
+            <a:spAutoFit/>
+          </a:bodyPr>
+          <a:lstStyle/>
+          <a:p>
+            <a:pPr algn="r">
+              <a:lnSpc>
+                <a:spcPct val="100000"/>
+              </a:lnSpc>
+              <a:spcAft>
+                <a:spcPts val="0"/>
+              </a:spcAft>
+            </a:pPr>
+            <a:r>
+              <a:rPr sz="1300" b="0">
+                <a:solidFill>
+                  <a:srgbClr val="1E293B"/>
+                </a:solidFill>
+                <a:latin typeface="Arial"/>
+              </a:rPr>
               <a:t>149</a:t>
             </a:r>
           </a:p>
@@ -7683,14 +8397,14 @@
       </p:sp>
       <p:sp>
         <p:nvSpPr>
-          <p:cNvPr id="113" name="TextBox 112"/>
-          <p:cNvSpPr txBox="1"/>
-          <p:nvPr/>
-        </p:nvSpPr>
-        <p:spPr>
-          <a:xfrm>
-            <a:off x="22197060" y="20361260"/>
-            <a:ext cx="2597353" cy="365760"/>
+          <p:cNvPr id="130" name="TextBox 129"/>
+          <p:cNvSpPr txBox="1"/>
+          <p:nvPr/>
+        </p:nvSpPr>
+        <p:spPr>
+          <a:xfrm>
+            <a:off x="22197060" y="20983052"/>
+            <a:ext cx="1698269" cy="365760"/>
           </a:xfrm>
           <a:prstGeom prst="rect">
             <a:avLst/>
@@ -7718,21 +8432,21 @@
                 </a:solidFill>
                 <a:latin typeface="Arial"/>
               </a:rPr>
-              <a:t>Qwen3-14B  L2</a:t>
-            </a:r>
-          </a:p>
-        </p:txBody>
-      </p:sp>
-      <p:sp>
-        <p:nvSpPr>
-          <p:cNvPr id="114" name="TextBox 113"/>
-          <p:cNvSpPr txBox="1"/>
-          <p:nvPr/>
-        </p:nvSpPr>
-        <p:spPr>
-          <a:xfrm>
-            <a:off x="24794413" y="20361260"/>
-            <a:ext cx="2597353" cy="365760"/>
+              <a:t>14 B  L2</a:t>
+            </a:r>
+          </a:p>
+        </p:txBody>
+      </p:sp>
+      <p:sp>
+        <p:nvSpPr>
+          <p:cNvPr id="131" name="TextBox 130"/>
+          <p:cNvSpPr txBox="1"/>
+          <p:nvPr/>
+        </p:nvSpPr>
+        <p:spPr>
+          <a:xfrm>
+            <a:off x="23895329" y="20983052"/>
+            <a:ext cx="2397556" cy="365760"/>
           </a:xfrm>
           <a:prstGeom prst="rect">
             <a:avLst/>
@@ -7767,13 +8481,55 @@
       </p:sp>
       <p:sp>
         <p:nvSpPr>
-          <p:cNvPr id="115" name="TextBox 114"/>
-          <p:cNvSpPr txBox="1"/>
-          <p:nvPr/>
-        </p:nvSpPr>
-        <p:spPr>
-          <a:xfrm>
-            <a:off x="27391766" y="20361260"/>
+          <p:cNvPr id="132" name="TextBox 131"/>
+          <p:cNvSpPr txBox="1"/>
+          <p:nvPr/>
+        </p:nvSpPr>
+        <p:spPr>
+          <a:xfrm>
+            <a:off x="26292886" y="20983052"/>
+            <a:ext cx="1198778" cy="365760"/>
+          </a:xfrm>
+          <a:prstGeom prst="rect">
+            <a:avLst/>
+          </a:prstGeom>
+          <a:noFill/>
+        </p:spPr>
+        <p:txBody>
+          <a:bodyPr wrap="square" lIns="0" rIns="0" tIns="0" bIns="0">
+            <a:spAutoFit/>
+          </a:bodyPr>
+          <a:lstStyle/>
+          <a:p>
+            <a:pPr algn="r">
+              <a:lnSpc>
+                <a:spcPct val="100000"/>
+              </a:lnSpc>
+              <a:spcAft>
+                <a:spcPts val="0"/>
+              </a:spcAft>
+            </a:pPr>
+            <a:r>
+              <a:rPr sz="1300" b="0">
+                <a:solidFill>
+                  <a:srgbClr val="1E293B"/>
+                </a:solidFill>
+                <a:latin typeface="Arial"/>
+              </a:rPr>
+              <a:t>0.664</a:t>
+            </a:r>
+          </a:p>
+        </p:txBody>
+      </p:sp>
+      <p:sp>
+        <p:nvSpPr>
+          <p:cNvPr id="133" name="TextBox 132"/>
+          <p:cNvSpPr txBox="1"/>
+          <p:nvPr/>
+        </p:nvSpPr>
+        <p:spPr>
+          <a:xfrm>
+            <a:off x="27491664" y="20983052"/>
             <a:ext cx="1298676" cy="365760"/>
           </a:xfrm>
           <a:prstGeom prst="rect">
@@ -7802,20 +8558,20 @@
                 </a:solidFill>
                 <a:latin typeface="Arial"/>
               </a:rPr>
-              <a:t>0.664</a:t>
-            </a:r>
-          </a:p>
-        </p:txBody>
-      </p:sp>
-      <p:sp>
-        <p:nvSpPr>
-          <p:cNvPr id="116" name="TextBox 115"/>
-          <p:cNvSpPr txBox="1"/>
-          <p:nvPr/>
-        </p:nvSpPr>
-        <p:spPr>
-          <a:xfrm>
-            <a:off x="28690443" y="20361260"/>
+              <a:t>0.602</a:t>
+            </a:r>
+          </a:p>
+        </p:txBody>
+      </p:sp>
+      <p:sp>
+        <p:nvSpPr>
+          <p:cNvPr id="134" name="TextBox 133"/>
+          <p:cNvSpPr txBox="1"/>
+          <p:nvPr/>
+        </p:nvSpPr>
+        <p:spPr>
+          <a:xfrm>
+            <a:off x="28790341" y="20983052"/>
             <a:ext cx="1398574" cy="365760"/>
           </a:xfrm>
           <a:prstGeom prst="rect">
@@ -7844,20 +8600,230 @@
                 </a:solidFill>
                 <a:latin typeface="Arial"/>
               </a:rPr>
-              <a:t>0.602</a:t>
-            </a:r>
-          </a:p>
-        </p:txBody>
-      </p:sp>
-      <p:sp>
-        <p:nvSpPr>
-          <p:cNvPr id="117" name="TextBox 116"/>
-          <p:cNvSpPr txBox="1"/>
-          <p:nvPr/>
-        </p:nvSpPr>
-        <p:spPr>
-          <a:xfrm>
-            <a:off x="30089017" y="20361260"/>
+              <a:t>0.606</a:t>
+            </a:r>
+          </a:p>
+        </p:txBody>
+      </p:sp>
+      <p:sp>
+        <p:nvSpPr>
+          <p:cNvPr id="135" name="TextBox 134"/>
+          <p:cNvSpPr txBox="1"/>
+          <p:nvPr/>
+        </p:nvSpPr>
+        <p:spPr>
+          <a:xfrm>
+            <a:off x="30188916" y="20983052"/>
+            <a:ext cx="1398574" cy="365760"/>
+          </a:xfrm>
+          <a:prstGeom prst="rect">
+            <a:avLst/>
+          </a:prstGeom>
+          <a:noFill/>
+        </p:spPr>
+        <p:txBody>
+          <a:bodyPr wrap="square" lIns="0" rIns="0" tIns="0" bIns="0">
+            <a:spAutoFit/>
+          </a:bodyPr>
+          <a:lstStyle/>
+          <a:p>
+            <a:pPr algn="r">
+              <a:lnSpc>
+                <a:spcPct val="100000"/>
+              </a:lnSpc>
+              <a:spcAft>
+                <a:spcPts val="0"/>
+              </a:spcAft>
+            </a:pPr>
+            <a:r>
+              <a:rPr sz="1300" b="0">
+                <a:solidFill>
+                  <a:srgbClr val="1E293B"/>
+                </a:solidFill>
+                <a:latin typeface="Arial"/>
+              </a:rPr>
+              <a:t>0.863</a:t>
+            </a:r>
+          </a:p>
+        </p:txBody>
+      </p:sp>
+      <p:sp>
+        <p:nvSpPr>
+          <p:cNvPr id="136" name="TextBox 135"/>
+          <p:cNvSpPr txBox="1"/>
+          <p:nvPr/>
+        </p:nvSpPr>
+        <p:spPr>
+          <a:xfrm>
+            <a:off x="31587490" y="20983052"/>
+            <a:ext cx="599389" cy="365760"/>
+          </a:xfrm>
+          <a:prstGeom prst="rect">
+            <a:avLst/>
+          </a:prstGeom>
+          <a:noFill/>
+        </p:spPr>
+        <p:txBody>
+          <a:bodyPr wrap="square" lIns="0" rIns="0" tIns="0" bIns="0">
+            <a:spAutoFit/>
+          </a:bodyPr>
+          <a:lstStyle/>
+          <a:p>
+            <a:pPr algn="r">
+              <a:lnSpc>
+                <a:spcPct val="100000"/>
+              </a:lnSpc>
+              <a:spcAft>
+                <a:spcPts val="0"/>
+              </a:spcAft>
+            </a:pPr>
+            <a:r>
+              <a:rPr sz="1300" b="0">
+                <a:solidFill>
+                  <a:srgbClr val="1E293B"/>
+                </a:solidFill>
+                <a:latin typeface="Arial"/>
+              </a:rPr>
+              <a:t>149</a:t>
+            </a:r>
+          </a:p>
+        </p:txBody>
+      </p:sp>
+      <p:sp>
+        <p:nvSpPr>
+          <p:cNvPr id="137" name="TextBox 136"/>
+          <p:cNvSpPr txBox="1"/>
+          <p:nvPr/>
+        </p:nvSpPr>
+        <p:spPr>
+          <a:xfrm>
+            <a:off x="22197060" y="21293948"/>
+            <a:ext cx="1698269" cy="365760"/>
+          </a:xfrm>
+          <a:prstGeom prst="rect">
+            <a:avLst/>
+          </a:prstGeom>
+          <a:noFill/>
+        </p:spPr>
+        <p:txBody>
+          <a:bodyPr wrap="square" lIns="0" rIns="0" tIns="0" bIns="0">
+            <a:spAutoFit/>
+          </a:bodyPr>
+          <a:lstStyle/>
+          <a:p>
+            <a:pPr algn="l">
+              <a:lnSpc>
+                <a:spcPct val="100000"/>
+              </a:lnSpc>
+              <a:spcAft>
+                <a:spcPts val="0"/>
+              </a:spcAft>
+            </a:pPr>
+            <a:r>
+              <a:rPr sz="1300" b="0">
+                <a:solidFill>
+                  <a:srgbClr val="1E293B"/>
+                </a:solidFill>
+                <a:latin typeface="Arial"/>
+              </a:rPr>
+              <a:t>14 B  L3</a:t>
+            </a:r>
+          </a:p>
+        </p:txBody>
+      </p:sp>
+      <p:sp>
+        <p:nvSpPr>
+          <p:cNvPr id="138" name="TextBox 137"/>
+          <p:cNvSpPr txBox="1"/>
+          <p:nvPr/>
+        </p:nvSpPr>
+        <p:spPr>
+          <a:xfrm>
+            <a:off x="23895329" y="21293948"/>
+            <a:ext cx="2397556" cy="365760"/>
+          </a:xfrm>
+          <a:prstGeom prst="rect">
+            <a:avLst/>
+          </a:prstGeom>
+          <a:noFill/>
+        </p:spPr>
+        <p:txBody>
+          <a:bodyPr wrap="square" lIns="0" rIns="0" tIns="0" bIns="0">
+            <a:spAutoFit/>
+          </a:bodyPr>
+          <a:lstStyle/>
+          <a:p>
+            <a:pPr algn="r">
+              <a:lnSpc>
+                <a:spcPct val="100000"/>
+              </a:lnSpc>
+              <a:spcAft>
+                <a:spcPts val="0"/>
+              </a:spcAft>
+            </a:pPr>
+            <a:r>
+              <a:rPr sz="1300" b="0">
+                <a:solidFill>
+                  <a:srgbClr val="1E293B"/>
+                </a:solidFill>
+                <a:latin typeface="Arial"/>
+              </a:rPr>
+              <a:t>artifacts + retrieval</a:t>
+            </a:r>
+          </a:p>
+        </p:txBody>
+      </p:sp>
+      <p:sp>
+        <p:nvSpPr>
+          <p:cNvPr id="139" name="TextBox 138"/>
+          <p:cNvSpPr txBox="1"/>
+          <p:nvPr/>
+        </p:nvSpPr>
+        <p:spPr>
+          <a:xfrm>
+            <a:off x="26292886" y="21293948"/>
+            <a:ext cx="1198778" cy="365760"/>
+          </a:xfrm>
+          <a:prstGeom prst="rect">
+            <a:avLst/>
+          </a:prstGeom>
+          <a:noFill/>
+        </p:spPr>
+        <p:txBody>
+          <a:bodyPr wrap="square" lIns="0" rIns="0" tIns="0" bIns="0">
+            <a:spAutoFit/>
+          </a:bodyPr>
+          <a:lstStyle/>
+          <a:p>
+            <a:pPr algn="r">
+              <a:lnSpc>
+                <a:spcPct val="100000"/>
+              </a:lnSpc>
+              <a:spcAft>
+                <a:spcPts val="0"/>
+              </a:spcAft>
+            </a:pPr>
+            <a:r>
+              <a:rPr sz="1300" b="0">
+                <a:solidFill>
+                  <a:srgbClr val="1E293B"/>
+                </a:solidFill>
+                <a:latin typeface="Arial"/>
+              </a:rPr>
+              <a:t>0.675</a:t>
+            </a:r>
+          </a:p>
+        </p:txBody>
+      </p:sp>
+      <p:sp>
+        <p:nvSpPr>
+          <p:cNvPr id="140" name="TextBox 139"/>
+          <p:cNvSpPr txBox="1"/>
+          <p:nvPr/>
+        </p:nvSpPr>
+        <p:spPr>
+          <a:xfrm>
+            <a:off x="27491664" y="21293948"/>
             <a:ext cx="1298676" cy="365760"/>
           </a:xfrm>
           <a:prstGeom prst="rect">
@@ -7886,21 +8852,21 @@
                 </a:solidFill>
                 <a:latin typeface="Arial"/>
               </a:rPr>
-              <a:t>0.606</a:t>
-            </a:r>
-          </a:p>
-        </p:txBody>
-      </p:sp>
-      <p:sp>
-        <p:nvSpPr>
-          <p:cNvPr id="118" name="TextBox 117"/>
-          <p:cNvSpPr txBox="1"/>
-          <p:nvPr/>
-        </p:nvSpPr>
-        <p:spPr>
-          <a:xfrm>
-            <a:off x="31387694" y="20361260"/>
-            <a:ext cx="799185" cy="365760"/>
+              <a:t>0.614</a:t>
+            </a:r>
+          </a:p>
+        </p:txBody>
+      </p:sp>
+      <p:sp>
+        <p:nvSpPr>
+          <p:cNvPr id="141" name="TextBox 140"/>
+          <p:cNvSpPr txBox="1"/>
+          <p:nvPr/>
+        </p:nvSpPr>
+        <p:spPr>
+          <a:xfrm>
+            <a:off x="28790341" y="21293948"/>
+            <a:ext cx="1398574" cy="365760"/>
           </a:xfrm>
           <a:prstGeom prst="rect">
             <a:avLst/>
@@ -7928,6 +8894,90 @@
                 </a:solidFill>
                 <a:latin typeface="Arial"/>
               </a:rPr>
+              <a:t>0.636</a:t>
+            </a:r>
+          </a:p>
+        </p:txBody>
+      </p:sp>
+      <p:sp>
+        <p:nvSpPr>
+          <p:cNvPr id="142" name="TextBox 141"/>
+          <p:cNvSpPr txBox="1"/>
+          <p:nvPr/>
+        </p:nvSpPr>
+        <p:spPr>
+          <a:xfrm>
+            <a:off x="30188916" y="21293948"/>
+            <a:ext cx="1398574" cy="365760"/>
+          </a:xfrm>
+          <a:prstGeom prst="rect">
+            <a:avLst/>
+          </a:prstGeom>
+          <a:noFill/>
+        </p:spPr>
+        <p:txBody>
+          <a:bodyPr wrap="square" lIns="0" rIns="0" tIns="0" bIns="0">
+            <a:spAutoFit/>
+          </a:bodyPr>
+          <a:lstStyle/>
+          <a:p>
+            <a:pPr algn="r">
+              <a:lnSpc>
+                <a:spcPct val="100000"/>
+              </a:lnSpc>
+              <a:spcAft>
+                <a:spcPts val="0"/>
+              </a:spcAft>
+            </a:pPr>
+            <a:r>
+              <a:rPr sz="1300" b="0">
+                <a:solidFill>
+                  <a:srgbClr val="1E293B"/>
+                </a:solidFill>
+                <a:latin typeface="Arial"/>
+              </a:rPr>
+              <a:t>0.820</a:t>
+            </a:r>
+          </a:p>
+        </p:txBody>
+      </p:sp>
+      <p:sp>
+        <p:nvSpPr>
+          <p:cNvPr id="143" name="TextBox 142"/>
+          <p:cNvSpPr txBox="1"/>
+          <p:nvPr/>
+        </p:nvSpPr>
+        <p:spPr>
+          <a:xfrm>
+            <a:off x="31587490" y="21293948"/>
+            <a:ext cx="599389" cy="365760"/>
+          </a:xfrm>
+          <a:prstGeom prst="rect">
+            <a:avLst/>
+          </a:prstGeom>
+          <a:noFill/>
+        </p:spPr>
+        <p:txBody>
+          <a:bodyPr wrap="square" lIns="0" rIns="0" tIns="0" bIns="0">
+            <a:spAutoFit/>
+          </a:bodyPr>
+          <a:lstStyle/>
+          <a:p>
+            <a:pPr algn="r">
+              <a:lnSpc>
+                <a:spcPct val="100000"/>
+              </a:lnSpc>
+              <a:spcAft>
+                <a:spcPts val="0"/>
+              </a:spcAft>
+            </a:pPr>
+            <a:r>
+              <a:rPr sz="1300" b="0">
+                <a:solidFill>
+                  <a:srgbClr val="1E293B"/>
+                </a:solidFill>
+                <a:latin typeface="Arial"/>
+              </a:rPr>
               <a:t>149</a:t>
             </a:r>
           </a:p>
@@ -7935,14 +8985,14 @@
       </p:sp>
       <p:sp>
         <p:nvSpPr>
-          <p:cNvPr id="119" name="TextBox 118"/>
-          <p:cNvSpPr txBox="1"/>
-          <p:nvPr/>
-        </p:nvSpPr>
-        <p:spPr>
-          <a:xfrm>
-            <a:off x="22197060" y="20672156"/>
-            <a:ext cx="2597353" cy="365760"/>
+          <p:cNvPr id="144" name="TextBox 143"/>
+          <p:cNvSpPr txBox="1"/>
+          <p:nvPr/>
+        </p:nvSpPr>
+        <p:spPr>
+          <a:xfrm>
+            <a:off x="22197060" y="21604844"/>
+            <a:ext cx="1698269" cy="365760"/>
           </a:xfrm>
           <a:prstGeom prst="rect">
             <a:avLst/>
@@ -7970,21 +9020,21 @@
                 </a:solidFill>
                 <a:latin typeface="Arial"/>
               </a:rPr>
-              <a:t>Qwen3-14B  L3</a:t>
-            </a:r>
-          </a:p>
-        </p:txBody>
-      </p:sp>
-      <p:sp>
-        <p:nvSpPr>
-          <p:cNvPr id="120" name="TextBox 119"/>
-          <p:cNvSpPr txBox="1"/>
-          <p:nvPr/>
-        </p:nvSpPr>
-        <p:spPr>
-          <a:xfrm>
-            <a:off x="24794413" y="20672156"/>
-            <a:ext cx="2597353" cy="365760"/>
+              <a:t>27 B  L2</a:t>
+            </a:r>
+          </a:p>
+        </p:txBody>
+      </p:sp>
+      <p:sp>
+        <p:nvSpPr>
+          <p:cNvPr id="145" name="TextBox 144"/>
+          <p:cNvSpPr txBox="1"/>
+          <p:nvPr/>
+        </p:nvSpPr>
+        <p:spPr>
+          <a:xfrm>
+            <a:off x="23895329" y="21604844"/>
+            <a:ext cx="2397556" cy="365760"/>
           </a:xfrm>
           <a:prstGeom prst="rect">
             <a:avLst/>
@@ -8012,6 +9062,300 @@
                 </a:solidFill>
                 <a:latin typeface="Arial"/>
               </a:rPr>
+              <a:t>artifacts</a:t>
+            </a:r>
+          </a:p>
+        </p:txBody>
+      </p:sp>
+      <p:sp>
+        <p:nvSpPr>
+          <p:cNvPr id="146" name="TextBox 145"/>
+          <p:cNvSpPr txBox="1"/>
+          <p:nvPr/>
+        </p:nvSpPr>
+        <p:spPr>
+          <a:xfrm>
+            <a:off x="26292886" y="21604844"/>
+            <a:ext cx="1198778" cy="365760"/>
+          </a:xfrm>
+          <a:prstGeom prst="rect">
+            <a:avLst/>
+          </a:prstGeom>
+          <a:noFill/>
+        </p:spPr>
+        <p:txBody>
+          <a:bodyPr wrap="square" lIns="0" rIns="0" tIns="0" bIns="0">
+            <a:spAutoFit/>
+          </a:bodyPr>
+          <a:lstStyle/>
+          <a:p>
+            <a:pPr algn="r">
+              <a:lnSpc>
+                <a:spcPct val="100000"/>
+              </a:lnSpc>
+              <a:spcAft>
+                <a:spcPts val="0"/>
+              </a:spcAft>
+            </a:pPr>
+            <a:r>
+              <a:rPr sz="1300" b="0">
+                <a:solidFill>
+                  <a:srgbClr val="1E293B"/>
+                </a:solidFill>
+                <a:latin typeface="Arial"/>
+              </a:rPr>
+              <a:t>0.553</a:t>
+            </a:r>
+          </a:p>
+        </p:txBody>
+      </p:sp>
+      <p:sp>
+        <p:nvSpPr>
+          <p:cNvPr id="147" name="TextBox 146"/>
+          <p:cNvSpPr txBox="1"/>
+          <p:nvPr/>
+        </p:nvSpPr>
+        <p:spPr>
+          <a:xfrm>
+            <a:off x="27491664" y="21604844"/>
+            <a:ext cx="1298676" cy="365760"/>
+          </a:xfrm>
+          <a:prstGeom prst="rect">
+            <a:avLst/>
+          </a:prstGeom>
+          <a:noFill/>
+        </p:spPr>
+        <p:txBody>
+          <a:bodyPr wrap="square" lIns="0" rIns="0" tIns="0" bIns="0">
+            <a:spAutoFit/>
+          </a:bodyPr>
+          <a:lstStyle/>
+          <a:p>
+            <a:pPr algn="r">
+              <a:lnSpc>
+                <a:spcPct val="100000"/>
+              </a:lnSpc>
+              <a:spcAft>
+                <a:spcPts val="0"/>
+              </a:spcAft>
+            </a:pPr>
+            <a:r>
+              <a:rPr sz="1300" b="0">
+                <a:solidFill>
+                  <a:srgbClr val="1E293B"/>
+                </a:solidFill>
+                <a:latin typeface="Arial"/>
+              </a:rPr>
+              <a:t>0.518</a:t>
+            </a:r>
+          </a:p>
+        </p:txBody>
+      </p:sp>
+      <p:sp>
+        <p:nvSpPr>
+          <p:cNvPr id="148" name="TextBox 147"/>
+          <p:cNvSpPr txBox="1"/>
+          <p:nvPr/>
+        </p:nvSpPr>
+        <p:spPr>
+          <a:xfrm>
+            <a:off x="28790341" y="21604844"/>
+            <a:ext cx="1398574" cy="365760"/>
+          </a:xfrm>
+          <a:prstGeom prst="rect">
+            <a:avLst/>
+          </a:prstGeom>
+          <a:noFill/>
+        </p:spPr>
+        <p:txBody>
+          <a:bodyPr wrap="square" lIns="0" rIns="0" tIns="0" bIns="0">
+            <a:spAutoFit/>
+          </a:bodyPr>
+          <a:lstStyle/>
+          <a:p>
+            <a:pPr algn="r">
+              <a:lnSpc>
+                <a:spcPct val="100000"/>
+              </a:lnSpc>
+              <a:spcAft>
+                <a:spcPts val="0"/>
+              </a:spcAft>
+            </a:pPr>
+            <a:r>
+              <a:rPr sz="1300" b="0">
+                <a:solidFill>
+                  <a:srgbClr val="1E293B"/>
+                </a:solidFill>
+                <a:latin typeface="Arial"/>
+              </a:rPr>
+              <a:t>0.212</a:t>
+            </a:r>
+          </a:p>
+        </p:txBody>
+      </p:sp>
+      <p:sp>
+        <p:nvSpPr>
+          <p:cNvPr id="149" name="TextBox 148"/>
+          <p:cNvSpPr txBox="1"/>
+          <p:nvPr/>
+        </p:nvSpPr>
+        <p:spPr>
+          <a:xfrm>
+            <a:off x="30188916" y="21604844"/>
+            <a:ext cx="1398574" cy="365760"/>
+          </a:xfrm>
+          <a:prstGeom prst="rect">
+            <a:avLst/>
+          </a:prstGeom>
+          <a:noFill/>
+        </p:spPr>
+        <p:txBody>
+          <a:bodyPr wrap="square" lIns="0" rIns="0" tIns="0" bIns="0">
+            <a:spAutoFit/>
+          </a:bodyPr>
+          <a:lstStyle/>
+          <a:p>
+            <a:pPr algn="r">
+              <a:lnSpc>
+                <a:spcPct val="100000"/>
+              </a:lnSpc>
+              <a:spcAft>
+                <a:spcPts val="0"/>
+              </a:spcAft>
+            </a:pPr>
+            <a:r>
+              <a:rPr sz="1300" b="0">
+                <a:solidFill>
+                  <a:srgbClr val="1E293B"/>
+                </a:solidFill>
+                <a:latin typeface="Arial"/>
+              </a:rPr>
+              <a:t>0.951</a:t>
+            </a:r>
+          </a:p>
+        </p:txBody>
+      </p:sp>
+      <p:sp>
+        <p:nvSpPr>
+          <p:cNvPr id="150" name="TextBox 149"/>
+          <p:cNvSpPr txBox="1"/>
+          <p:nvPr/>
+        </p:nvSpPr>
+        <p:spPr>
+          <a:xfrm>
+            <a:off x="31587490" y="21604844"/>
+            <a:ext cx="599389" cy="365760"/>
+          </a:xfrm>
+          <a:prstGeom prst="rect">
+            <a:avLst/>
+          </a:prstGeom>
+          <a:noFill/>
+        </p:spPr>
+        <p:txBody>
+          <a:bodyPr wrap="square" lIns="0" rIns="0" tIns="0" bIns="0">
+            <a:spAutoFit/>
+          </a:bodyPr>
+          <a:lstStyle/>
+          <a:p>
+            <a:pPr algn="r">
+              <a:lnSpc>
+                <a:spcPct val="100000"/>
+              </a:lnSpc>
+              <a:spcAft>
+                <a:spcPts val="0"/>
+              </a:spcAft>
+            </a:pPr>
+            <a:r>
+              <a:rPr sz="1300" b="0">
+                <a:solidFill>
+                  <a:srgbClr val="1E293B"/>
+                </a:solidFill>
+                <a:latin typeface="Arial"/>
+              </a:rPr>
+              <a:t>149</a:t>
+            </a:r>
+          </a:p>
+        </p:txBody>
+      </p:sp>
+      <p:sp>
+        <p:nvSpPr>
+          <p:cNvPr id="151" name="TextBox 150"/>
+          <p:cNvSpPr txBox="1"/>
+          <p:nvPr/>
+        </p:nvSpPr>
+        <p:spPr>
+          <a:xfrm>
+            <a:off x="22197060" y="21915740"/>
+            <a:ext cx="1698269" cy="365760"/>
+          </a:xfrm>
+          <a:prstGeom prst="rect">
+            <a:avLst/>
+          </a:prstGeom>
+          <a:noFill/>
+        </p:spPr>
+        <p:txBody>
+          <a:bodyPr wrap="square" lIns="0" rIns="0" tIns="0" bIns="0">
+            <a:spAutoFit/>
+          </a:bodyPr>
+          <a:lstStyle/>
+          <a:p>
+            <a:pPr algn="l">
+              <a:lnSpc>
+                <a:spcPct val="100000"/>
+              </a:lnSpc>
+              <a:spcAft>
+                <a:spcPts val="0"/>
+              </a:spcAft>
+            </a:pPr>
+            <a:r>
+              <a:rPr sz="1300" b="0">
+                <a:solidFill>
+                  <a:srgbClr val="1E293B"/>
+                </a:solidFill>
+                <a:latin typeface="Arial"/>
+              </a:rPr>
+              <a:t>27 B  L3</a:t>
+            </a:r>
+          </a:p>
+        </p:txBody>
+      </p:sp>
+      <p:sp>
+        <p:nvSpPr>
+          <p:cNvPr id="152" name="TextBox 151"/>
+          <p:cNvSpPr txBox="1"/>
+          <p:nvPr/>
+        </p:nvSpPr>
+        <p:spPr>
+          <a:xfrm>
+            <a:off x="23895329" y="21915740"/>
+            <a:ext cx="2397556" cy="365760"/>
+          </a:xfrm>
+          <a:prstGeom prst="rect">
+            <a:avLst/>
+          </a:prstGeom>
+          <a:noFill/>
+        </p:spPr>
+        <p:txBody>
+          <a:bodyPr wrap="square" lIns="0" rIns="0" tIns="0" bIns="0">
+            <a:spAutoFit/>
+          </a:bodyPr>
+          <a:lstStyle/>
+          <a:p>
+            <a:pPr algn="r">
+              <a:lnSpc>
+                <a:spcPct val="100000"/>
+              </a:lnSpc>
+              <a:spcAft>
+                <a:spcPts val="0"/>
+              </a:spcAft>
+            </a:pPr>
+            <a:r>
+              <a:rPr sz="1300" b="0">
+                <a:solidFill>
+                  <a:srgbClr val="1E293B"/>
+                </a:solidFill>
+                <a:latin typeface="Arial"/>
+              </a:rPr>
               <a:t>artifacts + retrieval</a:t>
             </a:r>
           </a:p>
@@ -8019,13 +9363,55 @@
       </p:sp>
       <p:sp>
         <p:nvSpPr>
-          <p:cNvPr id="121" name="TextBox 120"/>
-          <p:cNvSpPr txBox="1"/>
-          <p:nvPr/>
-        </p:nvSpPr>
-        <p:spPr>
-          <a:xfrm>
-            <a:off x="27391766" y="20672156"/>
+          <p:cNvPr id="153" name="TextBox 152"/>
+          <p:cNvSpPr txBox="1"/>
+          <p:nvPr/>
+        </p:nvSpPr>
+        <p:spPr>
+          <a:xfrm>
+            <a:off x="26292886" y="21915740"/>
+            <a:ext cx="1198778" cy="365760"/>
+          </a:xfrm>
+          <a:prstGeom prst="rect">
+            <a:avLst/>
+          </a:prstGeom>
+          <a:noFill/>
+        </p:spPr>
+        <p:txBody>
+          <a:bodyPr wrap="square" lIns="0" rIns="0" tIns="0" bIns="0">
+            <a:spAutoFit/>
+          </a:bodyPr>
+          <a:lstStyle/>
+          <a:p>
+            <a:pPr algn="r">
+              <a:lnSpc>
+                <a:spcPct val="100000"/>
+              </a:lnSpc>
+              <a:spcAft>
+                <a:spcPts val="0"/>
+              </a:spcAft>
+            </a:pPr>
+            <a:r>
+              <a:rPr sz="1300" b="0">
+                <a:solidFill>
+                  <a:srgbClr val="1E293B"/>
+                </a:solidFill>
+                <a:latin typeface="Arial"/>
+              </a:rPr>
+              <a:t>0.702</a:t>
+            </a:r>
+          </a:p>
+        </p:txBody>
+      </p:sp>
+      <p:sp>
+        <p:nvSpPr>
+          <p:cNvPr id="154" name="TextBox 153"/>
+          <p:cNvSpPr txBox="1"/>
+          <p:nvPr/>
+        </p:nvSpPr>
+        <p:spPr>
+          <a:xfrm>
+            <a:off x="27491664" y="21915740"/>
             <a:ext cx="1298676" cy="365760"/>
           </a:xfrm>
           <a:prstGeom prst="rect">
@@ -8054,20 +9440,20 @@
                 </a:solidFill>
                 <a:latin typeface="Arial"/>
               </a:rPr>
-              <a:t>0.675</a:t>
-            </a:r>
-          </a:p>
-        </p:txBody>
-      </p:sp>
-      <p:sp>
-        <p:nvSpPr>
-          <p:cNvPr id="122" name="TextBox 121"/>
-          <p:cNvSpPr txBox="1"/>
-          <p:nvPr/>
-        </p:nvSpPr>
-        <p:spPr>
-          <a:xfrm>
-            <a:off x="28690443" y="20672156"/>
+              <a:t>0.702</a:t>
+            </a:r>
+          </a:p>
+        </p:txBody>
+      </p:sp>
+      <p:sp>
+        <p:nvSpPr>
+          <p:cNvPr id="155" name="TextBox 154"/>
+          <p:cNvSpPr txBox="1"/>
+          <p:nvPr/>
+        </p:nvSpPr>
+        <p:spPr>
+          <a:xfrm>
+            <a:off x="28790341" y="21915740"/>
             <a:ext cx="1398574" cy="365760"/>
           </a:xfrm>
           <a:prstGeom prst="rect">
@@ -8096,20 +9482,230 @@
                 </a:solidFill>
                 <a:latin typeface="Arial"/>
               </a:rPr>
-              <a:t>0.614</a:t>
-            </a:r>
-          </a:p>
-        </p:txBody>
-      </p:sp>
-      <p:sp>
-        <p:nvSpPr>
-          <p:cNvPr id="123" name="TextBox 122"/>
-          <p:cNvSpPr txBox="1"/>
-          <p:nvPr/>
-        </p:nvSpPr>
-        <p:spPr>
-          <a:xfrm>
-            <a:off x="30089017" y="20672156"/>
+              <a:t>0.242</a:t>
+            </a:r>
+          </a:p>
+        </p:txBody>
+      </p:sp>
+      <p:sp>
+        <p:nvSpPr>
+          <p:cNvPr id="156" name="TextBox 155"/>
+          <p:cNvSpPr txBox="1"/>
+          <p:nvPr/>
+        </p:nvSpPr>
+        <p:spPr>
+          <a:xfrm>
+            <a:off x="30188916" y="21915740"/>
+            <a:ext cx="1398574" cy="365760"/>
+          </a:xfrm>
+          <a:prstGeom prst="rect">
+            <a:avLst/>
+          </a:prstGeom>
+          <a:noFill/>
+        </p:spPr>
+        <p:txBody>
+          <a:bodyPr wrap="square" lIns="0" rIns="0" tIns="0" bIns="0">
+            <a:spAutoFit/>
+          </a:bodyPr>
+          <a:lstStyle/>
+          <a:p>
+            <a:pPr algn="r">
+              <a:lnSpc>
+                <a:spcPct val="100000"/>
+              </a:lnSpc>
+              <a:spcAft>
+                <a:spcPts val="0"/>
+              </a:spcAft>
+            </a:pPr>
+            <a:r>
+              <a:rPr sz="1300" b="0">
+                <a:solidFill>
+                  <a:srgbClr val="1E293B"/>
+                </a:solidFill>
+                <a:latin typeface="Arial"/>
+              </a:rPr>
+              <a:t>0.968</a:t>
+            </a:r>
+          </a:p>
+        </p:txBody>
+      </p:sp>
+      <p:sp>
+        <p:nvSpPr>
+          <p:cNvPr id="157" name="TextBox 156"/>
+          <p:cNvSpPr txBox="1"/>
+          <p:nvPr/>
+        </p:nvSpPr>
+        <p:spPr>
+          <a:xfrm>
+            <a:off x="31587490" y="21915740"/>
+            <a:ext cx="599389" cy="365760"/>
+          </a:xfrm>
+          <a:prstGeom prst="rect">
+            <a:avLst/>
+          </a:prstGeom>
+          <a:noFill/>
+        </p:spPr>
+        <p:txBody>
+          <a:bodyPr wrap="square" lIns="0" rIns="0" tIns="0" bIns="0">
+            <a:spAutoFit/>
+          </a:bodyPr>
+          <a:lstStyle/>
+          <a:p>
+            <a:pPr algn="r">
+              <a:lnSpc>
+                <a:spcPct val="100000"/>
+              </a:lnSpc>
+              <a:spcAft>
+                <a:spcPts val="0"/>
+              </a:spcAft>
+            </a:pPr>
+            <a:r>
+              <a:rPr sz="1300" b="0">
+                <a:solidFill>
+                  <a:srgbClr val="1E293B"/>
+                </a:solidFill>
+                <a:latin typeface="Arial"/>
+              </a:rPr>
+              <a:t>92</a:t>
+            </a:r>
+          </a:p>
+        </p:txBody>
+      </p:sp>
+      <p:sp>
+        <p:nvSpPr>
+          <p:cNvPr id="158" name="TextBox 157"/>
+          <p:cNvSpPr txBox="1"/>
+          <p:nvPr/>
+        </p:nvSpPr>
+        <p:spPr>
+          <a:xfrm>
+            <a:off x="22197060" y="22226636"/>
+            <a:ext cx="1698269" cy="365760"/>
+          </a:xfrm>
+          <a:prstGeom prst="rect">
+            <a:avLst/>
+          </a:prstGeom>
+          <a:noFill/>
+        </p:spPr>
+        <p:txBody>
+          <a:bodyPr wrap="square" lIns="0" rIns="0" tIns="0" bIns="0">
+            <a:spAutoFit/>
+          </a:bodyPr>
+          <a:lstStyle/>
+          <a:p>
+            <a:pPr algn="l">
+              <a:lnSpc>
+                <a:spcPct val="100000"/>
+              </a:lnSpc>
+              <a:spcAft>
+                <a:spcPts val="0"/>
+              </a:spcAft>
+            </a:pPr>
+            <a:r>
+              <a:rPr sz="1300" b="0">
+                <a:solidFill>
+                  <a:srgbClr val="1E293B"/>
+                </a:solidFill>
+                <a:latin typeface="Arial"/>
+              </a:rPr>
+              <a:t>30 B  L2</a:t>
+            </a:r>
+          </a:p>
+        </p:txBody>
+      </p:sp>
+      <p:sp>
+        <p:nvSpPr>
+          <p:cNvPr id="159" name="TextBox 158"/>
+          <p:cNvSpPr txBox="1"/>
+          <p:nvPr/>
+        </p:nvSpPr>
+        <p:spPr>
+          <a:xfrm>
+            <a:off x="23895329" y="22226636"/>
+            <a:ext cx="2397556" cy="365760"/>
+          </a:xfrm>
+          <a:prstGeom prst="rect">
+            <a:avLst/>
+          </a:prstGeom>
+          <a:noFill/>
+        </p:spPr>
+        <p:txBody>
+          <a:bodyPr wrap="square" lIns="0" rIns="0" tIns="0" bIns="0">
+            <a:spAutoFit/>
+          </a:bodyPr>
+          <a:lstStyle/>
+          <a:p>
+            <a:pPr algn="r">
+              <a:lnSpc>
+                <a:spcPct val="100000"/>
+              </a:lnSpc>
+              <a:spcAft>
+                <a:spcPts val="0"/>
+              </a:spcAft>
+            </a:pPr>
+            <a:r>
+              <a:rPr sz="1300" b="0">
+                <a:solidFill>
+                  <a:srgbClr val="1E293B"/>
+                </a:solidFill>
+                <a:latin typeface="Arial"/>
+              </a:rPr>
+              <a:t>artifacts</a:t>
+            </a:r>
+          </a:p>
+        </p:txBody>
+      </p:sp>
+      <p:sp>
+        <p:nvSpPr>
+          <p:cNvPr id="160" name="TextBox 159"/>
+          <p:cNvSpPr txBox="1"/>
+          <p:nvPr/>
+        </p:nvSpPr>
+        <p:spPr>
+          <a:xfrm>
+            <a:off x="26292886" y="22226636"/>
+            <a:ext cx="1198778" cy="365760"/>
+          </a:xfrm>
+          <a:prstGeom prst="rect">
+            <a:avLst/>
+          </a:prstGeom>
+          <a:noFill/>
+        </p:spPr>
+        <p:txBody>
+          <a:bodyPr wrap="square" lIns="0" rIns="0" tIns="0" bIns="0">
+            <a:spAutoFit/>
+          </a:bodyPr>
+          <a:lstStyle/>
+          <a:p>
+            <a:pPr algn="r">
+              <a:lnSpc>
+                <a:spcPct val="100000"/>
+              </a:lnSpc>
+              <a:spcAft>
+                <a:spcPts val="0"/>
+              </a:spcAft>
+            </a:pPr>
+            <a:r>
+              <a:rPr sz="1300" b="0">
+                <a:solidFill>
+                  <a:srgbClr val="1E293B"/>
+                </a:solidFill>
+                <a:latin typeface="Arial"/>
+              </a:rPr>
+              <a:t>0.821</a:t>
+            </a:r>
+          </a:p>
+        </p:txBody>
+      </p:sp>
+      <p:sp>
+        <p:nvSpPr>
+          <p:cNvPr id="161" name="TextBox 160"/>
+          <p:cNvSpPr txBox="1"/>
+          <p:nvPr/>
+        </p:nvSpPr>
+        <p:spPr>
+          <a:xfrm>
+            <a:off x="27491664" y="22226636"/>
             <a:ext cx="1298676" cy="365760"/>
           </a:xfrm>
           <a:prstGeom prst="rect">
@@ -8138,21 +9734,21 @@
                 </a:solidFill>
                 <a:latin typeface="Arial"/>
               </a:rPr>
-              <a:t>0.636</a:t>
-            </a:r>
-          </a:p>
-        </p:txBody>
-      </p:sp>
-      <p:sp>
-        <p:nvSpPr>
-          <p:cNvPr id="124" name="TextBox 123"/>
-          <p:cNvSpPr txBox="1"/>
-          <p:nvPr/>
-        </p:nvSpPr>
-        <p:spPr>
-          <a:xfrm>
-            <a:off x="31387694" y="20672156"/>
-            <a:ext cx="799185" cy="365760"/>
+              <a:t>0.769</a:t>
+            </a:r>
+          </a:p>
+        </p:txBody>
+      </p:sp>
+      <p:sp>
+        <p:nvSpPr>
+          <p:cNvPr id="162" name="TextBox 161"/>
+          <p:cNvSpPr txBox="1"/>
+          <p:nvPr/>
+        </p:nvSpPr>
+        <p:spPr>
+          <a:xfrm>
+            <a:off x="28790341" y="22226636"/>
+            <a:ext cx="1398574" cy="365760"/>
           </a:xfrm>
           <a:prstGeom prst="rect">
             <a:avLst/>
@@ -8180,34 +9776,34 @@
                 </a:solidFill>
                 <a:latin typeface="Arial"/>
               </a:rPr>
-              <a:t>149</a:t>
-            </a:r>
-          </a:p>
-        </p:txBody>
-      </p:sp>
-      <p:sp>
-        <p:nvSpPr>
-          <p:cNvPr id="125" name="TextBox 124"/>
-          <p:cNvSpPr txBox="1"/>
-          <p:nvPr/>
-        </p:nvSpPr>
-        <p:spPr>
-          <a:xfrm>
-            <a:off x="22197060" y="20983052"/>
-            <a:ext cx="2597353" cy="365760"/>
-          </a:xfrm>
-          <a:prstGeom prst="rect">
-            <a:avLst/>
-          </a:prstGeom>
-          <a:noFill/>
-        </p:spPr>
-        <p:txBody>
-          <a:bodyPr wrap="square" lIns="0" rIns="0" tIns="0" bIns="0">
-            <a:spAutoFit/>
-          </a:bodyPr>
-          <a:lstStyle/>
-          <a:p>
-            <a:pPr algn="l">
+              <a:t>0.200</a:t>
+            </a:r>
+          </a:p>
+        </p:txBody>
+      </p:sp>
+      <p:sp>
+        <p:nvSpPr>
+          <p:cNvPr id="163" name="TextBox 162"/>
+          <p:cNvSpPr txBox="1"/>
+          <p:nvPr/>
+        </p:nvSpPr>
+        <p:spPr>
+          <a:xfrm>
+            <a:off x="30188916" y="22226636"/>
+            <a:ext cx="1398574" cy="365760"/>
+          </a:xfrm>
+          <a:prstGeom prst="rect">
+            <a:avLst/>
+          </a:prstGeom>
+          <a:noFill/>
+        </p:spPr>
+        <p:txBody>
+          <a:bodyPr wrap="square" lIns="0" rIns="0" tIns="0" bIns="0">
+            <a:spAutoFit/>
+          </a:bodyPr>
+          <a:lstStyle/>
+          <a:p>
+            <a:pPr algn="r">
               <a:lnSpc>
                 <a:spcPct val="100000"/>
               </a:lnSpc>
@@ -8222,21 +9818,21 @@
                 </a:solidFill>
                 <a:latin typeface="Arial"/>
               </a:rPr>
-              <a:t>Qwen3.8-27B  L2</a:t>
-            </a:r>
-          </a:p>
-        </p:txBody>
-      </p:sp>
-      <p:sp>
-        <p:nvSpPr>
-          <p:cNvPr id="126" name="TextBox 125"/>
-          <p:cNvSpPr txBox="1"/>
-          <p:nvPr/>
-        </p:nvSpPr>
-        <p:spPr>
-          <a:xfrm>
-            <a:off x="24794413" y="20983052"/>
-            <a:ext cx="2597353" cy="365760"/>
+              <a:t>0.836</a:t>
+            </a:r>
+          </a:p>
+        </p:txBody>
+      </p:sp>
+      <p:sp>
+        <p:nvSpPr>
+          <p:cNvPr id="164" name="TextBox 163"/>
+          <p:cNvSpPr txBox="1"/>
+          <p:nvPr/>
+        </p:nvSpPr>
+        <p:spPr>
+          <a:xfrm>
+            <a:off x="31587490" y="22226636"/>
+            <a:ext cx="599389" cy="365760"/>
           </a:xfrm>
           <a:prstGeom prst="rect">
             <a:avLst/>
@@ -8264,678 +9860,6 @@
                 </a:solidFill>
                 <a:latin typeface="Arial"/>
               </a:rPr>
-              <a:t>artifacts</a:t>
-            </a:r>
-          </a:p>
-        </p:txBody>
-      </p:sp>
-      <p:sp>
-        <p:nvSpPr>
-          <p:cNvPr id="127" name="TextBox 126"/>
-          <p:cNvSpPr txBox="1"/>
-          <p:nvPr/>
-        </p:nvSpPr>
-        <p:spPr>
-          <a:xfrm>
-            <a:off x="27391766" y="20983052"/>
-            <a:ext cx="1298676" cy="365760"/>
-          </a:xfrm>
-          <a:prstGeom prst="rect">
-            <a:avLst/>
-          </a:prstGeom>
-          <a:noFill/>
-        </p:spPr>
-        <p:txBody>
-          <a:bodyPr wrap="square" lIns="0" rIns="0" tIns="0" bIns="0">
-            <a:spAutoFit/>
-          </a:bodyPr>
-          <a:lstStyle/>
-          <a:p>
-            <a:pPr algn="r">
-              <a:lnSpc>
-                <a:spcPct val="100000"/>
-              </a:lnSpc>
-              <a:spcAft>
-                <a:spcPts val="0"/>
-              </a:spcAft>
-            </a:pPr>
-            <a:r>
-              <a:rPr sz="1300" b="0">
-                <a:solidFill>
-                  <a:srgbClr val="1E293B"/>
-                </a:solidFill>
-                <a:latin typeface="Arial"/>
-              </a:rPr>
-              <a:t>0.553</a:t>
-            </a:r>
-          </a:p>
-        </p:txBody>
-      </p:sp>
-      <p:sp>
-        <p:nvSpPr>
-          <p:cNvPr id="128" name="TextBox 127"/>
-          <p:cNvSpPr txBox="1"/>
-          <p:nvPr/>
-        </p:nvSpPr>
-        <p:spPr>
-          <a:xfrm>
-            <a:off x="28690443" y="20983052"/>
-            <a:ext cx="1398574" cy="365760"/>
-          </a:xfrm>
-          <a:prstGeom prst="rect">
-            <a:avLst/>
-          </a:prstGeom>
-          <a:noFill/>
-        </p:spPr>
-        <p:txBody>
-          <a:bodyPr wrap="square" lIns="0" rIns="0" tIns="0" bIns="0">
-            <a:spAutoFit/>
-          </a:bodyPr>
-          <a:lstStyle/>
-          <a:p>
-            <a:pPr algn="r">
-              <a:lnSpc>
-                <a:spcPct val="100000"/>
-              </a:lnSpc>
-              <a:spcAft>
-                <a:spcPts val="0"/>
-              </a:spcAft>
-            </a:pPr>
-            <a:r>
-              <a:rPr sz="1300" b="0">
-                <a:solidFill>
-                  <a:srgbClr val="1E293B"/>
-                </a:solidFill>
-                <a:latin typeface="Arial"/>
-              </a:rPr>
-              <a:t>0.518</a:t>
-            </a:r>
-          </a:p>
-        </p:txBody>
-      </p:sp>
-      <p:sp>
-        <p:nvSpPr>
-          <p:cNvPr id="129" name="TextBox 128"/>
-          <p:cNvSpPr txBox="1"/>
-          <p:nvPr/>
-        </p:nvSpPr>
-        <p:spPr>
-          <a:xfrm>
-            <a:off x="30089017" y="20983052"/>
-            <a:ext cx="1298676" cy="365760"/>
-          </a:xfrm>
-          <a:prstGeom prst="rect">
-            <a:avLst/>
-          </a:prstGeom>
-          <a:noFill/>
-        </p:spPr>
-        <p:txBody>
-          <a:bodyPr wrap="square" lIns="0" rIns="0" tIns="0" bIns="0">
-            <a:spAutoFit/>
-          </a:bodyPr>
-          <a:lstStyle/>
-          <a:p>
-            <a:pPr algn="r">
-              <a:lnSpc>
-                <a:spcPct val="100000"/>
-              </a:lnSpc>
-              <a:spcAft>
-                <a:spcPts val="0"/>
-              </a:spcAft>
-            </a:pPr>
-            <a:r>
-              <a:rPr sz="1300" b="0">
-                <a:solidFill>
-                  <a:srgbClr val="1E293B"/>
-                </a:solidFill>
-                <a:latin typeface="Arial"/>
-              </a:rPr>
-              <a:t>0.212</a:t>
-            </a:r>
-          </a:p>
-        </p:txBody>
-      </p:sp>
-      <p:sp>
-        <p:nvSpPr>
-          <p:cNvPr id="130" name="TextBox 129"/>
-          <p:cNvSpPr txBox="1"/>
-          <p:nvPr/>
-        </p:nvSpPr>
-        <p:spPr>
-          <a:xfrm>
-            <a:off x="31387694" y="20983052"/>
-            <a:ext cx="799185" cy="365760"/>
-          </a:xfrm>
-          <a:prstGeom prst="rect">
-            <a:avLst/>
-          </a:prstGeom>
-          <a:noFill/>
-        </p:spPr>
-        <p:txBody>
-          <a:bodyPr wrap="square" lIns="0" rIns="0" tIns="0" bIns="0">
-            <a:spAutoFit/>
-          </a:bodyPr>
-          <a:lstStyle/>
-          <a:p>
-            <a:pPr algn="r">
-              <a:lnSpc>
-                <a:spcPct val="100000"/>
-              </a:lnSpc>
-              <a:spcAft>
-                <a:spcPts val="0"/>
-              </a:spcAft>
-            </a:pPr>
-            <a:r>
-              <a:rPr sz="1300" b="0">
-                <a:solidFill>
-                  <a:srgbClr val="1E293B"/>
-                </a:solidFill>
-                <a:latin typeface="Arial"/>
-              </a:rPr>
-              <a:t>149</a:t>
-            </a:r>
-          </a:p>
-        </p:txBody>
-      </p:sp>
-      <p:sp>
-        <p:nvSpPr>
-          <p:cNvPr id="131" name="TextBox 130"/>
-          <p:cNvSpPr txBox="1"/>
-          <p:nvPr/>
-        </p:nvSpPr>
-        <p:spPr>
-          <a:xfrm>
-            <a:off x="22197060" y="21293948"/>
-            <a:ext cx="2597353" cy="365760"/>
-          </a:xfrm>
-          <a:prstGeom prst="rect">
-            <a:avLst/>
-          </a:prstGeom>
-          <a:noFill/>
-        </p:spPr>
-        <p:txBody>
-          <a:bodyPr wrap="square" lIns="0" rIns="0" tIns="0" bIns="0">
-            <a:spAutoFit/>
-          </a:bodyPr>
-          <a:lstStyle/>
-          <a:p>
-            <a:pPr algn="l">
-              <a:lnSpc>
-                <a:spcPct val="100000"/>
-              </a:lnSpc>
-              <a:spcAft>
-                <a:spcPts val="0"/>
-              </a:spcAft>
-            </a:pPr>
-            <a:r>
-              <a:rPr sz="1300" b="1">
-                <a:solidFill>
-                  <a:srgbClr val="1C6FB5"/>
-                </a:solidFill>
-                <a:latin typeface="Arial"/>
-              </a:rPr>
-              <a:t>Qwen3.8-27B  L3</a:t>
-            </a:r>
-          </a:p>
-        </p:txBody>
-      </p:sp>
-      <p:sp>
-        <p:nvSpPr>
-          <p:cNvPr id="132" name="TextBox 131"/>
-          <p:cNvSpPr txBox="1"/>
-          <p:nvPr/>
-        </p:nvSpPr>
-        <p:spPr>
-          <a:xfrm>
-            <a:off x="24794413" y="21293948"/>
-            <a:ext cx="2597353" cy="365760"/>
-          </a:xfrm>
-          <a:prstGeom prst="rect">
-            <a:avLst/>
-          </a:prstGeom>
-          <a:noFill/>
-        </p:spPr>
-        <p:txBody>
-          <a:bodyPr wrap="square" lIns="0" rIns="0" tIns="0" bIns="0">
-            <a:spAutoFit/>
-          </a:bodyPr>
-          <a:lstStyle/>
-          <a:p>
-            <a:pPr algn="r">
-              <a:lnSpc>
-                <a:spcPct val="100000"/>
-              </a:lnSpc>
-              <a:spcAft>
-                <a:spcPts val="0"/>
-              </a:spcAft>
-            </a:pPr>
-            <a:r>
-              <a:rPr sz="1300" b="1">
-                <a:solidFill>
-                  <a:srgbClr val="1C6FB5"/>
-                </a:solidFill>
-                <a:latin typeface="Arial"/>
-              </a:rPr>
-              <a:t>artifacts + retrieval</a:t>
-            </a:r>
-          </a:p>
-        </p:txBody>
-      </p:sp>
-      <p:sp>
-        <p:nvSpPr>
-          <p:cNvPr id="133" name="TextBox 132"/>
-          <p:cNvSpPr txBox="1"/>
-          <p:nvPr/>
-        </p:nvSpPr>
-        <p:spPr>
-          <a:xfrm>
-            <a:off x="27391766" y="21293948"/>
-            <a:ext cx="1298676" cy="365760"/>
-          </a:xfrm>
-          <a:prstGeom prst="rect">
-            <a:avLst/>
-          </a:prstGeom>
-          <a:noFill/>
-        </p:spPr>
-        <p:txBody>
-          <a:bodyPr wrap="square" lIns="0" rIns="0" tIns="0" bIns="0">
-            <a:spAutoFit/>
-          </a:bodyPr>
-          <a:lstStyle/>
-          <a:p>
-            <a:pPr algn="r">
-              <a:lnSpc>
-                <a:spcPct val="100000"/>
-              </a:lnSpc>
-              <a:spcAft>
-                <a:spcPts val="0"/>
-              </a:spcAft>
-            </a:pPr>
-            <a:r>
-              <a:rPr sz="1300" b="1">
-                <a:solidFill>
-                  <a:srgbClr val="1C6FB5"/>
-                </a:solidFill>
-                <a:latin typeface="Arial"/>
-              </a:rPr>
-              <a:t>0.702</a:t>
-            </a:r>
-          </a:p>
-        </p:txBody>
-      </p:sp>
-      <p:sp>
-        <p:nvSpPr>
-          <p:cNvPr id="134" name="TextBox 133"/>
-          <p:cNvSpPr txBox="1"/>
-          <p:nvPr/>
-        </p:nvSpPr>
-        <p:spPr>
-          <a:xfrm>
-            <a:off x="28690443" y="21293948"/>
-            <a:ext cx="1398574" cy="365760"/>
-          </a:xfrm>
-          <a:prstGeom prst="rect">
-            <a:avLst/>
-          </a:prstGeom>
-          <a:noFill/>
-        </p:spPr>
-        <p:txBody>
-          <a:bodyPr wrap="square" lIns="0" rIns="0" tIns="0" bIns="0">
-            <a:spAutoFit/>
-          </a:bodyPr>
-          <a:lstStyle/>
-          <a:p>
-            <a:pPr algn="r">
-              <a:lnSpc>
-                <a:spcPct val="100000"/>
-              </a:lnSpc>
-              <a:spcAft>
-                <a:spcPts val="0"/>
-              </a:spcAft>
-            </a:pPr>
-            <a:r>
-              <a:rPr sz="1300" b="1">
-                <a:solidFill>
-                  <a:srgbClr val="1C6FB5"/>
-                </a:solidFill>
-                <a:latin typeface="Arial"/>
-              </a:rPr>
-              <a:t>0.702</a:t>
-            </a:r>
-          </a:p>
-        </p:txBody>
-      </p:sp>
-      <p:sp>
-        <p:nvSpPr>
-          <p:cNvPr id="135" name="TextBox 134"/>
-          <p:cNvSpPr txBox="1"/>
-          <p:nvPr/>
-        </p:nvSpPr>
-        <p:spPr>
-          <a:xfrm>
-            <a:off x="30089017" y="21293948"/>
-            <a:ext cx="1298676" cy="365760"/>
-          </a:xfrm>
-          <a:prstGeom prst="rect">
-            <a:avLst/>
-          </a:prstGeom>
-          <a:noFill/>
-        </p:spPr>
-        <p:txBody>
-          <a:bodyPr wrap="square" lIns="0" rIns="0" tIns="0" bIns="0">
-            <a:spAutoFit/>
-          </a:bodyPr>
-          <a:lstStyle/>
-          <a:p>
-            <a:pPr algn="r">
-              <a:lnSpc>
-                <a:spcPct val="100000"/>
-              </a:lnSpc>
-              <a:spcAft>
-                <a:spcPts val="0"/>
-              </a:spcAft>
-            </a:pPr>
-            <a:r>
-              <a:rPr sz="1300" b="1">
-                <a:solidFill>
-                  <a:srgbClr val="1C6FB5"/>
-                </a:solidFill>
-                <a:latin typeface="Arial"/>
-              </a:rPr>
-              <a:t>0.242</a:t>
-            </a:r>
-          </a:p>
-        </p:txBody>
-      </p:sp>
-      <p:sp>
-        <p:nvSpPr>
-          <p:cNvPr id="136" name="TextBox 135"/>
-          <p:cNvSpPr txBox="1"/>
-          <p:nvPr/>
-        </p:nvSpPr>
-        <p:spPr>
-          <a:xfrm>
-            <a:off x="31387694" y="21293948"/>
-            <a:ext cx="799185" cy="365760"/>
-          </a:xfrm>
-          <a:prstGeom prst="rect">
-            <a:avLst/>
-          </a:prstGeom>
-          <a:noFill/>
-        </p:spPr>
-        <p:txBody>
-          <a:bodyPr wrap="square" lIns="0" rIns="0" tIns="0" bIns="0">
-            <a:spAutoFit/>
-          </a:bodyPr>
-          <a:lstStyle/>
-          <a:p>
-            <a:pPr algn="r">
-              <a:lnSpc>
-                <a:spcPct val="100000"/>
-              </a:lnSpc>
-              <a:spcAft>
-                <a:spcPts val="0"/>
-              </a:spcAft>
-            </a:pPr>
-            <a:r>
-              <a:rPr sz="1300" b="1">
-                <a:solidFill>
-                  <a:srgbClr val="1C6FB5"/>
-                </a:solidFill>
-                <a:latin typeface="Arial"/>
-              </a:rPr>
-              <a:t>92</a:t>
-            </a:r>
-          </a:p>
-        </p:txBody>
-      </p:sp>
-      <p:sp>
-        <p:nvSpPr>
-          <p:cNvPr id="137" name="TextBox 136"/>
-          <p:cNvSpPr txBox="1"/>
-          <p:nvPr/>
-        </p:nvSpPr>
-        <p:spPr>
-          <a:xfrm>
-            <a:off x="22197060" y="21604844"/>
-            <a:ext cx="2597353" cy="365760"/>
-          </a:xfrm>
-          <a:prstGeom prst="rect">
-            <a:avLst/>
-          </a:prstGeom>
-          <a:noFill/>
-        </p:spPr>
-        <p:txBody>
-          <a:bodyPr wrap="square" lIns="0" rIns="0" tIns="0" bIns="0">
-            <a:spAutoFit/>
-          </a:bodyPr>
-          <a:lstStyle/>
-          <a:p>
-            <a:pPr algn="l">
-              <a:lnSpc>
-                <a:spcPct val="100000"/>
-              </a:lnSpc>
-              <a:spcAft>
-                <a:spcPts val="0"/>
-              </a:spcAft>
-            </a:pPr>
-            <a:r>
-              <a:rPr sz="1300" b="0">
-                <a:solidFill>
-                  <a:srgbClr val="1E293B"/>
-                </a:solidFill>
-                <a:latin typeface="Arial"/>
-              </a:rPr>
-              <a:t>GLM-4.7-Flash  L2</a:t>
-            </a:r>
-          </a:p>
-        </p:txBody>
-      </p:sp>
-      <p:sp>
-        <p:nvSpPr>
-          <p:cNvPr id="138" name="TextBox 137"/>
-          <p:cNvSpPr txBox="1"/>
-          <p:nvPr/>
-        </p:nvSpPr>
-        <p:spPr>
-          <a:xfrm>
-            <a:off x="24794413" y="21604844"/>
-            <a:ext cx="2597353" cy="365760"/>
-          </a:xfrm>
-          <a:prstGeom prst="rect">
-            <a:avLst/>
-          </a:prstGeom>
-          <a:noFill/>
-        </p:spPr>
-        <p:txBody>
-          <a:bodyPr wrap="square" lIns="0" rIns="0" tIns="0" bIns="0">
-            <a:spAutoFit/>
-          </a:bodyPr>
-          <a:lstStyle/>
-          <a:p>
-            <a:pPr algn="r">
-              <a:lnSpc>
-                <a:spcPct val="100000"/>
-              </a:lnSpc>
-              <a:spcAft>
-                <a:spcPts val="0"/>
-              </a:spcAft>
-            </a:pPr>
-            <a:r>
-              <a:rPr sz="1300" b="0">
-                <a:solidFill>
-                  <a:srgbClr val="1E293B"/>
-                </a:solidFill>
-                <a:latin typeface="Arial"/>
-              </a:rPr>
-              <a:t>artifacts</a:t>
-            </a:r>
-          </a:p>
-        </p:txBody>
-      </p:sp>
-      <p:sp>
-        <p:nvSpPr>
-          <p:cNvPr id="139" name="TextBox 138"/>
-          <p:cNvSpPr txBox="1"/>
-          <p:nvPr/>
-        </p:nvSpPr>
-        <p:spPr>
-          <a:xfrm>
-            <a:off x="27391766" y="21604844"/>
-            <a:ext cx="1298676" cy="365760"/>
-          </a:xfrm>
-          <a:prstGeom prst="rect">
-            <a:avLst/>
-          </a:prstGeom>
-          <a:noFill/>
-        </p:spPr>
-        <p:txBody>
-          <a:bodyPr wrap="square" lIns="0" rIns="0" tIns="0" bIns="0">
-            <a:spAutoFit/>
-          </a:bodyPr>
-          <a:lstStyle/>
-          <a:p>
-            <a:pPr algn="r">
-              <a:lnSpc>
-                <a:spcPct val="100000"/>
-              </a:lnSpc>
-              <a:spcAft>
-                <a:spcPts val="0"/>
-              </a:spcAft>
-            </a:pPr>
-            <a:r>
-              <a:rPr sz="1300" b="0">
-                <a:solidFill>
-                  <a:srgbClr val="1E293B"/>
-                </a:solidFill>
-                <a:latin typeface="Arial"/>
-              </a:rPr>
-              <a:t>0.821</a:t>
-            </a:r>
-          </a:p>
-        </p:txBody>
-      </p:sp>
-      <p:sp>
-        <p:nvSpPr>
-          <p:cNvPr id="140" name="TextBox 139"/>
-          <p:cNvSpPr txBox="1"/>
-          <p:nvPr/>
-        </p:nvSpPr>
-        <p:spPr>
-          <a:xfrm>
-            <a:off x="28690443" y="21604844"/>
-            <a:ext cx="1398574" cy="365760"/>
-          </a:xfrm>
-          <a:prstGeom prst="rect">
-            <a:avLst/>
-          </a:prstGeom>
-          <a:noFill/>
-        </p:spPr>
-        <p:txBody>
-          <a:bodyPr wrap="square" lIns="0" rIns="0" tIns="0" bIns="0">
-            <a:spAutoFit/>
-          </a:bodyPr>
-          <a:lstStyle/>
-          <a:p>
-            <a:pPr algn="r">
-              <a:lnSpc>
-                <a:spcPct val="100000"/>
-              </a:lnSpc>
-              <a:spcAft>
-                <a:spcPts val="0"/>
-              </a:spcAft>
-            </a:pPr>
-            <a:r>
-              <a:rPr sz="1300" b="0">
-                <a:solidFill>
-                  <a:srgbClr val="1E293B"/>
-                </a:solidFill>
-                <a:latin typeface="Arial"/>
-              </a:rPr>
-              <a:t>0.769</a:t>
-            </a:r>
-          </a:p>
-        </p:txBody>
-      </p:sp>
-      <p:sp>
-        <p:nvSpPr>
-          <p:cNvPr id="141" name="TextBox 140"/>
-          <p:cNvSpPr txBox="1"/>
-          <p:nvPr/>
-        </p:nvSpPr>
-        <p:spPr>
-          <a:xfrm>
-            <a:off x="30089017" y="21604844"/>
-            <a:ext cx="1298676" cy="365760"/>
-          </a:xfrm>
-          <a:prstGeom prst="rect">
-            <a:avLst/>
-          </a:prstGeom>
-          <a:noFill/>
-        </p:spPr>
-        <p:txBody>
-          <a:bodyPr wrap="square" lIns="0" rIns="0" tIns="0" bIns="0">
-            <a:spAutoFit/>
-          </a:bodyPr>
-          <a:lstStyle/>
-          <a:p>
-            <a:pPr algn="r">
-              <a:lnSpc>
-                <a:spcPct val="100000"/>
-              </a:lnSpc>
-              <a:spcAft>
-                <a:spcPts val="0"/>
-              </a:spcAft>
-            </a:pPr>
-            <a:r>
-              <a:rPr sz="1300" b="0">
-                <a:solidFill>
-                  <a:srgbClr val="1E293B"/>
-                </a:solidFill>
-                <a:latin typeface="Arial"/>
-              </a:rPr>
-              <a:t>0.200</a:t>
-            </a:r>
-          </a:p>
-        </p:txBody>
-      </p:sp>
-      <p:sp>
-        <p:nvSpPr>
-          <p:cNvPr id="142" name="TextBox 141"/>
-          <p:cNvSpPr txBox="1"/>
-          <p:nvPr/>
-        </p:nvSpPr>
-        <p:spPr>
-          <a:xfrm>
-            <a:off x="31387694" y="21604844"/>
-            <a:ext cx="799185" cy="365760"/>
-          </a:xfrm>
-          <a:prstGeom prst="rect">
-            <a:avLst/>
-          </a:prstGeom>
-          <a:noFill/>
-        </p:spPr>
-        <p:txBody>
-          <a:bodyPr wrap="square" lIns="0" rIns="0" tIns="0" bIns="0">
-            <a:spAutoFit/>
-          </a:bodyPr>
-          <a:lstStyle/>
-          <a:p>
-            <a:pPr algn="r">
-              <a:lnSpc>
-                <a:spcPct val="100000"/>
-              </a:lnSpc>
-              <a:spcAft>
-                <a:spcPts val="0"/>
-              </a:spcAft>
-            </a:pPr>
-            <a:r>
-              <a:rPr sz="1300" b="0">
-                <a:solidFill>
-                  <a:srgbClr val="1E293B"/>
-                </a:solidFill>
-                <a:latin typeface="Arial"/>
-              </a:rPr>
               <a:t>78</a:t>
             </a:r>
           </a:p>
@@ -8943,13 +9867,13 @@
       </p:sp>
       <p:sp>
         <p:nvSpPr>
-          <p:cNvPr id="143" name="Rectangle 142"/>
+          <p:cNvPr id="165" name="Rectangle 164"/>
           <p:cNvSpPr/>
           <p:nvPr/>
         </p:nvSpPr>
         <p:spPr>
           <a:xfrm>
-            <a:off x="22197060" y="21934028"/>
+            <a:off x="22197060" y="22555820"/>
             <a:ext cx="9989819" cy="20116"/>
           </a:xfrm>
           <a:prstGeom prst="rect">
@@ -8987,13 +9911,13 @@
       </p:sp>
       <p:sp>
         <p:nvSpPr>
-          <p:cNvPr id="144" name="TextBox 143"/>
-          <p:cNvSpPr txBox="1"/>
-          <p:nvPr/>
-        </p:nvSpPr>
-        <p:spPr>
-          <a:xfrm>
-            <a:off x="22197060" y="22135196"/>
+          <p:cNvPr id="166" name="TextBox 165"/>
+          <p:cNvSpPr txBox="1"/>
+          <p:nvPr/>
+        </p:nvSpPr>
+        <p:spPr>
+          <a:xfrm>
+            <a:off x="22197060" y="22756988"/>
             <a:ext cx="9989819" cy="365760"/>
           </a:xfrm>
           <a:prstGeom prst="rect">
@@ -9022,20 +9946,20 @@
                 </a:solidFill>
                 <a:latin typeface="Arial"/>
               </a:rPr>
-              <a:t>The watchdog the pipeline ran never produced a decidable verdict on any of the 149 cases: “no signal fired” is not a judgement. The retrieval tier is worth +0.149 recall to the 27B and +0.012 to the 14B, so it pays where the model can use it and not otherwise. Model choice buys precision, not detection: the 14B reaches its recall by flagging 64% of the controls against the 27B's 24%.</a:t>
-            </a:r>
-          </a:p>
-        </p:txBody>
-      </p:sp>
-      <p:sp>
-        <p:nvSpPr>
-          <p:cNvPr id="145" name="TextBox 144"/>
-          <p:cNvSpPr txBox="1"/>
-          <p:nvPr/>
-        </p:nvSpPr>
-        <p:spPr>
-          <a:xfrm>
-            <a:off x="22197060" y="23091760"/>
+              <a:t>The watchdog the pipeline ran never produced a decidable verdict on any of the 149 cases: “no signal fired” is not a judgement. Above it, recall does not order the reviewers by size — the 7 B has the highest on the page — but grounded recall and citation validity do, and they do it steeply: 0.55 of the 7 B's detections quote a line that does not resolve, against 0.00 for the 27 B. The size class the campaign's own reviewer ran on for a week would have passed on recall alone. The retrieval tier is worth +0.149 to the 27 B and +0.012 to the 14 B, so it pays where the model can use it and not otherwise.</a:t>
+            </a:r>
+          </a:p>
+        </p:txBody>
+      </p:sp>
+      <p:sp>
+        <p:nvSpPr>
+          <p:cNvPr id="167" name="TextBox 166"/>
+          <p:cNvSpPr txBox="1"/>
+          <p:nvPr/>
+        </p:nvSpPr>
+        <p:spPr>
+          <a:xfrm>
+            <a:off x="22197060" y="23907227"/>
             <a:ext cx="9989819" cy="365760"/>
           </a:xfrm>
           <a:prstGeom prst="rect">
@@ -9071,7 +9995,7 @@
       </p:sp>
       <p:pic>
         <p:nvPicPr>
-          <p:cNvPr id="146" name="Picture 145" descr="r_tta.png"/>
+          <p:cNvPr id="168" name="Picture 167" descr="r_tta.png"/>
           <p:cNvPicPr>
             <a:picLocks noChangeAspect="1"/>
           </p:cNvPicPr>
@@ -9085,7 +10009,7 @@
         </p:blipFill>
         <p:spPr>
           <a:xfrm>
-            <a:off x="22197060" y="23402656"/>
+            <a:off x="22197060" y="24218123"/>
             <a:ext cx="9989819" cy="3348860"/>
           </a:xfrm>
           <a:prstGeom prst="rect">
@@ -9095,13 +10019,13 @@
       </p:pic>
       <p:sp>
         <p:nvSpPr>
-          <p:cNvPr id="147" name="TextBox 146"/>
-          <p:cNvSpPr txBox="1"/>
-          <p:nvPr/>
-        </p:nvSpPr>
-        <p:spPr>
-          <a:xfrm>
-            <a:off x="22197060" y="26842956"/>
+          <p:cNvPr id="169" name="TextBox 168"/>
+          <p:cNvSpPr txBox="1"/>
+          <p:nvPr/>
+        </p:nvSpPr>
+        <p:spPr>
+          <a:xfrm>
+            <a:off x="22197060" y="27658423"/>
             <a:ext cx="9989819" cy="365760"/>
           </a:xfrm>
           <a:prstGeom prst="rect">
@@ -9137,13 +10061,13 @@
       </p:sp>
       <p:sp>
         <p:nvSpPr>
-          <p:cNvPr id="148" name="TextBox 147"/>
-          <p:cNvSpPr txBox="1"/>
-          <p:nvPr/>
-        </p:nvSpPr>
-        <p:spPr>
-          <a:xfrm>
-            <a:off x="11704320" y="27940236"/>
+          <p:cNvPr id="170" name="TextBox 169"/>
+          <p:cNvSpPr txBox="1"/>
+          <p:nvPr/>
+        </p:nvSpPr>
+        <p:spPr>
+          <a:xfrm>
+            <a:off x="11704320" y="28755703"/>
             <a:ext cx="20482560" cy="365760"/>
           </a:xfrm>
           <a:prstGeom prst="rect">
@@ -9179,7 +10103,7 @@
       </p:sp>
       <p:pic>
         <p:nvPicPr>
-          <p:cNvPr id="149" name="Picture 148" descr="f_rounds.png"/>
+          <p:cNvPr id="171" name="Picture 170" descr="f_rounds.png"/>
           <p:cNvPicPr>
             <a:picLocks noChangeAspect="1"/>
           </p:cNvPicPr>
@@ -9193,7 +10117,7 @@
         </p:blipFill>
         <p:spPr>
           <a:xfrm>
-            <a:off x="11704320" y="28251132"/>
+            <a:off x="11704320" y="29066599"/>
             <a:ext cx="20482560" cy="3749135"/>
           </a:xfrm>
           <a:prstGeom prst="rect">
@@ -9203,13 +10127,13 @@
       </p:pic>
       <p:sp>
         <p:nvSpPr>
-          <p:cNvPr id="150" name="TextBox 149"/>
-          <p:cNvSpPr txBox="1"/>
-          <p:nvPr/>
-        </p:nvSpPr>
-        <p:spPr>
-          <a:xfrm>
-            <a:off x="11704320" y="32091707"/>
+          <p:cNvPr id="172" name="TextBox 171"/>
+          <p:cNvSpPr txBox="1"/>
+          <p:nvPr/>
+        </p:nvSpPr>
+        <p:spPr>
+          <a:xfrm>
+            <a:off x="11704320" y="32907174"/>
             <a:ext cx="20482560" cy="365760"/>
           </a:xfrm>
           <a:prstGeom prst="rect">
@@ -9245,7 +10169,7 @@
       </p:sp>
       <p:sp>
         <p:nvSpPr>
-          <p:cNvPr id="151" name="TextBox 150"/>
+          <p:cNvPr id="173" name="TextBox 172"/>
           <p:cNvSpPr txBox="1"/>
           <p:nvPr/>
         </p:nvSpPr>
@@ -9287,7 +10211,7 @@
       </p:sp>
       <p:sp>
         <p:nvSpPr>
-          <p:cNvPr id="152" name="Rectangle 151"/>
+          <p:cNvPr id="174" name="Rectangle 173"/>
           <p:cNvSpPr/>
           <p:nvPr/>
         </p:nvSpPr>
@@ -9331,7 +10255,7 @@
       </p:sp>
       <p:pic>
         <p:nvPicPr>
-          <p:cNvPr id="153" name="Picture 152" descr="d_wall.png"/>
+          <p:cNvPr id="175" name="Picture 174" descr="d_wall.png"/>
           <p:cNvPicPr>
             <a:picLocks noChangeAspect="1"/>
           </p:cNvPicPr>
@@ -9355,7 +10279,7 @@
       </p:pic>
       <p:sp>
         <p:nvSpPr>
-          <p:cNvPr id="154" name="TextBox 153"/>
+          <p:cNvPr id="176" name="TextBox 175"/>
           <p:cNvSpPr txBox="1"/>
           <p:nvPr/>
         </p:nvSpPr>
@@ -9397,7 +10321,7 @@
       </p:sp>
       <p:pic>
         <p:nvPicPr>
-          <p:cNvPr id="155" name="Picture 154" descr="p_field.png"/>
+          <p:cNvPr id="177" name="Picture 176" descr="p_field.png"/>
           <p:cNvPicPr>
             <a:picLocks noChangeAspect="1"/>
           </p:cNvPicPr>
@@ -9421,7 +10345,7 @@
       </p:pic>
       <p:sp>
         <p:nvSpPr>
-          <p:cNvPr id="156" name="TextBox 155"/>
+          <p:cNvPr id="178" name="TextBox 177"/>
           <p:cNvSpPr txBox="1"/>
           <p:nvPr/>
         </p:nvSpPr>
@@ -9463,7 +10387,7 @@
       </p:sp>
       <p:pic>
         <p:nvPicPr>
-          <p:cNvPr id="157" name="Picture 156" descr="j_species.png"/>
+          <p:cNvPr id="179" name="Picture 178" descr="j_species.png"/>
           <p:cNvPicPr>
             <a:picLocks noChangeAspect="1"/>
           </p:cNvPicPr>
@@ -9487,7 +10411,7 @@
       </p:pic>
       <p:sp>
         <p:nvSpPr>
-          <p:cNvPr id="158" name="TextBox 157"/>
+          <p:cNvPr id="180" name="TextBox 179"/>
           <p:cNvSpPr txBox="1"/>
           <p:nvPr/>
         </p:nvSpPr>
@@ -9529,7 +10453,7 @@
       </p:sp>
       <p:sp>
         <p:nvSpPr>
-          <p:cNvPr id="159" name="TextBox 158"/>
+          <p:cNvPr id="181" name="TextBox 180"/>
           <p:cNvSpPr txBox="1"/>
           <p:nvPr/>
         </p:nvSpPr>
@@ -9571,7 +10495,7 @@
       </p:sp>
       <p:sp>
         <p:nvSpPr>
-          <p:cNvPr id="160" name="Rectangle 159"/>
+          <p:cNvPr id="182" name="Rectangle 181"/>
           <p:cNvSpPr/>
           <p:nvPr/>
         </p:nvSpPr>
@@ -9615,7 +10539,7 @@
       </p:sp>
       <p:sp>
         <p:nvSpPr>
-          <p:cNvPr id="161" name="TextBox 160"/>
+          <p:cNvPr id="183" name="TextBox 182"/>
           <p:cNvSpPr txBox="1"/>
           <p:nvPr/>
         </p:nvSpPr>
@@ -9657,7 +10581,7 @@
       </p:sp>
       <p:sp>
         <p:nvSpPr>
-          <p:cNvPr id="162" name="TextBox 161"/>
+          <p:cNvPr id="184" name="TextBox 183"/>
           <p:cNvSpPr txBox="1"/>
           <p:nvPr/>
         </p:nvSpPr>
@@ -9699,7 +10623,7 @@
       </p:sp>
       <p:sp>
         <p:nvSpPr>
-          <p:cNvPr id="163" name="TextBox 162"/>
+          <p:cNvPr id="185" name="TextBox 184"/>
           <p:cNvSpPr txBox="1"/>
           <p:nvPr/>
         </p:nvSpPr>
@@ -9741,7 +10665,7 @@
       </p:sp>
       <p:sp>
         <p:nvSpPr>
-          <p:cNvPr id="164" name="TextBox 163"/>
+          <p:cNvPr id="186" name="TextBox 185"/>
           <p:cNvSpPr txBox="1"/>
           <p:nvPr/>
         </p:nvSpPr>
@@ -9783,7 +10707,7 @@
       </p:sp>
       <p:sp>
         <p:nvSpPr>
-          <p:cNvPr id="165" name="TextBox 164"/>
+          <p:cNvPr id="187" name="TextBox 186"/>
           <p:cNvSpPr txBox="1"/>
           <p:nvPr/>
         </p:nvSpPr>
@@ -9825,7 +10749,7 @@
       </p:sp>
       <p:sp>
         <p:nvSpPr>
-          <p:cNvPr id="166" name="TextBox 165"/>
+          <p:cNvPr id="188" name="TextBox 187"/>
           <p:cNvSpPr txBox="1"/>
           <p:nvPr/>
         </p:nvSpPr>
@@ -9867,7 +10791,7 @@
       </p:sp>
       <p:sp>
         <p:nvSpPr>
-          <p:cNvPr id="167" name="TextBox 166"/>
+          <p:cNvPr id="189" name="TextBox 188"/>
           <p:cNvSpPr txBox="1"/>
           <p:nvPr/>
         </p:nvSpPr>
@@ -9909,7 +10833,7 @@
       </p:sp>
       <p:sp>
         <p:nvSpPr>
-          <p:cNvPr id="168" name="Rectangle 167"/>
+          <p:cNvPr id="190" name="Rectangle 189"/>
           <p:cNvSpPr/>
           <p:nvPr/>
         </p:nvSpPr>
@@ -9953,7 +10877,7 @@
       </p:sp>
       <p:sp>
         <p:nvSpPr>
-          <p:cNvPr id="169" name="TextBox 168"/>
+          <p:cNvPr id="191" name="TextBox 190"/>
           <p:cNvSpPr txBox="1"/>
           <p:nvPr/>
         </p:nvSpPr>
@@ -9995,7 +10919,7 @@
       </p:sp>
       <p:sp>
         <p:nvSpPr>
-          <p:cNvPr id="170" name="TextBox 169"/>
+          <p:cNvPr id="192" name="TextBox 191"/>
           <p:cNvSpPr txBox="1"/>
           <p:nvPr/>
         </p:nvSpPr>
@@ -10037,7 +10961,7 @@
       </p:sp>
       <p:sp>
         <p:nvSpPr>
-          <p:cNvPr id="171" name="Rectangle 170"/>
+          <p:cNvPr id="193" name="Rectangle 192"/>
           <p:cNvSpPr/>
           <p:nvPr/>
         </p:nvSpPr>
@@ -10081,7 +11005,7 @@
       </p:sp>
       <p:sp>
         <p:nvSpPr>
-          <p:cNvPr id="172" name="TextBox 171"/>
+          <p:cNvPr id="194" name="TextBox 193"/>
           <p:cNvSpPr txBox="1"/>
           <p:nvPr/>
         </p:nvSpPr>

--- a/docs/poster/MTSU_WeedAgent_Poster.pptx
+++ b/docs/poster/MTSU_WeedAgent_Poster.pptx
@@ -3696,7 +3696,7 @@
         <p:spPr>
           <a:xfrm>
             <a:off x="731520" y="9719436"/>
-            <a:ext cx="10607040" cy="1732684"/>
+            <a:ext cx="10607040" cy="2103120"/>
           </a:xfrm>
           <a:prstGeom prst="rect">
             <a:avLst/>
@@ -3711,7 +3711,7 @@
         </p:nvSpPr>
         <p:spPr>
           <a:xfrm>
-            <a:off x="731520" y="11543560"/>
+            <a:off x="731520" y="11913996"/>
             <a:ext cx="10607040" cy="365760"/>
           </a:xfrm>
           <a:prstGeom prst="rect">
@@ -3761,8 +3761,8 @@
         </p:blipFill>
         <p:spPr>
           <a:xfrm>
-            <a:off x="731520" y="12366520"/>
-            <a:ext cx="10607040" cy="4294410"/>
+            <a:off x="731520" y="12736957"/>
+            <a:ext cx="10607040" cy="3840480"/>
           </a:xfrm>
           <a:prstGeom prst="rect">
             <a:avLst/>
@@ -3777,7 +3777,7 @@
         </p:nvSpPr>
         <p:spPr>
           <a:xfrm>
-            <a:off x="731520" y="16752371"/>
+            <a:off x="731520" y="16668877"/>
             <a:ext cx="10607040" cy="365760"/>
           </a:xfrm>
           <a:prstGeom prst="rect">
@@ -3827,8 +3827,8 @@
         </p:blipFill>
         <p:spPr>
           <a:xfrm>
-            <a:off x="731520" y="17209571"/>
-            <a:ext cx="10607040" cy="4525878"/>
+            <a:off x="731520" y="17126077"/>
+            <a:ext cx="10607040" cy="2743200"/>
           </a:xfrm>
           <a:prstGeom prst="rect">
             <a:avLst/>
@@ -3843,7 +3843,7 @@
         </p:nvSpPr>
         <p:spPr>
           <a:xfrm>
-            <a:off x="731520" y="21826889"/>
+            <a:off x="731520" y="19960717"/>
             <a:ext cx="10607040" cy="365760"/>
           </a:xfrm>
           <a:prstGeom prst="rect">
@@ -3893,8 +3893,8 @@
         </p:blipFill>
         <p:spPr>
           <a:xfrm>
-            <a:off x="731520" y="22466969"/>
-            <a:ext cx="10607040" cy="4125268"/>
+            <a:off x="731520" y="20600797"/>
+            <a:ext cx="10607040" cy="3108960"/>
           </a:xfrm>
           <a:prstGeom prst="rect">
             <a:avLst/>
@@ -3909,7 +3909,7 @@
         </p:nvSpPr>
         <p:spPr>
           <a:xfrm>
-            <a:off x="731520" y="26683677"/>
+            <a:off x="731520" y="23801197"/>
             <a:ext cx="10607040" cy="365760"/>
           </a:xfrm>
           <a:prstGeom prst="rect">
@@ -3951,7 +3951,7 @@
         </p:nvSpPr>
         <p:spPr>
           <a:xfrm>
-            <a:off x="731520" y="27369477"/>
+            <a:off x="731520" y="24486997"/>
             <a:ext cx="10607040" cy="365760"/>
           </a:xfrm>
           <a:prstGeom prst="rect">
@@ -3993,7 +3993,7 @@
         </p:nvSpPr>
         <p:spPr>
           <a:xfrm>
-            <a:off x="731520" y="27844965"/>
+            <a:off x="731520" y="24962485"/>
             <a:ext cx="10607040" cy="25603"/>
           </a:xfrm>
           <a:prstGeom prst="rect">
@@ -4037,7 +4037,7 @@
         </p:nvSpPr>
         <p:spPr>
           <a:xfrm>
-            <a:off x="731520" y="28100997"/>
+            <a:off x="731520" y="25218517"/>
             <a:ext cx="10607040" cy="365760"/>
           </a:xfrm>
           <a:prstGeom prst="rect">
@@ -4079,7 +4079,7 @@
         </p:nvSpPr>
         <p:spPr>
           <a:xfrm>
-            <a:off x="731520" y="29064673"/>
+            <a:off x="731520" y="26182193"/>
             <a:ext cx="10607040" cy="365760"/>
           </a:xfrm>
           <a:prstGeom prst="rect">
@@ -4121,7 +4121,7 @@
         </p:nvSpPr>
         <p:spPr>
           <a:xfrm>
-            <a:off x="731520" y="29670463"/>
+            <a:off x="731520" y="26787983"/>
             <a:ext cx="10607040" cy="365760"/>
           </a:xfrm>
           <a:prstGeom prst="rect">
@@ -4163,7 +4163,7 @@
         </p:nvSpPr>
         <p:spPr>
           <a:xfrm>
-            <a:off x="731520" y="30145951"/>
+            <a:off x="731520" y="27263471"/>
             <a:ext cx="10607040" cy="25603"/>
           </a:xfrm>
           <a:prstGeom prst="rect">
@@ -4207,7 +4207,7 @@
         </p:nvSpPr>
         <p:spPr>
           <a:xfrm>
-            <a:off x="731520" y="30401983"/>
+            <a:off x="731520" y="27519503"/>
             <a:ext cx="10607040" cy="365760"/>
           </a:xfrm>
           <a:prstGeom prst="rect">
@@ -4249,7 +4249,7 @@
         </p:nvSpPr>
         <p:spPr>
           <a:xfrm>
-            <a:off x="731520" y="30947321"/>
+            <a:off x="731520" y="28064841"/>
             <a:ext cx="10607040" cy="20116"/>
           </a:xfrm>
           <a:prstGeom prst="rect">
@@ -4293,7 +4293,7 @@
         </p:nvSpPr>
         <p:spPr>
           <a:xfrm>
-            <a:off x="731520" y="31038761"/>
+            <a:off x="731520" y="28156281"/>
             <a:ext cx="6576364" cy="365760"/>
           </a:xfrm>
           <a:prstGeom prst="rect">
@@ -4335,7 +4335,7 @@
         </p:nvSpPr>
         <p:spPr>
           <a:xfrm>
-            <a:off x="7307884" y="31038761"/>
+            <a:off x="7307884" y="28156281"/>
             <a:ext cx="4030675" cy="365760"/>
           </a:xfrm>
           <a:prstGeom prst="rect">
@@ -4377,7 +4377,7 @@
         </p:nvSpPr>
         <p:spPr>
           <a:xfrm>
-            <a:off x="731520" y="31313081"/>
+            <a:off x="731520" y="28430601"/>
             <a:ext cx="10607040" cy="12801"/>
           </a:xfrm>
           <a:prstGeom prst="rect">
@@ -4421,7 +4421,7 @@
         </p:nvSpPr>
         <p:spPr>
           <a:xfrm>
-            <a:off x="731520" y="31395377"/>
+            <a:off x="731520" y="28512897"/>
             <a:ext cx="6576364" cy="365760"/>
           </a:xfrm>
           <a:prstGeom prst="rect">
@@ -4463,7 +4463,7 @@
         </p:nvSpPr>
         <p:spPr>
           <a:xfrm>
-            <a:off x="7307884" y="31395377"/>
+            <a:off x="7307884" y="28512897"/>
             <a:ext cx="4030675" cy="365760"/>
           </a:xfrm>
           <a:prstGeom prst="rect">
@@ -4505,7 +4505,7 @@
         </p:nvSpPr>
         <p:spPr>
           <a:xfrm>
-            <a:off x="731520" y="31706273"/>
+            <a:off x="731520" y="28823793"/>
             <a:ext cx="6576364" cy="365760"/>
           </a:xfrm>
           <a:prstGeom prst="rect">
@@ -4547,7 +4547,7 @@
         </p:nvSpPr>
         <p:spPr>
           <a:xfrm>
-            <a:off x="7307884" y="31706273"/>
+            <a:off x="7307884" y="28823793"/>
             <a:ext cx="4030675" cy="365760"/>
           </a:xfrm>
           <a:prstGeom prst="rect">
@@ -4589,7 +4589,7 @@
         </p:nvSpPr>
         <p:spPr>
           <a:xfrm>
-            <a:off x="731520" y="32017169"/>
+            <a:off x="731520" y="29134689"/>
             <a:ext cx="6576364" cy="365760"/>
           </a:xfrm>
           <a:prstGeom prst="rect">
@@ -4631,7 +4631,7 @@
         </p:nvSpPr>
         <p:spPr>
           <a:xfrm>
-            <a:off x="7307884" y="32017169"/>
+            <a:off x="7307884" y="29134689"/>
             <a:ext cx="4030675" cy="365760"/>
           </a:xfrm>
           <a:prstGeom prst="rect">
@@ -4673,7 +4673,7 @@
         </p:nvSpPr>
         <p:spPr>
           <a:xfrm>
-            <a:off x="731520" y="32328065"/>
+            <a:off x="731520" y="29445585"/>
             <a:ext cx="6576364" cy="365760"/>
           </a:xfrm>
           <a:prstGeom prst="rect">
@@ -4715,7 +4715,7 @@
         </p:nvSpPr>
         <p:spPr>
           <a:xfrm>
-            <a:off x="7307884" y="32328065"/>
+            <a:off x="7307884" y="29445585"/>
             <a:ext cx="4030675" cy="365760"/>
           </a:xfrm>
           <a:prstGeom prst="rect">
@@ -4757,7 +4757,7 @@
         </p:nvSpPr>
         <p:spPr>
           <a:xfrm>
-            <a:off x="731520" y="32657249"/>
+            <a:off x="731520" y="29774769"/>
             <a:ext cx="10607040" cy="20116"/>
           </a:xfrm>
           <a:prstGeom prst="rect">
@@ -5618,7 +5618,7 @@
         <p:spPr>
           <a:xfrm>
             <a:off x="11704320" y="7763255"/>
-            <a:ext cx="9989819" cy="5361065"/>
+            <a:ext cx="9989819" cy="2560710"/>
           </a:xfrm>
           <a:prstGeom prst="rect">
             <a:avLst/>
@@ -5633,7 +5633,7 @@
         </p:nvSpPr>
         <p:spPr>
           <a:xfrm>
-            <a:off x="11704320" y="13215760"/>
+            <a:off x="11704320" y="10415405"/>
             <a:ext cx="9989819" cy="365760"/>
           </a:xfrm>
           <a:prstGeom prst="rect">
@@ -5662,7 +5662,7 @@
                 </a:solidFill>
                 <a:latin typeface="Arial"/>
               </a:rPr>
-              <a:t>Figure 5.  Three detector families on the CottonWeedDet12 holdout, three seeds each. How the network is initialised is worth three times what the architecture is worth.</a:t>
+              <a:t>Figure 5.  Three detector families on the sealed 1,977-image CottonWeedDet12 holdout. Filled mark: the mean over seeds 101/102/103, with 1 s.d.; open marks behind it: the three runs themselves. How the network is initialised is worth three times what the architecture is worth. The pretrained-versus-Mamba pair carries no bracket on purpose -- one side started from COCO weights and the other from scratch, so it is not an architecture comparison.</a:t>
             </a:r>
           </a:p>
         </p:txBody>
@@ -5684,7 +5684,7 @@
         <p:spPr>
           <a:xfrm>
             <a:off x="22197060" y="7763255"/>
-            <a:ext cx="9989819" cy="4817913"/>
+            <a:ext cx="9989819" cy="3841066"/>
           </a:xfrm>
           <a:prstGeom prst="rect">
             <a:avLst/>
@@ -5699,7 +5699,7 @@
         </p:nvSpPr>
         <p:spPr>
           <a:xfrm>
-            <a:off x="22197060" y="12672608"/>
+            <a:off x="22197060" y="11695762"/>
             <a:ext cx="9989819" cy="365760"/>
           </a:xfrm>
           <a:prstGeom prst="rect">
@@ -5741,7 +5741,7 @@
         </p:nvSpPr>
         <p:spPr>
           <a:xfrm>
-            <a:off x="11704320" y="13947281"/>
+            <a:off x="11704320" y="12427282"/>
             <a:ext cx="20482560" cy="365760"/>
           </a:xfrm>
           <a:prstGeom prst="rect">
@@ -5791,8 +5791,8 @@
         </p:blipFill>
         <p:spPr>
           <a:xfrm>
-            <a:off x="11704320" y="14258176"/>
-            <a:ext cx="9989819" cy="2543654"/>
+            <a:off x="11704320" y="12738178"/>
+            <a:ext cx="9989819" cy="3017980"/>
           </a:xfrm>
           <a:prstGeom prst="rect">
             <a:avLst/>
@@ -5807,7 +5807,7 @@
         </p:nvSpPr>
         <p:spPr>
           <a:xfrm>
-            <a:off x="11704320" y="16893271"/>
+            <a:off x="11704320" y="15847598"/>
             <a:ext cx="9989819" cy="365760"/>
           </a:xfrm>
           <a:prstGeom prst="rect">
@@ -5849,7 +5849,7 @@
         </p:nvSpPr>
         <p:spPr>
           <a:xfrm>
-            <a:off x="22197060" y="14258176"/>
+            <a:off x="22197060" y="12738178"/>
             <a:ext cx="9989819" cy="365760"/>
           </a:xfrm>
           <a:prstGeom prst="rect">
@@ -5891,7 +5891,7 @@
         </p:nvSpPr>
         <p:spPr>
           <a:xfrm>
-            <a:off x="22197060" y="14803514"/>
+            <a:off x="22197060" y="13283516"/>
             <a:ext cx="9989819" cy="20116"/>
           </a:xfrm>
           <a:prstGeom prst="rect">
@@ -5935,7 +5935,7 @@
         </p:nvSpPr>
         <p:spPr>
           <a:xfrm>
-            <a:off x="22197060" y="14894955"/>
+            <a:off x="22197060" y="13374956"/>
             <a:ext cx="4595317" cy="365760"/>
           </a:xfrm>
           <a:prstGeom prst="rect">
@@ -5977,7 +5977,7 @@
         </p:nvSpPr>
         <p:spPr>
           <a:xfrm>
-            <a:off x="26792377" y="14894955"/>
+            <a:off x="26792377" y="13374956"/>
             <a:ext cx="3796131" cy="365760"/>
           </a:xfrm>
           <a:prstGeom prst="rect">
@@ -6019,7 +6019,7 @@
         </p:nvSpPr>
         <p:spPr>
           <a:xfrm>
-            <a:off x="30588508" y="14894955"/>
+            <a:off x="30588508" y="13374956"/>
             <a:ext cx="1598371" cy="365760"/>
           </a:xfrm>
           <a:prstGeom prst="rect">
@@ -6061,7 +6061,7 @@
         </p:nvSpPr>
         <p:spPr>
           <a:xfrm>
-            <a:off x="22197060" y="15169275"/>
+            <a:off x="22197060" y="13649276"/>
             <a:ext cx="9989819" cy="12801"/>
           </a:xfrm>
           <a:prstGeom prst="rect">
@@ -6105,7 +6105,7 @@
         </p:nvSpPr>
         <p:spPr>
           <a:xfrm>
-            <a:off x="22197060" y="15251571"/>
+            <a:off x="22197060" y="13731572"/>
             <a:ext cx="4595317" cy="365760"/>
           </a:xfrm>
           <a:prstGeom prst="rect">
@@ -6147,7 +6147,7 @@
         </p:nvSpPr>
         <p:spPr>
           <a:xfrm>
-            <a:off x="26792377" y="15251571"/>
+            <a:off x="26792377" y="13731572"/>
             <a:ext cx="3796131" cy="365760"/>
           </a:xfrm>
           <a:prstGeom prst="rect">
@@ -6189,7 +6189,7 @@
         </p:nvSpPr>
         <p:spPr>
           <a:xfrm>
-            <a:off x="30588508" y="15251571"/>
+            <a:off x="30588508" y="13731572"/>
             <a:ext cx="1598371" cy="365760"/>
           </a:xfrm>
           <a:prstGeom prst="rect">
@@ -6231,7 +6231,7 @@
         </p:nvSpPr>
         <p:spPr>
           <a:xfrm>
-            <a:off x="22197060" y="15562467"/>
+            <a:off x="22197060" y="14042468"/>
             <a:ext cx="4595317" cy="365760"/>
           </a:xfrm>
           <a:prstGeom prst="rect">
@@ -6273,7 +6273,7 @@
         </p:nvSpPr>
         <p:spPr>
           <a:xfrm>
-            <a:off x="26792377" y="15562467"/>
+            <a:off x="26792377" y="14042468"/>
             <a:ext cx="3796131" cy="365760"/>
           </a:xfrm>
           <a:prstGeom prst="rect">
@@ -6315,7 +6315,7 @@
         </p:nvSpPr>
         <p:spPr>
           <a:xfrm>
-            <a:off x="30588508" y="15562467"/>
+            <a:off x="30588508" y="14042468"/>
             <a:ext cx="1598371" cy="365760"/>
           </a:xfrm>
           <a:prstGeom prst="rect">
@@ -6357,7 +6357,7 @@
         </p:nvSpPr>
         <p:spPr>
           <a:xfrm>
-            <a:off x="22197060" y="15873363"/>
+            <a:off x="22197060" y="14353364"/>
             <a:ext cx="4595317" cy="365760"/>
           </a:xfrm>
           <a:prstGeom prst="rect">
@@ -6399,7 +6399,7 @@
         </p:nvSpPr>
         <p:spPr>
           <a:xfrm>
-            <a:off x="26792377" y="15873363"/>
+            <a:off x="26792377" y="14353364"/>
             <a:ext cx="3796131" cy="365760"/>
           </a:xfrm>
           <a:prstGeom prst="rect">
@@ -6441,7 +6441,7 @@
         </p:nvSpPr>
         <p:spPr>
           <a:xfrm>
-            <a:off x="30588508" y="15873363"/>
+            <a:off x="30588508" y="14353364"/>
             <a:ext cx="1598371" cy="365760"/>
           </a:xfrm>
           <a:prstGeom prst="rect">
@@ -6483,7 +6483,7 @@
         </p:nvSpPr>
         <p:spPr>
           <a:xfrm>
-            <a:off x="22197060" y="16184259"/>
+            <a:off x="22197060" y="14664260"/>
             <a:ext cx="4595317" cy="365760"/>
           </a:xfrm>
           <a:prstGeom prst="rect">
@@ -6525,7 +6525,7 @@
         </p:nvSpPr>
         <p:spPr>
           <a:xfrm>
-            <a:off x="26792377" y="16184259"/>
+            <a:off x="26792377" y="14664260"/>
             <a:ext cx="3796131" cy="365760"/>
           </a:xfrm>
           <a:prstGeom prst="rect">
@@ -6567,7 +6567,7 @@
         </p:nvSpPr>
         <p:spPr>
           <a:xfrm>
-            <a:off x="30588508" y="16184259"/>
+            <a:off x="30588508" y="14664260"/>
             <a:ext cx="1598371" cy="365760"/>
           </a:xfrm>
           <a:prstGeom prst="rect">
@@ -6609,7 +6609,7 @@
         </p:nvSpPr>
         <p:spPr>
           <a:xfrm>
-            <a:off x="22197060" y="16513443"/>
+            <a:off x="22197060" y="14993443"/>
             <a:ext cx="9989819" cy="20116"/>
           </a:xfrm>
           <a:prstGeom prst="rect">
@@ -6653,7 +6653,7 @@
         </p:nvSpPr>
         <p:spPr>
           <a:xfrm>
-            <a:off x="22197060" y="16714610"/>
+            <a:off x="22197060" y="15194611"/>
             <a:ext cx="9989819" cy="365760"/>
           </a:xfrm>
           <a:prstGeom prst="rect">
@@ -6695,7 +6695,7 @@
         </p:nvSpPr>
         <p:spPr>
           <a:xfrm>
-            <a:off x="11704320" y="17807671"/>
+            <a:off x="11704320" y="16761998"/>
             <a:ext cx="20482560" cy="365760"/>
           </a:xfrm>
           <a:prstGeom prst="rect">
@@ -6745,8 +6745,8 @@
         </p:blipFill>
         <p:spPr>
           <a:xfrm>
-            <a:off x="11704320" y="18118567"/>
-            <a:ext cx="9989819" cy="2543654"/>
+            <a:off x="11704320" y="17072894"/>
+            <a:ext cx="9989819" cy="4938513"/>
           </a:xfrm>
           <a:prstGeom prst="rect">
             <a:avLst/>
@@ -6761,7 +6761,7 @@
         </p:nvSpPr>
         <p:spPr>
           <a:xfrm>
-            <a:off x="11704320" y="20753661"/>
+            <a:off x="11704320" y="22102847"/>
             <a:ext cx="9989819" cy="365760"/>
           </a:xfrm>
           <a:prstGeom prst="rect">
@@ -6790,7 +6790,7 @@
                 </a:solidFill>
                 <a:latin typeface="Arial"/>
               </a:rPr>
-              <a:t>Figure 8.  (e) Every arm on one frozen corpus of real incidents from this project's own history -- 116 incidents, 33 controls -- scored by the project's own scorer. Open circle: the model reads raw artifact excerpts; filled: the same model with a retrieval round over them. The retrieval tier is worth +0.149 recall to the 27 B and +0.012 to the 14 B. (f) The same arms, asking how much of that detection quotes a line that resolves in the artifact. The 7 B has the highest recall on the page and 0.55 of it is unevidenced; the 27 B's gap is 0.00. Recall alone would have cleared the size class the campaign's own reviewer ran on for a week.</a:t>
+              <a:t>Figure 8.  (e) Every arm on one frozen corpus of real incidents from this project's own history, scored by the project's own scorer. Each mark carries its own denominator: two arms are still running and stand on 57 and 39 incidents against the others' 112 to 114, and bars are 95% Wilson intervals. Open circle: the model reads raw artifact excerpts; the arrow runs to the same model given a retrieval round over them, and is drawn solid only where both ends were scored on the same cases. (f) The same arms, asking how much of that detection quotes a line that resolves in the artifact. The 7 B has the highest recall on the page and 0.55 of it is unevidenced; the 27 B has no gap at all. Recall alone would have cleared the size class this campaign's own reviewer ran on for a week. The intervals are wide and they overlap: on this corpus the ordering among the model arms is not established, and the grounded gap is.</a:t>
             </a:r>
           </a:p>
         </p:txBody>
@@ -6803,7 +6803,7 @@
         </p:nvSpPr>
         <p:spPr>
           <a:xfrm>
-            <a:off x="22197060" y="18118567"/>
+            <a:off x="22197060" y="17072894"/>
             <a:ext cx="9989819" cy="365760"/>
           </a:xfrm>
           <a:prstGeom prst="rect">
@@ -6845,7 +6845,7 @@
         </p:nvSpPr>
         <p:spPr>
           <a:xfrm>
-            <a:off x="22197060" y="19291412"/>
+            <a:off x="22197060" y="18245739"/>
             <a:ext cx="9989819" cy="20116"/>
           </a:xfrm>
           <a:prstGeom prst="rect">
@@ -6889,7 +6889,7 @@
         </p:nvSpPr>
         <p:spPr>
           <a:xfrm>
-            <a:off x="22197060" y="19382852"/>
+            <a:off x="22197060" y="18337179"/>
             <a:ext cx="1698269" cy="365760"/>
           </a:xfrm>
           <a:prstGeom prst="rect">
@@ -6931,7 +6931,7 @@
         </p:nvSpPr>
         <p:spPr>
           <a:xfrm>
-            <a:off x="23895329" y="19382852"/>
+            <a:off x="23895329" y="18337179"/>
             <a:ext cx="2397556" cy="365760"/>
           </a:xfrm>
           <a:prstGeom prst="rect">
@@ -6973,7 +6973,7 @@
         </p:nvSpPr>
         <p:spPr>
           <a:xfrm>
-            <a:off x="26292886" y="19382852"/>
+            <a:off x="26292886" y="18337179"/>
             <a:ext cx="1198778" cy="365760"/>
           </a:xfrm>
           <a:prstGeom prst="rect">
@@ -7015,7 +7015,7 @@
         </p:nvSpPr>
         <p:spPr>
           <a:xfrm>
-            <a:off x="27491664" y="19382852"/>
+            <a:off x="27491664" y="18337179"/>
             <a:ext cx="1298676" cy="365760"/>
           </a:xfrm>
           <a:prstGeom prst="rect">
@@ -7057,7 +7057,7 @@
         </p:nvSpPr>
         <p:spPr>
           <a:xfrm>
-            <a:off x="28790341" y="19382852"/>
+            <a:off x="28790341" y="18337179"/>
             <a:ext cx="1398574" cy="365760"/>
           </a:xfrm>
           <a:prstGeom prst="rect">
@@ -7099,7 +7099,7 @@
         </p:nvSpPr>
         <p:spPr>
           <a:xfrm>
-            <a:off x="30188916" y="19382852"/>
+            <a:off x="30188916" y="18337179"/>
             <a:ext cx="1398574" cy="365760"/>
           </a:xfrm>
           <a:prstGeom prst="rect">
@@ -7141,7 +7141,7 @@
         </p:nvSpPr>
         <p:spPr>
           <a:xfrm>
-            <a:off x="31587490" y="19382852"/>
+            <a:off x="31587490" y="18337179"/>
             <a:ext cx="599389" cy="365760"/>
           </a:xfrm>
           <a:prstGeom prst="rect">
@@ -7183,7 +7183,7 @@
         </p:nvSpPr>
         <p:spPr>
           <a:xfrm>
-            <a:off x="22197060" y="19657172"/>
+            <a:off x="22197060" y="18611499"/>
             <a:ext cx="9989819" cy="12801"/>
           </a:xfrm>
           <a:prstGeom prst="rect">
@@ -7227,7 +7227,7 @@
         </p:nvSpPr>
         <p:spPr>
           <a:xfrm>
-            <a:off x="22197060" y="19739468"/>
+            <a:off x="22197060" y="18693795"/>
             <a:ext cx="1698269" cy="365760"/>
           </a:xfrm>
           <a:prstGeom prst="rect">
@@ -7269,7 +7269,7 @@
         </p:nvSpPr>
         <p:spPr>
           <a:xfrm>
-            <a:off x="23895329" y="19739468"/>
+            <a:off x="23895329" y="18693795"/>
             <a:ext cx="2397556" cy="365760"/>
           </a:xfrm>
           <a:prstGeom prst="rect">
@@ -7311,7 +7311,7 @@
         </p:nvSpPr>
         <p:spPr>
           <a:xfrm>
-            <a:off x="26292886" y="19739468"/>
+            <a:off x="26292886" y="18693795"/>
             <a:ext cx="1198778" cy="365760"/>
           </a:xfrm>
           <a:prstGeom prst="rect">
@@ -7353,7 +7353,7 @@
         </p:nvSpPr>
         <p:spPr>
           <a:xfrm>
-            <a:off x="27491664" y="19739468"/>
+            <a:off x="27491664" y="18693795"/>
             <a:ext cx="1298676" cy="365760"/>
           </a:xfrm>
           <a:prstGeom prst="rect">
@@ -7395,7 +7395,7 @@
         </p:nvSpPr>
         <p:spPr>
           <a:xfrm>
-            <a:off x="28790341" y="19739468"/>
+            <a:off x="28790341" y="18693795"/>
             <a:ext cx="1398574" cy="365760"/>
           </a:xfrm>
           <a:prstGeom prst="rect">
@@ -7437,7 +7437,7 @@
         </p:nvSpPr>
         <p:spPr>
           <a:xfrm>
-            <a:off x="30188916" y="19739468"/>
+            <a:off x="30188916" y="18693795"/>
             <a:ext cx="1398574" cy="365760"/>
           </a:xfrm>
           <a:prstGeom prst="rect">
@@ -7479,7 +7479,7 @@
         </p:nvSpPr>
         <p:spPr>
           <a:xfrm>
-            <a:off x="31587490" y="19739468"/>
+            <a:off x="31587490" y="18693795"/>
             <a:ext cx="599389" cy="365760"/>
           </a:xfrm>
           <a:prstGeom prst="rect">
@@ -7521,7 +7521,7 @@
         </p:nvSpPr>
         <p:spPr>
           <a:xfrm>
-            <a:off x="22197060" y="20050364"/>
+            <a:off x="22197060" y="19004691"/>
             <a:ext cx="1698269" cy="365760"/>
           </a:xfrm>
           <a:prstGeom prst="rect">
@@ -7563,7 +7563,7 @@
         </p:nvSpPr>
         <p:spPr>
           <a:xfrm>
-            <a:off x="23895329" y="20050364"/>
+            <a:off x="23895329" y="19004691"/>
             <a:ext cx="2397556" cy="365760"/>
           </a:xfrm>
           <a:prstGeom prst="rect">
@@ -7605,7 +7605,7 @@
         </p:nvSpPr>
         <p:spPr>
           <a:xfrm>
-            <a:off x="26292886" y="20050364"/>
+            <a:off x="26292886" y="19004691"/>
             <a:ext cx="1198778" cy="365760"/>
           </a:xfrm>
           <a:prstGeom prst="rect">
@@ -7647,7 +7647,7 @@
         </p:nvSpPr>
         <p:spPr>
           <a:xfrm>
-            <a:off x="27491664" y="20050364"/>
+            <a:off x="27491664" y="19004691"/>
             <a:ext cx="1298676" cy="365760"/>
           </a:xfrm>
           <a:prstGeom prst="rect">
@@ -7689,7 +7689,7 @@
         </p:nvSpPr>
         <p:spPr>
           <a:xfrm>
-            <a:off x="28790341" y="20050364"/>
+            <a:off x="28790341" y="19004691"/>
             <a:ext cx="1398574" cy="365760"/>
           </a:xfrm>
           <a:prstGeom prst="rect">
@@ -7731,7 +7731,7 @@
         </p:nvSpPr>
         <p:spPr>
           <a:xfrm>
-            <a:off x="30188916" y="20050364"/>
+            <a:off x="30188916" y="19004691"/>
             <a:ext cx="1398574" cy="365760"/>
           </a:xfrm>
           <a:prstGeom prst="rect">
@@ -7773,7 +7773,7 @@
         </p:nvSpPr>
         <p:spPr>
           <a:xfrm>
-            <a:off x="31587490" y="20050364"/>
+            <a:off x="31587490" y="19004691"/>
             <a:ext cx="599389" cy="365760"/>
           </a:xfrm>
           <a:prstGeom prst="rect">
@@ -7815,7 +7815,7 @@
         </p:nvSpPr>
         <p:spPr>
           <a:xfrm>
-            <a:off x="22197060" y="20361260"/>
+            <a:off x="22197060" y="19315587"/>
             <a:ext cx="1698269" cy="365760"/>
           </a:xfrm>
           <a:prstGeom prst="rect">
@@ -7857,7 +7857,7 @@
         </p:nvSpPr>
         <p:spPr>
           <a:xfrm>
-            <a:off x="23895329" y="20361260"/>
+            <a:off x="23895329" y="19315587"/>
             <a:ext cx="2397556" cy="365760"/>
           </a:xfrm>
           <a:prstGeom prst="rect">
@@ -7899,7 +7899,7 @@
         </p:nvSpPr>
         <p:spPr>
           <a:xfrm>
-            <a:off x="26292886" y="20361260"/>
+            <a:off x="26292886" y="19315587"/>
             <a:ext cx="1198778" cy="365760"/>
           </a:xfrm>
           <a:prstGeom prst="rect">
@@ -7941,7 +7941,7 @@
         </p:nvSpPr>
         <p:spPr>
           <a:xfrm>
-            <a:off x="27491664" y="20361260"/>
+            <a:off x="27491664" y="19315587"/>
             <a:ext cx="1298676" cy="365760"/>
           </a:xfrm>
           <a:prstGeom prst="rect">
@@ -7983,7 +7983,7 @@
         </p:nvSpPr>
         <p:spPr>
           <a:xfrm>
-            <a:off x="28790341" y="20361260"/>
+            <a:off x="28790341" y="19315587"/>
             <a:ext cx="1398574" cy="365760"/>
           </a:xfrm>
           <a:prstGeom prst="rect">
@@ -8025,7 +8025,7 @@
         </p:nvSpPr>
         <p:spPr>
           <a:xfrm>
-            <a:off x="30188916" y="20361260"/>
+            <a:off x="30188916" y="19315587"/>
             <a:ext cx="1398574" cy="365760"/>
           </a:xfrm>
           <a:prstGeom prst="rect">
@@ -8067,7 +8067,7 @@
         </p:nvSpPr>
         <p:spPr>
           <a:xfrm>
-            <a:off x="31587490" y="20361260"/>
+            <a:off x="31587490" y="19315587"/>
             <a:ext cx="599389" cy="365760"/>
           </a:xfrm>
           <a:prstGeom prst="rect">
@@ -8109,7 +8109,7 @@
         </p:nvSpPr>
         <p:spPr>
           <a:xfrm>
-            <a:off x="22197060" y="20672156"/>
+            <a:off x="22197060" y="19626483"/>
             <a:ext cx="1698269" cy="365760"/>
           </a:xfrm>
           <a:prstGeom prst="rect">
@@ -8151,7 +8151,7 @@
         </p:nvSpPr>
         <p:spPr>
           <a:xfrm>
-            <a:off x="23895329" y="20672156"/>
+            <a:off x="23895329" y="19626483"/>
             <a:ext cx="2397556" cy="365760"/>
           </a:xfrm>
           <a:prstGeom prst="rect">
@@ -8193,7 +8193,7 @@
         </p:nvSpPr>
         <p:spPr>
           <a:xfrm>
-            <a:off x="26292886" y="20672156"/>
+            <a:off x="26292886" y="19626483"/>
             <a:ext cx="1198778" cy="365760"/>
           </a:xfrm>
           <a:prstGeom prst="rect">
@@ -8235,7 +8235,7 @@
         </p:nvSpPr>
         <p:spPr>
           <a:xfrm>
-            <a:off x="27491664" y="20672156"/>
+            <a:off x="27491664" y="19626483"/>
             <a:ext cx="1298676" cy="365760"/>
           </a:xfrm>
           <a:prstGeom prst="rect">
@@ -8277,7 +8277,7 @@
         </p:nvSpPr>
         <p:spPr>
           <a:xfrm>
-            <a:off x="28790341" y="20672156"/>
+            <a:off x="28790341" y="19626483"/>
             <a:ext cx="1398574" cy="365760"/>
           </a:xfrm>
           <a:prstGeom prst="rect">
@@ -8319,7 +8319,7 @@
         </p:nvSpPr>
         <p:spPr>
           <a:xfrm>
-            <a:off x="30188916" y="20672156"/>
+            <a:off x="30188916" y="19626483"/>
             <a:ext cx="1398574" cy="365760"/>
           </a:xfrm>
           <a:prstGeom prst="rect">
@@ -8361,7 +8361,7 @@
         </p:nvSpPr>
         <p:spPr>
           <a:xfrm>
-            <a:off x="31587490" y="20672156"/>
+            <a:off x="31587490" y="19626483"/>
             <a:ext cx="599389" cy="365760"/>
           </a:xfrm>
           <a:prstGeom prst="rect">
@@ -8403,7 +8403,7 @@
         </p:nvSpPr>
         <p:spPr>
           <a:xfrm>
-            <a:off x="22197060" y="20983052"/>
+            <a:off x="22197060" y="19937379"/>
             <a:ext cx="1698269" cy="365760"/>
           </a:xfrm>
           <a:prstGeom prst="rect">
@@ -8445,7 +8445,7 @@
         </p:nvSpPr>
         <p:spPr>
           <a:xfrm>
-            <a:off x="23895329" y="20983052"/>
+            <a:off x="23895329" y="19937379"/>
             <a:ext cx="2397556" cy="365760"/>
           </a:xfrm>
           <a:prstGeom prst="rect">
@@ -8487,7 +8487,7 @@
         </p:nvSpPr>
         <p:spPr>
           <a:xfrm>
-            <a:off x="26292886" y="20983052"/>
+            <a:off x="26292886" y="19937379"/>
             <a:ext cx="1198778" cy="365760"/>
           </a:xfrm>
           <a:prstGeom prst="rect">
@@ -8529,7 +8529,7 @@
         </p:nvSpPr>
         <p:spPr>
           <a:xfrm>
-            <a:off x="27491664" y="20983052"/>
+            <a:off x="27491664" y="19937379"/>
             <a:ext cx="1298676" cy="365760"/>
           </a:xfrm>
           <a:prstGeom prst="rect">
@@ -8571,7 +8571,7 @@
         </p:nvSpPr>
         <p:spPr>
           <a:xfrm>
-            <a:off x="28790341" y="20983052"/>
+            <a:off x="28790341" y="19937379"/>
             <a:ext cx="1398574" cy="365760"/>
           </a:xfrm>
           <a:prstGeom prst="rect">
@@ -8613,7 +8613,7 @@
         </p:nvSpPr>
         <p:spPr>
           <a:xfrm>
-            <a:off x="30188916" y="20983052"/>
+            <a:off x="30188916" y="19937379"/>
             <a:ext cx="1398574" cy="365760"/>
           </a:xfrm>
           <a:prstGeom prst="rect">
@@ -8655,7 +8655,7 @@
         </p:nvSpPr>
         <p:spPr>
           <a:xfrm>
-            <a:off x="31587490" y="20983052"/>
+            <a:off x="31587490" y="19937379"/>
             <a:ext cx="599389" cy="365760"/>
           </a:xfrm>
           <a:prstGeom prst="rect">
@@ -8697,7 +8697,7 @@
         </p:nvSpPr>
         <p:spPr>
           <a:xfrm>
-            <a:off x="22197060" y="21293948"/>
+            <a:off x="22197060" y="20248275"/>
             <a:ext cx="1698269" cy="365760"/>
           </a:xfrm>
           <a:prstGeom prst="rect">
@@ -8739,7 +8739,7 @@
         </p:nvSpPr>
         <p:spPr>
           <a:xfrm>
-            <a:off x="23895329" y="21293948"/>
+            <a:off x="23895329" y="20248275"/>
             <a:ext cx="2397556" cy="365760"/>
           </a:xfrm>
           <a:prstGeom prst="rect">
@@ -8781,7 +8781,7 @@
         </p:nvSpPr>
         <p:spPr>
           <a:xfrm>
-            <a:off x="26292886" y="21293948"/>
+            <a:off x="26292886" y="20248275"/>
             <a:ext cx="1198778" cy="365760"/>
           </a:xfrm>
           <a:prstGeom prst="rect">
@@ -8823,7 +8823,7 @@
         </p:nvSpPr>
         <p:spPr>
           <a:xfrm>
-            <a:off x="27491664" y="21293948"/>
+            <a:off x="27491664" y="20248275"/>
             <a:ext cx="1298676" cy="365760"/>
           </a:xfrm>
           <a:prstGeom prst="rect">
@@ -8865,7 +8865,7 @@
         </p:nvSpPr>
         <p:spPr>
           <a:xfrm>
-            <a:off x="28790341" y="21293948"/>
+            <a:off x="28790341" y="20248275"/>
             <a:ext cx="1398574" cy="365760"/>
           </a:xfrm>
           <a:prstGeom prst="rect">
@@ -8907,7 +8907,7 @@
         </p:nvSpPr>
         <p:spPr>
           <a:xfrm>
-            <a:off x="30188916" y="21293948"/>
+            <a:off x="30188916" y="20248275"/>
             <a:ext cx="1398574" cy="365760"/>
           </a:xfrm>
           <a:prstGeom prst="rect">
@@ -8949,7 +8949,7 @@
         </p:nvSpPr>
         <p:spPr>
           <a:xfrm>
-            <a:off x="31587490" y="21293948"/>
+            <a:off x="31587490" y="20248275"/>
             <a:ext cx="599389" cy="365760"/>
           </a:xfrm>
           <a:prstGeom prst="rect">
@@ -8991,7 +8991,7 @@
         </p:nvSpPr>
         <p:spPr>
           <a:xfrm>
-            <a:off x="22197060" y="21604844"/>
+            <a:off x="22197060" y="20559171"/>
             <a:ext cx="1698269" cy="365760"/>
           </a:xfrm>
           <a:prstGeom prst="rect">
@@ -9033,7 +9033,7 @@
         </p:nvSpPr>
         <p:spPr>
           <a:xfrm>
-            <a:off x="23895329" y="21604844"/>
+            <a:off x="23895329" y="20559171"/>
             <a:ext cx="2397556" cy="365760"/>
           </a:xfrm>
           <a:prstGeom prst="rect">
@@ -9075,7 +9075,7 @@
         </p:nvSpPr>
         <p:spPr>
           <a:xfrm>
-            <a:off x="26292886" y="21604844"/>
+            <a:off x="26292886" y="20559171"/>
             <a:ext cx="1198778" cy="365760"/>
           </a:xfrm>
           <a:prstGeom prst="rect">
@@ -9117,7 +9117,7 @@
         </p:nvSpPr>
         <p:spPr>
           <a:xfrm>
-            <a:off x="27491664" y="21604844"/>
+            <a:off x="27491664" y="20559171"/>
             <a:ext cx="1298676" cy="365760"/>
           </a:xfrm>
           <a:prstGeom prst="rect">
@@ -9159,7 +9159,7 @@
         </p:nvSpPr>
         <p:spPr>
           <a:xfrm>
-            <a:off x="28790341" y="21604844"/>
+            <a:off x="28790341" y="20559171"/>
             <a:ext cx="1398574" cy="365760"/>
           </a:xfrm>
           <a:prstGeom prst="rect">
@@ -9201,7 +9201,7 @@
         </p:nvSpPr>
         <p:spPr>
           <a:xfrm>
-            <a:off x="30188916" y="21604844"/>
+            <a:off x="30188916" y="20559171"/>
             <a:ext cx="1398574" cy="365760"/>
           </a:xfrm>
           <a:prstGeom prst="rect">
@@ -9243,7 +9243,7 @@
         </p:nvSpPr>
         <p:spPr>
           <a:xfrm>
-            <a:off x="31587490" y="21604844"/>
+            <a:off x="31587490" y="20559171"/>
             <a:ext cx="599389" cy="365760"/>
           </a:xfrm>
           <a:prstGeom prst="rect">
@@ -9285,7 +9285,7 @@
         </p:nvSpPr>
         <p:spPr>
           <a:xfrm>
-            <a:off x="22197060" y="21915740"/>
+            <a:off x="22197060" y="20870067"/>
             <a:ext cx="1698269" cy="365760"/>
           </a:xfrm>
           <a:prstGeom prst="rect">
@@ -9327,7 +9327,7 @@
         </p:nvSpPr>
         <p:spPr>
           <a:xfrm>
-            <a:off x="23895329" y="21915740"/>
+            <a:off x="23895329" y="20870067"/>
             <a:ext cx="2397556" cy="365760"/>
           </a:xfrm>
           <a:prstGeom prst="rect">
@@ -9369,7 +9369,7 @@
         </p:nvSpPr>
         <p:spPr>
           <a:xfrm>
-            <a:off x="26292886" y="21915740"/>
+            <a:off x="26292886" y="20870067"/>
             <a:ext cx="1198778" cy="365760"/>
           </a:xfrm>
           <a:prstGeom prst="rect">
@@ -9411,7 +9411,7 @@
         </p:nvSpPr>
         <p:spPr>
           <a:xfrm>
-            <a:off x="27491664" y="21915740"/>
+            <a:off x="27491664" y="20870067"/>
             <a:ext cx="1298676" cy="365760"/>
           </a:xfrm>
           <a:prstGeom prst="rect">
@@ -9453,7 +9453,7 @@
         </p:nvSpPr>
         <p:spPr>
           <a:xfrm>
-            <a:off x="28790341" y="21915740"/>
+            <a:off x="28790341" y="20870067"/>
             <a:ext cx="1398574" cy="365760"/>
           </a:xfrm>
           <a:prstGeom prst="rect">
@@ -9495,7 +9495,7 @@
         </p:nvSpPr>
         <p:spPr>
           <a:xfrm>
-            <a:off x="30188916" y="21915740"/>
+            <a:off x="30188916" y="20870067"/>
             <a:ext cx="1398574" cy="365760"/>
           </a:xfrm>
           <a:prstGeom prst="rect">
@@ -9537,7 +9537,7 @@
         </p:nvSpPr>
         <p:spPr>
           <a:xfrm>
-            <a:off x="31587490" y="21915740"/>
+            <a:off x="31587490" y="20870067"/>
             <a:ext cx="599389" cy="365760"/>
           </a:xfrm>
           <a:prstGeom prst="rect">
@@ -9579,7 +9579,7 @@
         </p:nvSpPr>
         <p:spPr>
           <a:xfrm>
-            <a:off x="22197060" y="22226636"/>
+            <a:off x="22197060" y="21180963"/>
             <a:ext cx="1698269" cy="365760"/>
           </a:xfrm>
           <a:prstGeom prst="rect">
@@ -9621,7 +9621,7 @@
         </p:nvSpPr>
         <p:spPr>
           <a:xfrm>
-            <a:off x="23895329" y="22226636"/>
+            <a:off x="23895329" y="21180963"/>
             <a:ext cx="2397556" cy="365760"/>
           </a:xfrm>
           <a:prstGeom prst="rect">
@@ -9663,7 +9663,7 @@
         </p:nvSpPr>
         <p:spPr>
           <a:xfrm>
-            <a:off x="26292886" y="22226636"/>
+            <a:off x="26292886" y="21180963"/>
             <a:ext cx="1198778" cy="365760"/>
           </a:xfrm>
           <a:prstGeom prst="rect">
@@ -9705,7 +9705,7 @@
         </p:nvSpPr>
         <p:spPr>
           <a:xfrm>
-            <a:off x="27491664" y="22226636"/>
+            <a:off x="27491664" y="21180963"/>
             <a:ext cx="1298676" cy="365760"/>
           </a:xfrm>
           <a:prstGeom prst="rect">
@@ -9747,7 +9747,7 @@
         </p:nvSpPr>
         <p:spPr>
           <a:xfrm>
-            <a:off x="28790341" y="22226636"/>
+            <a:off x="28790341" y="21180963"/>
             <a:ext cx="1398574" cy="365760"/>
           </a:xfrm>
           <a:prstGeom prst="rect">
@@ -9789,7 +9789,7 @@
         </p:nvSpPr>
         <p:spPr>
           <a:xfrm>
-            <a:off x="30188916" y="22226636"/>
+            <a:off x="30188916" y="21180963"/>
             <a:ext cx="1398574" cy="365760"/>
           </a:xfrm>
           <a:prstGeom prst="rect">
@@ -9831,7 +9831,7 @@
         </p:nvSpPr>
         <p:spPr>
           <a:xfrm>
-            <a:off x="31587490" y="22226636"/>
+            <a:off x="31587490" y="21180963"/>
             <a:ext cx="599389" cy="365760"/>
           </a:xfrm>
           <a:prstGeom prst="rect">
@@ -9873,7 +9873,7 @@
         </p:nvSpPr>
         <p:spPr>
           <a:xfrm>
-            <a:off x="22197060" y="22555820"/>
+            <a:off x="22197060" y="21510147"/>
             <a:ext cx="9989819" cy="20116"/>
           </a:xfrm>
           <a:prstGeom prst="rect">
@@ -9917,7 +9917,7 @@
         </p:nvSpPr>
         <p:spPr>
           <a:xfrm>
-            <a:off x="22197060" y="22756988"/>
+            <a:off x="22197060" y="21711315"/>
             <a:ext cx="9989819" cy="365760"/>
           </a:xfrm>
           <a:prstGeom prst="rect">
@@ -9959,7 +9959,7 @@
         </p:nvSpPr>
         <p:spPr>
           <a:xfrm>
-            <a:off x="22197060" y="23907227"/>
+            <a:off x="22197060" y="22861554"/>
             <a:ext cx="9989819" cy="365760"/>
           </a:xfrm>
           <a:prstGeom prst="rect">
@@ -10009,8 +10009,8 @@
         </p:blipFill>
         <p:spPr>
           <a:xfrm>
-            <a:off x="22197060" y="24218123"/>
-            <a:ext cx="9989819" cy="3348860"/>
+            <a:off x="22197060" y="23172450"/>
+            <a:ext cx="9989819" cy="2652164"/>
           </a:xfrm>
           <a:prstGeom prst="rect">
             <a:avLst/>
@@ -10025,7 +10025,7 @@
         </p:nvSpPr>
         <p:spPr>
           <a:xfrm>
-            <a:off x="22197060" y="27658423"/>
+            <a:off x="22197060" y="25916054"/>
             <a:ext cx="9989819" cy="365760"/>
           </a:xfrm>
           <a:prstGeom prst="rect">
@@ -10067,7 +10067,7 @@
         </p:nvSpPr>
         <p:spPr>
           <a:xfrm>
-            <a:off x="11704320" y="28755703"/>
+            <a:off x="11704320" y="27013334"/>
             <a:ext cx="20482560" cy="365760"/>
           </a:xfrm>
           <a:prstGeom prst="rect">
@@ -10117,8 +10117,8 @@
         </p:blipFill>
         <p:spPr>
           <a:xfrm>
-            <a:off x="11704320" y="29066599"/>
-            <a:ext cx="20482560" cy="3749135"/>
+            <a:off x="11704320" y="27324230"/>
+            <a:ext cx="20482560" cy="3657600"/>
           </a:xfrm>
           <a:prstGeom prst="rect">
             <a:avLst/>
@@ -10133,7 +10133,7 @@
         </p:nvSpPr>
         <p:spPr>
           <a:xfrm>
-            <a:off x="11704320" y="32907174"/>
+            <a:off x="11704320" y="31073270"/>
             <a:ext cx="20482560" cy="365760"/>
           </a:xfrm>
           <a:prstGeom prst="rect">
@@ -10162,7 +10162,7 @@
                 </a:solidFill>
                 <a:latin typeface="Arial"/>
               </a:rPr>
-              <a:t>Figure 10.  (f) Fifteen unattended rounds on a fixed holdout. (g) Round 15's exact dataset, three ways. Bars 1 and 2 differ only in the starting weights, so their gap is the warm-start chain; bar 3 is the recipe the campaign ran, whose wall-clock cap truncates the cosine. Sigma throughout is that recipe's own seed spread, 0.0040 over three seeds, propagated to the difference being quoted. Completing the schedule is not the fix -- bar 2 sits below bar 3.</a:t>
+              <a:t>Figure 10.  (f) Fifteen unattended rounds on a fixed holdout. (g) Round 15's exact dataset, three ways. The first two marks differ only in the starting weights, so their gap is the warm-start chain; the third is the recipe the campaign ran, whose wall-clock cap truncates the cosine, with its three seeds drawn behind it. Sigma throughout is that recipe's own seed spread, 0.0040 over three seeds, propagated to the difference being quoted. Completing the schedule is not the fix -- the second mark sits below the third.</a:t>
             </a:r>
           </a:p>
         </p:txBody>
@@ -10270,7 +10270,7 @@
         <p:spPr>
           <a:xfrm>
             <a:off x="32552640" y="5577840"/>
-            <a:ext cx="10607040" cy="6362678"/>
+            <a:ext cx="10607040" cy="3840480"/>
           </a:xfrm>
           <a:prstGeom prst="rect">
             <a:avLst/>
@@ -10285,7 +10285,7 @@
         </p:nvSpPr>
         <p:spPr>
           <a:xfrm>
-            <a:off x="32552640" y="12031958"/>
+            <a:off x="32552640" y="9509760"/>
             <a:ext cx="10607040" cy="365760"/>
           </a:xfrm>
           <a:prstGeom prst="rect">
@@ -10335,8 +10335,8 @@
         </p:blipFill>
         <p:spPr>
           <a:xfrm>
-            <a:off x="32552640" y="12672038"/>
-            <a:ext cx="10607040" cy="5360041"/>
+            <a:off x="32552640" y="10149840"/>
+            <a:ext cx="10607040" cy="2743200"/>
           </a:xfrm>
           <a:prstGeom prst="rect">
             <a:avLst/>
@@ -10351,7 +10351,7 @@
         </p:nvSpPr>
         <p:spPr>
           <a:xfrm>
-            <a:off x="32552640" y="18123519"/>
+            <a:off x="32552640" y="12984480"/>
             <a:ext cx="10607040" cy="365760"/>
           </a:xfrm>
           <a:prstGeom prst="rect">
@@ -10401,8 +10401,8 @@
         </p:blipFill>
         <p:spPr>
           <a:xfrm>
-            <a:off x="32552640" y="19129359"/>
-            <a:ext cx="10607040" cy="5429067"/>
+            <a:off x="32552640" y="13990320"/>
+            <a:ext cx="10607040" cy="4754880"/>
           </a:xfrm>
           <a:prstGeom prst="rect">
             <a:avLst/>
@@ -10417,7 +10417,7 @@
         </p:nvSpPr>
         <p:spPr>
           <a:xfrm>
-            <a:off x="32552640" y="24649866"/>
+            <a:off x="32552640" y="18836640"/>
             <a:ext cx="10607040" cy="365760"/>
           </a:xfrm>
           <a:prstGeom prst="rect">
@@ -10459,7 +10459,7 @@
         </p:nvSpPr>
         <p:spPr>
           <a:xfrm>
-            <a:off x="32552640" y="25335666"/>
+            <a:off x="32552640" y="19522440"/>
             <a:ext cx="10607040" cy="365760"/>
           </a:xfrm>
           <a:prstGeom prst="rect">
@@ -10501,7 +10501,7 @@
         </p:nvSpPr>
         <p:spPr>
           <a:xfrm>
-            <a:off x="32552640" y="25811154"/>
+            <a:off x="32552640" y="19997928"/>
             <a:ext cx="10607040" cy="25603"/>
           </a:xfrm>
           <a:prstGeom prst="rect">
@@ -10545,7 +10545,7 @@
         </p:nvSpPr>
         <p:spPr>
           <a:xfrm>
-            <a:off x="32552640" y="26067186"/>
+            <a:off x="32552640" y="20253960"/>
             <a:ext cx="10607040" cy="365760"/>
           </a:xfrm>
           <a:prstGeom prst="rect">
@@ -10587,7 +10587,7 @@
         </p:nvSpPr>
         <p:spPr>
           <a:xfrm>
-            <a:off x="32552640" y="26773052"/>
+            <a:off x="32552640" y="20959826"/>
             <a:ext cx="10607040" cy="365760"/>
           </a:xfrm>
           <a:prstGeom prst="rect">
@@ -10629,7 +10629,7 @@
         </p:nvSpPr>
         <p:spPr>
           <a:xfrm>
-            <a:off x="32552640" y="27277496"/>
+            <a:off x="32552640" y="21464270"/>
             <a:ext cx="10607040" cy="365760"/>
           </a:xfrm>
           <a:prstGeom prst="rect">
@@ -10671,7 +10671,7 @@
         </p:nvSpPr>
         <p:spPr>
           <a:xfrm>
-            <a:off x="32552640" y="27781940"/>
+            <a:off x="32552640" y="21968714"/>
             <a:ext cx="10607040" cy="365760"/>
           </a:xfrm>
           <a:prstGeom prst="rect">
@@ -10713,7 +10713,7 @@
         </p:nvSpPr>
         <p:spPr>
           <a:xfrm>
-            <a:off x="32552640" y="28487806"/>
+            <a:off x="32552640" y="22674580"/>
             <a:ext cx="10607040" cy="365760"/>
           </a:xfrm>
           <a:prstGeom prst="rect">
@@ -10755,7 +10755,7 @@
         </p:nvSpPr>
         <p:spPr>
           <a:xfrm>
-            <a:off x="32552640" y="28992250"/>
+            <a:off x="32552640" y="23179024"/>
             <a:ext cx="10607040" cy="365760"/>
           </a:xfrm>
           <a:prstGeom prst="rect">
@@ -10797,7 +10797,7 @@
         </p:nvSpPr>
         <p:spPr>
           <a:xfrm>
-            <a:off x="32552640" y="29789556"/>
+            <a:off x="32552640" y="23976330"/>
             <a:ext cx="10607040" cy="365760"/>
           </a:xfrm>
           <a:prstGeom prst="rect">
@@ -10839,7 +10839,7 @@
         </p:nvSpPr>
         <p:spPr>
           <a:xfrm>
-            <a:off x="32552640" y="30265044"/>
+            <a:off x="32552640" y="24451818"/>
             <a:ext cx="10607040" cy="25603"/>
           </a:xfrm>
           <a:prstGeom prst="rect">
@@ -10883,7 +10883,7 @@
         </p:nvSpPr>
         <p:spPr>
           <a:xfrm>
-            <a:off x="32552640" y="30521076"/>
+            <a:off x="32552640" y="24707850"/>
             <a:ext cx="10607040" cy="365760"/>
           </a:xfrm>
           <a:prstGeom prst="rect">
@@ -10925,7 +10925,7 @@
         </p:nvSpPr>
         <p:spPr>
           <a:xfrm>
-            <a:off x="32552640" y="31689602"/>
+            <a:off x="32552640" y="25876377"/>
             <a:ext cx="10607040" cy="365760"/>
           </a:xfrm>
           <a:prstGeom prst="rect">
@@ -10967,7 +10967,7 @@
         </p:nvSpPr>
         <p:spPr>
           <a:xfrm>
-            <a:off x="32552640" y="32165091"/>
+            <a:off x="32552640" y="26351865"/>
             <a:ext cx="10607040" cy="25603"/>
           </a:xfrm>
           <a:prstGeom prst="rect">
@@ -11011,7 +11011,7 @@
         </p:nvSpPr>
         <p:spPr>
           <a:xfrm>
-            <a:off x="32552640" y="32421122"/>
+            <a:off x="32552640" y="26607897"/>
             <a:ext cx="10607040" cy="365760"/>
           </a:xfrm>
           <a:prstGeom prst="rect">

--- a/docs/poster/MTSU_WeedAgent_Poster.pptx
+++ b/docs/poster/MTSU_WeedAgent_Poster.pptx
@@ -3247,7 +3247,7 @@
                 </a:solidFill>
                 <a:latin typeface="Arial"/>
               </a:rPr>
-              <a:t>Hongbo Zhang</a:t>
+              <a:t>Harry He</a:t>
             </a:r>
             <a:r>
               <a:rPr sz="2000" b="1" baseline="30000">
@@ -3256,7 +3256,7 @@
                 </a:solidFill>
                 <a:latin typeface="Arial"/>
               </a:rPr>
-              <a:t>1</a:t>
+              <a:t/>
             </a:r>
             <a:r>
               <a:rPr sz="3200" b="1">
@@ -3265,7 +3265,7 @@
                 </a:solidFill>
                 <a:latin typeface="Arial"/>
               </a:rPr>
-              <a:t>,     Harry He</a:t>
+              <a:t>,     Hongbo Zhang</a:t>
             </a:r>
             <a:r>
               <a:rPr sz="2000" b="1" baseline="30000">
@@ -3274,25 +3274,7 @@
                 </a:solidFill>
                 <a:latin typeface="Arial"/>
               </a:rPr>
-              <a:t>1</a:t>
-            </a:r>
-            <a:r>
-              <a:rPr sz="3200" b="1">
-                <a:solidFill>
-                  <a:srgbClr val="FFFFFF"/>
-                </a:solidFill>
-                <a:latin typeface="Arial"/>
-              </a:rPr>
-              <a:t>,     Song Cui</a:t>
-            </a:r>
-            <a:r>
-              <a:rPr sz="2000" b="1" baseline="30000">
-                <a:solidFill>
-                  <a:srgbClr val="FFFFFF"/>
-                </a:solidFill>
-                <a:latin typeface="Arial"/>
-              </a:rPr>
-              <a:t>2</a:t>
+              <a:t/>
             </a:r>
           </a:p>
         </p:txBody>
@@ -3334,7 +3316,7 @@
                 </a:solidFill>
                 <a:latin typeface="Arial"/>
               </a:rPr>
-              <a:t>¹Department of Engineering Technology   ·   ²School of Agriculture   ·   Middle Tennessee State University, Murfreesboro, TN, USA</a:t>
+              <a:t>Department of Engineering Technology   ·   Middle Tennessee State University, Murfreesboro, TN, USA</a:t>
             </a:r>
           </a:p>
         </p:txBody>

--- a/docs/poster/MTSU_WeedAgent_Poster.pptx
+++ b/docs/poster/MTSU_WeedAgent_Poster.pptx
@@ -3722,7 +3722,7 @@
                 </a:solidFill>
                 <a:latin typeface="Arial"/>
               </a:rPr>
-              <a:t>Figure 1.  Frames as recorded, unenhanced. 2686 frames across 26 sessions and 2 robots sit on the platform and 0 of them are labelled: robot 241 contributes 2259 at 640 x 360 and 1 Hz, the laser cart 427 of which 75 are in a field. The boxes in (n) are the cart's own detector drawing on its own video, not ground truth.</a:t>
+              <a:t>Figure 1.  Frames as recorded, unenhanced. Robot 241 has sent 2,259 frames at 640 x 360 and 1 Hz, the laser cart 427, and 75 of the cart's were taken in a field. None of the 2,686 is labelled. The rectangle in the down camera is the cart's fixed work-zone overlay. It is drawn on every frame, including the ones with no vegetation in them.</a:t>
             </a:r>
           </a:p>
         </p:txBody>
